--- a/Programacion II/Clases/Clase 9 - Refactorizacion con IA y persistencia de archivos/Presentacion.pptx
+++ b/Programacion II/Clases/Clase 9 - Refactorizacion con IA y persistencia de archivos/Presentacion.pptx
@@ -18,6 +18,15 @@
     <p:sldId id="266" r:id="rId17"/>
     <p:sldId id="267" r:id="rId18"/>
     <p:sldId id="268" r:id="rId19"/>
+    <p:sldId id="269" r:id="rId20"/>
+    <p:sldId id="270" r:id="rId21"/>
+    <p:sldId id="271" r:id="rId22"/>
+    <p:sldId id="272" r:id="rId23"/>
+    <p:sldId id="273" r:id="rId24"/>
+    <p:sldId id="274" r:id="rId25"/>
+    <p:sldId id="275" r:id="rId26"/>
+    <p:sldId id="276" r:id="rId27"/>
+    <p:sldId id="277" r:id="rId28"/>
   </p:sldIdLst>
   <p:sldSz cx="12191695" cy="6858000" type="screen4x3"/>
   <p:notesSz cx="6858000" cy="9144000"/>
@@ -3618,154 +3627,21 @@
                 </a:solidFill>
                 <a:latin typeface="Calibri"/>
               </a:rPr>
-              <a:t>Antes de entregar — autochequeo</a:t>
-            </a:r>
-          </a:p>
-        </p:txBody>
-      </p:sp>
-      <p:sp>
-        <p:nvSpPr>
-          <p:cNvPr id="5" name="Rounded Rectangle 4"/>
-          <p:cNvSpPr/>
-          <p:nvPr/>
-        </p:nvSpPr>
-        <p:spPr>
-          <a:xfrm>
-            <a:off x="457200" y="1261872"/>
-            <a:ext cx="11277295" cy="566928"/>
-          </a:xfrm>
-          <a:prstGeom prst="roundRect">
-            <a:avLst>
-              <a:gd name="adj" fmla="val 12000"/>
-            </a:avLst>
-          </a:prstGeom>
-          <a:solidFill>
-            <a:srgbClr val="F2F2F2"/>
-          </a:solidFill>
-          <a:ln>
-            <a:noFill/>
-          </a:ln>
-        </p:spPr>
-        <p:style>
-          <a:lnRef idx="1">
-            <a:schemeClr val="accent1"/>
-          </a:lnRef>
-          <a:fillRef idx="3">
-            <a:schemeClr val="accent1"/>
-          </a:fillRef>
-          <a:effectRef idx="2">
-            <a:schemeClr val="accent1"/>
-          </a:effectRef>
-          <a:fontRef idx="minor">
-            <a:schemeClr val="lt1"/>
-          </a:fontRef>
-        </p:style>
-        <p:txBody>
-          <a:bodyPr rtlCol="0" anchor="ctr"/>
-          <a:lstStyle/>
-          <a:p>
-            <a:pPr algn="ctr"/>
-          </a:p>
-        </p:txBody>
-      </p:sp>
-      <p:sp>
-        <p:nvSpPr>
-          <p:cNvPr id="6" name="Rectangle 5"/>
-          <p:cNvSpPr/>
-          <p:nvPr/>
-        </p:nvSpPr>
-        <p:spPr>
-          <a:xfrm>
-            <a:off x="640080" y="1408175"/>
-            <a:ext cx="274320" cy="274320"/>
-          </a:xfrm>
-          <a:prstGeom prst="rect">
-            <a:avLst/>
-          </a:prstGeom>
-          <a:solidFill>
-            <a:srgbClr val="FFFFFF"/>
-          </a:solidFill>
-          <a:ln>
-            <a:solidFill>
-              <a:srgbClr val="333333"/>
-            </a:solidFill>
-          </a:ln>
-        </p:spPr>
-        <p:style>
-          <a:lnRef idx="1">
-            <a:schemeClr val="accent1"/>
-          </a:lnRef>
-          <a:fillRef idx="3">
-            <a:schemeClr val="accent1"/>
-          </a:fillRef>
-          <a:effectRef idx="2">
-            <a:schemeClr val="accent1"/>
-          </a:effectRef>
-          <a:fontRef idx="minor">
-            <a:schemeClr val="lt1"/>
-          </a:fontRef>
-        </p:style>
-        <p:txBody>
-          <a:bodyPr rtlCol="0" anchor="ctr"/>
-          <a:lstStyle/>
-          <a:p>
-            <a:pPr algn="ctr"/>
-          </a:p>
-        </p:txBody>
-      </p:sp>
-      <p:sp>
-        <p:nvSpPr>
-          <p:cNvPr id="7" name="Rectangle 6"/>
-          <p:cNvSpPr/>
-          <p:nvPr/>
-        </p:nvSpPr>
-        <p:spPr>
-          <a:xfrm>
-            <a:off x="640080" y="1408175"/>
-            <a:ext cx="73152" cy="274320"/>
-          </a:xfrm>
-          <a:prstGeom prst="rect">
-            <a:avLst/>
-          </a:prstGeom>
-          <a:solidFill>
-            <a:srgbClr val="269CCB"/>
-          </a:solidFill>
-          <a:ln>
-            <a:noFill/>
-          </a:ln>
-        </p:spPr>
-        <p:style>
-          <a:lnRef idx="1">
-            <a:schemeClr val="accent1"/>
-          </a:lnRef>
-          <a:fillRef idx="3">
-            <a:schemeClr val="accent1"/>
-          </a:fillRef>
-          <a:effectRef idx="2">
-            <a:schemeClr val="accent1"/>
-          </a:effectRef>
-          <a:fontRef idx="minor">
-            <a:schemeClr val="lt1"/>
-          </a:fontRef>
-        </p:style>
-        <p:txBody>
-          <a:bodyPr rtlCol="0" anchor="ctr"/>
-          <a:lstStyle/>
-          <a:p>
-            <a:pPr algn="ctr"/>
-          </a:p>
-        </p:txBody>
-      </p:sp>
-      <p:sp>
-        <p:nvSpPr>
-          <p:cNvPr id="8" name="TextBox 7"/>
+              <a:t>Un archivo abierto es un recurso del sistema operativo, y todo recurso... (1/2)</a:t>
+            </a:r>
+          </a:p>
+        </p:txBody>
+      </p:sp>
+      <p:sp>
+        <p:nvSpPr>
+          <p:cNvPr id="5" name="TextBox 4"/>
           <p:cNvSpPr txBox="1"/>
           <p:nvPr/>
         </p:nvSpPr>
         <p:spPr>
           <a:xfrm>
-            <a:off x="1097280" y="1353312"/>
-            <a:ext cx="10362895" cy="402336"/>
+            <a:off x="457200" y="1170432"/>
+            <a:ext cx="11277295" cy="5230368"/>
           </a:xfrm>
           <a:prstGeom prst="rect">
             <a:avLst/>
@@ -3773,354 +3649,95 @@
           <a:noFill/>
         </p:spPr>
         <p:txBody>
-          <a:bodyPr wrap="square" anchor="ctr"/>
-          <a:lstStyle/>
-          <a:p>
-            <a:r>
-              <a:rPr sz="1500" b="0" i="0">
+          <a:bodyPr wrap="square">
+            <a:spAutoFit/>
+          </a:bodyPr>
+          <a:lstStyle/>
+          <a:p>
+            <a:pPr>
+              <a:spcAft>
+                <a:spcPts val="800"/>
+              </a:spcAft>
+            </a:pPr>
+            <a:r>
+              <a:rPr sz="2000" b="0" i="0">
                 <a:solidFill>
                   <a:srgbClr val="333333"/>
                 </a:solidFill>
                 <a:latin typeface="Calibri"/>
               </a:rPr>
-              <a:t>Si el archivo aparece con 0 bytes aunque el programa dijo que guardó, ¿quién debía vaciar el buffer y cuándo se supone que eso ocurre?</a:t>
-            </a:r>
-          </a:p>
-        </p:txBody>
-      </p:sp>
-      <p:sp>
-        <p:nvSpPr>
-          <p:cNvPr id="9" name="Rounded Rectangle 8"/>
-          <p:cNvSpPr/>
-          <p:nvPr/>
-        </p:nvSpPr>
-        <p:spPr>
-          <a:xfrm>
-            <a:off x="457200" y="1938528"/>
-            <a:ext cx="11277295" cy="566928"/>
-          </a:xfrm>
-          <a:prstGeom prst="roundRect">
-            <a:avLst>
-              <a:gd name="adj" fmla="val 12000"/>
-            </a:avLst>
-          </a:prstGeom>
-          <a:solidFill>
-            <a:srgbClr val="F2F2F2"/>
-          </a:solidFill>
-          <a:ln>
-            <a:noFill/>
-          </a:ln>
-        </p:spPr>
-        <p:style>
-          <a:lnRef idx="1">
-            <a:schemeClr val="accent1"/>
-          </a:lnRef>
-          <a:fillRef idx="3">
-            <a:schemeClr val="accent1"/>
-          </a:fillRef>
-          <a:effectRef idx="2">
-            <a:schemeClr val="accent1"/>
-          </a:effectRef>
-          <a:fontRef idx="minor">
-            <a:schemeClr val="lt1"/>
-          </a:fontRef>
-        </p:style>
-        <p:txBody>
-          <a:bodyPr rtlCol="0" anchor="ctr"/>
-          <a:lstStyle/>
-          <a:p>
-            <a:pPr algn="ctr"/>
-          </a:p>
-        </p:txBody>
-      </p:sp>
-      <p:sp>
-        <p:nvSpPr>
-          <p:cNvPr id="10" name="Rectangle 9"/>
-          <p:cNvSpPr/>
-          <p:nvPr/>
-        </p:nvSpPr>
-        <p:spPr>
-          <a:xfrm>
-            <a:off x="640080" y="2084832"/>
-            <a:ext cx="274320" cy="274320"/>
-          </a:xfrm>
-          <a:prstGeom prst="rect">
-            <a:avLst/>
-          </a:prstGeom>
-          <a:solidFill>
-            <a:srgbClr val="FFFFFF"/>
-          </a:solidFill>
-          <a:ln>
-            <a:solidFill>
-              <a:srgbClr val="333333"/>
-            </a:solidFill>
-          </a:ln>
-        </p:spPr>
-        <p:style>
-          <a:lnRef idx="1">
-            <a:schemeClr val="accent1"/>
-          </a:lnRef>
-          <a:fillRef idx="3">
-            <a:schemeClr val="accent1"/>
-          </a:fillRef>
-          <a:effectRef idx="2">
-            <a:schemeClr val="accent1"/>
-          </a:effectRef>
-          <a:fontRef idx="minor">
-            <a:schemeClr val="lt1"/>
-          </a:fontRef>
-        </p:style>
-        <p:txBody>
-          <a:bodyPr rtlCol="0" anchor="ctr"/>
-          <a:lstStyle/>
-          <a:p>
-            <a:pPr algn="ctr"/>
-          </a:p>
-        </p:txBody>
-      </p:sp>
-      <p:sp>
-        <p:nvSpPr>
-          <p:cNvPr id="11" name="Rectangle 10"/>
-          <p:cNvSpPr/>
-          <p:nvPr/>
-        </p:nvSpPr>
-        <p:spPr>
-          <a:xfrm>
-            <a:off x="640080" y="2084832"/>
-            <a:ext cx="73152" cy="274320"/>
-          </a:xfrm>
-          <a:prstGeom prst="rect">
-            <a:avLst/>
-          </a:prstGeom>
-          <a:solidFill>
-            <a:srgbClr val="269CCB"/>
-          </a:solidFill>
-          <a:ln>
-            <a:noFill/>
-          </a:ln>
-        </p:spPr>
-        <p:style>
-          <a:lnRef idx="1">
-            <a:schemeClr val="accent1"/>
-          </a:lnRef>
-          <a:fillRef idx="3">
-            <a:schemeClr val="accent1"/>
-          </a:fillRef>
-          <a:effectRef idx="2">
-            <a:schemeClr val="accent1"/>
-          </a:effectRef>
-          <a:fontRef idx="minor">
-            <a:schemeClr val="lt1"/>
-          </a:fontRef>
-        </p:style>
-        <p:txBody>
-          <a:bodyPr rtlCol="0" anchor="ctr"/>
-          <a:lstStyle/>
-          <a:p>
-            <a:pPr algn="ctr"/>
-          </a:p>
-        </p:txBody>
-      </p:sp>
-      <p:sp>
-        <p:nvSpPr>
-          <p:cNvPr id="12" name="TextBox 11"/>
-          <p:cNvSpPr txBox="1"/>
-          <p:nvPr/>
-        </p:nvSpPr>
-        <p:spPr>
-          <a:xfrm>
-            <a:off x="1097280" y="2029968"/>
-            <a:ext cx="10362895" cy="402336"/>
-          </a:xfrm>
-          <a:prstGeom prst="rect">
-            <a:avLst/>
-          </a:prstGeom>
-          <a:noFill/>
-        </p:spPr>
-        <p:txBody>
-          <a:bodyPr wrap="square" anchor="ctr"/>
-          <a:lstStyle/>
-          <a:p>
-            <a:r>
-              <a:rPr sz="1500" b="0" i="0">
+              <a:t>–   Un archivo abierto es un recurso del sistema operativo, y todo recurso hay que cerrarlo.</a:t>
+            </a:r>
+          </a:p>
+          <a:p>
+            <a:pPr>
+              <a:spcAft>
+                <a:spcPts val="800"/>
+              </a:spcAft>
+            </a:pPr>
+            <a:r>
+              <a:rPr sz="2000" b="0" i="0">
                 <a:solidFill>
                   <a:srgbClr val="333333"/>
                 </a:solidFill>
                 <a:latin typeface="Calibri"/>
               </a:rPr>
-              <a:t>Si al reabrir la aplicación aparecen cero mascotas pero el .csv tiene contenido, ¿está descartando el encabezado o lo está intentando convertir en una mascota?</a:t>
-            </a:r>
-          </a:p>
-        </p:txBody>
-      </p:sp>
-      <p:sp>
-        <p:nvSpPr>
-          <p:cNvPr id="13" name="Rounded Rectangle 12"/>
-          <p:cNvSpPr/>
-          <p:nvPr/>
-        </p:nvSpPr>
-        <p:spPr>
-          <a:xfrm>
-            <a:off x="457200" y="2615184"/>
-            <a:ext cx="11277295" cy="566928"/>
-          </a:xfrm>
-          <a:prstGeom prst="roundRect">
-            <a:avLst>
-              <a:gd name="adj" fmla="val 12000"/>
-            </a:avLst>
-          </a:prstGeom>
-          <a:solidFill>
-            <a:srgbClr val="F2F2F2"/>
-          </a:solidFill>
-          <a:ln>
-            <a:noFill/>
-          </a:ln>
-        </p:spPr>
-        <p:style>
-          <a:lnRef idx="1">
-            <a:schemeClr val="accent1"/>
-          </a:lnRef>
-          <a:fillRef idx="3">
-            <a:schemeClr val="accent1"/>
-          </a:fillRef>
-          <a:effectRef idx="2">
-            <a:schemeClr val="accent1"/>
-          </a:effectRef>
-          <a:fontRef idx="minor">
-            <a:schemeClr val="lt1"/>
-          </a:fontRef>
-        </p:style>
-        <p:txBody>
-          <a:bodyPr rtlCol="0" anchor="ctr"/>
-          <a:lstStyle/>
-          <a:p>
-            <a:pPr algn="ctr"/>
-          </a:p>
-        </p:txBody>
-      </p:sp>
-      <p:sp>
-        <p:nvSpPr>
-          <p:cNvPr id="14" name="Rectangle 13"/>
-          <p:cNvSpPr/>
-          <p:nvPr/>
-        </p:nvSpPr>
-        <p:spPr>
-          <a:xfrm>
-            <a:off x="640080" y="2761488"/>
-            <a:ext cx="274320" cy="274320"/>
-          </a:xfrm>
-          <a:prstGeom prst="rect">
-            <a:avLst/>
-          </a:prstGeom>
-          <a:solidFill>
-            <a:srgbClr val="FFFFFF"/>
-          </a:solidFill>
-          <a:ln>
-            <a:solidFill>
-              <a:srgbClr val="333333"/>
-            </a:solidFill>
-          </a:ln>
-        </p:spPr>
-        <p:style>
-          <a:lnRef idx="1">
-            <a:schemeClr val="accent1"/>
-          </a:lnRef>
-          <a:fillRef idx="3">
-            <a:schemeClr val="accent1"/>
-          </a:fillRef>
-          <a:effectRef idx="2">
-            <a:schemeClr val="accent1"/>
-          </a:effectRef>
-          <a:fontRef idx="minor">
-            <a:schemeClr val="lt1"/>
-          </a:fontRef>
-        </p:style>
-        <p:txBody>
-          <a:bodyPr rtlCol="0" anchor="ctr"/>
-          <a:lstStyle/>
-          <a:p>
-            <a:pPr algn="ctr"/>
-          </a:p>
-        </p:txBody>
-      </p:sp>
-      <p:sp>
-        <p:nvSpPr>
-          <p:cNvPr id="15" name="Rectangle 14"/>
-          <p:cNvSpPr/>
-          <p:nvPr/>
-        </p:nvSpPr>
-        <p:spPr>
-          <a:xfrm>
-            <a:off x="640080" y="2761488"/>
-            <a:ext cx="73152" cy="274320"/>
-          </a:xfrm>
-          <a:prstGeom prst="rect">
-            <a:avLst/>
-          </a:prstGeom>
-          <a:solidFill>
-            <a:srgbClr val="269CCB"/>
-          </a:solidFill>
-          <a:ln>
-            <a:noFill/>
-          </a:ln>
-        </p:spPr>
-        <p:style>
-          <a:lnRef idx="1">
-            <a:schemeClr val="accent1"/>
-          </a:lnRef>
-          <a:fillRef idx="3">
-            <a:schemeClr val="accent1"/>
-          </a:fillRef>
-          <a:effectRef idx="2">
-            <a:schemeClr val="accent1"/>
-          </a:effectRef>
-          <a:fontRef idx="minor">
-            <a:schemeClr val="lt1"/>
-          </a:fontRef>
-        </p:style>
-        <p:txBody>
-          <a:bodyPr rtlCol="0" anchor="ctr"/>
-          <a:lstStyle/>
-          <a:p>
-            <a:pPr algn="ctr"/>
-          </a:p>
-        </p:txBody>
-      </p:sp>
-      <p:sp>
-        <p:nvSpPr>
-          <p:cNvPr id="16" name="TextBox 15"/>
-          <p:cNvSpPr txBox="1"/>
-          <p:nvPr/>
-        </p:nvSpPr>
-        <p:spPr>
-          <a:xfrm>
-            <a:off x="1097280" y="2706624"/>
-            <a:ext cx="10362895" cy="402336"/>
-          </a:xfrm>
-          <a:prstGeom prst="rect">
-            <a:avLst/>
-          </a:prstGeom>
-          <a:noFill/>
-        </p:spPr>
-        <p:txBody>
-          <a:bodyPr wrap="square" anchor="ctr"/>
-          <a:lstStyle/>
-          <a:p>
-            <a:r>
-              <a:rPr sz="1500" b="0" i="0">
+              <a:t>–   Cuando se escribe con un BufferedWriter, el texto no viaja al disco letra por letra: se acumula en un buffer en memoria y se vuelca cuando el buffer se llena o cuando se cierra el flujo.</a:t>
+            </a:r>
+          </a:p>
+          <a:p>
+            <a:pPr>
+              <a:spcAft>
+                <a:spcPts val="800"/>
+              </a:spcAft>
+            </a:pPr>
+            <a:r>
+              <a:rPr sz="2000" b="0" i="0">
                 <a:solidFill>
                   <a:srgbClr val="333333"/>
                 </a:solidFill>
                 <a:latin typeface="Calibri"/>
               </a:rPr>
-              <a:t>De las sugerencias que le dio la IA, ¿cuál cambia únicamente la forma del código y cuál cambia lo que el programa hace? ¿Puede explicar la diferencia sin volver a preguntarle a la IA?</a:t>
-            </a:r>
-          </a:p>
-        </p:txBody>
-      </p:sp>
-      <p:sp>
-        <p:nvSpPr>
-          <p:cNvPr id="17" name="TextBox 16"/>
+              <a:t>–   Por eso el error más desconcertante para un principiante es este: el programa corre sin lanzar ninguna excepción, dice 'guardado', y el archivo mascotas.csv aparece con cero bytes.</a:t>
+            </a:r>
+          </a:p>
+          <a:p>
+            <a:pPr>
+              <a:spcAft>
+                <a:spcPts val="800"/>
+              </a:spcAft>
+            </a:pPr>
+            <a:r>
+              <a:rPr sz="2000" b="0" i="0">
+                <a:solidFill>
+                  <a:srgbClr val="333333"/>
+                </a:solidFill>
+                <a:latin typeface="Calibri"/>
+              </a:rPr>
+              <a:t>–   No se cerró el escritor y lo que estaba en el buffer nunca bajó al disco.</a:t>
+            </a:r>
+          </a:p>
+          <a:p>
+            <a:pPr>
+              <a:spcAft>
+                <a:spcPts val="800"/>
+              </a:spcAft>
+            </a:pPr>
+            <a:r>
+              <a:rPr sz="2000" b="0" i="0">
+                <a:solidFill>
+                  <a:srgbClr val="333333"/>
+                </a:solidFill>
+                <a:latin typeface="Calibri"/>
+              </a:rPr>
+              <a:t>–   La solución moderna es try-with-resources: se declara el recurso entre paréntesis, try (BufferedWriter salida = Files.newBufferedWriter(ruta, StandardCharsets.UTF_8)) {... }</a:t>
+            </a:r>
+          </a:p>
+        </p:txBody>
+      </p:sp>
+      <p:sp>
+        <p:nvSpPr>
+          <p:cNvPr id="6" name="TextBox 5"/>
           <p:cNvSpPr txBox="1"/>
           <p:nvPr/>
         </p:nvSpPr>
@@ -4294,7 +3911,7 @@
                 </a:solidFill>
                 <a:latin typeface="Calibri"/>
               </a:rPr>
-              <a:t>Criterios de exito / entregable</a:t>
+              <a:t>Un archivo abierto es un recurso del sistema operativo, y todo recurso... (2/2)</a:t>
             </a:r>
           </a:p>
         </p:txBody>
@@ -4333,25 +3950,7 @@
                 </a:solidFill>
                 <a:latin typeface="Calibri"/>
               </a:rPr>
-              <a:t>–   </a:t>
-            </a:r>
-            <a:r>
-              <a:rPr sz="2000" b="1" i="0">
-                <a:solidFill>
-                  <a:srgbClr val="333333"/>
-                </a:solidFill>
-                <a:latin typeface="Calibri"/>
-              </a:rPr>
-              <a:t>Entregable:</a:t>
-            </a:r>
-            <a:r>
-              <a:rPr sz="2000" b="0" i="0">
-                <a:solidFill>
-                  <a:srgbClr val="333333"/>
-                </a:solidFill>
-                <a:latin typeface="Calibri"/>
-              </a:rPr>
-              <a:t> La clase RepositorioMascotasCSV con guardar() y cargar() funcionando, el archivo mascotas.csv generado por la propia aplicación y la bitácora REFACTOR.md, subidos a la plataforma del curso.</a:t>
+              <a:t>–   Y Java garantiza que se llama a close() al salir del bloque, ocurra lo que ocurra, incluso si se lanzó una excepción en la mitad.</a:t>
             </a:r>
           </a:p>
           <a:p>
@@ -4367,25 +3966,7 @@
                 </a:solidFill>
                 <a:latin typeface="Calibri"/>
               </a:rPr>
-              <a:t>–   </a:t>
-            </a:r>
-            <a:r>
-              <a:rPr sz="2000" b="1" i="0">
-                <a:solidFill>
-                  <a:srgbClr val="333333"/>
-                </a:solidFill>
-                <a:latin typeface="Calibri"/>
-              </a:rPr>
-              <a:t>Exito:</a:t>
-            </a:r>
-            <a:r>
-              <a:rPr sz="2000" b="0" i="0">
-                <a:solidFill>
-                  <a:srgbClr val="333333"/>
-                </a:solidFill>
-                <a:latin typeface="Calibri"/>
-              </a:rPr>
-              <a:t> Al cerrar la aplicación y volver a abrirla, la tabla muestra las mismas mascotas que había antes: el conteo coincide y los datos no cambiaron de columna.</a:t>
+              <a:t>–   Reemplaza al viejo patrón de finally con verificación de null, que casi nadie escribe bien.</a:t>
             </a:r>
           </a:p>
           <a:p>
@@ -4401,25 +3982,7 @@
                 </a:solidFill>
                 <a:latin typeface="Calibri"/>
               </a:rPr>
-              <a:t>–   </a:t>
-            </a:r>
-            <a:r>
-              <a:rPr sz="2000" b="1" i="0">
-                <a:solidFill>
-                  <a:srgbClr val="333333"/>
-                </a:solidFill>
-                <a:latin typeface="Calibri"/>
-              </a:rPr>
-              <a:t>Exito:</a:t>
-            </a:r>
-            <a:r>
-              <a:rPr sz="2000" b="0" i="0">
-                <a:solidFill>
-                  <a:srgbClr val="333333"/>
-                </a:solidFill>
-                <a:latin typeface="Calibri"/>
-              </a:rPr>
-              <a:t> El archivo mascotas.csv tiene una línea de encabezado y una línea por mascota, todas con el mismo número de separadores y sin líneas en blanco intermedias.</a:t>
+              <a:t>–   Además, IOException es una excepción verificada: el compilador obliga a capturarla o a declararla, y eso no es una molestia, es el lenguaje recordando que el disco puede estar lleno, el archivo puede estar abierto en Excel o la ruta puede no existir.</a:t>
             </a:r>
           </a:p>
           <a:p>
@@ -4435,93 +3998,7 @@
                 </a:solidFill>
                 <a:latin typeface="Calibri"/>
               </a:rPr>
-              <a:t>–   </a:t>
-            </a:r>
-            <a:r>
-              <a:rPr sz="2000" b="1" i="0">
-                <a:solidFill>
-                  <a:srgbClr val="333333"/>
-                </a:solidFill>
-                <a:latin typeface="Calibri"/>
-              </a:rPr>
-              <a:t>Exito:</a:t>
-            </a:r>
-            <a:r>
-              <a:rPr sz="2000" b="0" i="0">
-                <a:solidFill>
-                  <a:srgbClr val="333333"/>
-                </a:solidFill>
-                <a:latin typeface="Calibri"/>
-              </a:rPr>
-              <a:t> Toda lectura y escritura de archivo usa try-with-resources y captura IOException informando al usuario: no queda ningún catch vacío en el proyecto.</a:t>
-            </a:r>
-          </a:p>
-          <a:p>
-            <a:pPr>
-              <a:spcAft>
-                <a:spcPts val="800"/>
-              </a:spcAft>
-            </a:pPr>
-            <a:r>
-              <a:rPr sz="2000" b="0" i="0">
-                <a:solidFill>
-                  <a:srgbClr val="333333"/>
-                </a:solidFill>
-                <a:latin typeface="Calibri"/>
-              </a:rPr>
-              <a:t>–   </a:t>
-            </a:r>
-            <a:r>
-              <a:rPr sz="2000" b="1" i="0">
-                <a:solidFill>
-                  <a:srgbClr val="333333"/>
-                </a:solidFill>
-                <a:latin typeface="Calibri"/>
-              </a:rPr>
-              <a:t>Exito:</a:t>
-            </a:r>
-            <a:r>
-              <a:rPr sz="2000" b="0" i="0">
-                <a:solidFill>
-                  <a:srgbClr val="333333"/>
-                </a:solidFill>
-                <a:latin typeface="Calibri"/>
-              </a:rPr>
-              <a:t> Si mascotas.csv no existe o si una línea está dañada, la aplicación arranca igual, reporta el problema indicando el número de línea y carga los registros válidos restantes.</a:t>
-            </a:r>
-          </a:p>
-          <a:p>
-            <a:pPr>
-              <a:spcAft>
-                <a:spcPts val="800"/>
-              </a:spcAft>
-            </a:pPr>
-            <a:r>
-              <a:rPr sz="2000" b="0" i="0">
-                <a:solidFill>
-                  <a:srgbClr val="333333"/>
-                </a:solidFill>
-                <a:latin typeface="Calibri"/>
-              </a:rPr>
-              <a:t>–   </a:t>
-            </a:r>
-            <a:r>
-              <a:rPr sz="2000" b="1" i="0">
-                <a:solidFill>
-                  <a:srgbClr val="333333"/>
-                </a:solidFill>
-                <a:latin typeface="Calibri"/>
-              </a:rPr>
-              <a:t>Entrega en la plataforma del curso</a:t>
-            </a:r>
-            <a:r>
-              <a:rPr sz="2000" b="0" i="0">
-                <a:solidFill>
-                  <a:srgbClr val="333333"/>
-                </a:solidFill>
-                <a:latin typeface="Calibri"/>
-              </a:rPr>
-              <a:t> — en la fecha que indique el docente.</a:t>
+              <a:t>–   Especificar StandardCharsets.UTF_8 no es adorno: es lo que evita que 'Ñoño' vuelva del archivo convertido en símbolos raros.</a:t>
             </a:r>
           </a:p>
         </p:txBody>
@@ -4702,109 +4179,21 @@
                 </a:solidFill>
                 <a:latin typeface="Calibri"/>
               </a:rPr>
-              <a:t>Para el PI esta semana</a:t>
-            </a:r>
-          </a:p>
-        </p:txBody>
-      </p:sp>
-      <p:sp>
-        <p:nvSpPr>
-          <p:cNvPr id="5" name="Rounded Rectangle 4"/>
-          <p:cNvSpPr/>
-          <p:nvPr/>
-        </p:nvSpPr>
-        <p:spPr>
-          <a:xfrm>
-            <a:off x="457200" y="1261872"/>
-            <a:ext cx="11277295" cy="1051560"/>
-          </a:xfrm>
-          <a:prstGeom prst="roundRect">
-            <a:avLst>
-              <a:gd name="adj" fmla="val 12000"/>
-            </a:avLst>
-          </a:prstGeom>
-          <a:solidFill>
-            <a:srgbClr val="E8F4FA"/>
-          </a:solidFill>
-          <a:ln>
-            <a:noFill/>
-          </a:ln>
-        </p:spPr>
-        <p:style>
-          <a:lnRef idx="1">
-            <a:schemeClr val="accent1"/>
-          </a:lnRef>
-          <a:fillRef idx="3">
-            <a:schemeClr val="accent1"/>
-          </a:fillRef>
-          <a:effectRef idx="2">
-            <a:schemeClr val="accent1"/>
-          </a:effectRef>
-          <a:fontRef idx="minor">
-            <a:schemeClr val="lt1"/>
-          </a:fontRef>
-        </p:style>
-        <p:txBody>
-          <a:bodyPr rtlCol="0" anchor="ctr"/>
-          <a:lstStyle/>
-          <a:p>
-            <a:pPr algn="ctr"/>
-          </a:p>
-        </p:txBody>
-      </p:sp>
-      <p:sp>
-        <p:nvSpPr>
-          <p:cNvPr id="6" name="Rectangle 5"/>
-          <p:cNvSpPr/>
-          <p:nvPr/>
-        </p:nvSpPr>
-        <p:spPr>
-          <a:xfrm>
-            <a:off x="457200" y="1261872"/>
-            <a:ext cx="128016" cy="1051560"/>
-          </a:xfrm>
-          <a:prstGeom prst="rect">
-            <a:avLst/>
-          </a:prstGeom>
-          <a:solidFill>
-            <a:srgbClr val="269CCB"/>
-          </a:solidFill>
-          <a:ln>
-            <a:noFill/>
-          </a:ln>
-        </p:spPr>
-        <p:style>
-          <a:lnRef idx="1">
-            <a:schemeClr val="accent1"/>
-          </a:lnRef>
-          <a:fillRef idx="3">
-            <a:schemeClr val="accent1"/>
-          </a:fillRef>
-          <a:effectRef idx="2">
-            <a:schemeClr val="accent1"/>
-          </a:effectRef>
-          <a:fontRef idx="minor">
-            <a:schemeClr val="lt1"/>
-          </a:fontRef>
-        </p:style>
-        <p:txBody>
-          <a:bodyPr rtlCol="0" anchor="ctr"/>
-          <a:lstStyle/>
-          <a:p>
-            <a:pPr algn="ctr"/>
-          </a:p>
-        </p:txBody>
-      </p:sp>
-      <p:sp>
-        <p:nvSpPr>
-          <p:cNvPr id="7" name="TextBox 6"/>
+              <a:t>La persistencia se conecta al ciclo de vida de la aplicación en dos... (1/2)</a:t>
+            </a:r>
+          </a:p>
+        </p:txBody>
+      </p:sp>
+      <p:sp>
+        <p:nvSpPr>
+          <p:cNvPr id="5" name="TextBox 4"/>
           <p:cNvSpPr txBox="1"/>
           <p:nvPr/>
         </p:nvSpPr>
         <p:spPr>
           <a:xfrm>
-            <a:off x="777240" y="1399031"/>
-            <a:ext cx="10774375" cy="822959"/>
+            <a:off x="457200" y="1170432"/>
+            <a:ext cx="11277295" cy="5230368"/>
           </a:xfrm>
           <a:prstGeom prst="rect">
             <a:avLst/>
@@ -4817,313 +4206,74 @@
           </a:bodyPr>
           <a:lstStyle/>
           <a:p>
-            <a:r>
-              <a:rPr sz="1200" b="1" i="0">
-                <a:solidFill>
-                  <a:srgbClr val="269CCB"/>
-                </a:solidFill>
-                <a:latin typeface="Calibri"/>
-              </a:rPr>
-              <a:t>Info</a:t>
-            </a:r>
-          </a:p>
-          <a:p>
             <a:pPr>
-              <a:spcBef>
-                <a:spcPts val="400"/>
-              </a:spcBef>
+              <a:spcAft>
+                <a:spcPts val="800"/>
+              </a:spcAft>
             </a:pPr>
             <a:r>
-              <a:rPr sz="1400" b="0" i="0">
+              <a:rPr sz="2000" b="0" i="0">
                 <a:solidFill>
                   <a:srgbClr val="333333"/>
                 </a:solidFill>
                 <a:latin typeface="Calibri"/>
               </a:rPr>
-              <a:t>Hito: VetCare guarda la lista de mascotas en mascotas.csv al cerrar y la vuelve a cargar al abrir.</a:t>
-            </a:r>
-          </a:p>
-        </p:txBody>
-      </p:sp>
-      <p:sp>
-        <p:nvSpPr>
-          <p:cNvPr id="8" name="Rounded Rectangle 7"/>
-          <p:cNvSpPr/>
-          <p:nvPr/>
-        </p:nvSpPr>
-        <p:spPr>
-          <a:xfrm>
-            <a:off x="457200" y="2478024"/>
-            <a:ext cx="11277295" cy="1051560"/>
-          </a:xfrm>
-          <a:prstGeom prst="roundRect">
-            <a:avLst>
-              <a:gd name="adj" fmla="val 12000"/>
-            </a:avLst>
-          </a:prstGeom>
-          <a:solidFill>
-            <a:srgbClr val="FFF8E1"/>
-          </a:solidFill>
-          <a:ln>
-            <a:noFill/>
-          </a:ln>
-        </p:spPr>
-        <p:style>
-          <a:lnRef idx="1">
-            <a:schemeClr val="accent1"/>
-          </a:lnRef>
-          <a:fillRef idx="3">
-            <a:schemeClr val="accent1"/>
-          </a:fillRef>
-          <a:effectRef idx="2">
-            <a:schemeClr val="accent1"/>
-          </a:effectRef>
-          <a:fontRef idx="minor">
-            <a:schemeClr val="lt1"/>
-          </a:fontRef>
-        </p:style>
-        <p:txBody>
-          <a:bodyPr rtlCol="0" anchor="ctr"/>
-          <a:lstStyle/>
-          <a:p>
-            <a:pPr algn="ctr"/>
-          </a:p>
-        </p:txBody>
-      </p:sp>
-      <p:sp>
-        <p:nvSpPr>
-          <p:cNvPr id="9" name="Rectangle 8"/>
-          <p:cNvSpPr/>
-          <p:nvPr/>
-        </p:nvSpPr>
-        <p:spPr>
-          <a:xfrm>
-            <a:off x="457200" y="2478024"/>
-            <a:ext cx="128016" cy="1051560"/>
-          </a:xfrm>
-          <a:prstGeom prst="rect">
-            <a:avLst/>
-          </a:prstGeom>
-          <a:solidFill>
-            <a:srgbClr val="FFD000"/>
-          </a:solidFill>
-          <a:ln>
-            <a:noFill/>
-          </a:ln>
-        </p:spPr>
-        <p:style>
-          <a:lnRef idx="1">
-            <a:schemeClr val="accent1"/>
-          </a:lnRef>
-          <a:fillRef idx="3">
-            <a:schemeClr val="accent1"/>
-          </a:fillRef>
-          <a:effectRef idx="2">
-            <a:schemeClr val="accent1"/>
-          </a:effectRef>
-          <a:fontRef idx="minor">
-            <a:schemeClr val="lt1"/>
-          </a:fontRef>
-        </p:style>
-        <p:txBody>
-          <a:bodyPr rtlCol="0" anchor="ctr"/>
-          <a:lstStyle/>
-          <a:p>
-            <a:pPr algn="ctr"/>
-          </a:p>
-        </p:txBody>
-      </p:sp>
-      <p:sp>
-        <p:nvSpPr>
-          <p:cNvPr id="10" name="TextBox 9"/>
-          <p:cNvSpPr txBox="1"/>
-          <p:nvPr/>
-        </p:nvSpPr>
-        <p:spPr>
-          <a:xfrm>
-            <a:off x="777240" y="2615184"/>
-            <a:ext cx="10774375" cy="822959"/>
-          </a:xfrm>
-          <a:prstGeom prst="rect">
-            <a:avLst/>
-          </a:prstGeom>
-          <a:noFill/>
-        </p:spPr>
-        <p:txBody>
-          <a:bodyPr wrap="square">
-            <a:spAutoFit/>
-          </a:bodyPr>
-          <a:lstStyle/>
-          <a:p>
-            <a:r>
-              <a:rPr sz="1200" b="1" i="0">
-                <a:solidFill>
-                  <a:srgbClr val="FFD000"/>
-                </a:solidFill>
-                <a:latin typeface="Calibri"/>
-              </a:rPr>
-              <a:t>Aclaración</a:t>
+              <a:t>–   La persistencia se conecta al ciclo de vida de la aplicación en dos puntos: se carga al arrancar y se guarda al cerrar (o después de cada cambio, si se quiere ser más seguro).</a:t>
             </a:r>
           </a:p>
           <a:p>
             <a:pPr>
-              <a:spcBef>
-                <a:spcPts val="400"/>
-              </a:spcBef>
+              <a:spcAft>
+                <a:spcPts val="800"/>
+              </a:spcAft>
             </a:pPr>
             <a:r>
-              <a:rPr sz="1400" b="0" i="0">
+              <a:rPr sz="2000" b="0" i="0">
                 <a:solidFill>
                   <a:srgbClr val="333333"/>
                 </a:solidFill>
                 <a:latin typeface="Calibri"/>
               </a:rPr>
-              <a:t>Enunciado completo: Clases/Proyecto Integrador/ (VetCare).</a:t>
-            </a:r>
-          </a:p>
-        </p:txBody>
-      </p:sp>
-      <p:sp>
-        <p:nvSpPr>
-          <p:cNvPr id="11" name="Rounded Rectangle 10"/>
-          <p:cNvSpPr/>
-          <p:nvPr/>
-        </p:nvSpPr>
-        <p:spPr>
-          <a:xfrm>
-            <a:off x="457200" y="3694176"/>
-            <a:ext cx="11277295" cy="1051560"/>
-          </a:xfrm>
-          <a:prstGeom prst="roundRect">
-            <a:avLst>
-              <a:gd name="adj" fmla="val 12000"/>
-            </a:avLst>
-          </a:prstGeom>
-          <a:solidFill>
-            <a:srgbClr val="FBE4E4"/>
-          </a:solidFill>
-          <a:ln>
-            <a:noFill/>
-          </a:ln>
-        </p:spPr>
-        <p:style>
-          <a:lnRef idx="1">
-            <a:schemeClr val="accent1"/>
-          </a:lnRef>
-          <a:fillRef idx="3">
-            <a:schemeClr val="accent1"/>
-          </a:fillRef>
-          <a:effectRef idx="2">
-            <a:schemeClr val="accent1"/>
-          </a:effectRef>
-          <a:fontRef idx="minor">
-            <a:schemeClr val="lt1"/>
-          </a:fontRef>
-        </p:style>
-        <p:txBody>
-          <a:bodyPr rtlCol="0" anchor="ctr"/>
-          <a:lstStyle/>
-          <a:p>
-            <a:pPr algn="ctr"/>
-          </a:p>
-        </p:txBody>
-      </p:sp>
-      <p:sp>
-        <p:nvSpPr>
-          <p:cNvPr id="12" name="Rectangle 11"/>
-          <p:cNvSpPr/>
-          <p:nvPr/>
-        </p:nvSpPr>
-        <p:spPr>
-          <a:xfrm>
-            <a:off x="457200" y="3694176"/>
-            <a:ext cx="128016" cy="1051560"/>
-          </a:xfrm>
-          <a:prstGeom prst="rect">
-            <a:avLst/>
-          </a:prstGeom>
-          <a:solidFill>
-            <a:srgbClr val="A02030"/>
-          </a:solidFill>
-          <a:ln>
-            <a:noFill/>
-          </a:ln>
-        </p:spPr>
-        <p:style>
-          <a:lnRef idx="1">
-            <a:schemeClr val="accent1"/>
-          </a:lnRef>
-          <a:fillRef idx="3">
-            <a:schemeClr val="accent1"/>
-          </a:fillRef>
-          <a:effectRef idx="2">
-            <a:schemeClr val="accent1"/>
-          </a:effectRef>
-          <a:fontRef idx="minor">
-            <a:schemeClr val="lt1"/>
-          </a:fontRef>
-        </p:style>
-        <p:txBody>
-          <a:bodyPr rtlCol="0" anchor="ctr"/>
-          <a:lstStyle/>
-          <a:p>
-            <a:pPr algn="ctr"/>
-          </a:p>
-        </p:txBody>
-      </p:sp>
-      <p:sp>
-        <p:nvSpPr>
-          <p:cNvPr id="13" name="TextBox 12"/>
-          <p:cNvSpPr txBox="1"/>
-          <p:nvPr/>
-        </p:nvSpPr>
-        <p:spPr>
-          <a:xfrm>
-            <a:off x="777240" y="3831336"/>
-            <a:ext cx="10774375" cy="822959"/>
-          </a:xfrm>
-          <a:prstGeom prst="rect">
-            <a:avLst/>
-          </a:prstGeom>
-          <a:noFill/>
-        </p:spPr>
-        <p:txBody>
-          <a:bodyPr wrap="square">
-            <a:spAutoFit/>
-          </a:bodyPr>
-          <a:lstStyle/>
-          <a:p>
-            <a:r>
-              <a:rPr sz="1200" b="1" i="0">
-                <a:solidFill>
-                  <a:srgbClr val="A02030"/>
-                </a:solidFill>
-                <a:latin typeface="Calibri"/>
-              </a:rPr>
-              <a:t>Atención</a:t>
+              <a:t>–   Cargar al arrancar significa que el main construye el repositorio, pide cargar() y solo después muestra la ventana con la tabla ya poblada.</a:t>
             </a:r>
           </a:p>
           <a:p>
             <a:pPr>
-              <a:spcBef>
-                <a:spcPts val="400"/>
-              </a:spcBef>
+              <a:spcAft>
+                <a:spcPts val="800"/>
+              </a:spcAft>
             </a:pPr>
             <a:r>
-              <a:rPr sz="1400" b="0" i="0">
+              <a:rPr sz="2000" b="0" i="0">
                 <a:solidFill>
                   <a:srgbClr val="333333"/>
                 </a:solidFill>
                 <a:latin typeface="Calibri"/>
               </a:rPr>
-              <a:t>Entrega del taller, si el docente lo asigna · en la fecha que indique el docente.</a:t>
-            </a:r>
-          </a:p>
-        </p:txBody>
-      </p:sp>
-      <p:sp>
-        <p:nvSpPr>
-          <p:cNvPr id="14" name="TextBox 13"/>
+              <a:t>–   Y cargar tiene que ser defensivo, porque el archivo es del mundo real: si mascotas.csv no existe todavía, cargar() devuelve una lista vacía y la aplicación abre normalmente, no revienta con una excepción en la cara del usuario</a:t>
+            </a:r>
+          </a:p>
+          <a:p>
+            <a:pPr>
+              <a:spcAft>
+                <a:spcPts val="800"/>
+              </a:spcAft>
+            </a:pPr>
+            <a:r>
+              <a:rPr sz="2000" b="0" i="0">
+                <a:solidFill>
+                  <a:srgbClr val="333333"/>
+                </a:solidFill>
+                <a:latin typeface="Calibri"/>
+              </a:rPr>
+              <a:t>–   Si una línea quedó con cuatro campos en vez de cinco porque alguien la editó en el Bloc de notas, esa línea se ignora, se avisa por consola con el número de línea y las demás sí se cargan</a:t>
+            </a:r>
+          </a:p>
+        </p:txBody>
+      </p:sp>
+      <p:sp>
+        <p:nvSpPr>
+          <p:cNvPr id="6" name="TextBox 5"/>
           <p:cNvSpPr txBox="1"/>
           <p:nvPr/>
         </p:nvSpPr>
@@ -5191,7 +4341,2818 @@
         <p:spPr>
           <a:xfrm>
             <a:off x="0" y="0"/>
-            <a:ext cx="12191695" cy="164592"/>
+            <a:ext cx="12191695" cy="960120"/>
+          </a:xfrm>
+          <a:prstGeom prst="rect">
+            <a:avLst/>
+          </a:prstGeom>
+          <a:solidFill>
+            <a:srgbClr val="095292"/>
+          </a:solidFill>
+          <a:ln>
+            <a:noFill/>
+          </a:ln>
+        </p:spPr>
+        <p:style>
+          <a:lnRef idx="1">
+            <a:schemeClr val="accent1"/>
+          </a:lnRef>
+          <a:fillRef idx="3">
+            <a:schemeClr val="accent1"/>
+          </a:fillRef>
+          <a:effectRef idx="2">
+            <a:schemeClr val="accent1"/>
+          </a:effectRef>
+          <a:fontRef idx="minor">
+            <a:schemeClr val="lt1"/>
+          </a:fontRef>
+        </p:style>
+        <p:txBody>
+          <a:bodyPr rtlCol="0" anchor="ctr"/>
+          <a:lstStyle/>
+          <a:p>
+            <a:pPr algn="ctr"/>
+          </a:p>
+        </p:txBody>
+      </p:sp>
+      <p:sp>
+        <p:nvSpPr>
+          <p:cNvPr id="3" name="Rectangle 2"/>
+          <p:cNvSpPr/>
+          <p:nvPr/>
+        </p:nvSpPr>
+        <p:spPr>
+          <a:xfrm>
+            <a:off x="0" y="960120"/>
+            <a:ext cx="12191695" cy="41148"/>
+          </a:xfrm>
+          <a:prstGeom prst="rect">
+            <a:avLst/>
+          </a:prstGeom>
+          <a:solidFill>
+            <a:srgbClr val="FFD000"/>
+          </a:solidFill>
+          <a:ln>
+            <a:noFill/>
+          </a:ln>
+        </p:spPr>
+        <p:style>
+          <a:lnRef idx="1">
+            <a:schemeClr val="accent1"/>
+          </a:lnRef>
+          <a:fillRef idx="3">
+            <a:schemeClr val="accent1"/>
+          </a:fillRef>
+          <a:effectRef idx="2">
+            <a:schemeClr val="accent1"/>
+          </a:effectRef>
+          <a:fontRef idx="minor">
+            <a:schemeClr val="lt1"/>
+          </a:fontRef>
+        </p:style>
+        <p:txBody>
+          <a:bodyPr rtlCol="0" anchor="ctr"/>
+          <a:lstStyle/>
+          <a:p>
+            <a:pPr algn="ctr"/>
+          </a:p>
+        </p:txBody>
+      </p:sp>
+      <p:sp>
+        <p:nvSpPr>
+          <p:cNvPr id="4" name="TextBox 3"/>
+          <p:cNvSpPr txBox="1"/>
+          <p:nvPr/>
+        </p:nvSpPr>
+        <p:spPr>
+          <a:xfrm>
+            <a:off x="457200" y="164592"/>
+            <a:ext cx="11277295" cy="502920"/>
+          </a:xfrm>
+          <a:prstGeom prst="rect">
+            <a:avLst/>
+          </a:prstGeom>
+          <a:noFill/>
+        </p:spPr>
+        <p:txBody>
+          <a:bodyPr wrap="square">
+            <a:spAutoFit/>
+          </a:bodyPr>
+          <a:lstStyle/>
+          <a:p>
+            <a:r>
+              <a:rPr sz="2600" b="1" i="0">
+                <a:solidFill>
+                  <a:srgbClr val="FFFFFF"/>
+                </a:solidFill>
+                <a:latin typeface="Calibri"/>
+              </a:rPr>
+              <a:t>La persistencia se conecta al ciclo de vida de la aplicación en dos... (2/2)</a:t>
+            </a:r>
+          </a:p>
+        </p:txBody>
+      </p:sp>
+      <p:sp>
+        <p:nvSpPr>
+          <p:cNvPr id="5" name="TextBox 4"/>
+          <p:cNvSpPr txBox="1"/>
+          <p:nvPr/>
+        </p:nvSpPr>
+        <p:spPr>
+          <a:xfrm>
+            <a:off x="457200" y="1170432"/>
+            <a:ext cx="11277295" cy="5230368"/>
+          </a:xfrm>
+          <a:prstGeom prst="rect">
+            <a:avLst/>
+          </a:prstGeom>
+          <a:noFill/>
+        </p:spPr>
+        <p:txBody>
+          <a:bodyPr wrap="square">
+            <a:spAutoFit/>
+          </a:bodyPr>
+          <a:lstStyle/>
+          <a:p>
+            <a:pPr>
+              <a:spcAft>
+                <a:spcPts val="800"/>
+              </a:spcAft>
+            </a:pPr>
+            <a:r>
+              <a:rPr sz="2000" b="0" i="0">
+                <a:solidFill>
+                  <a:srgbClr val="333333"/>
+                </a:solidFill>
+                <a:latin typeface="Calibri"/>
+              </a:rPr>
+              <a:t>–   Si la edad viene como 'dos', el Integer.parseInt lanza NumberFormatException, se captura, se descarta ese registro y se sigue.</a:t>
+            </a:r>
+          </a:p>
+          <a:p>
+            <a:pPr>
+              <a:spcAft>
+                <a:spcPts val="800"/>
+              </a:spcAft>
+            </a:pPr>
+            <a:r>
+              <a:rPr sz="2000" b="0" i="0">
+                <a:solidFill>
+                  <a:srgbClr val="333333"/>
+                </a:solidFill>
+                <a:latin typeface="Calibri"/>
+              </a:rPr>
+              <a:t>–   La regla es que un dato malo no puede tumbar la aplicación completa.</a:t>
+            </a:r>
+          </a:p>
+          <a:p>
+            <a:pPr>
+              <a:spcAft>
+                <a:spcPts val="800"/>
+              </a:spcAft>
+            </a:pPr>
+            <a:r>
+              <a:rPr sz="2000" b="0" i="0">
+                <a:solidFill>
+                  <a:srgbClr val="333333"/>
+                </a:solidFill>
+                <a:latin typeface="Calibri"/>
+              </a:rPr>
+              <a:t>–   Del lado de la escritura, el detalle que muerde es la ruta: si se usa la ruta relativa "mascotas.csv", el archivo queda en el directorio de trabajo, que al ejecutar desde VS Code es la carpeta del proyecto.</a:t>
+            </a:r>
+          </a:p>
+          <a:p>
+            <a:pPr>
+              <a:spcAft>
+                <a:spcPts val="800"/>
+              </a:spcAft>
+            </a:pPr>
+            <a:r>
+              <a:rPr sz="2000" b="0" i="0">
+                <a:solidFill>
+                  <a:srgbClr val="333333"/>
+                </a:solidFill>
+                <a:latin typeface="Calibri"/>
+              </a:rPr>
+              <a:t>–   Por eso conviene imprimir una vez ruta.toAbsolutePath() para que el estudiante sepa dónde buscarlo en vez de jurar que el programa no guardó nada.</a:t>
+            </a:r>
+          </a:p>
+        </p:txBody>
+      </p:sp>
+      <p:sp>
+        <p:nvSpPr>
+          <p:cNvPr id="6" name="TextBox 5"/>
+          <p:cNvSpPr txBox="1"/>
+          <p:nvPr/>
+        </p:nvSpPr>
+        <p:spPr>
+          <a:xfrm>
+            <a:off x="11185855" y="6473952"/>
+            <a:ext cx="640080" cy="274320"/>
+          </a:xfrm>
+          <a:prstGeom prst="rect">
+            <a:avLst/>
+          </a:prstGeom>
+          <a:noFill/>
+        </p:spPr>
+        <p:txBody>
+          <a:bodyPr wrap="square">
+            <a:spAutoFit/>
+          </a:bodyPr>
+          <a:lstStyle/>
+          <a:p>
+            <a:pPr algn="r"/>
+            <a:r>
+              <a:rPr sz="1100" b="0" i="0">
+                <a:solidFill>
+                  <a:srgbClr val="666666"/>
+                </a:solidFill>
+                <a:latin typeface="Calibri"/>
+              </a:rPr>
+              <a:t>13</a:t>
+            </a:r>
+          </a:p>
+        </p:txBody>
+      </p:sp>
+    </p:spTree>
+  </p:cSld>
+  <p:clrMapOvr>
+    <a:masterClrMapping/>
+  </p:clrMapOvr>
+</p:sld>
+</file>
+
+<file path=ppt/slides/slide14.xml><?xml version="1.0" encoding="utf-8"?>
+<p:sld xmlns:a="http://schemas.openxmlformats.org/drawingml/2006/main" xmlns:p="http://schemas.openxmlformats.org/presentationml/2006/main" xmlns:r="http://schemas.openxmlformats.org/officeDocument/2006/relationships">
+  <p:cSld>
+    <p:bg>
+      <p:bgPr>
+        <a:solidFill>
+          <a:srgbClr val="FFFFFF"/>
+        </a:solidFill>
+        <a:effectLst/>
+      </p:bgPr>
+    </p:bg>
+    <p:spTree>
+      <p:nvGrpSpPr>
+        <p:cNvPr id="1" name=""/>
+        <p:cNvGrpSpPr/>
+        <p:nvPr/>
+      </p:nvGrpSpPr>
+      <p:grpSpPr/>
+      <p:sp>
+        <p:nvSpPr>
+          <p:cNvPr id="2" name="Rectangle 1"/>
+          <p:cNvSpPr/>
+          <p:nvPr/>
+        </p:nvSpPr>
+        <p:spPr>
+          <a:xfrm>
+            <a:off x="0" y="0"/>
+            <a:ext cx="12191695" cy="960120"/>
+          </a:xfrm>
+          <a:prstGeom prst="rect">
+            <a:avLst/>
+          </a:prstGeom>
+          <a:solidFill>
+            <a:srgbClr val="095292"/>
+          </a:solidFill>
+          <a:ln>
+            <a:noFill/>
+          </a:ln>
+        </p:spPr>
+        <p:style>
+          <a:lnRef idx="1">
+            <a:schemeClr val="accent1"/>
+          </a:lnRef>
+          <a:fillRef idx="3">
+            <a:schemeClr val="accent1"/>
+          </a:fillRef>
+          <a:effectRef idx="2">
+            <a:schemeClr val="accent1"/>
+          </a:effectRef>
+          <a:fontRef idx="minor">
+            <a:schemeClr val="lt1"/>
+          </a:fontRef>
+        </p:style>
+        <p:txBody>
+          <a:bodyPr rtlCol="0" anchor="ctr"/>
+          <a:lstStyle/>
+          <a:p>
+            <a:pPr algn="ctr"/>
+          </a:p>
+        </p:txBody>
+      </p:sp>
+      <p:sp>
+        <p:nvSpPr>
+          <p:cNvPr id="3" name="Rectangle 2"/>
+          <p:cNvSpPr/>
+          <p:nvPr/>
+        </p:nvSpPr>
+        <p:spPr>
+          <a:xfrm>
+            <a:off x="0" y="960120"/>
+            <a:ext cx="12191695" cy="41148"/>
+          </a:xfrm>
+          <a:prstGeom prst="rect">
+            <a:avLst/>
+          </a:prstGeom>
+          <a:solidFill>
+            <a:srgbClr val="FFD000"/>
+          </a:solidFill>
+          <a:ln>
+            <a:noFill/>
+          </a:ln>
+        </p:spPr>
+        <p:style>
+          <a:lnRef idx="1">
+            <a:schemeClr val="accent1"/>
+          </a:lnRef>
+          <a:fillRef idx="3">
+            <a:schemeClr val="accent1"/>
+          </a:fillRef>
+          <a:effectRef idx="2">
+            <a:schemeClr val="accent1"/>
+          </a:effectRef>
+          <a:fontRef idx="minor">
+            <a:schemeClr val="lt1"/>
+          </a:fontRef>
+        </p:style>
+        <p:txBody>
+          <a:bodyPr rtlCol="0" anchor="ctr"/>
+          <a:lstStyle/>
+          <a:p>
+            <a:pPr algn="ctr"/>
+          </a:p>
+        </p:txBody>
+      </p:sp>
+      <p:sp>
+        <p:nvSpPr>
+          <p:cNvPr id="4" name="TextBox 3"/>
+          <p:cNvSpPr txBox="1"/>
+          <p:nvPr/>
+        </p:nvSpPr>
+        <p:spPr>
+          <a:xfrm>
+            <a:off x="457200" y="164592"/>
+            <a:ext cx="11277295" cy="502920"/>
+          </a:xfrm>
+          <a:prstGeom prst="rect">
+            <a:avLst/>
+          </a:prstGeom>
+          <a:noFill/>
+        </p:spPr>
+        <p:txBody>
+          <a:bodyPr wrap="square">
+            <a:spAutoFit/>
+          </a:bodyPr>
+          <a:lstStyle/>
+          <a:p>
+            <a:r>
+              <a:rPr sz="2600" b="1" i="0">
+                <a:solidFill>
+                  <a:srgbClr val="FFFFFF"/>
+                </a:solidFill>
+                <a:latin typeface="Calibri"/>
+              </a:rPr>
+              <a:t>guardar(): el archivo como memoria larga de VetCare</a:t>
+            </a:r>
+          </a:p>
+        </p:txBody>
+      </p:sp>
+      <p:sp>
+        <p:nvSpPr>
+          <p:cNvPr id="5" name="Rounded Rectangle 4"/>
+          <p:cNvSpPr/>
+          <p:nvPr/>
+        </p:nvSpPr>
+        <p:spPr>
+          <a:xfrm>
+            <a:off x="457200" y="1261872"/>
+            <a:ext cx="11277295" cy="4773168"/>
+          </a:xfrm>
+          <a:prstGeom prst="roundRect">
+            <a:avLst>
+              <a:gd name="adj" fmla="val 12000"/>
+            </a:avLst>
+          </a:prstGeom>
+          <a:solidFill>
+            <a:srgbClr val="1E2A38"/>
+          </a:solidFill>
+          <a:ln>
+            <a:noFill/>
+          </a:ln>
+        </p:spPr>
+        <p:style>
+          <a:lnRef idx="1">
+            <a:schemeClr val="accent1"/>
+          </a:lnRef>
+          <a:fillRef idx="3">
+            <a:schemeClr val="accent1"/>
+          </a:fillRef>
+          <a:effectRef idx="2">
+            <a:schemeClr val="accent1"/>
+          </a:effectRef>
+          <a:fontRef idx="minor">
+            <a:schemeClr val="lt1"/>
+          </a:fontRef>
+        </p:style>
+        <p:txBody>
+          <a:bodyPr rtlCol="0" anchor="ctr"/>
+          <a:lstStyle/>
+          <a:p>
+            <a:pPr algn="ctr"/>
+          </a:p>
+        </p:txBody>
+      </p:sp>
+      <p:sp>
+        <p:nvSpPr>
+          <p:cNvPr id="6" name="Rectangle 5"/>
+          <p:cNvSpPr/>
+          <p:nvPr/>
+        </p:nvSpPr>
+        <p:spPr>
+          <a:xfrm>
+            <a:off x="457200" y="1261872"/>
+            <a:ext cx="11277295" cy="320040"/>
+          </a:xfrm>
+          <a:prstGeom prst="rect">
+            <a:avLst/>
+          </a:prstGeom>
+          <a:solidFill>
+            <a:srgbClr val="095292"/>
+          </a:solidFill>
+          <a:ln>
+            <a:noFill/>
+          </a:ln>
+        </p:spPr>
+        <p:style>
+          <a:lnRef idx="1">
+            <a:schemeClr val="accent1"/>
+          </a:lnRef>
+          <a:fillRef idx="3">
+            <a:schemeClr val="accent1"/>
+          </a:fillRef>
+          <a:effectRef idx="2">
+            <a:schemeClr val="accent1"/>
+          </a:effectRef>
+          <a:fontRef idx="minor">
+            <a:schemeClr val="lt1"/>
+          </a:fontRef>
+        </p:style>
+        <p:txBody>
+          <a:bodyPr rtlCol="0" anchor="ctr"/>
+          <a:lstStyle/>
+          <a:p>
+            <a:pPr algn="ctr"/>
+          </a:p>
+        </p:txBody>
+      </p:sp>
+      <p:sp>
+        <p:nvSpPr>
+          <p:cNvPr id="7" name="TextBox 6"/>
+          <p:cNvSpPr txBox="1"/>
+          <p:nvPr/>
+        </p:nvSpPr>
+        <p:spPr>
+          <a:xfrm>
+            <a:off x="685800" y="1307592"/>
+            <a:ext cx="10820095" cy="256032"/>
+          </a:xfrm>
+          <a:prstGeom prst="rect">
+            <a:avLst/>
+          </a:prstGeom>
+          <a:noFill/>
+        </p:spPr>
+        <p:txBody>
+          <a:bodyPr wrap="square" anchor="ctr"/>
+          <a:lstStyle/>
+          <a:p>
+            <a:r>
+              <a:rPr sz="1000" b="1" i="0">
+                <a:solidFill>
+                  <a:srgbClr val="269CCB"/>
+                </a:solidFill>
+                <a:latin typeface="Calibri"/>
+              </a:rPr>
+              <a:t>● ● ●</a:t>
+            </a:r>
+          </a:p>
+        </p:txBody>
+      </p:sp>
+      <p:sp>
+        <p:nvSpPr>
+          <p:cNvPr id="8" name="TextBox 7"/>
+          <p:cNvSpPr txBox="1"/>
+          <p:nvPr/>
+        </p:nvSpPr>
+        <p:spPr>
+          <a:xfrm>
+            <a:off x="777240" y="1719072"/>
+            <a:ext cx="10637215" cy="4133087"/>
+          </a:xfrm>
+          <a:prstGeom prst="rect">
+            <a:avLst/>
+          </a:prstGeom>
+          <a:noFill/>
+        </p:spPr>
+        <p:txBody>
+          <a:bodyPr wrap="square">
+            <a:spAutoFit/>
+          </a:bodyPr>
+          <a:lstStyle/>
+          <a:p>
+            <a:pPr>
+              <a:spcAft>
+                <a:spcPts val="400"/>
+              </a:spcAft>
+            </a:pPr>
+            <a:r>
+              <a:rPr sz="1400" b="0" i="0">
+                <a:solidFill>
+                  <a:srgbClr val="FFFFFF"/>
+                </a:solidFill>
+                <a:latin typeface="Calibri"/>
+              </a:rPr>
+              <a:t>// Sin esto, al cerrar la ventana la clinica Huellitas vuelve al papel.</a:t>
+            </a:r>
+          </a:p>
+          <a:p>
+            <a:pPr>
+              <a:spcAft>
+                <a:spcPts val="400"/>
+              </a:spcAft>
+            </a:pPr>
+            <a:r>
+              <a:rPr sz="1400" b="0" i="0">
+                <a:solidFill>
+                  <a:srgbClr val="FFFFFF"/>
+                </a:solidFill>
+                <a:latin typeface="Calibri"/>
+              </a:rPr>
+              <a:t>try (BufferedWriter salida = Files.newBufferedWriter(ruta, StandardCharsets.UTF_8)) {</a:t>
+            </a:r>
+          </a:p>
+          <a:p>
+            <a:pPr>
+              <a:spcAft>
+                <a:spcPts val="400"/>
+              </a:spcAft>
+            </a:pPr>
+            <a:r>
+              <a:rPr sz="1400" b="0" i="0">
+                <a:solidFill>
+                  <a:srgbClr val="FFFFFF"/>
+                </a:solidFill>
+                <a:latin typeface="Calibri"/>
+              </a:rPr>
+              <a:t>    salida.write("id;nombre;especie;edad;cedula_dueno"); // encabezado = contrato del CSV</a:t>
+            </a:r>
+          </a:p>
+          <a:p>
+            <a:pPr>
+              <a:spcAft>
+                <a:spcPts val="400"/>
+              </a:spcAft>
+            </a:pPr>
+            <a:r>
+              <a:rPr sz="1400" b="0" i="0">
+                <a:solidFill>
+                  <a:srgbClr val="FFFFFF"/>
+                </a:solidFill>
+                <a:latin typeface="Calibri"/>
+              </a:rPr>
+              <a:t>    salida.newLine();</a:t>
+            </a:r>
+          </a:p>
+          <a:p>
+            <a:pPr>
+              <a:spcAft>
+                <a:spcPts val="400"/>
+              </a:spcAft>
+            </a:pPr>
+            <a:r>
+              <a:rPr sz="1400" b="0" i="0">
+                <a:solidFill>
+                  <a:srgbClr val="FFFFFF"/>
+                </a:solidFill>
+                <a:latin typeface="Calibri"/>
+              </a:rPr>
+              <a:t>    for (Mascota m: mascotas) {</a:t>
+            </a:r>
+          </a:p>
+          <a:p>
+            <a:pPr>
+              <a:spcAft>
+                <a:spcPts val="400"/>
+              </a:spcAft>
+            </a:pPr>
+            <a:r>
+              <a:rPr sz="1400" b="0" i="0">
+                <a:solidFill>
+                  <a:srgbClr val="FFFFFF"/>
+                </a:solidFill>
+                <a:latin typeface="Calibri"/>
+              </a:rPr>
+              <a:t>        salida.write(m.getId() + ";" + m.getNombre() + ";" + m.getEspecie()</a:t>
+            </a:r>
+          </a:p>
+          <a:p>
+            <a:pPr>
+              <a:spcAft>
+                <a:spcPts val="400"/>
+              </a:spcAft>
+            </a:pPr>
+            <a:r>
+              <a:rPr sz="1400" b="0" i="0">
+                <a:solidFill>
+                  <a:srgbClr val="FFFFFF"/>
+                </a:solidFill>
+                <a:latin typeface="Calibri"/>
+              </a:rPr>
+              <a:t>                   + ";" + m.getEdad() + ";" + m.getCedulaDueno());</a:t>
+            </a:r>
+          </a:p>
+          <a:p>
+            <a:pPr>
+              <a:spcAft>
+                <a:spcPts val="400"/>
+              </a:spcAft>
+            </a:pPr>
+            <a:r>
+              <a:rPr sz="1400" b="0" i="0">
+                <a:solidFill>
+                  <a:srgbClr val="FFFFFF"/>
+                </a:solidFill>
+                <a:latin typeface="Calibri"/>
+              </a:rPr>
+              <a:t>        salida.newLine();                 // una mascota = una linea, siempre 4 separadores</a:t>
+            </a:r>
+          </a:p>
+          <a:p>
+            <a:pPr>
+              <a:spcAft>
+                <a:spcPts val="400"/>
+              </a:spcAft>
+            </a:pPr>
+            <a:r>
+              <a:rPr sz="1400" b="0" i="0">
+                <a:solidFill>
+                  <a:srgbClr val="FFFFFF"/>
+                </a:solidFill>
+                <a:latin typeface="Calibri"/>
+              </a:rPr>
+              <a:t>    }</a:t>
+            </a:r>
+          </a:p>
+          <a:p>
+            <a:pPr>
+              <a:spcAft>
+                <a:spcPts val="400"/>
+              </a:spcAft>
+            </a:pPr>
+            <a:r>
+              <a:rPr sz="1400" b="0" i="0">
+                <a:solidFill>
+                  <a:srgbClr val="FFFFFF"/>
+                </a:solidFill>
+                <a:latin typeface="Calibri"/>
+              </a:rPr>
+              <a:t>}                                          // aqui se cierra solo y el buffer baja al disco</a:t>
+            </a:r>
+          </a:p>
+          <a:p>
+            <a:pPr>
+              <a:spcAft>
+                <a:spcPts val="400"/>
+              </a:spcAft>
+            </a:pPr>
+            <a:r>
+              <a:rPr sz="1400" b="0" i="0">
+                <a:solidFill>
+                  <a:srgbClr val="FFFFFF"/>
+                </a:solidFill>
+                <a:latin typeface="Calibri"/>
+              </a:rPr>
+              <a:t>catch (IOException e) {                    // IOException es checked: el compilador la exige</a:t>
+            </a:r>
+          </a:p>
+          <a:p>
+            <a:pPr>
+              <a:spcAft>
+                <a:spcPts val="400"/>
+              </a:spcAft>
+            </a:pPr>
+            <a:r>
+              <a:rPr sz="1400" b="0" i="0">
+                <a:solidFill>
+                  <a:srgbClr val="FFFFFF"/>
+                </a:solidFill>
+                <a:latin typeface="Calibri"/>
+              </a:rPr>
+              <a:t>    JOptionPane.showMessageDialog(null, "No se pudo guardar: " + e.getMessage());</a:t>
+            </a:r>
+          </a:p>
+          <a:p>
+            <a:pPr>
+              <a:spcAft>
+                <a:spcPts val="400"/>
+              </a:spcAft>
+            </a:pPr>
+            <a:r>
+              <a:rPr sz="1400" b="0" i="0">
+                <a:solidFill>
+                  <a:srgbClr val="FFFFFF"/>
+                </a:solidFill>
+                <a:latin typeface="Calibri"/>
+              </a:rPr>
+              <a:t>}                                          // un catch vacio aqui = mascota perdida en silencio</a:t>
+            </a:r>
+          </a:p>
+        </p:txBody>
+      </p:sp>
+      <p:sp>
+        <p:nvSpPr>
+          <p:cNvPr id="9" name="TextBox 8"/>
+          <p:cNvSpPr txBox="1"/>
+          <p:nvPr/>
+        </p:nvSpPr>
+        <p:spPr>
+          <a:xfrm>
+            <a:off x="457200" y="6080760"/>
+            <a:ext cx="11277295" cy="320040"/>
+          </a:xfrm>
+          <a:prstGeom prst="rect">
+            <a:avLst/>
+          </a:prstGeom>
+          <a:noFill/>
+        </p:spPr>
+        <p:txBody>
+          <a:bodyPr wrap="square">
+            <a:spAutoFit/>
+          </a:bodyPr>
+          <a:lstStyle/>
+          <a:p>
+            <a:pPr algn="ctr"/>
+            <a:r>
+              <a:rPr sz="1200" b="0" i="1">
+                <a:solidFill>
+                  <a:srgbClr val="666666"/>
+                </a:solidFill>
+                <a:latin typeface="Calibri"/>
+              </a:rPr>
+              <a:t>El try-with-resources cierra el archivo pase lo que pase; si no cierra, el .csv queda en cero bytes aunque el programa diga que guardó.</a:t>
+            </a:r>
+          </a:p>
+        </p:txBody>
+      </p:sp>
+      <p:sp>
+        <p:nvSpPr>
+          <p:cNvPr id="10" name="TextBox 9"/>
+          <p:cNvSpPr txBox="1"/>
+          <p:nvPr/>
+        </p:nvSpPr>
+        <p:spPr>
+          <a:xfrm>
+            <a:off x="11185855" y="6473952"/>
+            <a:ext cx="640080" cy="274320"/>
+          </a:xfrm>
+          <a:prstGeom prst="rect">
+            <a:avLst/>
+          </a:prstGeom>
+          <a:noFill/>
+        </p:spPr>
+        <p:txBody>
+          <a:bodyPr wrap="square">
+            <a:spAutoFit/>
+          </a:bodyPr>
+          <a:lstStyle/>
+          <a:p>
+            <a:pPr algn="r"/>
+            <a:r>
+              <a:rPr sz="1100" b="0" i="0">
+                <a:solidFill>
+                  <a:srgbClr val="666666"/>
+                </a:solidFill>
+                <a:latin typeface="Calibri"/>
+              </a:rPr>
+              <a:t>14</a:t>
+            </a:r>
+          </a:p>
+        </p:txBody>
+      </p:sp>
+    </p:spTree>
+  </p:cSld>
+  <p:clrMapOvr>
+    <a:masterClrMapping/>
+  </p:clrMapOvr>
+</p:sld>
+</file>
+
+<file path=ppt/slides/slide15.xml><?xml version="1.0" encoding="utf-8"?>
+<p:sld xmlns:a="http://schemas.openxmlformats.org/drawingml/2006/main" xmlns:p="http://schemas.openxmlformats.org/presentationml/2006/main" xmlns:r="http://schemas.openxmlformats.org/officeDocument/2006/relationships">
+  <p:cSld>
+    <p:bg>
+      <p:bgPr>
+        <a:solidFill>
+          <a:srgbClr val="FFFFFF"/>
+        </a:solidFill>
+        <a:effectLst/>
+      </p:bgPr>
+    </p:bg>
+    <p:spTree>
+      <p:nvGrpSpPr>
+        <p:cNvPr id="1" name=""/>
+        <p:cNvGrpSpPr/>
+        <p:nvPr/>
+      </p:nvGrpSpPr>
+      <p:grpSpPr/>
+      <p:sp>
+        <p:nvSpPr>
+          <p:cNvPr id="2" name="Rectangle 1"/>
+          <p:cNvSpPr/>
+          <p:nvPr/>
+        </p:nvSpPr>
+        <p:spPr>
+          <a:xfrm>
+            <a:off x="0" y="0"/>
+            <a:ext cx="12191695" cy="960120"/>
+          </a:xfrm>
+          <a:prstGeom prst="rect">
+            <a:avLst/>
+          </a:prstGeom>
+          <a:solidFill>
+            <a:srgbClr val="095292"/>
+          </a:solidFill>
+          <a:ln>
+            <a:noFill/>
+          </a:ln>
+        </p:spPr>
+        <p:style>
+          <a:lnRef idx="1">
+            <a:schemeClr val="accent1"/>
+          </a:lnRef>
+          <a:fillRef idx="3">
+            <a:schemeClr val="accent1"/>
+          </a:fillRef>
+          <a:effectRef idx="2">
+            <a:schemeClr val="accent1"/>
+          </a:effectRef>
+          <a:fontRef idx="minor">
+            <a:schemeClr val="lt1"/>
+          </a:fontRef>
+        </p:style>
+        <p:txBody>
+          <a:bodyPr rtlCol="0" anchor="ctr"/>
+          <a:lstStyle/>
+          <a:p>
+            <a:pPr algn="ctr"/>
+          </a:p>
+        </p:txBody>
+      </p:sp>
+      <p:sp>
+        <p:nvSpPr>
+          <p:cNvPr id="3" name="Rectangle 2"/>
+          <p:cNvSpPr/>
+          <p:nvPr/>
+        </p:nvSpPr>
+        <p:spPr>
+          <a:xfrm>
+            <a:off x="0" y="960120"/>
+            <a:ext cx="12191695" cy="41148"/>
+          </a:xfrm>
+          <a:prstGeom prst="rect">
+            <a:avLst/>
+          </a:prstGeom>
+          <a:solidFill>
+            <a:srgbClr val="FFD000"/>
+          </a:solidFill>
+          <a:ln>
+            <a:noFill/>
+          </a:ln>
+        </p:spPr>
+        <p:style>
+          <a:lnRef idx="1">
+            <a:schemeClr val="accent1"/>
+          </a:lnRef>
+          <a:fillRef idx="3">
+            <a:schemeClr val="accent1"/>
+          </a:fillRef>
+          <a:effectRef idx="2">
+            <a:schemeClr val="accent1"/>
+          </a:effectRef>
+          <a:fontRef idx="minor">
+            <a:schemeClr val="lt1"/>
+          </a:fontRef>
+        </p:style>
+        <p:txBody>
+          <a:bodyPr rtlCol="0" anchor="ctr"/>
+          <a:lstStyle/>
+          <a:p>
+            <a:pPr algn="ctr"/>
+          </a:p>
+        </p:txBody>
+      </p:sp>
+      <p:sp>
+        <p:nvSpPr>
+          <p:cNvPr id="4" name="TextBox 3"/>
+          <p:cNvSpPr txBox="1"/>
+          <p:nvPr/>
+        </p:nvSpPr>
+        <p:spPr>
+          <a:xfrm>
+            <a:off x="457200" y="164592"/>
+            <a:ext cx="11277295" cy="502920"/>
+          </a:xfrm>
+          <a:prstGeom prst="rect">
+            <a:avLst/>
+          </a:prstGeom>
+          <a:noFill/>
+        </p:spPr>
+        <p:txBody>
+          <a:bodyPr wrap="square">
+            <a:spAutoFit/>
+          </a:bodyPr>
+          <a:lstStyle/>
+          <a:p>
+            <a:r>
+              <a:rPr sz="2600" b="1" i="0">
+                <a:solidFill>
+                  <a:srgbClr val="FFFFFF"/>
+                </a:solidFill>
+                <a:latin typeface="Calibri"/>
+              </a:rPr>
+              <a:t>Demo del dia</a:t>
+            </a:r>
+          </a:p>
+        </p:txBody>
+      </p:sp>
+      <p:sp>
+        <p:nvSpPr>
+          <p:cNvPr id="5" name="TextBox 4"/>
+          <p:cNvSpPr txBox="1"/>
+          <p:nvPr/>
+        </p:nvSpPr>
+        <p:spPr>
+          <a:xfrm>
+            <a:off x="457200" y="1170432"/>
+            <a:ext cx="11277295" cy="5230368"/>
+          </a:xfrm>
+          <a:prstGeom prst="rect">
+            <a:avLst/>
+          </a:prstGeom>
+          <a:noFill/>
+        </p:spPr>
+        <p:txBody>
+          <a:bodyPr wrap="square">
+            <a:spAutoFit/>
+          </a:bodyPr>
+          <a:lstStyle/>
+          <a:p>
+            <a:pPr>
+              <a:spcAft>
+                <a:spcPts val="800"/>
+              </a:spcAft>
+            </a:pPr>
+            <a:r>
+              <a:rPr sz="2000" b="0" i="0">
+                <a:solidFill>
+                  <a:srgbClr val="333333"/>
+                </a:solidFill>
+                <a:latin typeface="Calibri"/>
+              </a:rPr>
+              <a:t>–   </a:t>
+            </a:r>
+            <a:r>
+              <a:rPr sz="2000" b="1" i="0">
+                <a:solidFill>
+                  <a:srgbClr val="333333"/>
+                </a:solidFill>
+                <a:latin typeface="Calibri"/>
+              </a:rPr>
+              <a:t>Herramienta:</a:t>
+            </a:r>
+            <a:r>
+              <a:rPr sz="2000" b="0" i="0">
+                <a:solidFill>
+                  <a:srgbClr val="333333"/>
+                </a:solidFill>
+                <a:latin typeface="Calibri"/>
+              </a:rPr>
+              <a:t> Visual Studio Code (Java)</a:t>
+            </a:r>
+          </a:p>
+          <a:p>
+            <a:pPr>
+              <a:spcAft>
+                <a:spcPts val="800"/>
+              </a:spcAft>
+            </a:pPr>
+            <a:r>
+              <a:rPr sz="2000" b="0" i="0">
+                <a:solidFill>
+                  <a:srgbClr val="333333"/>
+                </a:solidFill>
+                <a:latin typeface="Calibri"/>
+              </a:rPr>
+              <a:t>–   </a:t>
+            </a:r>
+            <a:r>
+              <a:rPr sz="2000" b="1" i="0">
+                <a:solidFill>
+                  <a:srgbClr val="333333"/>
+                </a:solidFill>
+                <a:latin typeface="Calibri"/>
+              </a:rPr>
+              <a:t>Demo:</a:t>
+            </a:r>
+            <a:r>
+              <a:rPr sz="2000" b="0" i="0">
+                <a:solidFill>
+                  <a:srgbClr val="333333"/>
+                </a:solidFill>
+                <a:latin typeface="Calibri"/>
+              </a:rPr>
+              <a:t> El docente registra una mascota, cierra la aplicación, la vuelve a abrir y la mascota sigue ahí; enseguida abre mascotas.csv en el Bloc de notas para mostrar la línea que escribió el programa.</a:t>
+            </a:r>
+          </a:p>
+          <a:p>
+            <a:pPr>
+              <a:spcAft>
+                <a:spcPts val="800"/>
+              </a:spcAft>
+            </a:pPr>
+            <a:r>
+              <a:rPr sz="2000" b="0" i="0">
+                <a:solidFill>
+                  <a:srgbClr val="333333"/>
+                </a:solidFill>
+                <a:latin typeface="Calibri"/>
+              </a:rPr>
+              <a:t>–   Mismo dominio VetCare — no otro ejemplo.</a:t>
+            </a:r>
+          </a:p>
+        </p:txBody>
+      </p:sp>
+      <p:sp>
+        <p:nvSpPr>
+          <p:cNvPr id="6" name="TextBox 5"/>
+          <p:cNvSpPr txBox="1"/>
+          <p:nvPr/>
+        </p:nvSpPr>
+        <p:spPr>
+          <a:xfrm>
+            <a:off x="11185855" y="6473952"/>
+            <a:ext cx="640080" cy="274320"/>
+          </a:xfrm>
+          <a:prstGeom prst="rect">
+            <a:avLst/>
+          </a:prstGeom>
+          <a:noFill/>
+        </p:spPr>
+        <p:txBody>
+          <a:bodyPr wrap="square">
+            <a:spAutoFit/>
+          </a:bodyPr>
+          <a:lstStyle/>
+          <a:p>
+            <a:pPr algn="r"/>
+            <a:r>
+              <a:rPr sz="1100" b="0" i="0">
+                <a:solidFill>
+                  <a:srgbClr val="666666"/>
+                </a:solidFill>
+                <a:latin typeface="Calibri"/>
+              </a:rPr>
+              <a:t>15</a:t>
+            </a:r>
+          </a:p>
+        </p:txBody>
+      </p:sp>
+    </p:spTree>
+  </p:cSld>
+  <p:clrMapOvr>
+    <a:masterClrMapping/>
+  </p:clrMapOvr>
+</p:sld>
+</file>
+
+<file path=ppt/slides/slide16.xml><?xml version="1.0" encoding="utf-8"?>
+<p:sld xmlns:a="http://schemas.openxmlformats.org/drawingml/2006/main" xmlns:p="http://schemas.openxmlformats.org/presentationml/2006/main" xmlns:r="http://schemas.openxmlformats.org/officeDocument/2006/relationships">
+  <p:cSld>
+    <p:bg>
+      <p:bgPr>
+        <a:solidFill>
+          <a:srgbClr val="FFFFFF"/>
+        </a:solidFill>
+        <a:effectLst/>
+      </p:bgPr>
+    </p:bg>
+    <p:spTree>
+      <p:nvGrpSpPr>
+        <p:cNvPr id="1" name=""/>
+        <p:cNvGrpSpPr/>
+        <p:nvPr/>
+      </p:nvGrpSpPr>
+      <p:grpSpPr/>
+      <p:sp>
+        <p:nvSpPr>
+          <p:cNvPr id="2" name="Rectangle 1"/>
+          <p:cNvSpPr/>
+          <p:nvPr/>
+        </p:nvSpPr>
+        <p:spPr>
+          <a:xfrm>
+            <a:off x="0" y="0"/>
+            <a:ext cx="12191695" cy="960120"/>
+          </a:xfrm>
+          <a:prstGeom prst="rect">
+            <a:avLst/>
+          </a:prstGeom>
+          <a:solidFill>
+            <a:srgbClr val="095292"/>
+          </a:solidFill>
+          <a:ln>
+            <a:noFill/>
+          </a:ln>
+        </p:spPr>
+        <p:style>
+          <a:lnRef idx="1">
+            <a:schemeClr val="accent1"/>
+          </a:lnRef>
+          <a:fillRef idx="3">
+            <a:schemeClr val="accent1"/>
+          </a:fillRef>
+          <a:effectRef idx="2">
+            <a:schemeClr val="accent1"/>
+          </a:effectRef>
+          <a:fontRef idx="minor">
+            <a:schemeClr val="lt1"/>
+          </a:fontRef>
+        </p:style>
+        <p:txBody>
+          <a:bodyPr rtlCol="0" anchor="ctr"/>
+          <a:lstStyle/>
+          <a:p>
+            <a:pPr algn="ctr"/>
+          </a:p>
+        </p:txBody>
+      </p:sp>
+      <p:sp>
+        <p:nvSpPr>
+          <p:cNvPr id="3" name="Rectangle 2"/>
+          <p:cNvSpPr/>
+          <p:nvPr/>
+        </p:nvSpPr>
+        <p:spPr>
+          <a:xfrm>
+            <a:off x="0" y="960120"/>
+            <a:ext cx="12191695" cy="41148"/>
+          </a:xfrm>
+          <a:prstGeom prst="rect">
+            <a:avLst/>
+          </a:prstGeom>
+          <a:solidFill>
+            <a:srgbClr val="FFD000"/>
+          </a:solidFill>
+          <a:ln>
+            <a:noFill/>
+          </a:ln>
+        </p:spPr>
+        <p:style>
+          <a:lnRef idx="1">
+            <a:schemeClr val="accent1"/>
+          </a:lnRef>
+          <a:fillRef idx="3">
+            <a:schemeClr val="accent1"/>
+          </a:fillRef>
+          <a:effectRef idx="2">
+            <a:schemeClr val="accent1"/>
+          </a:effectRef>
+          <a:fontRef idx="minor">
+            <a:schemeClr val="lt1"/>
+          </a:fontRef>
+        </p:style>
+        <p:txBody>
+          <a:bodyPr rtlCol="0" anchor="ctr"/>
+          <a:lstStyle/>
+          <a:p>
+            <a:pPr algn="ctr"/>
+          </a:p>
+        </p:txBody>
+      </p:sp>
+      <p:sp>
+        <p:nvSpPr>
+          <p:cNvPr id="4" name="TextBox 3"/>
+          <p:cNvSpPr txBox="1"/>
+          <p:nvPr/>
+        </p:nvSpPr>
+        <p:spPr>
+          <a:xfrm>
+            <a:off x="457200" y="164592"/>
+            <a:ext cx="11277295" cy="502920"/>
+          </a:xfrm>
+          <a:prstGeom prst="rect">
+            <a:avLst/>
+          </a:prstGeom>
+          <a:noFill/>
+        </p:spPr>
+        <p:txBody>
+          <a:bodyPr wrap="square">
+            <a:spAutoFit/>
+          </a:bodyPr>
+          <a:lstStyle/>
+          <a:p>
+            <a:r>
+              <a:rPr sz="2600" b="1" i="0">
+                <a:solidFill>
+                  <a:srgbClr val="FFFFFF"/>
+                </a:solidFill>
+                <a:latin typeface="Calibri"/>
+              </a:rPr>
+              <a:t>Taller PI — por que importa</a:t>
+            </a:r>
+          </a:p>
+        </p:txBody>
+      </p:sp>
+      <p:sp>
+        <p:nvSpPr>
+          <p:cNvPr id="5" name="TextBox 4"/>
+          <p:cNvSpPr txBox="1"/>
+          <p:nvPr/>
+        </p:nvSpPr>
+        <p:spPr>
+          <a:xfrm>
+            <a:off x="457200" y="1170432"/>
+            <a:ext cx="11277295" cy="5230368"/>
+          </a:xfrm>
+          <a:prstGeom prst="rect">
+            <a:avLst/>
+          </a:prstGeom>
+          <a:noFill/>
+        </p:spPr>
+        <p:txBody>
+          <a:bodyPr wrap="square">
+            <a:spAutoFit/>
+          </a:bodyPr>
+          <a:lstStyle/>
+          <a:p>
+            <a:pPr>
+              <a:spcAft>
+                <a:spcPts val="800"/>
+              </a:spcAft>
+            </a:pPr>
+            <a:r>
+              <a:rPr sz="2000" b="0" i="0">
+                <a:solidFill>
+                  <a:srgbClr val="333333"/>
+                </a:solidFill>
+                <a:latin typeface="Calibri"/>
+              </a:rPr>
+              <a:t>–   </a:t>
+            </a:r>
+            <a:r>
+              <a:rPr sz="2000" b="1" i="0">
+                <a:solidFill>
+                  <a:srgbClr val="333333"/>
+                </a:solidFill>
+                <a:latin typeface="Calibri"/>
+              </a:rPr>
+              <a:t>Por que importa al PI:</a:t>
+            </a:r>
+            <a:r>
+              <a:rPr sz="2000" b="0" i="0">
+                <a:solidFill>
+                  <a:srgbClr val="333333"/>
+                </a:solidFill>
+                <a:latin typeface="Calibri"/>
+              </a:rPr>
+              <a:t> el PI exige explícitamente persistencia en archivos .txt o .csv, y sin ella VetCare sigue siendo una libreta que se borra sola: la clínica Huellitas no puede recuperar el expediente de Firulais al día siguiente.</a:t>
+            </a:r>
+          </a:p>
+          <a:p>
+            <a:pPr>
+              <a:spcAft>
+                <a:spcPts val="800"/>
+              </a:spcAft>
+            </a:pPr>
+            <a:r>
+              <a:rPr sz="2000" b="0" i="0">
+                <a:solidFill>
+                  <a:srgbClr val="333333"/>
+                </a:solidFill>
+                <a:latin typeface="Calibri"/>
+              </a:rPr>
+              <a:t>–   Esta es la primera clase donde el producto deja de existir solo mientras la ventana está abierta; a partir de hoy el proyecto tiene datos reales acumulados que las clases siguientes van a leer, integrar y revisar.</a:t>
+            </a:r>
+          </a:p>
+          <a:p>
+            <a:pPr>
+              <a:spcAft>
+                <a:spcPts val="800"/>
+              </a:spcAft>
+            </a:pPr>
+            <a:r>
+              <a:rPr sz="2000" b="0" i="0">
+                <a:solidFill>
+                  <a:srgbClr val="333333"/>
+                </a:solidFill>
+                <a:latin typeface="Calibri"/>
+              </a:rPr>
+              <a:t>–   La bitácora REFACTOR.md es también la evidencia del uso responsable de IA que se le va a exigir en la sustentación final: quien no pueda explicar su propio código no puede defenderlo.</a:t>
+            </a:r>
+          </a:p>
+        </p:txBody>
+      </p:sp>
+      <p:sp>
+        <p:nvSpPr>
+          <p:cNvPr id="6" name="TextBox 5"/>
+          <p:cNvSpPr txBox="1"/>
+          <p:nvPr/>
+        </p:nvSpPr>
+        <p:spPr>
+          <a:xfrm>
+            <a:off x="11185855" y="6473952"/>
+            <a:ext cx="640080" cy="274320"/>
+          </a:xfrm>
+          <a:prstGeom prst="rect">
+            <a:avLst/>
+          </a:prstGeom>
+          <a:noFill/>
+        </p:spPr>
+        <p:txBody>
+          <a:bodyPr wrap="square">
+            <a:spAutoFit/>
+          </a:bodyPr>
+          <a:lstStyle/>
+          <a:p>
+            <a:pPr algn="r"/>
+            <a:r>
+              <a:rPr sz="1100" b="0" i="0">
+                <a:solidFill>
+                  <a:srgbClr val="666666"/>
+                </a:solidFill>
+                <a:latin typeface="Calibri"/>
+              </a:rPr>
+              <a:t>16</a:t>
+            </a:r>
+          </a:p>
+        </p:txBody>
+      </p:sp>
+    </p:spTree>
+  </p:cSld>
+  <p:clrMapOvr>
+    <a:masterClrMapping/>
+  </p:clrMapOvr>
+</p:sld>
+</file>
+
+<file path=ppt/slides/slide17.xml><?xml version="1.0" encoding="utf-8"?>
+<p:sld xmlns:a="http://schemas.openxmlformats.org/drawingml/2006/main" xmlns:p="http://schemas.openxmlformats.org/presentationml/2006/main" xmlns:r="http://schemas.openxmlformats.org/officeDocument/2006/relationships">
+  <p:cSld>
+    <p:bg>
+      <p:bgPr>
+        <a:solidFill>
+          <a:srgbClr val="FFFFFF"/>
+        </a:solidFill>
+        <a:effectLst/>
+      </p:bgPr>
+    </p:bg>
+    <p:spTree>
+      <p:nvGrpSpPr>
+        <p:cNvPr id="1" name=""/>
+        <p:cNvGrpSpPr/>
+        <p:nvPr/>
+      </p:nvGrpSpPr>
+      <p:grpSpPr/>
+      <p:sp>
+        <p:nvSpPr>
+          <p:cNvPr id="2" name="Rectangle 1"/>
+          <p:cNvSpPr/>
+          <p:nvPr/>
+        </p:nvSpPr>
+        <p:spPr>
+          <a:xfrm>
+            <a:off x="0" y="0"/>
+            <a:ext cx="12191695" cy="960120"/>
+          </a:xfrm>
+          <a:prstGeom prst="rect">
+            <a:avLst/>
+          </a:prstGeom>
+          <a:solidFill>
+            <a:srgbClr val="095292"/>
+          </a:solidFill>
+          <a:ln>
+            <a:noFill/>
+          </a:ln>
+        </p:spPr>
+        <p:style>
+          <a:lnRef idx="1">
+            <a:schemeClr val="accent1"/>
+          </a:lnRef>
+          <a:fillRef idx="3">
+            <a:schemeClr val="accent1"/>
+          </a:fillRef>
+          <a:effectRef idx="2">
+            <a:schemeClr val="accent1"/>
+          </a:effectRef>
+          <a:fontRef idx="minor">
+            <a:schemeClr val="lt1"/>
+          </a:fontRef>
+        </p:style>
+        <p:txBody>
+          <a:bodyPr rtlCol="0" anchor="ctr"/>
+          <a:lstStyle/>
+          <a:p>
+            <a:pPr algn="ctr"/>
+          </a:p>
+        </p:txBody>
+      </p:sp>
+      <p:sp>
+        <p:nvSpPr>
+          <p:cNvPr id="3" name="Rectangle 2"/>
+          <p:cNvSpPr/>
+          <p:nvPr/>
+        </p:nvSpPr>
+        <p:spPr>
+          <a:xfrm>
+            <a:off x="0" y="960120"/>
+            <a:ext cx="12191695" cy="41148"/>
+          </a:xfrm>
+          <a:prstGeom prst="rect">
+            <a:avLst/>
+          </a:prstGeom>
+          <a:solidFill>
+            <a:srgbClr val="FFD000"/>
+          </a:solidFill>
+          <a:ln>
+            <a:noFill/>
+          </a:ln>
+        </p:spPr>
+        <p:style>
+          <a:lnRef idx="1">
+            <a:schemeClr val="accent1"/>
+          </a:lnRef>
+          <a:fillRef idx="3">
+            <a:schemeClr val="accent1"/>
+          </a:fillRef>
+          <a:effectRef idx="2">
+            <a:schemeClr val="accent1"/>
+          </a:effectRef>
+          <a:fontRef idx="minor">
+            <a:schemeClr val="lt1"/>
+          </a:fontRef>
+        </p:style>
+        <p:txBody>
+          <a:bodyPr rtlCol="0" anchor="ctr"/>
+          <a:lstStyle/>
+          <a:p>
+            <a:pPr algn="ctr"/>
+          </a:p>
+        </p:txBody>
+      </p:sp>
+      <p:sp>
+        <p:nvSpPr>
+          <p:cNvPr id="4" name="TextBox 3"/>
+          <p:cNvSpPr txBox="1"/>
+          <p:nvPr/>
+        </p:nvSpPr>
+        <p:spPr>
+          <a:xfrm>
+            <a:off x="457200" y="164592"/>
+            <a:ext cx="11277295" cy="502920"/>
+          </a:xfrm>
+          <a:prstGeom prst="rect">
+            <a:avLst/>
+          </a:prstGeom>
+          <a:noFill/>
+        </p:spPr>
+        <p:txBody>
+          <a:bodyPr wrap="square">
+            <a:spAutoFit/>
+          </a:bodyPr>
+          <a:lstStyle/>
+          <a:p>
+            <a:r>
+              <a:rPr sz="2600" b="1" i="0">
+                <a:solidFill>
+                  <a:srgbClr val="FFFFFF"/>
+                </a:solidFill>
+                <a:latin typeface="Calibri"/>
+              </a:rPr>
+              <a:t>Taller PI — punto de partida</a:t>
+            </a:r>
+          </a:p>
+        </p:txBody>
+      </p:sp>
+      <p:sp>
+        <p:nvSpPr>
+          <p:cNvPr id="5" name="TextBox 4"/>
+          <p:cNvSpPr txBox="1"/>
+          <p:nvPr/>
+        </p:nvSpPr>
+        <p:spPr>
+          <a:xfrm>
+            <a:off x="457200" y="1170432"/>
+            <a:ext cx="11277295" cy="5230368"/>
+          </a:xfrm>
+          <a:prstGeom prst="rect">
+            <a:avLst/>
+          </a:prstGeom>
+          <a:noFill/>
+        </p:spPr>
+        <p:txBody>
+          <a:bodyPr wrap="square">
+            <a:spAutoFit/>
+          </a:bodyPr>
+          <a:lstStyle/>
+          <a:p>
+            <a:pPr>
+              <a:spcAft>
+                <a:spcPts val="800"/>
+              </a:spcAft>
+            </a:pPr>
+            <a:r>
+              <a:rPr sz="2000" b="0" i="0">
+                <a:solidFill>
+                  <a:srgbClr val="333333"/>
+                </a:solidFill>
+                <a:latin typeface="Calibri"/>
+              </a:rPr>
+              <a:t>–   VetCare ya tiene la clase Mascota con atributos privados y getters, un ArrayList&lt;Mascota&gt; administrado por el servicio y una ventana Swing que registra y lista (trabajo de las clases 1 a 6).</a:t>
+            </a:r>
+          </a:p>
+          <a:p>
+            <a:pPr>
+              <a:spcAft>
+                <a:spcPts val="800"/>
+              </a:spcAft>
+            </a:pPr>
+            <a:r>
+              <a:rPr sz="2000" b="0" i="0">
+                <a:solidFill>
+                  <a:srgbClr val="333333"/>
+                </a:solidFill>
+                <a:latin typeface="Calibri"/>
+              </a:rPr>
+              <a:t>–   En la carpeta del proyecto todavía no existe ningún archivo de datos: cada vez que se cierra la aplicación, la lista arranca vacía otra vez.</a:t>
+            </a:r>
+          </a:p>
+          <a:p>
+            <a:pPr>
+              <a:spcAft>
+                <a:spcPts val="800"/>
+              </a:spcAft>
+            </a:pPr>
+            <a:r>
+              <a:rPr sz="2000" b="0" i="0">
+                <a:solidFill>
+                  <a:srgbClr val="333333"/>
+                </a:solidFill>
+                <a:latin typeface="Calibri"/>
+              </a:rPr>
+              <a:t>–   Se trabaja con tres mascotas de prueba: M001 Firulais, canino, 4 años, dueño CC 1144556677; M002 Michi, felino, 2 años, dueño CC 1098765432; M003 Pelusa, felino, 1 año, dueño CC 1052233445.</a:t>
+            </a:r>
+          </a:p>
+        </p:txBody>
+      </p:sp>
+      <p:sp>
+        <p:nvSpPr>
+          <p:cNvPr id="6" name="TextBox 5"/>
+          <p:cNvSpPr txBox="1"/>
+          <p:nvPr/>
+        </p:nvSpPr>
+        <p:spPr>
+          <a:xfrm>
+            <a:off x="11185855" y="6473952"/>
+            <a:ext cx="640080" cy="274320"/>
+          </a:xfrm>
+          <a:prstGeom prst="rect">
+            <a:avLst/>
+          </a:prstGeom>
+          <a:noFill/>
+        </p:spPr>
+        <p:txBody>
+          <a:bodyPr wrap="square">
+            <a:spAutoFit/>
+          </a:bodyPr>
+          <a:lstStyle/>
+          <a:p>
+            <a:pPr algn="r"/>
+            <a:r>
+              <a:rPr sz="1100" b="0" i="0">
+                <a:solidFill>
+                  <a:srgbClr val="666666"/>
+                </a:solidFill>
+                <a:latin typeface="Calibri"/>
+              </a:rPr>
+              <a:t>17</a:t>
+            </a:r>
+          </a:p>
+        </p:txBody>
+      </p:sp>
+    </p:spTree>
+  </p:cSld>
+  <p:clrMapOvr>
+    <a:masterClrMapping/>
+  </p:clrMapOvr>
+</p:sld>
+</file>
+
+<file path=ppt/slides/slide18.xml><?xml version="1.0" encoding="utf-8"?>
+<p:sld xmlns:a="http://schemas.openxmlformats.org/drawingml/2006/main" xmlns:p="http://schemas.openxmlformats.org/presentationml/2006/main" xmlns:r="http://schemas.openxmlformats.org/officeDocument/2006/relationships">
+  <p:cSld>
+    <p:bg>
+      <p:bgPr>
+        <a:solidFill>
+          <a:srgbClr val="FFFFFF"/>
+        </a:solidFill>
+        <a:effectLst/>
+      </p:bgPr>
+    </p:bg>
+    <p:spTree>
+      <p:nvGrpSpPr>
+        <p:cNvPr id="1" name=""/>
+        <p:cNvGrpSpPr/>
+        <p:nvPr/>
+      </p:nvGrpSpPr>
+      <p:grpSpPr/>
+      <p:sp>
+        <p:nvSpPr>
+          <p:cNvPr id="2" name="Rectangle 1"/>
+          <p:cNvSpPr/>
+          <p:nvPr/>
+        </p:nvSpPr>
+        <p:spPr>
+          <a:xfrm>
+            <a:off x="0" y="0"/>
+            <a:ext cx="12191695" cy="960120"/>
+          </a:xfrm>
+          <a:prstGeom prst="rect">
+            <a:avLst/>
+          </a:prstGeom>
+          <a:solidFill>
+            <a:srgbClr val="095292"/>
+          </a:solidFill>
+          <a:ln>
+            <a:noFill/>
+          </a:ln>
+        </p:spPr>
+        <p:style>
+          <a:lnRef idx="1">
+            <a:schemeClr val="accent1"/>
+          </a:lnRef>
+          <a:fillRef idx="3">
+            <a:schemeClr val="accent1"/>
+          </a:fillRef>
+          <a:effectRef idx="2">
+            <a:schemeClr val="accent1"/>
+          </a:effectRef>
+          <a:fontRef idx="minor">
+            <a:schemeClr val="lt1"/>
+          </a:fontRef>
+        </p:style>
+        <p:txBody>
+          <a:bodyPr rtlCol="0" anchor="ctr"/>
+          <a:lstStyle/>
+          <a:p>
+            <a:pPr algn="ctr"/>
+          </a:p>
+        </p:txBody>
+      </p:sp>
+      <p:sp>
+        <p:nvSpPr>
+          <p:cNvPr id="3" name="Rectangle 2"/>
+          <p:cNvSpPr/>
+          <p:nvPr/>
+        </p:nvSpPr>
+        <p:spPr>
+          <a:xfrm>
+            <a:off x="0" y="960120"/>
+            <a:ext cx="12191695" cy="41148"/>
+          </a:xfrm>
+          <a:prstGeom prst="rect">
+            <a:avLst/>
+          </a:prstGeom>
+          <a:solidFill>
+            <a:srgbClr val="FFD000"/>
+          </a:solidFill>
+          <a:ln>
+            <a:noFill/>
+          </a:ln>
+        </p:spPr>
+        <p:style>
+          <a:lnRef idx="1">
+            <a:schemeClr val="accent1"/>
+          </a:lnRef>
+          <a:fillRef idx="3">
+            <a:schemeClr val="accent1"/>
+          </a:fillRef>
+          <a:effectRef idx="2">
+            <a:schemeClr val="accent1"/>
+          </a:effectRef>
+          <a:fontRef idx="minor">
+            <a:schemeClr val="lt1"/>
+          </a:fontRef>
+        </p:style>
+        <p:txBody>
+          <a:bodyPr rtlCol="0" anchor="ctr"/>
+          <a:lstStyle/>
+          <a:p>
+            <a:pPr algn="ctr"/>
+          </a:p>
+        </p:txBody>
+      </p:sp>
+      <p:sp>
+        <p:nvSpPr>
+          <p:cNvPr id="4" name="TextBox 3"/>
+          <p:cNvSpPr txBox="1"/>
+          <p:nvPr/>
+        </p:nvSpPr>
+        <p:spPr>
+          <a:xfrm>
+            <a:off x="457200" y="164592"/>
+            <a:ext cx="11277295" cy="502920"/>
+          </a:xfrm>
+          <a:prstGeom prst="rect">
+            <a:avLst/>
+          </a:prstGeom>
+          <a:noFill/>
+        </p:spPr>
+        <p:txBody>
+          <a:bodyPr wrap="square">
+            <a:spAutoFit/>
+          </a:bodyPr>
+          <a:lstStyle/>
+          <a:p>
+            <a:r>
+              <a:rPr sz="2600" b="1" i="0">
+                <a:solidFill>
+                  <a:srgbClr val="FFFFFF"/>
+                </a:solidFill>
+                <a:latin typeface="Calibri"/>
+              </a:rPr>
+              <a:t>Taller PI — pasos guiados</a:t>
+            </a:r>
+          </a:p>
+        </p:txBody>
+      </p:sp>
+      <p:sp>
+        <p:nvSpPr>
+          <p:cNvPr id="5" name="Rounded Rectangle 4"/>
+          <p:cNvSpPr/>
+          <p:nvPr/>
+        </p:nvSpPr>
+        <p:spPr>
+          <a:xfrm>
+            <a:off x="457200" y="1234440"/>
+            <a:ext cx="11277295" cy="950976"/>
+          </a:xfrm>
+          <a:prstGeom prst="roundRect">
+            <a:avLst>
+              <a:gd name="adj" fmla="val 12000"/>
+            </a:avLst>
+          </a:prstGeom>
+          <a:solidFill>
+            <a:srgbClr val="F2F2F2"/>
+          </a:solidFill>
+          <a:ln>
+            <a:noFill/>
+          </a:ln>
+        </p:spPr>
+        <p:style>
+          <a:lnRef idx="1">
+            <a:schemeClr val="accent1"/>
+          </a:lnRef>
+          <a:fillRef idx="3">
+            <a:schemeClr val="accent1"/>
+          </a:fillRef>
+          <a:effectRef idx="2">
+            <a:schemeClr val="accent1"/>
+          </a:effectRef>
+          <a:fontRef idx="minor">
+            <a:schemeClr val="lt1"/>
+          </a:fontRef>
+        </p:style>
+        <p:txBody>
+          <a:bodyPr rtlCol="0" anchor="ctr"/>
+          <a:lstStyle/>
+          <a:p>
+            <a:pPr algn="ctr"/>
+          </a:p>
+        </p:txBody>
+      </p:sp>
+      <p:sp>
+        <p:nvSpPr>
+          <p:cNvPr id="6" name="Rounded Rectangle 5"/>
+          <p:cNvSpPr/>
+          <p:nvPr/>
+        </p:nvSpPr>
+        <p:spPr>
+          <a:xfrm>
+            <a:off x="594360" y="1490472"/>
+            <a:ext cx="438912" cy="438912"/>
+          </a:xfrm>
+          <a:prstGeom prst="roundRect">
+            <a:avLst>
+              <a:gd name="adj" fmla="val 12000"/>
+            </a:avLst>
+          </a:prstGeom>
+          <a:solidFill>
+            <a:srgbClr val="095292"/>
+          </a:solidFill>
+          <a:ln>
+            <a:noFill/>
+          </a:ln>
+        </p:spPr>
+        <p:style>
+          <a:lnRef idx="1">
+            <a:schemeClr val="accent1"/>
+          </a:lnRef>
+          <a:fillRef idx="3">
+            <a:schemeClr val="accent1"/>
+          </a:fillRef>
+          <a:effectRef idx="2">
+            <a:schemeClr val="accent1"/>
+          </a:effectRef>
+          <a:fontRef idx="minor">
+            <a:schemeClr val="lt1"/>
+          </a:fontRef>
+        </p:style>
+        <p:txBody>
+          <a:bodyPr rtlCol="0" anchor="ctr"/>
+          <a:lstStyle/>
+          <a:p>
+            <a:pPr algn="ctr"/>
+          </a:p>
+        </p:txBody>
+      </p:sp>
+      <p:sp>
+        <p:nvSpPr>
+          <p:cNvPr id="7" name="TextBox 6"/>
+          <p:cNvSpPr txBox="1"/>
+          <p:nvPr/>
+        </p:nvSpPr>
+        <p:spPr>
+          <a:xfrm>
+            <a:off x="594360" y="1490472"/>
+            <a:ext cx="438912" cy="438912"/>
+          </a:xfrm>
+          <a:prstGeom prst="rect">
+            <a:avLst/>
+          </a:prstGeom>
+          <a:noFill/>
+        </p:spPr>
+        <p:txBody>
+          <a:bodyPr wrap="square" anchor="ctr"/>
+          <a:lstStyle/>
+          <a:p>
+            <a:pPr algn="ctr"/>
+            <a:r>
+              <a:rPr sz="1600" b="1" i="0">
+                <a:solidFill>
+                  <a:srgbClr val="FFFFFF"/>
+                </a:solidFill>
+                <a:latin typeface="Calibri"/>
+              </a:rPr>
+              <a:t>1</a:t>
+            </a:r>
+          </a:p>
+        </p:txBody>
+      </p:sp>
+      <p:sp>
+        <p:nvSpPr>
+          <p:cNvPr id="8" name="TextBox 7"/>
+          <p:cNvSpPr txBox="1"/>
+          <p:nvPr/>
+        </p:nvSpPr>
+        <p:spPr>
+          <a:xfrm>
+            <a:off x="1188720" y="1325880"/>
+            <a:ext cx="10271455" cy="786384"/>
+          </a:xfrm>
+          <a:prstGeom prst="rect">
+            <a:avLst/>
+          </a:prstGeom>
+          <a:noFill/>
+        </p:spPr>
+        <p:txBody>
+          <a:bodyPr wrap="square" anchor="ctr"/>
+          <a:lstStyle/>
+          <a:p>
+            <a:r>
+              <a:rPr sz="1400" b="1" i="0">
+                <a:solidFill>
+                  <a:srgbClr val="095292"/>
+                </a:solidFill>
+                <a:latin typeface="Calibri"/>
+              </a:rPr>
+              <a:t>Cree el paquete vetcare.datos y dentro la clase RepositorioMascotasCSV con la constante private static final String SEPARADOR = ";", la constante ENCABEZADO con el texto id;nombre;especie;edad;cedula_dueno y un atributo Path ruta construido con Paths.get("mascotas.csv"); compile el proyecto y verifique que no hay errores rojos antes de seguir.</a:t>
+            </a:r>
+          </a:p>
+        </p:txBody>
+      </p:sp>
+      <p:sp>
+        <p:nvSpPr>
+          <p:cNvPr id="9" name="Rounded Rectangle 8"/>
+          <p:cNvSpPr/>
+          <p:nvPr/>
+        </p:nvSpPr>
+        <p:spPr>
+          <a:xfrm>
+            <a:off x="457200" y="2276856"/>
+            <a:ext cx="11277295" cy="950976"/>
+          </a:xfrm>
+          <a:prstGeom prst="roundRect">
+            <a:avLst>
+              <a:gd name="adj" fmla="val 12000"/>
+            </a:avLst>
+          </a:prstGeom>
+          <a:solidFill>
+            <a:srgbClr val="E8F4FA"/>
+          </a:solidFill>
+          <a:ln>
+            <a:noFill/>
+          </a:ln>
+        </p:spPr>
+        <p:style>
+          <a:lnRef idx="1">
+            <a:schemeClr val="accent1"/>
+          </a:lnRef>
+          <a:fillRef idx="3">
+            <a:schemeClr val="accent1"/>
+          </a:fillRef>
+          <a:effectRef idx="2">
+            <a:schemeClr val="accent1"/>
+          </a:effectRef>
+          <a:fontRef idx="minor">
+            <a:schemeClr val="lt1"/>
+          </a:fontRef>
+        </p:style>
+        <p:txBody>
+          <a:bodyPr rtlCol="0" anchor="ctr"/>
+          <a:lstStyle/>
+          <a:p>
+            <a:pPr algn="ctr"/>
+          </a:p>
+        </p:txBody>
+      </p:sp>
+      <p:sp>
+        <p:nvSpPr>
+          <p:cNvPr id="10" name="Rounded Rectangle 9"/>
+          <p:cNvSpPr/>
+          <p:nvPr/>
+        </p:nvSpPr>
+        <p:spPr>
+          <a:xfrm>
+            <a:off x="594360" y="2532888"/>
+            <a:ext cx="438912" cy="438912"/>
+          </a:xfrm>
+          <a:prstGeom prst="roundRect">
+            <a:avLst>
+              <a:gd name="adj" fmla="val 12000"/>
+            </a:avLst>
+          </a:prstGeom>
+          <a:solidFill>
+            <a:srgbClr val="095292"/>
+          </a:solidFill>
+          <a:ln>
+            <a:noFill/>
+          </a:ln>
+        </p:spPr>
+        <p:style>
+          <a:lnRef idx="1">
+            <a:schemeClr val="accent1"/>
+          </a:lnRef>
+          <a:fillRef idx="3">
+            <a:schemeClr val="accent1"/>
+          </a:fillRef>
+          <a:effectRef idx="2">
+            <a:schemeClr val="accent1"/>
+          </a:effectRef>
+          <a:fontRef idx="minor">
+            <a:schemeClr val="lt1"/>
+          </a:fontRef>
+        </p:style>
+        <p:txBody>
+          <a:bodyPr rtlCol="0" anchor="ctr"/>
+          <a:lstStyle/>
+          <a:p>
+            <a:pPr algn="ctr"/>
+          </a:p>
+        </p:txBody>
+      </p:sp>
+      <p:sp>
+        <p:nvSpPr>
+          <p:cNvPr id="11" name="TextBox 10"/>
+          <p:cNvSpPr txBox="1"/>
+          <p:nvPr/>
+        </p:nvSpPr>
+        <p:spPr>
+          <a:xfrm>
+            <a:off x="594360" y="2532888"/>
+            <a:ext cx="438912" cy="438912"/>
+          </a:xfrm>
+          <a:prstGeom prst="rect">
+            <a:avLst/>
+          </a:prstGeom>
+          <a:noFill/>
+        </p:spPr>
+        <p:txBody>
+          <a:bodyPr wrap="square" anchor="ctr"/>
+          <a:lstStyle/>
+          <a:p>
+            <a:pPr algn="ctr"/>
+            <a:r>
+              <a:rPr sz="1600" b="1" i="0">
+                <a:solidFill>
+                  <a:srgbClr val="FFFFFF"/>
+                </a:solidFill>
+                <a:latin typeface="Calibri"/>
+              </a:rPr>
+              <a:t>2</a:t>
+            </a:r>
+          </a:p>
+        </p:txBody>
+      </p:sp>
+      <p:sp>
+        <p:nvSpPr>
+          <p:cNvPr id="12" name="TextBox 11"/>
+          <p:cNvSpPr txBox="1"/>
+          <p:nvPr/>
+        </p:nvSpPr>
+        <p:spPr>
+          <a:xfrm>
+            <a:off x="1188720" y="2368296"/>
+            <a:ext cx="10271455" cy="786384"/>
+          </a:xfrm>
+          <a:prstGeom prst="rect">
+            <a:avLst/>
+          </a:prstGeom>
+          <a:noFill/>
+        </p:spPr>
+        <p:txBody>
+          <a:bodyPr wrap="square" anchor="ctr"/>
+          <a:lstStyle/>
+          <a:p>
+            <a:r>
+              <a:rPr sz="1400" b="1" i="0">
+                <a:solidFill>
+                  <a:srgbClr val="095292"/>
+                </a:solidFill>
+                <a:latin typeface="Calibri"/>
+              </a:rPr>
+              <a:t>Implemente guardar(List&lt;Mascota&gt;) usando try-with-resources: escriba el encabezado, recorra la lista y escriba una línea por mascota; ejecute, abra mascotas.csv en el Bloc de notas y verifique que tiene exactamente tantas líneas como mascotas más una, y el mismo número de punto y coma en todas.</a:t>
+            </a:r>
+          </a:p>
+        </p:txBody>
+      </p:sp>
+      <p:sp>
+        <p:nvSpPr>
+          <p:cNvPr id="13" name="Rounded Rectangle 12"/>
+          <p:cNvSpPr/>
+          <p:nvPr/>
+        </p:nvSpPr>
+        <p:spPr>
+          <a:xfrm>
+            <a:off x="457200" y="3319272"/>
+            <a:ext cx="11277295" cy="950976"/>
+          </a:xfrm>
+          <a:prstGeom prst="roundRect">
+            <a:avLst>
+              <a:gd name="adj" fmla="val 12000"/>
+            </a:avLst>
+          </a:prstGeom>
+          <a:solidFill>
+            <a:srgbClr val="F2F2F2"/>
+          </a:solidFill>
+          <a:ln>
+            <a:noFill/>
+          </a:ln>
+        </p:spPr>
+        <p:style>
+          <a:lnRef idx="1">
+            <a:schemeClr val="accent1"/>
+          </a:lnRef>
+          <a:fillRef idx="3">
+            <a:schemeClr val="accent1"/>
+          </a:fillRef>
+          <a:effectRef idx="2">
+            <a:schemeClr val="accent1"/>
+          </a:effectRef>
+          <a:fontRef idx="minor">
+            <a:schemeClr val="lt1"/>
+          </a:fontRef>
+        </p:style>
+        <p:txBody>
+          <a:bodyPr rtlCol="0" anchor="ctr"/>
+          <a:lstStyle/>
+          <a:p>
+            <a:pPr algn="ctr"/>
+          </a:p>
+        </p:txBody>
+      </p:sp>
+      <p:sp>
+        <p:nvSpPr>
+          <p:cNvPr id="14" name="Rounded Rectangle 13"/>
+          <p:cNvSpPr/>
+          <p:nvPr/>
+        </p:nvSpPr>
+        <p:spPr>
+          <a:xfrm>
+            <a:off x="594360" y="3575304"/>
+            <a:ext cx="438912" cy="438912"/>
+          </a:xfrm>
+          <a:prstGeom prst="roundRect">
+            <a:avLst>
+              <a:gd name="adj" fmla="val 12000"/>
+            </a:avLst>
+          </a:prstGeom>
+          <a:solidFill>
+            <a:srgbClr val="095292"/>
+          </a:solidFill>
+          <a:ln>
+            <a:noFill/>
+          </a:ln>
+        </p:spPr>
+        <p:style>
+          <a:lnRef idx="1">
+            <a:schemeClr val="accent1"/>
+          </a:lnRef>
+          <a:fillRef idx="3">
+            <a:schemeClr val="accent1"/>
+          </a:fillRef>
+          <a:effectRef idx="2">
+            <a:schemeClr val="accent1"/>
+          </a:effectRef>
+          <a:fontRef idx="minor">
+            <a:schemeClr val="lt1"/>
+          </a:fontRef>
+        </p:style>
+        <p:txBody>
+          <a:bodyPr rtlCol="0" anchor="ctr"/>
+          <a:lstStyle/>
+          <a:p>
+            <a:pPr algn="ctr"/>
+          </a:p>
+        </p:txBody>
+      </p:sp>
+      <p:sp>
+        <p:nvSpPr>
+          <p:cNvPr id="15" name="TextBox 14"/>
+          <p:cNvSpPr txBox="1"/>
+          <p:nvPr/>
+        </p:nvSpPr>
+        <p:spPr>
+          <a:xfrm>
+            <a:off x="594360" y="3575304"/>
+            <a:ext cx="438912" cy="438912"/>
+          </a:xfrm>
+          <a:prstGeom prst="rect">
+            <a:avLst/>
+          </a:prstGeom>
+          <a:noFill/>
+        </p:spPr>
+        <p:txBody>
+          <a:bodyPr wrap="square" anchor="ctr"/>
+          <a:lstStyle/>
+          <a:p>
+            <a:pPr algn="ctr"/>
+            <a:r>
+              <a:rPr sz="1600" b="1" i="0">
+                <a:solidFill>
+                  <a:srgbClr val="FFFFFF"/>
+                </a:solidFill>
+                <a:latin typeface="Calibri"/>
+              </a:rPr>
+              <a:t>3</a:t>
+            </a:r>
+          </a:p>
+        </p:txBody>
+      </p:sp>
+      <p:sp>
+        <p:nvSpPr>
+          <p:cNvPr id="16" name="TextBox 15"/>
+          <p:cNvSpPr txBox="1"/>
+          <p:nvPr/>
+        </p:nvSpPr>
+        <p:spPr>
+          <a:xfrm>
+            <a:off x="1188720" y="3410712"/>
+            <a:ext cx="10271455" cy="786384"/>
+          </a:xfrm>
+          <a:prstGeom prst="rect">
+            <a:avLst/>
+          </a:prstGeom>
+          <a:noFill/>
+        </p:spPr>
+        <p:txBody>
+          <a:bodyPr wrap="square" anchor="ctr"/>
+          <a:lstStyle/>
+          <a:p>
+            <a:r>
+              <a:rPr sz="1400" b="1" i="0">
+                <a:solidFill>
+                  <a:srgbClr val="095292"/>
+                </a:solidFill>
+                <a:latin typeface="Calibri"/>
+              </a:rPr>
+              <a:t>Implemente cargar() de forma defensiva: si el archivo no existe devuelve una lista vacía, descarta la línea de encabezado, ignora las líneas que no tengan cinco campos e ignora las que traigan una edad no numérica, avisando por consola el número de la línea; compruébelo dañando a propósito una línea del archivo y volviendo a ejecutar.</a:t>
+            </a:r>
+          </a:p>
+        </p:txBody>
+      </p:sp>
+      <p:sp>
+        <p:nvSpPr>
+          <p:cNvPr id="17" name="Rounded Rectangle 16"/>
+          <p:cNvSpPr/>
+          <p:nvPr/>
+        </p:nvSpPr>
+        <p:spPr>
+          <a:xfrm>
+            <a:off x="457200" y="4361688"/>
+            <a:ext cx="11277295" cy="950976"/>
+          </a:xfrm>
+          <a:prstGeom prst="roundRect">
+            <a:avLst>
+              <a:gd name="adj" fmla="val 12000"/>
+            </a:avLst>
+          </a:prstGeom>
+          <a:solidFill>
+            <a:srgbClr val="E8F4FA"/>
+          </a:solidFill>
+          <a:ln>
+            <a:noFill/>
+          </a:ln>
+        </p:spPr>
+        <p:style>
+          <a:lnRef idx="1">
+            <a:schemeClr val="accent1"/>
+          </a:lnRef>
+          <a:fillRef idx="3">
+            <a:schemeClr val="accent1"/>
+          </a:fillRef>
+          <a:effectRef idx="2">
+            <a:schemeClr val="accent1"/>
+          </a:effectRef>
+          <a:fontRef idx="minor">
+            <a:schemeClr val="lt1"/>
+          </a:fontRef>
+        </p:style>
+        <p:txBody>
+          <a:bodyPr rtlCol="0" anchor="ctr"/>
+          <a:lstStyle/>
+          <a:p>
+            <a:pPr algn="ctr"/>
+          </a:p>
+        </p:txBody>
+      </p:sp>
+      <p:sp>
+        <p:nvSpPr>
+          <p:cNvPr id="18" name="Rounded Rectangle 17"/>
+          <p:cNvSpPr/>
+          <p:nvPr/>
+        </p:nvSpPr>
+        <p:spPr>
+          <a:xfrm>
+            <a:off x="594360" y="4617720"/>
+            <a:ext cx="438912" cy="438912"/>
+          </a:xfrm>
+          <a:prstGeom prst="roundRect">
+            <a:avLst>
+              <a:gd name="adj" fmla="val 12000"/>
+            </a:avLst>
+          </a:prstGeom>
+          <a:solidFill>
+            <a:srgbClr val="095292"/>
+          </a:solidFill>
+          <a:ln>
+            <a:noFill/>
+          </a:ln>
+        </p:spPr>
+        <p:style>
+          <a:lnRef idx="1">
+            <a:schemeClr val="accent1"/>
+          </a:lnRef>
+          <a:fillRef idx="3">
+            <a:schemeClr val="accent1"/>
+          </a:fillRef>
+          <a:effectRef idx="2">
+            <a:schemeClr val="accent1"/>
+          </a:effectRef>
+          <a:fontRef idx="minor">
+            <a:schemeClr val="lt1"/>
+          </a:fontRef>
+        </p:style>
+        <p:txBody>
+          <a:bodyPr rtlCol="0" anchor="ctr"/>
+          <a:lstStyle/>
+          <a:p>
+            <a:pPr algn="ctr"/>
+          </a:p>
+        </p:txBody>
+      </p:sp>
+      <p:sp>
+        <p:nvSpPr>
+          <p:cNvPr id="19" name="TextBox 18"/>
+          <p:cNvSpPr txBox="1"/>
+          <p:nvPr/>
+        </p:nvSpPr>
+        <p:spPr>
+          <a:xfrm>
+            <a:off x="594360" y="4617720"/>
+            <a:ext cx="438912" cy="438912"/>
+          </a:xfrm>
+          <a:prstGeom prst="rect">
+            <a:avLst/>
+          </a:prstGeom>
+          <a:noFill/>
+        </p:spPr>
+        <p:txBody>
+          <a:bodyPr wrap="square" anchor="ctr"/>
+          <a:lstStyle/>
+          <a:p>
+            <a:pPr algn="ctr"/>
+            <a:r>
+              <a:rPr sz="1600" b="1" i="0">
+                <a:solidFill>
+                  <a:srgbClr val="FFFFFF"/>
+                </a:solidFill>
+                <a:latin typeface="Calibri"/>
+              </a:rPr>
+              <a:t>4</a:t>
+            </a:r>
+          </a:p>
+        </p:txBody>
+      </p:sp>
+      <p:sp>
+        <p:nvSpPr>
+          <p:cNvPr id="20" name="TextBox 19"/>
+          <p:cNvSpPr txBox="1"/>
+          <p:nvPr/>
+        </p:nvSpPr>
+        <p:spPr>
+          <a:xfrm>
+            <a:off x="1188720" y="4453128"/>
+            <a:ext cx="10271455" cy="786384"/>
+          </a:xfrm>
+          <a:prstGeom prst="rect">
+            <a:avLst/>
+          </a:prstGeom>
+          <a:noFill/>
+        </p:spPr>
+        <p:txBody>
+          <a:bodyPr wrap="square" anchor="ctr"/>
+          <a:lstStyle/>
+          <a:p>
+            <a:r>
+              <a:rPr sz="1500" b="1" i="0">
+                <a:solidFill>
+                  <a:srgbClr val="095292"/>
+                </a:solidFill>
+                <a:latin typeface="Calibri"/>
+              </a:rPr>
+              <a:t>Conecte el repositorio al ciclo de vida de la aplicación: cargar() al arrancar antes de mostrar la ventana y guardar() al cerrar; cierre la aplicación, vuelva a abrirla y verifique que el conteo de mascotas en la tabla es el mismo que había antes de cerrar.</a:t>
+            </a:r>
+          </a:p>
+        </p:txBody>
+      </p:sp>
+      <p:sp>
+        <p:nvSpPr>
+          <p:cNvPr id="21" name="Rounded Rectangle 20"/>
+          <p:cNvSpPr/>
+          <p:nvPr/>
+        </p:nvSpPr>
+        <p:spPr>
+          <a:xfrm>
+            <a:off x="457200" y="5404104"/>
+            <a:ext cx="11277295" cy="950976"/>
+          </a:xfrm>
+          <a:prstGeom prst="roundRect">
+            <a:avLst>
+              <a:gd name="adj" fmla="val 12000"/>
+            </a:avLst>
+          </a:prstGeom>
+          <a:solidFill>
+            <a:srgbClr val="F2F2F2"/>
+          </a:solidFill>
+          <a:ln>
+            <a:noFill/>
+          </a:ln>
+        </p:spPr>
+        <p:style>
+          <a:lnRef idx="1">
+            <a:schemeClr val="accent1"/>
+          </a:lnRef>
+          <a:fillRef idx="3">
+            <a:schemeClr val="accent1"/>
+          </a:fillRef>
+          <a:effectRef idx="2">
+            <a:schemeClr val="accent1"/>
+          </a:effectRef>
+          <a:fontRef idx="minor">
+            <a:schemeClr val="lt1"/>
+          </a:fontRef>
+        </p:style>
+        <p:txBody>
+          <a:bodyPr rtlCol="0" anchor="ctr"/>
+          <a:lstStyle/>
+          <a:p>
+            <a:pPr algn="ctr"/>
+          </a:p>
+        </p:txBody>
+      </p:sp>
+      <p:sp>
+        <p:nvSpPr>
+          <p:cNvPr id="22" name="Rounded Rectangle 21"/>
+          <p:cNvSpPr/>
+          <p:nvPr/>
+        </p:nvSpPr>
+        <p:spPr>
+          <a:xfrm>
+            <a:off x="594360" y="5660136"/>
+            <a:ext cx="438912" cy="438912"/>
+          </a:xfrm>
+          <a:prstGeom prst="roundRect">
+            <a:avLst>
+              <a:gd name="adj" fmla="val 12000"/>
+            </a:avLst>
+          </a:prstGeom>
+          <a:solidFill>
+            <a:srgbClr val="095292"/>
+          </a:solidFill>
+          <a:ln>
+            <a:noFill/>
+          </a:ln>
+        </p:spPr>
+        <p:style>
+          <a:lnRef idx="1">
+            <a:schemeClr val="accent1"/>
+          </a:lnRef>
+          <a:fillRef idx="3">
+            <a:schemeClr val="accent1"/>
+          </a:fillRef>
+          <a:effectRef idx="2">
+            <a:schemeClr val="accent1"/>
+          </a:effectRef>
+          <a:fontRef idx="minor">
+            <a:schemeClr val="lt1"/>
+          </a:fontRef>
+        </p:style>
+        <p:txBody>
+          <a:bodyPr rtlCol="0" anchor="ctr"/>
+          <a:lstStyle/>
+          <a:p>
+            <a:pPr algn="ctr"/>
+          </a:p>
+        </p:txBody>
+      </p:sp>
+      <p:sp>
+        <p:nvSpPr>
+          <p:cNvPr id="23" name="TextBox 22"/>
+          <p:cNvSpPr txBox="1"/>
+          <p:nvPr/>
+        </p:nvSpPr>
+        <p:spPr>
+          <a:xfrm>
+            <a:off x="594360" y="5660136"/>
+            <a:ext cx="438912" cy="438912"/>
+          </a:xfrm>
+          <a:prstGeom prst="rect">
+            <a:avLst/>
+          </a:prstGeom>
+          <a:noFill/>
+        </p:spPr>
+        <p:txBody>
+          <a:bodyPr wrap="square" anchor="ctr"/>
+          <a:lstStyle/>
+          <a:p>
+            <a:pPr algn="ctr"/>
+            <a:r>
+              <a:rPr sz="1600" b="1" i="0">
+                <a:solidFill>
+                  <a:srgbClr val="FFFFFF"/>
+                </a:solidFill>
+                <a:latin typeface="Calibri"/>
+              </a:rPr>
+              <a:t>5</a:t>
+            </a:r>
+          </a:p>
+        </p:txBody>
+      </p:sp>
+      <p:sp>
+        <p:nvSpPr>
+          <p:cNvPr id="24" name="TextBox 23"/>
+          <p:cNvSpPr txBox="1"/>
+          <p:nvPr/>
+        </p:nvSpPr>
+        <p:spPr>
+          <a:xfrm>
+            <a:off x="1188720" y="5495544"/>
+            <a:ext cx="10271455" cy="786384"/>
+          </a:xfrm>
+          <a:prstGeom prst="rect">
+            <a:avLst/>
+          </a:prstGeom>
+          <a:noFill/>
+        </p:spPr>
+        <p:txBody>
+          <a:bodyPr wrap="square" anchor="ctr"/>
+          <a:lstStyle/>
+          <a:p>
+            <a:r>
+              <a:rPr sz="1400" b="1" i="0">
+                <a:solidFill>
+                  <a:srgbClr val="095292"/>
+                </a:solidFill>
+                <a:latin typeface="Calibri"/>
+              </a:rPr>
+              <a:t>Haga una revisión asistida por IA de su método guardar(): pídale a la herramienta que señale problemas, aplique como máximo dos mejoras que usted pueda explicar en voz alta, rechace por escrito al menos una sugerencia y registre todo en REFACTOR.md con el formato 'sugerencia / la acepté o no / por qué'; vuelva a correr el flujo completo y confirme que el comportamiento es idéntico.</a:t>
+            </a:r>
+          </a:p>
+        </p:txBody>
+      </p:sp>
+      <p:sp>
+        <p:nvSpPr>
+          <p:cNvPr id="25" name="TextBox 24"/>
+          <p:cNvSpPr txBox="1"/>
+          <p:nvPr/>
+        </p:nvSpPr>
+        <p:spPr>
+          <a:xfrm>
+            <a:off x="11185855" y="6473952"/>
+            <a:ext cx="640080" cy="274320"/>
+          </a:xfrm>
+          <a:prstGeom prst="rect">
+            <a:avLst/>
+          </a:prstGeom>
+          <a:noFill/>
+        </p:spPr>
+        <p:txBody>
+          <a:bodyPr wrap="square">
+            <a:spAutoFit/>
+          </a:bodyPr>
+          <a:lstStyle/>
+          <a:p>
+            <a:pPr algn="r"/>
+            <a:r>
+              <a:rPr sz="1100" b="0" i="0">
+                <a:solidFill>
+                  <a:srgbClr val="666666"/>
+                </a:solidFill>
+                <a:latin typeface="Calibri"/>
+              </a:rPr>
+              <a:t>18</a:t>
+            </a:r>
+          </a:p>
+        </p:txBody>
+      </p:sp>
+    </p:spTree>
+  </p:cSld>
+  <p:clrMapOvr>
+    <a:masterClrMapping/>
+  </p:clrMapOvr>
+</p:sld>
+</file>
+
+<file path=ppt/slides/slide19.xml><?xml version="1.0" encoding="utf-8"?>
+<p:sld xmlns:a="http://schemas.openxmlformats.org/drawingml/2006/main" xmlns:p="http://schemas.openxmlformats.org/presentationml/2006/main" xmlns:r="http://schemas.openxmlformats.org/officeDocument/2006/relationships">
+  <p:cSld>
+    <p:bg>
+      <p:bgPr>
+        <a:solidFill>
+          <a:srgbClr val="FFFFFF"/>
+        </a:solidFill>
+        <a:effectLst/>
+      </p:bgPr>
+    </p:bg>
+    <p:spTree>
+      <p:nvGrpSpPr>
+        <p:cNvPr id="1" name=""/>
+        <p:cNvGrpSpPr/>
+        <p:nvPr/>
+      </p:nvGrpSpPr>
+      <p:grpSpPr/>
+      <p:sp>
+        <p:nvSpPr>
+          <p:cNvPr id="2" name="Rectangle 1"/>
+          <p:cNvSpPr/>
+          <p:nvPr/>
+        </p:nvSpPr>
+        <p:spPr>
+          <a:xfrm>
+            <a:off x="0" y="0"/>
+            <a:ext cx="12191695" cy="960120"/>
+          </a:xfrm>
+          <a:prstGeom prst="rect">
+            <a:avLst/>
+          </a:prstGeom>
+          <a:solidFill>
+            <a:srgbClr val="095292"/>
+          </a:solidFill>
+          <a:ln>
+            <a:noFill/>
+          </a:ln>
+        </p:spPr>
+        <p:style>
+          <a:lnRef idx="1">
+            <a:schemeClr val="accent1"/>
+          </a:lnRef>
+          <a:fillRef idx="3">
+            <a:schemeClr val="accent1"/>
+          </a:fillRef>
+          <a:effectRef idx="2">
+            <a:schemeClr val="accent1"/>
+          </a:effectRef>
+          <a:fontRef idx="minor">
+            <a:schemeClr val="lt1"/>
+          </a:fontRef>
+        </p:style>
+        <p:txBody>
+          <a:bodyPr rtlCol="0" anchor="ctr"/>
+          <a:lstStyle/>
+          <a:p>
+            <a:pPr algn="ctr"/>
+          </a:p>
+        </p:txBody>
+      </p:sp>
+      <p:sp>
+        <p:nvSpPr>
+          <p:cNvPr id="3" name="Rectangle 2"/>
+          <p:cNvSpPr/>
+          <p:nvPr/>
+        </p:nvSpPr>
+        <p:spPr>
+          <a:xfrm>
+            <a:off x="0" y="960120"/>
+            <a:ext cx="12191695" cy="41148"/>
+          </a:xfrm>
+          <a:prstGeom prst="rect">
+            <a:avLst/>
+          </a:prstGeom>
+          <a:solidFill>
+            <a:srgbClr val="FFD000"/>
+          </a:solidFill>
+          <a:ln>
+            <a:noFill/>
+          </a:ln>
+        </p:spPr>
+        <p:style>
+          <a:lnRef idx="1">
+            <a:schemeClr val="accent1"/>
+          </a:lnRef>
+          <a:fillRef idx="3">
+            <a:schemeClr val="accent1"/>
+          </a:fillRef>
+          <a:effectRef idx="2">
+            <a:schemeClr val="accent1"/>
+          </a:effectRef>
+          <a:fontRef idx="minor">
+            <a:schemeClr val="lt1"/>
+          </a:fontRef>
+        </p:style>
+        <p:txBody>
+          <a:bodyPr rtlCol="0" anchor="ctr"/>
+          <a:lstStyle/>
+          <a:p>
+            <a:pPr algn="ctr"/>
+          </a:p>
+        </p:txBody>
+      </p:sp>
+      <p:sp>
+        <p:nvSpPr>
+          <p:cNvPr id="4" name="TextBox 3"/>
+          <p:cNvSpPr txBox="1"/>
+          <p:nvPr/>
+        </p:nvSpPr>
+        <p:spPr>
+          <a:xfrm>
+            <a:off x="457200" y="164592"/>
+            <a:ext cx="11277295" cy="502920"/>
+          </a:xfrm>
+          <a:prstGeom prst="rect">
+            <a:avLst/>
+          </a:prstGeom>
+          <a:noFill/>
+        </p:spPr>
+        <p:txBody>
+          <a:bodyPr wrap="square">
+            <a:spAutoFit/>
+          </a:bodyPr>
+          <a:lstStyle/>
+          <a:p>
+            <a:r>
+              <a:rPr sz="2600" b="1" i="0">
+                <a:solidFill>
+                  <a:srgbClr val="FFFFFF"/>
+                </a:solidFill>
+                <a:latin typeface="Calibri"/>
+              </a:rPr>
+              <a:t>Antes de entregar — autochequeo</a:t>
+            </a:r>
+          </a:p>
+        </p:txBody>
+      </p:sp>
+      <p:sp>
+        <p:nvSpPr>
+          <p:cNvPr id="5" name="Rounded Rectangle 4"/>
+          <p:cNvSpPr/>
+          <p:nvPr/>
+        </p:nvSpPr>
+        <p:spPr>
+          <a:xfrm>
+            <a:off x="457200" y="1261872"/>
+            <a:ext cx="11277295" cy="566928"/>
+          </a:xfrm>
+          <a:prstGeom prst="roundRect">
+            <a:avLst>
+              <a:gd name="adj" fmla="val 12000"/>
+            </a:avLst>
+          </a:prstGeom>
+          <a:solidFill>
+            <a:srgbClr val="F2F2F2"/>
+          </a:solidFill>
+          <a:ln>
+            <a:noFill/>
+          </a:ln>
+        </p:spPr>
+        <p:style>
+          <a:lnRef idx="1">
+            <a:schemeClr val="accent1"/>
+          </a:lnRef>
+          <a:fillRef idx="3">
+            <a:schemeClr val="accent1"/>
+          </a:fillRef>
+          <a:effectRef idx="2">
+            <a:schemeClr val="accent1"/>
+          </a:effectRef>
+          <a:fontRef idx="minor">
+            <a:schemeClr val="lt1"/>
+          </a:fontRef>
+        </p:style>
+        <p:txBody>
+          <a:bodyPr rtlCol="0" anchor="ctr"/>
+          <a:lstStyle/>
+          <a:p>
+            <a:pPr algn="ctr"/>
+          </a:p>
+        </p:txBody>
+      </p:sp>
+      <p:sp>
+        <p:nvSpPr>
+          <p:cNvPr id="6" name="Rectangle 5"/>
+          <p:cNvSpPr/>
+          <p:nvPr/>
+        </p:nvSpPr>
+        <p:spPr>
+          <a:xfrm>
+            <a:off x="640080" y="1408175"/>
+            <a:ext cx="274320" cy="274320"/>
+          </a:xfrm>
+          <a:prstGeom prst="rect">
+            <a:avLst/>
+          </a:prstGeom>
+          <a:solidFill>
+            <a:srgbClr val="FFFFFF"/>
+          </a:solidFill>
+          <a:ln>
+            <a:solidFill>
+              <a:srgbClr val="333333"/>
+            </a:solidFill>
+          </a:ln>
+        </p:spPr>
+        <p:style>
+          <a:lnRef idx="1">
+            <a:schemeClr val="accent1"/>
+          </a:lnRef>
+          <a:fillRef idx="3">
+            <a:schemeClr val="accent1"/>
+          </a:fillRef>
+          <a:effectRef idx="2">
+            <a:schemeClr val="accent1"/>
+          </a:effectRef>
+          <a:fontRef idx="minor">
+            <a:schemeClr val="lt1"/>
+          </a:fontRef>
+        </p:style>
+        <p:txBody>
+          <a:bodyPr rtlCol="0" anchor="ctr"/>
+          <a:lstStyle/>
+          <a:p>
+            <a:pPr algn="ctr"/>
+          </a:p>
+        </p:txBody>
+      </p:sp>
+      <p:sp>
+        <p:nvSpPr>
+          <p:cNvPr id="7" name="Rectangle 6"/>
+          <p:cNvSpPr/>
+          <p:nvPr/>
+        </p:nvSpPr>
+        <p:spPr>
+          <a:xfrm>
+            <a:off x="640080" y="1408175"/>
+            <a:ext cx="73152" cy="274320"/>
           </a:xfrm>
           <a:prstGeom prst="rect">
             <a:avLst/>
@@ -5225,40 +7186,16 @@
           </a:p>
         </p:txBody>
       </p:sp>
-      <p:pic>
-        <p:nvPicPr>
-          <p:cNvPr id="3" name="Picture 2" descr="logo_uniajc_color.png"/>
-          <p:cNvPicPr>
-            <a:picLocks noChangeAspect="1"/>
-          </p:cNvPicPr>
-          <p:nvPr/>
-        </p:nvPicPr>
-        <p:blipFill>
-          <a:blip r:embed="rId2"/>
-          <a:stretch>
-            <a:fillRect/>
-          </a:stretch>
-        </p:blipFill>
-        <p:spPr>
-          <a:xfrm>
-            <a:off x="10271455" y="5998464"/>
-            <a:ext cx="1463040" cy="643233"/>
-          </a:xfrm>
-          <a:prstGeom prst="rect">
-            <a:avLst/>
-          </a:prstGeom>
-        </p:spPr>
-      </p:pic>
-      <p:sp>
-        <p:nvSpPr>
-          <p:cNvPr id="4" name="TextBox 3"/>
+      <p:sp>
+        <p:nvSpPr>
+          <p:cNvPr id="8" name="TextBox 7"/>
           <p:cNvSpPr txBox="1"/>
           <p:nvPr/>
         </p:nvSpPr>
         <p:spPr>
           <a:xfrm>
-            <a:off x="457200" y="1737360"/>
-            <a:ext cx="11277295" cy="1097280"/>
+            <a:off x="1097280" y="1353312"/>
+            <a:ext cx="10362895" cy="402336"/>
           </a:xfrm>
           <a:prstGeom prst="rect">
             <a:avLst/>
@@ -5269,29 +7206,358 @@
           <a:bodyPr wrap="square" anchor="ctr"/>
           <a:lstStyle/>
           <a:p>
+            <a:r>
+              <a:rPr sz="1500" b="0" i="0">
+                <a:solidFill>
+                  <a:srgbClr val="333333"/>
+                </a:solidFill>
+                <a:latin typeface="Calibri"/>
+              </a:rPr>
+              <a:t>Si el archivo aparece con 0 bytes aunque el programa dijo que guardó, ¿quién debía vaciar el buffer y cuándo se supone que eso ocurre?</a:t>
+            </a:r>
+          </a:p>
+        </p:txBody>
+      </p:sp>
+      <p:sp>
+        <p:nvSpPr>
+          <p:cNvPr id="9" name="Rounded Rectangle 8"/>
+          <p:cNvSpPr/>
+          <p:nvPr/>
+        </p:nvSpPr>
+        <p:spPr>
+          <a:xfrm>
+            <a:off x="457200" y="1938528"/>
+            <a:ext cx="11277295" cy="566928"/>
+          </a:xfrm>
+          <a:prstGeom prst="roundRect">
+            <a:avLst>
+              <a:gd name="adj" fmla="val 12000"/>
+            </a:avLst>
+          </a:prstGeom>
+          <a:solidFill>
+            <a:srgbClr val="F2F2F2"/>
+          </a:solidFill>
+          <a:ln>
+            <a:noFill/>
+          </a:ln>
+        </p:spPr>
+        <p:style>
+          <a:lnRef idx="1">
+            <a:schemeClr val="accent1"/>
+          </a:lnRef>
+          <a:fillRef idx="3">
+            <a:schemeClr val="accent1"/>
+          </a:fillRef>
+          <a:effectRef idx="2">
+            <a:schemeClr val="accent1"/>
+          </a:effectRef>
+          <a:fontRef idx="minor">
+            <a:schemeClr val="lt1"/>
+          </a:fontRef>
+        </p:style>
+        <p:txBody>
+          <a:bodyPr rtlCol="0" anchor="ctr"/>
+          <a:lstStyle/>
+          <a:p>
             <a:pPr algn="ctr"/>
-            <a:r>
-              <a:rPr sz="3400" b="1" i="0">
-                <a:solidFill>
-                  <a:srgbClr val="095292"/>
-                </a:solidFill>
-                <a:latin typeface="Calibri"/>
-              </a:rPr>
-              <a:t>Clase 9 · VetCare avanza</a:t>
-            </a:r>
-          </a:p>
-        </p:txBody>
-      </p:sp>
-      <p:sp>
-        <p:nvSpPr>
-          <p:cNvPr id="5" name="TextBox 4"/>
+          </a:p>
+        </p:txBody>
+      </p:sp>
+      <p:sp>
+        <p:nvSpPr>
+          <p:cNvPr id="10" name="Rectangle 9"/>
+          <p:cNvSpPr/>
+          <p:nvPr/>
+        </p:nvSpPr>
+        <p:spPr>
+          <a:xfrm>
+            <a:off x="640080" y="2084832"/>
+            <a:ext cx="274320" cy="274320"/>
+          </a:xfrm>
+          <a:prstGeom prst="rect">
+            <a:avLst/>
+          </a:prstGeom>
+          <a:solidFill>
+            <a:srgbClr val="FFFFFF"/>
+          </a:solidFill>
+          <a:ln>
+            <a:solidFill>
+              <a:srgbClr val="333333"/>
+            </a:solidFill>
+          </a:ln>
+        </p:spPr>
+        <p:style>
+          <a:lnRef idx="1">
+            <a:schemeClr val="accent1"/>
+          </a:lnRef>
+          <a:fillRef idx="3">
+            <a:schemeClr val="accent1"/>
+          </a:fillRef>
+          <a:effectRef idx="2">
+            <a:schemeClr val="accent1"/>
+          </a:effectRef>
+          <a:fontRef idx="minor">
+            <a:schemeClr val="lt1"/>
+          </a:fontRef>
+        </p:style>
+        <p:txBody>
+          <a:bodyPr rtlCol="0" anchor="ctr"/>
+          <a:lstStyle/>
+          <a:p>
+            <a:pPr algn="ctr"/>
+          </a:p>
+        </p:txBody>
+      </p:sp>
+      <p:sp>
+        <p:nvSpPr>
+          <p:cNvPr id="11" name="Rectangle 10"/>
+          <p:cNvSpPr/>
+          <p:nvPr/>
+        </p:nvSpPr>
+        <p:spPr>
+          <a:xfrm>
+            <a:off x="640080" y="2084832"/>
+            <a:ext cx="73152" cy="274320"/>
+          </a:xfrm>
+          <a:prstGeom prst="rect">
+            <a:avLst/>
+          </a:prstGeom>
+          <a:solidFill>
+            <a:srgbClr val="269CCB"/>
+          </a:solidFill>
+          <a:ln>
+            <a:noFill/>
+          </a:ln>
+        </p:spPr>
+        <p:style>
+          <a:lnRef idx="1">
+            <a:schemeClr val="accent1"/>
+          </a:lnRef>
+          <a:fillRef idx="3">
+            <a:schemeClr val="accent1"/>
+          </a:fillRef>
+          <a:effectRef idx="2">
+            <a:schemeClr val="accent1"/>
+          </a:effectRef>
+          <a:fontRef idx="minor">
+            <a:schemeClr val="lt1"/>
+          </a:fontRef>
+        </p:style>
+        <p:txBody>
+          <a:bodyPr rtlCol="0" anchor="ctr"/>
+          <a:lstStyle/>
+          <a:p>
+            <a:pPr algn="ctr"/>
+          </a:p>
+        </p:txBody>
+      </p:sp>
+      <p:sp>
+        <p:nvSpPr>
+          <p:cNvPr id="12" name="TextBox 11"/>
           <p:cNvSpPr txBox="1"/>
           <p:nvPr/>
         </p:nvSpPr>
         <p:spPr>
           <a:xfrm>
-            <a:off x="457200" y="3017520"/>
-            <a:ext cx="11277295" cy="1645920"/>
+            <a:off x="1097280" y="2029968"/>
+            <a:ext cx="10362895" cy="402336"/>
+          </a:xfrm>
+          <a:prstGeom prst="rect">
+            <a:avLst/>
+          </a:prstGeom>
+          <a:noFill/>
+        </p:spPr>
+        <p:txBody>
+          <a:bodyPr wrap="square" anchor="ctr"/>
+          <a:lstStyle/>
+          <a:p>
+            <a:r>
+              <a:rPr sz="1500" b="0" i="0">
+                <a:solidFill>
+                  <a:srgbClr val="333333"/>
+                </a:solidFill>
+                <a:latin typeface="Calibri"/>
+              </a:rPr>
+              <a:t>Si al reabrir la aplicación aparecen cero mascotas pero el .csv tiene contenido, ¿está descartando el encabezado o lo está intentando convertir en una mascota?</a:t>
+            </a:r>
+          </a:p>
+        </p:txBody>
+      </p:sp>
+      <p:sp>
+        <p:nvSpPr>
+          <p:cNvPr id="13" name="Rounded Rectangle 12"/>
+          <p:cNvSpPr/>
+          <p:nvPr/>
+        </p:nvSpPr>
+        <p:spPr>
+          <a:xfrm>
+            <a:off x="457200" y="2615184"/>
+            <a:ext cx="11277295" cy="566928"/>
+          </a:xfrm>
+          <a:prstGeom prst="roundRect">
+            <a:avLst>
+              <a:gd name="adj" fmla="val 12000"/>
+            </a:avLst>
+          </a:prstGeom>
+          <a:solidFill>
+            <a:srgbClr val="F2F2F2"/>
+          </a:solidFill>
+          <a:ln>
+            <a:noFill/>
+          </a:ln>
+        </p:spPr>
+        <p:style>
+          <a:lnRef idx="1">
+            <a:schemeClr val="accent1"/>
+          </a:lnRef>
+          <a:fillRef idx="3">
+            <a:schemeClr val="accent1"/>
+          </a:fillRef>
+          <a:effectRef idx="2">
+            <a:schemeClr val="accent1"/>
+          </a:effectRef>
+          <a:fontRef idx="minor">
+            <a:schemeClr val="lt1"/>
+          </a:fontRef>
+        </p:style>
+        <p:txBody>
+          <a:bodyPr rtlCol="0" anchor="ctr"/>
+          <a:lstStyle/>
+          <a:p>
+            <a:pPr algn="ctr"/>
+          </a:p>
+        </p:txBody>
+      </p:sp>
+      <p:sp>
+        <p:nvSpPr>
+          <p:cNvPr id="14" name="Rectangle 13"/>
+          <p:cNvSpPr/>
+          <p:nvPr/>
+        </p:nvSpPr>
+        <p:spPr>
+          <a:xfrm>
+            <a:off x="640080" y="2761488"/>
+            <a:ext cx="274320" cy="274320"/>
+          </a:xfrm>
+          <a:prstGeom prst="rect">
+            <a:avLst/>
+          </a:prstGeom>
+          <a:solidFill>
+            <a:srgbClr val="FFFFFF"/>
+          </a:solidFill>
+          <a:ln>
+            <a:solidFill>
+              <a:srgbClr val="333333"/>
+            </a:solidFill>
+          </a:ln>
+        </p:spPr>
+        <p:style>
+          <a:lnRef idx="1">
+            <a:schemeClr val="accent1"/>
+          </a:lnRef>
+          <a:fillRef idx="3">
+            <a:schemeClr val="accent1"/>
+          </a:fillRef>
+          <a:effectRef idx="2">
+            <a:schemeClr val="accent1"/>
+          </a:effectRef>
+          <a:fontRef idx="minor">
+            <a:schemeClr val="lt1"/>
+          </a:fontRef>
+        </p:style>
+        <p:txBody>
+          <a:bodyPr rtlCol="0" anchor="ctr"/>
+          <a:lstStyle/>
+          <a:p>
+            <a:pPr algn="ctr"/>
+          </a:p>
+        </p:txBody>
+      </p:sp>
+      <p:sp>
+        <p:nvSpPr>
+          <p:cNvPr id="15" name="Rectangle 14"/>
+          <p:cNvSpPr/>
+          <p:nvPr/>
+        </p:nvSpPr>
+        <p:spPr>
+          <a:xfrm>
+            <a:off x="640080" y="2761488"/>
+            <a:ext cx="73152" cy="274320"/>
+          </a:xfrm>
+          <a:prstGeom prst="rect">
+            <a:avLst/>
+          </a:prstGeom>
+          <a:solidFill>
+            <a:srgbClr val="269CCB"/>
+          </a:solidFill>
+          <a:ln>
+            <a:noFill/>
+          </a:ln>
+        </p:spPr>
+        <p:style>
+          <a:lnRef idx="1">
+            <a:schemeClr val="accent1"/>
+          </a:lnRef>
+          <a:fillRef idx="3">
+            <a:schemeClr val="accent1"/>
+          </a:fillRef>
+          <a:effectRef idx="2">
+            <a:schemeClr val="accent1"/>
+          </a:effectRef>
+          <a:fontRef idx="minor">
+            <a:schemeClr val="lt1"/>
+          </a:fontRef>
+        </p:style>
+        <p:txBody>
+          <a:bodyPr rtlCol="0" anchor="ctr"/>
+          <a:lstStyle/>
+          <a:p>
+            <a:pPr algn="ctr"/>
+          </a:p>
+        </p:txBody>
+      </p:sp>
+      <p:sp>
+        <p:nvSpPr>
+          <p:cNvPr id="16" name="TextBox 15"/>
+          <p:cNvSpPr txBox="1"/>
+          <p:nvPr/>
+        </p:nvSpPr>
+        <p:spPr>
+          <a:xfrm>
+            <a:off x="1097280" y="2706624"/>
+            <a:ext cx="10362895" cy="402336"/>
+          </a:xfrm>
+          <a:prstGeom prst="rect">
+            <a:avLst/>
+          </a:prstGeom>
+          <a:noFill/>
+        </p:spPr>
+        <p:txBody>
+          <a:bodyPr wrap="square" anchor="ctr"/>
+          <a:lstStyle/>
+          <a:p>
+            <a:r>
+              <a:rPr sz="1500" b="0" i="0">
+                <a:solidFill>
+                  <a:srgbClr val="333333"/>
+                </a:solidFill>
+                <a:latin typeface="Calibri"/>
+              </a:rPr>
+              <a:t>De las sugerencias que le dio la IA, ¿cuál cambia únicamente la forma del código y cuál cambia lo que el programa hace? ¿Puede explicar la diferencia sin volver a preguntarle a la IA?</a:t>
+            </a:r>
+          </a:p>
+        </p:txBody>
+      </p:sp>
+      <p:sp>
+        <p:nvSpPr>
+          <p:cNvPr id="17" name="TextBox 16"/>
+          <p:cNvSpPr txBox="1"/>
+          <p:nvPr/>
+        </p:nvSpPr>
+        <p:spPr>
+          <a:xfrm>
+            <a:off x="11185855" y="6473952"/>
+            <a:ext cx="640080" cy="274320"/>
           </a:xfrm>
           <a:prstGeom prst="rect">
             <a:avLst/>
@@ -5304,86 +7570,15 @@
           </a:bodyPr>
           <a:lstStyle/>
           <a:p>
-            <a:pPr algn="ctr">
-              <a:spcAft>
-                <a:spcPts val="600"/>
-              </a:spcAft>
-            </a:pPr>
-            <a:r>
-              <a:rPr sz="1600" b="0" i="0">
-                <a:solidFill>
-                  <a:srgbClr val="333333"/>
-                </a:solidFill>
-                <a:latin typeface="Calibri"/>
-              </a:rPr>
-              <a:t>VetCare guarda la lista de mascotas en mascotas.csv al cerrar y la vuelve a cargar al abrir.</a:t>
-            </a:r>
-          </a:p>
-          <a:p>
-            <a:pPr algn="ctr">
-              <a:spcAft>
-                <a:spcPts val="600"/>
-              </a:spcAft>
-            </a:pPr>
-            <a:r>
-              <a:rPr sz="1600" b="0" i="0">
-                <a:solidFill>
-                  <a:srgbClr val="333333"/>
-                </a:solidFill>
-                <a:latin typeface="Calibri"/>
-              </a:rPr>
-              <a:t>Entregable: La clase RepositorioMascotasCSV con guardar() y cargar() funcionando, el archivo mascotas.csv generado por la propia aplicación y la bitácora REFACTOR.md, subidos a la plataforma del curso.</a:t>
-            </a:r>
-          </a:p>
-          <a:p>
-            <a:pPr algn="ctr">
-              <a:spcAft>
-                <a:spcPts val="600"/>
-              </a:spcAft>
-            </a:pPr>
-            <a:r>
-              <a:rPr sz="1600" b="0" i="0">
-                <a:solidFill>
-                  <a:srgbClr val="333333"/>
-                </a:solidFill>
-                <a:latin typeface="Calibri"/>
-              </a:rPr>
-              <a:t>Siguiente clase: continuamos el hilo del PI</a:t>
-            </a:r>
-          </a:p>
-        </p:txBody>
-      </p:sp>
-      <p:sp>
-        <p:nvSpPr>
-          <p:cNvPr id="6" name="TextBox 5"/>
-          <p:cNvSpPr txBox="1"/>
-          <p:nvPr/>
-        </p:nvSpPr>
-        <p:spPr>
-          <a:xfrm>
-            <a:off x="457200" y="4754880"/>
-            <a:ext cx="11277295" cy="640080"/>
-          </a:xfrm>
-          <a:prstGeom prst="rect">
-            <a:avLst/>
-          </a:prstGeom>
-          <a:noFill/>
-        </p:spPr>
-        <p:txBody>
-          <a:bodyPr wrap="square">
-            <a:spAutoFit/>
-          </a:bodyPr>
-          <a:lstStyle/>
-          <a:p>
-            <a:pPr algn="ctr"/>
-            <a:r>
-              <a:rPr sz="2000" b="1" i="0">
-                <a:solidFill>
-                  <a:srgbClr val="269CCB"/>
-                </a:solidFill>
-                <a:latin typeface="Calibri"/>
-              </a:rPr>
-              <a:t>Teoria al servicio del proyecto</a:t>
+            <a:pPr algn="r"/>
+            <a:r>
+              <a:rPr sz="1100" b="0" i="0">
+                <a:solidFill>
+                  <a:srgbClr val="666666"/>
+                </a:solidFill>
+                <a:latin typeface="Calibri"/>
+              </a:rPr>
+              <a:t>19</a:t>
             </a:r>
           </a:p>
         </p:txBody>
@@ -5727,6 +7922,1241 @@
 </p:sld>
 </file>
 
+<file path=ppt/slides/slide20.xml><?xml version="1.0" encoding="utf-8"?>
+<p:sld xmlns:a="http://schemas.openxmlformats.org/drawingml/2006/main" xmlns:p="http://schemas.openxmlformats.org/presentationml/2006/main" xmlns:r="http://schemas.openxmlformats.org/officeDocument/2006/relationships">
+  <p:cSld>
+    <p:bg>
+      <p:bgPr>
+        <a:solidFill>
+          <a:srgbClr val="FFFFFF"/>
+        </a:solidFill>
+        <a:effectLst/>
+      </p:bgPr>
+    </p:bg>
+    <p:spTree>
+      <p:nvGrpSpPr>
+        <p:cNvPr id="1" name=""/>
+        <p:cNvGrpSpPr/>
+        <p:nvPr/>
+      </p:nvGrpSpPr>
+      <p:grpSpPr/>
+      <p:sp>
+        <p:nvSpPr>
+          <p:cNvPr id="2" name="Rectangle 1"/>
+          <p:cNvSpPr/>
+          <p:nvPr/>
+        </p:nvSpPr>
+        <p:spPr>
+          <a:xfrm>
+            <a:off x="0" y="0"/>
+            <a:ext cx="12191695" cy="960120"/>
+          </a:xfrm>
+          <a:prstGeom prst="rect">
+            <a:avLst/>
+          </a:prstGeom>
+          <a:solidFill>
+            <a:srgbClr val="095292"/>
+          </a:solidFill>
+          <a:ln>
+            <a:noFill/>
+          </a:ln>
+        </p:spPr>
+        <p:style>
+          <a:lnRef idx="1">
+            <a:schemeClr val="accent1"/>
+          </a:lnRef>
+          <a:fillRef idx="3">
+            <a:schemeClr val="accent1"/>
+          </a:fillRef>
+          <a:effectRef idx="2">
+            <a:schemeClr val="accent1"/>
+          </a:effectRef>
+          <a:fontRef idx="minor">
+            <a:schemeClr val="lt1"/>
+          </a:fontRef>
+        </p:style>
+        <p:txBody>
+          <a:bodyPr rtlCol="0" anchor="ctr"/>
+          <a:lstStyle/>
+          <a:p>
+            <a:pPr algn="ctr"/>
+          </a:p>
+        </p:txBody>
+      </p:sp>
+      <p:sp>
+        <p:nvSpPr>
+          <p:cNvPr id="3" name="Rectangle 2"/>
+          <p:cNvSpPr/>
+          <p:nvPr/>
+        </p:nvSpPr>
+        <p:spPr>
+          <a:xfrm>
+            <a:off x="0" y="960120"/>
+            <a:ext cx="12191695" cy="41148"/>
+          </a:xfrm>
+          <a:prstGeom prst="rect">
+            <a:avLst/>
+          </a:prstGeom>
+          <a:solidFill>
+            <a:srgbClr val="FFD000"/>
+          </a:solidFill>
+          <a:ln>
+            <a:noFill/>
+          </a:ln>
+        </p:spPr>
+        <p:style>
+          <a:lnRef idx="1">
+            <a:schemeClr val="accent1"/>
+          </a:lnRef>
+          <a:fillRef idx="3">
+            <a:schemeClr val="accent1"/>
+          </a:fillRef>
+          <a:effectRef idx="2">
+            <a:schemeClr val="accent1"/>
+          </a:effectRef>
+          <a:fontRef idx="minor">
+            <a:schemeClr val="lt1"/>
+          </a:fontRef>
+        </p:style>
+        <p:txBody>
+          <a:bodyPr rtlCol="0" anchor="ctr"/>
+          <a:lstStyle/>
+          <a:p>
+            <a:pPr algn="ctr"/>
+          </a:p>
+        </p:txBody>
+      </p:sp>
+      <p:sp>
+        <p:nvSpPr>
+          <p:cNvPr id="4" name="TextBox 3"/>
+          <p:cNvSpPr txBox="1"/>
+          <p:nvPr/>
+        </p:nvSpPr>
+        <p:spPr>
+          <a:xfrm>
+            <a:off x="457200" y="164592"/>
+            <a:ext cx="11277295" cy="502920"/>
+          </a:xfrm>
+          <a:prstGeom prst="rect">
+            <a:avLst/>
+          </a:prstGeom>
+          <a:noFill/>
+        </p:spPr>
+        <p:txBody>
+          <a:bodyPr wrap="square">
+            <a:spAutoFit/>
+          </a:bodyPr>
+          <a:lstStyle/>
+          <a:p>
+            <a:r>
+              <a:rPr sz="2600" b="1" i="0">
+                <a:solidFill>
+                  <a:srgbClr val="FFFFFF"/>
+                </a:solidFill>
+                <a:latin typeface="Calibri"/>
+              </a:rPr>
+              <a:t>Criterios de exito / entregable</a:t>
+            </a:r>
+          </a:p>
+        </p:txBody>
+      </p:sp>
+      <p:sp>
+        <p:nvSpPr>
+          <p:cNvPr id="5" name="TextBox 4"/>
+          <p:cNvSpPr txBox="1"/>
+          <p:nvPr/>
+        </p:nvSpPr>
+        <p:spPr>
+          <a:xfrm>
+            <a:off x="457200" y="1170432"/>
+            <a:ext cx="11277295" cy="5230368"/>
+          </a:xfrm>
+          <a:prstGeom prst="rect">
+            <a:avLst/>
+          </a:prstGeom>
+          <a:noFill/>
+        </p:spPr>
+        <p:txBody>
+          <a:bodyPr wrap="square">
+            <a:spAutoFit/>
+          </a:bodyPr>
+          <a:lstStyle/>
+          <a:p>
+            <a:pPr>
+              <a:spcAft>
+                <a:spcPts val="800"/>
+              </a:spcAft>
+            </a:pPr>
+            <a:r>
+              <a:rPr sz="2000" b="0" i="0">
+                <a:solidFill>
+                  <a:srgbClr val="333333"/>
+                </a:solidFill>
+                <a:latin typeface="Calibri"/>
+              </a:rPr>
+              <a:t>–   </a:t>
+            </a:r>
+            <a:r>
+              <a:rPr sz="2000" b="1" i="0">
+                <a:solidFill>
+                  <a:srgbClr val="333333"/>
+                </a:solidFill>
+                <a:latin typeface="Calibri"/>
+              </a:rPr>
+              <a:t>Entregable:</a:t>
+            </a:r>
+            <a:r>
+              <a:rPr sz="2000" b="0" i="0">
+                <a:solidFill>
+                  <a:srgbClr val="333333"/>
+                </a:solidFill>
+                <a:latin typeface="Calibri"/>
+              </a:rPr>
+              <a:t> La clase RepositorioMascotasCSV con guardar() y cargar() funcionando, el archivo mascotas.csv generado por la propia aplicación y la bitácora REFACTOR.md, subidos a la plataforma del curso.</a:t>
+            </a:r>
+          </a:p>
+          <a:p>
+            <a:pPr>
+              <a:spcAft>
+                <a:spcPts val="800"/>
+              </a:spcAft>
+            </a:pPr>
+            <a:r>
+              <a:rPr sz="2000" b="0" i="0">
+                <a:solidFill>
+                  <a:srgbClr val="333333"/>
+                </a:solidFill>
+                <a:latin typeface="Calibri"/>
+              </a:rPr>
+              <a:t>–   </a:t>
+            </a:r>
+            <a:r>
+              <a:rPr sz="2000" b="1" i="0">
+                <a:solidFill>
+                  <a:srgbClr val="333333"/>
+                </a:solidFill>
+                <a:latin typeface="Calibri"/>
+              </a:rPr>
+              <a:t>Exito:</a:t>
+            </a:r>
+            <a:r>
+              <a:rPr sz="2000" b="0" i="0">
+                <a:solidFill>
+                  <a:srgbClr val="333333"/>
+                </a:solidFill>
+                <a:latin typeface="Calibri"/>
+              </a:rPr>
+              <a:t> Al cerrar la aplicación y volver a abrirla, la tabla muestra las mismas mascotas que había antes: el conteo coincide y los datos no cambiaron de columna.</a:t>
+            </a:r>
+          </a:p>
+          <a:p>
+            <a:pPr>
+              <a:spcAft>
+                <a:spcPts val="800"/>
+              </a:spcAft>
+            </a:pPr>
+            <a:r>
+              <a:rPr sz="2000" b="0" i="0">
+                <a:solidFill>
+                  <a:srgbClr val="333333"/>
+                </a:solidFill>
+                <a:latin typeface="Calibri"/>
+              </a:rPr>
+              <a:t>–   </a:t>
+            </a:r>
+            <a:r>
+              <a:rPr sz="2000" b="1" i="0">
+                <a:solidFill>
+                  <a:srgbClr val="333333"/>
+                </a:solidFill>
+                <a:latin typeface="Calibri"/>
+              </a:rPr>
+              <a:t>Exito:</a:t>
+            </a:r>
+            <a:r>
+              <a:rPr sz="2000" b="0" i="0">
+                <a:solidFill>
+                  <a:srgbClr val="333333"/>
+                </a:solidFill>
+                <a:latin typeface="Calibri"/>
+              </a:rPr>
+              <a:t> El archivo mascotas.csv tiene una línea de encabezado y una línea por mascota, todas con el mismo número de separadores y sin líneas en blanco intermedias.</a:t>
+            </a:r>
+          </a:p>
+          <a:p>
+            <a:pPr>
+              <a:spcAft>
+                <a:spcPts val="800"/>
+              </a:spcAft>
+            </a:pPr>
+            <a:r>
+              <a:rPr sz="2000" b="0" i="0">
+                <a:solidFill>
+                  <a:srgbClr val="333333"/>
+                </a:solidFill>
+                <a:latin typeface="Calibri"/>
+              </a:rPr>
+              <a:t>–   </a:t>
+            </a:r>
+            <a:r>
+              <a:rPr sz="2000" b="1" i="0">
+                <a:solidFill>
+                  <a:srgbClr val="333333"/>
+                </a:solidFill>
+                <a:latin typeface="Calibri"/>
+              </a:rPr>
+              <a:t>Exito:</a:t>
+            </a:r>
+            <a:r>
+              <a:rPr sz="2000" b="0" i="0">
+                <a:solidFill>
+                  <a:srgbClr val="333333"/>
+                </a:solidFill>
+                <a:latin typeface="Calibri"/>
+              </a:rPr>
+              <a:t> Toda lectura y escritura de archivo usa try-with-resources y captura IOException informando al usuario: no queda ningún catch vacío en el proyecto.</a:t>
+            </a:r>
+          </a:p>
+          <a:p>
+            <a:pPr>
+              <a:spcAft>
+                <a:spcPts val="800"/>
+              </a:spcAft>
+            </a:pPr>
+            <a:r>
+              <a:rPr sz="2000" b="0" i="0">
+                <a:solidFill>
+                  <a:srgbClr val="333333"/>
+                </a:solidFill>
+                <a:latin typeface="Calibri"/>
+              </a:rPr>
+              <a:t>–   </a:t>
+            </a:r>
+            <a:r>
+              <a:rPr sz="2000" b="1" i="0">
+                <a:solidFill>
+                  <a:srgbClr val="333333"/>
+                </a:solidFill>
+                <a:latin typeface="Calibri"/>
+              </a:rPr>
+              <a:t>Exito:</a:t>
+            </a:r>
+            <a:r>
+              <a:rPr sz="2000" b="0" i="0">
+                <a:solidFill>
+                  <a:srgbClr val="333333"/>
+                </a:solidFill>
+                <a:latin typeface="Calibri"/>
+              </a:rPr>
+              <a:t> Si mascotas.csv no existe o si una línea está dañada, la aplicación arranca igual, reporta el problema indicando el número de línea y carga los registros válidos restantes.</a:t>
+            </a:r>
+          </a:p>
+          <a:p>
+            <a:pPr>
+              <a:spcAft>
+                <a:spcPts val="800"/>
+              </a:spcAft>
+            </a:pPr>
+            <a:r>
+              <a:rPr sz="2000" b="0" i="0">
+                <a:solidFill>
+                  <a:srgbClr val="333333"/>
+                </a:solidFill>
+                <a:latin typeface="Calibri"/>
+              </a:rPr>
+              <a:t>–   </a:t>
+            </a:r>
+            <a:r>
+              <a:rPr sz="2000" b="1" i="0">
+                <a:solidFill>
+                  <a:srgbClr val="333333"/>
+                </a:solidFill>
+                <a:latin typeface="Calibri"/>
+              </a:rPr>
+              <a:t>Entrega en la plataforma del curso</a:t>
+            </a:r>
+            <a:r>
+              <a:rPr sz="2000" b="0" i="0">
+                <a:solidFill>
+                  <a:srgbClr val="333333"/>
+                </a:solidFill>
+                <a:latin typeface="Calibri"/>
+              </a:rPr>
+              <a:t> — en la fecha que indique el docente.</a:t>
+            </a:r>
+          </a:p>
+        </p:txBody>
+      </p:sp>
+      <p:sp>
+        <p:nvSpPr>
+          <p:cNvPr id="6" name="TextBox 5"/>
+          <p:cNvSpPr txBox="1"/>
+          <p:nvPr/>
+        </p:nvSpPr>
+        <p:spPr>
+          <a:xfrm>
+            <a:off x="11185855" y="6473952"/>
+            <a:ext cx="640080" cy="274320"/>
+          </a:xfrm>
+          <a:prstGeom prst="rect">
+            <a:avLst/>
+          </a:prstGeom>
+          <a:noFill/>
+        </p:spPr>
+        <p:txBody>
+          <a:bodyPr wrap="square">
+            <a:spAutoFit/>
+          </a:bodyPr>
+          <a:lstStyle/>
+          <a:p>
+            <a:pPr algn="r"/>
+            <a:r>
+              <a:rPr sz="1100" b="0" i="0">
+                <a:solidFill>
+                  <a:srgbClr val="666666"/>
+                </a:solidFill>
+                <a:latin typeface="Calibri"/>
+              </a:rPr>
+              <a:t>20</a:t>
+            </a:r>
+          </a:p>
+        </p:txBody>
+      </p:sp>
+    </p:spTree>
+  </p:cSld>
+  <p:clrMapOvr>
+    <a:masterClrMapping/>
+  </p:clrMapOvr>
+</p:sld>
+</file>
+
+<file path=ppt/slides/slide21.xml><?xml version="1.0" encoding="utf-8"?>
+<p:sld xmlns:a="http://schemas.openxmlformats.org/drawingml/2006/main" xmlns:p="http://schemas.openxmlformats.org/presentationml/2006/main" xmlns:r="http://schemas.openxmlformats.org/officeDocument/2006/relationships">
+  <p:cSld>
+    <p:bg>
+      <p:bgPr>
+        <a:solidFill>
+          <a:srgbClr val="FFFFFF"/>
+        </a:solidFill>
+        <a:effectLst/>
+      </p:bgPr>
+    </p:bg>
+    <p:spTree>
+      <p:nvGrpSpPr>
+        <p:cNvPr id="1" name=""/>
+        <p:cNvGrpSpPr/>
+        <p:nvPr/>
+      </p:nvGrpSpPr>
+      <p:grpSpPr/>
+      <p:sp>
+        <p:nvSpPr>
+          <p:cNvPr id="2" name="Rectangle 1"/>
+          <p:cNvSpPr/>
+          <p:nvPr/>
+        </p:nvSpPr>
+        <p:spPr>
+          <a:xfrm>
+            <a:off x="0" y="0"/>
+            <a:ext cx="12191695" cy="960120"/>
+          </a:xfrm>
+          <a:prstGeom prst="rect">
+            <a:avLst/>
+          </a:prstGeom>
+          <a:solidFill>
+            <a:srgbClr val="095292"/>
+          </a:solidFill>
+          <a:ln>
+            <a:noFill/>
+          </a:ln>
+        </p:spPr>
+        <p:style>
+          <a:lnRef idx="1">
+            <a:schemeClr val="accent1"/>
+          </a:lnRef>
+          <a:fillRef idx="3">
+            <a:schemeClr val="accent1"/>
+          </a:fillRef>
+          <a:effectRef idx="2">
+            <a:schemeClr val="accent1"/>
+          </a:effectRef>
+          <a:fontRef idx="minor">
+            <a:schemeClr val="lt1"/>
+          </a:fontRef>
+        </p:style>
+        <p:txBody>
+          <a:bodyPr rtlCol="0" anchor="ctr"/>
+          <a:lstStyle/>
+          <a:p>
+            <a:pPr algn="ctr"/>
+          </a:p>
+        </p:txBody>
+      </p:sp>
+      <p:sp>
+        <p:nvSpPr>
+          <p:cNvPr id="3" name="Rectangle 2"/>
+          <p:cNvSpPr/>
+          <p:nvPr/>
+        </p:nvSpPr>
+        <p:spPr>
+          <a:xfrm>
+            <a:off x="0" y="960120"/>
+            <a:ext cx="12191695" cy="41148"/>
+          </a:xfrm>
+          <a:prstGeom prst="rect">
+            <a:avLst/>
+          </a:prstGeom>
+          <a:solidFill>
+            <a:srgbClr val="FFD000"/>
+          </a:solidFill>
+          <a:ln>
+            <a:noFill/>
+          </a:ln>
+        </p:spPr>
+        <p:style>
+          <a:lnRef idx="1">
+            <a:schemeClr val="accent1"/>
+          </a:lnRef>
+          <a:fillRef idx="3">
+            <a:schemeClr val="accent1"/>
+          </a:fillRef>
+          <a:effectRef idx="2">
+            <a:schemeClr val="accent1"/>
+          </a:effectRef>
+          <a:fontRef idx="minor">
+            <a:schemeClr val="lt1"/>
+          </a:fontRef>
+        </p:style>
+        <p:txBody>
+          <a:bodyPr rtlCol="0" anchor="ctr"/>
+          <a:lstStyle/>
+          <a:p>
+            <a:pPr algn="ctr"/>
+          </a:p>
+        </p:txBody>
+      </p:sp>
+      <p:sp>
+        <p:nvSpPr>
+          <p:cNvPr id="4" name="TextBox 3"/>
+          <p:cNvSpPr txBox="1"/>
+          <p:nvPr/>
+        </p:nvSpPr>
+        <p:spPr>
+          <a:xfrm>
+            <a:off x="457200" y="164592"/>
+            <a:ext cx="11277295" cy="502920"/>
+          </a:xfrm>
+          <a:prstGeom prst="rect">
+            <a:avLst/>
+          </a:prstGeom>
+          <a:noFill/>
+        </p:spPr>
+        <p:txBody>
+          <a:bodyPr wrap="square">
+            <a:spAutoFit/>
+          </a:bodyPr>
+          <a:lstStyle/>
+          <a:p>
+            <a:r>
+              <a:rPr sz="2600" b="1" i="0">
+                <a:solidFill>
+                  <a:srgbClr val="FFFFFF"/>
+                </a:solidFill>
+                <a:latin typeface="Calibri"/>
+              </a:rPr>
+              <a:t>Para el PI esta semana</a:t>
+            </a:r>
+          </a:p>
+        </p:txBody>
+      </p:sp>
+      <p:sp>
+        <p:nvSpPr>
+          <p:cNvPr id="5" name="Rounded Rectangle 4"/>
+          <p:cNvSpPr/>
+          <p:nvPr/>
+        </p:nvSpPr>
+        <p:spPr>
+          <a:xfrm>
+            <a:off x="457200" y="1261872"/>
+            <a:ext cx="11277295" cy="1051560"/>
+          </a:xfrm>
+          <a:prstGeom prst="roundRect">
+            <a:avLst>
+              <a:gd name="adj" fmla="val 12000"/>
+            </a:avLst>
+          </a:prstGeom>
+          <a:solidFill>
+            <a:srgbClr val="E8F4FA"/>
+          </a:solidFill>
+          <a:ln>
+            <a:noFill/>
+          </a:ln>
+        </p:spPr>
+        <p:style>
+          <a:lnRef idx="1">
+            <a:schemeClr val="accent1"/>
+          </a:lnRef>
+          <a:fillRef idx="3">
+            <a:schemeClr val="accent1"/>
+          </a:fillRef>
+          <a:effectRef idx="2">
+            <a:schemeClr val="accent1"/>
+          </a:effectRef>
+          <a:fontRef idx="minor">
+            <a:schemeClr val="lt1"/>
+          </a:fontRef>
+        </p:style>
+        <p:txBody>
+          <a:bodyPr rtlCol="0" anchor="ctr"/>
+          <a:lstStyle/>
+          <a:p>
+            <a:pPr algn="ctr"/>
+          </a:p>
+        </p:txBody>
+      </p:sp>
+      <p:sp>
+        <p:nvSpPr>
+          <p:cNvPr id="6" name="Rectangle 5"/>
+          <p:cNvSpPr/>
+          <p:nvPr/>
+        </p:nvSpPr>
+        <p:spPr>
+          <a:xfrm>
+            <a:off x="457200" y="1261872"/>
+            <a:ext cx="128016" cy="1051560"/>
+          </a:xfrm>
+          <a:prstGeom prst="rect">
+            <a:avLst/>
+          </a:prstGeom>
+          <a:solidFill>
+            <a:srgbClr val="269CCB"/>
+          </a:solidFill>
+          <a:ln>
+            <a:noFill/>
+          </a:ln>
+        </p:spPr>
+        <p:style>
+          <a:lnRef idx="1">
+            <a:schemeClr val="accent1"/>
+          </a:lnRef>
+          <a:fillRef idx="3">
+            <a:schemeClr val="accent1"/>
+          </a:fillRef>
+          <a:effectRef idx="2">
+            <a:schemeClr val="accent1"/>
+          </a:effectRef>
+          <a:fontRef idx="minor">
+            <a:schemeClr val="lt1"/>
+          </a:fontRef>
+        </p:style>
+        <p:txBody>
+          <a:bodyPr rtlCol="0" anchor="ctr"/>
+          <a:lstStyle/>
+          <a:p>
+            <a:pPr algn="ctr"/>
+          </a:p>
+        </p:txBody>
+      </p:sp>
+      <p:sp>
+        <p:nvSpPr>
+          <p:cNvPr id="7" name="TextBox 6"/>
+          <p:cNvSpPr txBox="1"/>
+          <p:nvPr/>
+        </p:nvSpPr>
+        <p:spPr>
+          <a:xfrm>
+            <a:off x="777240" y="1399031"/>
+            <a:ext cx="10774375" cy="822959"/>
+          </a:xfrm>
+          <a:prstGeom prst="rect">
+            <a:avLst/>
+          </a:prstGeom>
+          <a:noFill/>
+        </p:spPr>
+        <p:txBody>
+          <a:bodyPr wrap="square">
+            <a:spAutoFit/>
+          </a:bodyPr>
+          <a:lstStyle/>
+          <a:p>
+            <a:r>
+              <a:rPr sz="1200" b="1" i="0">
+                <a:solidFill>
+                  <a:srgbClr val="269CCB"/>
+                </a:solidFill>
+                <a:latin typeface="Calibri"/>
+              </a:rPr>
+              <a:t>Info</a:t>
+            </a:r>
+          </a:p>
+          <a:p>
+            <a:pPr>
+              <a:spcBef>
+                <a:spcPts val="400"/>
+              </a:spcBef>
+            </a:pPr>
+            <a:r>
+              <a:rPr sz="1400" b="0" i="0">
+                <a:solidFill>
+                  <a:srgbClr val="333333"/>
+                </a:solidFill>
+                <a:latin typeface="Calibri"/>
+              </a:rPr>
+              <a:t>Hito: VetCare guarda la lista de mascotas en mascotas.csv al cerrar y la vuelve a cargar al abrir.</a:t>
+            </a:r>
+          </a:p>
+        </p:txBody>
+      </p:sp>
+      <p:sp>
+        <p:nvSpPr>
+          <p:cNvPr id="8" name="Rounded Rectangle 7"/>
+          <p:cNvSpPr/>
+          <p:nvPr/>
+        </p:nvSpPr>
+        <p:spPr>
+          <a:xfrm>
+            <a:off x="457200" y="2478024"/>
+            <a:ext cx="11277295" cy="1051560"/>
+          </a:xfrm>
+          <a:prstGeom prst="roundRect">
+            <a:avLst>
+              <a:gd name="adj" fmla="val 12000"/>
+            </a:avLst>
+          </a:prstGeom>
+          <a:solidFill>
+            <a:srgbClr val="FFF8E1"/>
+          </a:solidFill>
+          <a:ln>
+            <a:noFill/>
+          </a:ln>
+        </p:spPr>
+        <p:style>
+          <a:lnRef idx="1">
+            <a:schemeClr val="accent1"/>
+          </a:lnRef>
+          <a:fillRef idx="3">
+            <a:schemeClr val="accent1"/>
+          </a:fillRef>
+          <a:effectRef idx="2">
+            <a:schemeClr val="accent1"/>
+          </a:effectRef>
+          <a:fontRef idx="minor">
+            <a:schemeClr val="lt1"/>
+          </a:fontRef>
+        </p:style>
+        <p:txBody>
+          <a:bodyPr rtlCol="0" anchor="ctr"/>
+          <a:lstStyle/>
+          <a:p>
+            <a:pPr algn="ctr"/>
+          </a:p>
+        </p:txBody>
+      </p:sp>
+      <p:sp>
+        <p:nvSpPr>
+          <p:cNvPr id="9" name="Rectangle 8"/>
+          <p:cNvSpPr/>
+          <p:nvPr/>
+        </p:nvSpPr>
+        <p:spPr>
+          <a:xfrm>
+            <a:off x="457200" y="2478024"/>
+            <a:ext cx="128016" cy="1051560"/>
+          </a:xfrm>
+          <a:prstGeom prst="rect">
+            <a:avLst/>
+          </a:prstGeom>
+          <a:solidFill>
+            <a:srgbClr val="FFD000"/>
+          </a:solidFill>
+          <a:ln>
+            <a:noFill/>
+          </a:ln>
+        </p:spPr>
+        <p:style>
+          <a:lnRef idx="1">
+            <a:schemeClr val="accent1"/>
+          </a:lnRef>
+          <a:fillRef idx="3">
+            <a:schemeClr val="accent1"/>
+          </a:fillRef>
+          <a:effectRef idx="2">
+            <a:schemeClr val="accent1"/>
+          </a:effectRef>
+          <a:fontRef idx="minor">
+            <a:schemeClr val="lt1"/>
+          </a:fontRef>
+        </p:style>
+        <p:txBody>
+          <a:bodyPr rtlCol="0" anchor="ctr"/>
+          <a:lstStyle/>
+          <a:p>
+            <a:pPr algn="ctr"/>
+          </a:p>
+        </p:txBody>
+      </p:sp>
+      <p:sp>
+        <p:nvSpPr>
+          <p:cNvPr id="10" name="TextBox 9"/>
+          <p:cNvSpPr txBox="1"/>
+          <p:nvPr/>
+        </p:nvSpPr>
+        <p:spPr>
+          <a:xfrm>
+            <a:off x="777240" y="2615184"/>
+            <a:ext cx="10774375" cy="822959"/>
+          </a:xfrm>
+          <a:prstGeom prst="rect">
+            <a:avLst/>
+          </a:prstGeom>
+          <a:noFill/>
+        </p:spPr>
+        <p:txBody>
+          <a:bodyPr wrap="square">
+            <a:spAutoFit/>
+          </a:bodyPr>
+          <a:lstStyle/>
+          <a:p>
+            <a:r>
+              <a:rPr sz="1200" b="1" i="0">
+                <a:solidFill>
+                  <a:srgbClr val="FFD000"/>
+                </a:solidFill>
+                <a:latin typeface="Calibri"/>
+              </a:rPr>
+              <a:t>Aclaración</a:t>
+            </a:r>
+          </a:p>
+          <a:p>
+            <a:pPr>
+              <a:spcBef>
+                <a:spcPts val="400"/>
+              </a:spcBef>
+            </a:pPr>
+            <a:r>
+              <a:rPr sz="1400" b="0" i="0">
+                <a:solidFill>
+                  <a:srgbClr val="333333"/>
+                </a:solidFill>
+                <a:latin typeface="Calibri"/>
+              </a:rPr>
+              <a:t>Enunciado completo: Clases/Proyecto Integrador/ (VetCare).</a:t>
+            </a:r>
+          </a:p>
+        </p:txBody>
+      </p:sp>
+      <p:sp>
+        <p:nvSpPr>
+          <p:cNvPr id="11" name="Rounded Rectangle 10"/>
+          <p:cNvSpPr/>
+          <p:nvPr/>
+        </p:nvSpPr>
+        <p:spPr>
+          <a:xfrm>
+            <a:off x="457200" y="3694176"/>
+            <a:ext cx="11277295" cy="1051560"/>
+          </a:xfrm>
+          <a:prstGeom prst="roundRect">
+            <a:avLst>
+              <a:gd name="adj" fmla="val 12000"/>
+            </a:avLst>
+          </a:prstGeom>
+          <a:solidFill>
+            <a:srgbClr val="FBE4E4"/>
+          </a:solidFill>
+          <a:ln>
+            <a:noFill/>
+          </a:ln>
+        </p:spPr>
+        <p:style>
+          <a:lnRef idx="1">
+            <a:schemeClr val="accent1"/>
+          </a:lnRef>
+          <a:fillRef idx="3">
+            <a:schemeClr val="accent1"/>
+          </a:fillRef>
+          <a:effectRef idx="2">
+            <a:schemeClr val="accent1"/>
+          </a:effectRef>
+          <a:fontRef idx="minor">
+            <a:schemeClr val="lt1"/>
+          </a:fontRef>
+        </p:style>
+        <p:txBody>
+          <a:bodyPr rtlCol="0" anchor="ctr"/>
+          <a:lstStyle/>
+          <a:p>
+            <a:pPr algn="ctr"/>
+          </a:p>
+        </p:txBody>
+      </p:sp>
+      <p:sp>
+        <p:nvSpPr>
+          <p:cNvPr id="12" name="Rectangle 11"/>
+          <p:cNvSpPr/>
+          <p:nvPr/>
+        </p:nvSpPr>
+        <p:spPr>
+          <a:xfrm>
+            <a:off x="457200" y="3694176"/>
+            <a:ext cx="128016" cy="1051560"/>
+          </a:xfrm>
+          <a:prstGeom prst="rect">
+            <a:avLst/>
+          </a:prstGeom>
+          <a:solidFill>
+            <a:srgbClr val="A02030"/>
+          </a:solidFill>
+          <a:ln>
+            <a:noFill/>
+          </a:ln>
+        </p:spPr>
+        <p:style>
+          <a:lnRef idx="1">
+            <a:schemeClr val="accent1"/>
+          </a:lnRef>
+          <a:fillRef idx="3">
+            <a:schemeClr val="accent1"/>
+          </a:fillRef>
+          <a:effectRef idx="2">
+            <a:schemeClr val="accent1"/>
+          </a:effectRef>
+          <a:fontRef idx="minor">
+            <a:schemeClr val="lt1"/>
+          </a:fontRef>
+        </p:style>
+        <p:txBody>
+          <a:bodyPr rtlCol="0" anchor="ctr"/>
+          <a:lstStyle/>
+          <a:p>
+            <a:pPr algn="ctr"/>
+          </a:p>
+        </p:txBody>
+      </p:sp>
+      <p:sp>
+        <p:nvSpPr>
+          <p:cNvPr id="13" name="TextBox 12"/>
+          <p:cNvSpPr txBox="1"/>
+          <p:nvPr/>
+        </p:nvSpPr>
+        <p:spPr>
+          <a:xfrm>
+            <a:off x="777240" y="3831336"/>
+            <a:ext cx="10774375" cy="822959"/>
+          </a:xfrm>
+          <a:prstGeom prst="rect">
+            <a:avLst/>
+          </a:prstGeom>
+          <a:noFill/>
+        </p:spPr>
+        <p:txBody>
+          <a:bodyPr wrap="square">
+            <a:spAutoFit/>
+          </a:bodyPr>
+          <a:lstStyle/>
+          <a:p>
+            <a:r>
+              <a:rPr sz="1200" b="1" i="0">
+                <a:solidFill>
+                  <a:srgbClr val="A02030"/>
+                </a:solidFill>
+                <a:latin typeface="Calibri"/>
+              </a:rPr>
+              <a:t>Atención</a:t>
+            </a:r>
+          </a:p>
+          <a:p>
+            <a:pPr>
+              <a:spcBef>
+                <a:spcPts val="400"/>
+              </a:spcBef>
+            </a:pPr>
+            <a:r>
+              <a:rPr sz="1400" b="0" i="0">
+                <a:solidFill>
+                  <a:srgbClr val="333333"/>
+                </a:solidFill>
+                <a:latin typeface="Calibri"/>
+              </a:rPr>
+              <a:t>Entrega del taller, si el docente lo asigna · en la fecha que indique el docente.</a:t>
+            </a:r>
+          </a:p>
+        </p:txBody>
+      </p:sp>
+      <p:sp>
+        <p:nvSpPr>
+          <p:cNvPr id="14" name="TextBox 13"/>
+          <p:cNvSpPr txBox="1"/>
+          <p:nvPr/>
+        </p:nvSpPr>
+        <p:spPr>
+          <a:xfrm>
+            <a:off x="11185855" y="6473952"/>
+            <a:ext cx="640080" cy="274320"/>
+          </a:xfrm>
+          <a:prstGeom prst="rect">
+            <a:avLst/>
+          </a:prstGeom>
+          <a:noFill/>
+        </p:spPr>
+        <p:txBody>
+          <a:bodyPr wrap="square">
+            <a:spAutoFit/>
+          </a:bodyPr>
+          <a:lstStyle/>
+          <a:p>
+            <a:pPr algn="r"/>
+            <a:r>
+              <a:rPr sz="1100" b="0" i="0">
+                <a:solidFill>
+                  <a:srgbClr val="666666"/>
+                </a:solidFill>
+                <a:latin typeface="Calibri"/>
+              </a:rPr>
+              <a:t>21</a:t>
+            </a:r>
+          </a:p>
+        </p:txBody>
+      </p:sp>
+    </p:spTree>
+  </p:cSld>
+  <p:clrMapOvr>
+    <a:masterClrMapping/>
+  </p:clrMapOvr>
+</p:sld>
+</file>
+
+<file path=ppt/slides/slide22.xml><?xml version="1.0" encoding="utf-8"?>
+<p:sld xmlns:a="http://schemas.openxmlformats.org/drawingml/2006/main" xmlns:p="http://schemas.openxmlformats.org/presentationml/2006/main" xmlns:r="http://schemas.openxmlformats.org/officeDocument/2006/relationships">
+  <p:cSld>
+    <p:bg>
+      <p:bgPr>
+        <a:solidFill>
+          <a:srgbClr val="FFFFFF"/>
+        </a:solidFill>
+        <a:effectLst/>
+      </p:bgPr>
+    </p:bg>
+    <p:spTree>
+      <p:nvGrpSpPr>
+        <p:cNvPr id="1" name=""/>
+        <p:cNvGrpSpPr/>
+        <p:nvPr/>
+      </p:nvGrpSpPr>
+      <p:grpSpPr/>
+      <p:sp>
+        <p:nvSpPr>
+          <p:cNvPr id="2" name="Rectangle 1"/>
+          <p:cNvSpPr/>
+          <p:nvPr/>
+        </p:nvSpPr>
+        <p:spPr>
+          <a:xfrm>
+            <a:off x="0" y="0"/>
+            <a:ext cx="12191695" cy="164592"/>
+          </a:xfrm>
+          <a:prstGeom prst="rect">
+            <a:avLst/>
+          </a:prstGeom>
+          <a:solidFill>
+            <a:srgbClr val="269CCB"/>
+          </a:solidFill>
+          <a:ln>
+            <a:noFill/>
+          </a:ln>
+        </p:spPr>
+        <p:style>
+          <a:lnRef idx="1">
+            <a:schemeClr val="accent1"/>
+          </a:lnRef>
+          <a:fillRef idx="3">
+            <a:schemeClr val="accent1"/>
+          </a:fillRef>
+          <a:effectRef idx="2">
+            <a:schemeClr val="accent1"/>
+          </a:effectRef>
+          <a:fontRef idx="minor">
+            <a:schemeClr val="lt1"/>
+          </a:fontRef>
+        </p:style>
+        <p:txBody>
+          <a:bodyPr rtlCol="0" anchor="ctr"/>
+          <a:lstStyle/>
+          <a:p>
+            <a:pPr algn="ctr"/>
+          </a:p>
+        </p:txBody>
+      </p:sp>
+      <p:pic>
+        <p:nvPicPr>
+          <p:cNvPr id="3" name="Picture 2" descr="logo_uniajc_color.png"/>
+          <p:cNvPicPr>
+            <a:picLocks noChangeAspect="1"/>
+          </p:cNvPicPr>
+          <p:nvPr/>
+        </p:nvPicPr>
+        <p:blipFill>
+          <a:blip r:embed="rId2"/>
+          <a:stretch>
+            <a:fillRect/>
+          </a:stretch>
+        </p:blipFill>
+        <p:spPr>
+          <a:xfrm>
+            <a:off x="10271455" y="5998464"/>
+            <a:ext cx="1463040" cy="643233"/>
+          </a:xfrm>
+          <a:prstGeom prst="rect">
+            <a:avLst/>
+          </a:prstGeom>
+        </p:spPr>
+      </p:pic>
+      <p:sp>
+        <p:nvSpPr>
+          <p:cNvPr id="4" name="TextBox 3"/>
+          <p:cNvSpPr txBox="1"/>
+          <p:nvPr/>
+        </p:nvSpPr>
+        <p:spPr>
+          <a:xfrm>
+            <a:off x="457200" y="1737360"/>
+            <a:ext cx="11277295" cy="1097280"/>
+          </a:xfrm>
+          <a:prstGeom prst="rect">
+            <a:avLst/>
+          </a:prstGeom>
+          <a:noFill/>
+        </p:spPr>
+        <p:txBody>
+          <a:bodyPr wrap="square" anchor="ctr"/>
+          <a:lstStyle/>
+          <a:p>
+            <a:pPr algn="ctr"/>
+            <a:r>
+              <a:rPr sz="3400" b="1" i="0">
+                <a:solidFill>
+                  <a:srgbClr val="095292"/>
+                </a:solidFill>
+                <a:latin typeface="Calibri"/>
+              </a:rPr>
+              <a:t>Clase 9 · VetCare avanza</a:t>
+            </a:r>
+          </a:p>
+        </p:txBody>
+      </p:sp>
+      <p:sp>
+        <p:nvSpPr>
+          <p:cNvPr id="5" name="TextBox 4"/>
+          <p:cNvSpPr txBox="1"/>
+          <p:nvPr/>
+        </p:nvSpPr>
+        <p:spPr>
+          <a:xfrm>
+            <a:off x="457200" y="3017520"/>
+            <a:ext cx="11277295" cy="1645920"/>
+          </a:xfrm>
+          <a:prstGeom prst="rect">
+            <a:avLst/>
+          </a:prstGeom>
+          <a:noFill/>
+        </p:spPr>
+        <p:txBody>
+          <a:bodyPr wrap="square">
+            <a:spAutoFit/>
+          </a:bodyPr>
+          <a:lstStyle/>
+          <a:p>
+            <a:pPr algn="ctr">
+              <a:spcAft>
+                <a:spcPts val="600"/>
+              </a:spcAft>
+            </a:pPr>
+            <a:r>
+              <a:rPr sz="1600" b="0" i="0">
+                <a:solidFill>
+                  <a:srgbClr val="333333"/>
+                </a:solidFill>
+                <a:latin typeface="Calibri"/>
+              </a:rPr>
+              <a:t>VetCare guarda la lista de mascotas en mascotas.csv al cerrar y la vuelve a cargar al abrir.</a:t>
+            </a:r>
+          </a:p>
+          <a:p>
+            <a:pPr algn="ctr">
+              <a:spcAft>
+                <a:spcPts val="600"/>
+              </a:spcAft>
+            </a:pPr>
+            <a:r>
+              <a:rPr sz="1600" b="0" i="0">
+                <a:solidFill>
+                  <a:srgbClr val="333333"/>
+                </a:solidFill>
+                <a:latin typeface="Calibri"/>
+              </a:rPr>
+              <a:t>Entregable: La clase RepositorioMascotasCSV con guardar() y cargar() funcionando, el archivo mascotas.csv generado por la propia aplicación y la bitácora REFACTOR.md, subidos a la plataforma del curso.</a:t>
+            </a:r>
+          </a:p>
+          <a:p>
+            <a:pPr algn="ctr">
+              <a:spcAft>
+                <a:spcPts val="600"/>
+              </a:spcAft>
+            </a:pPr>
+            <a:r>
+              <a:rPr sz="1600" b="0" i="0">
+                <a:solidFill>
+                  <a:srgbClr val="333333"/>
+                </a:solidFill>
+                <a:latin typeface="Calibri"/>
+              </a:rPr>
+              <a:t>Siguiente clase: continuamos el hilo del PI</a:t>
+            </a:r>
+          </a:p>
+        </p:txBody>
+      </p:sp>
+      <p:sp>
+        <p:nvSpPr>
+          <p:cNvPr id="6" name="TextBox 5"/>
+          <p:cNvSpPr txBox="1"/>
+          <p:nvPr/>
+        </p:nvSpPr>
+        <p:spPr>
+          <a:xfrm>
+            <a:off x="457200" y="4754880"/>
+            <a:ext cx="11277295" cy="640080"/>
+          </a:xfrm>
+          <a:prstGeom prst="rect">
+            <a:avLst/>
+          </a:prstGeom>
+          <a:noFill/>
+        </p:spPr>
+        <p:txBody>
+          <a:bodyPr wrap="square">
+            <a:spAutoFit/>
+          </a:bodyPr>
+          <a:lstStyle/>
+          <a:p>
+            <a:pPr algn="ctr"/>
+            <a:r>
+              <a:rPr sz="2000" b="1" i="0">
+                <a:solidFill>
+                  <a:srgbClr val="269CCB"/>
+                </a:solidFill>
+                <a:latin typeface="Calibri"/>
+              </a:rPr>
+              <a:t>Teoria al servicio del proyecto</a:t>
+            </a:r>
+          </a:p>
+        </p:txBody>
+      </p:sp>
+    </p:spTree>
+  </p:cSld>
+  <p:clrMapOvr>
+    <a:masterClrMapping/>
+  </p:clrMapOvr>
+</p:sld>
+</file>
+
 <file path=ppt/slides/slide3.xml><?xml version="1.0" encoding="utf-8"?>
 <p:sld xmlns:a="http://schemas.openxmlformats.org/drawingml/2006/main" xmlns:p="http://schemas.openxmlformats.org/presentationml/2006/main" xmlns:r="http://schemas.openxmlformats.org/officeDocument/2006/relationships">
   <p:cSld>
@@ -6712,7 +10142,7 @@
                 </a:solidFill>
                 <a:latin typeface="Calibri"/>
               </a:rPr>
-              <a:t>Teoria Core</a:t>
+              <a:t>Refactorizar es cambiar la forma interna del código sin cambiar ni un... (1/2)</a:t>
             </a:r>
           </a:p>
         </p:txBody>
@@ -6751,7 +10181,7 @@
                 </a:solidFill>
                 <a:latin typeface="Calibri"/>
               </a:rPr>
-              <a:t>–   Refactorizar es cambiar la forma interna del código sin cambiar ni un milímetro de su comportamiento externo</a:t>
+              <a:t>–   Refactorizar es cambiar la forma interna del código sin cambiar ni un milímetro de su comportamiento externo.</a:t>
             </a:r>
           </a:p>
           <a:p>
@@ -6767,7 +10197,7 @@
                 </a:solidFill>
                 <a:latin typeface="Calibri"/>
               </a:rPr>
-              <a:t>–   Un code smell es un síntoma en el código que casi siempre anuncia un problema mayor; no es un error de compilación…</a:t>
+              <a:t>–   Si antes de tocar nada la aplicación registraba una mascota y mostraba 'Mascota registrada con ID M004', después de refactorizar tiene que registrar exactamente igual y mostrar exactamente el mismo mensaje</a:t>
             </a:r>
           </a:p>
           <a:p>
@@ -6783,7 +10213,7 @@
                 </a:solidFill>
                 <a:latin typeface="Calibri"/>
               </a:rPr>
-              <a:t>–   Persistencia es lograr que los datos sobrevivan al proceso que los creó</a:t>
+              <a:t>–   Lo único que cambió es que el código quedó más fácil de leer y de modificar.</a:t>
             </a:r>
           </a:p>
           <a:p>
@@ -6799,7 +10229,7 @@
                 </a:solidFill>
                 <a:latin typeface="Calibri"/>
               </a:rPr>
-              <a:t>–   Un archivo abierto es un recurso del sistema operativo, y todo recurso hay que cerrarlo</a:t>
+              <a:t>–   En VetCare el caso clásico es el manejador del botón Registrar: un método de noventa líneas que valida el nombre, convierte la edad, genera el ID consecutivo, arma la línea del CSV, abre el archivo, escribe y muestra el aviso.</a:t>
             </a:r>
           </a:p>
           <a:p>
@@ -6815,7 +10245,7 @@
                 </a:solidFill>
                 <a:latin typeface="Calibri"/>
               </a:rPr>
-              <a:t>–   La persistencia se conecta al ciclo de vida de la aplicación en dos puntos: se carga al arrancar y se guarda al…</a:t>
+              <a:t>–   Refactorizarlo es partirlo en cuatro métodos con nombre propio (validar, generarId, aLineaCsv, escribirArchivo) y mover los dos últimos a una clase RepositorioMascotasCSV.</a:t>
             </a:r>
           </a:p>
         </p:txBody>
@@ -6996,141 +10426,21 @@
                 </a:solidFill>
                 <a:latin typeface="Calibri"/>
               </a:rPr>
-              <a:t>guardar(): el archivo como memoria larga de VetCare</a:t>
-            </a:r>
-          </a:p>
-        </p:txBody>
-      </p:sp>
-      <p:sp>
-        <p:nvSpPr>
-          <p:cNvPr id="5" name="Rounded Rectangle 4"/>
-          <p:cNvSpPr/>
-          <p:nvPr/>
-        </p:nvSpPr>
-        <p:spPr>
-          <a:xfrm>
-            <a:off x="457200" y="1261872"/>
-            <a:ext cx="11277295" cy="4773168"/>
-          </a:xfrm>
-          <a:prstGeom prst="roundRect">
-            <a:avLst>
-              <a:gd name="adj" fmla="val 12000"/>
-            </a:avLst>
-          </a:prstGeom>
-          <a:solidFill>
-            <a:srgbClr val="1E2A38"/>
-          </a:solidFill>
-          <a:ln>
-            <a:noFill/>
-          </a:ln>
-        </p:spPr>
-        <p:style>
-          <a:lnRef idx="1">
-            <a:schemeClr val="accent1"/>
-          </a:lnRef>
-          <a:fillRef idx="3">
-            <a:schemeClr val="accent1"/>
-          </a:fillRef>
-          <a:effectRef idx="2">
-            <a:schemeClr val="accent1"/>
-          </a:effectRef>
-          <a:fontRef idx="minor">
-            <a:schemeClr val="lt1"/>
-          </a:fontRef>
-        </p:style>
-        <p:txBody>
-          <a:bodyPr rtlCol="0" anchor="ctr"/>
-          <a:lstStyle/>
-          <a:p>
-            <a:pPr algn="ctr"/>
-          </a:p>
-        </p:txBody>
-      </p:sp>
-      <p:sp>
-        <p:nvSpPr>
-          <p:cNvPr id="6" name="Rectangle 5"/>
-          <p:cNvSpPr/>
-          <p:nvPr/>
-        </p:nvSpPr>
-        <p:spPr>
-          <a:xfrm>
-            <a:off x="457200" y="1261872"/>
-            <a:ext cx="11277295" cy="320040"/>
-          </a:xfrm>
-          <a:prstGeom prst="rect">
-            <a:avLst/>
-          </a:prstGeom>
-          <a:solidFill>
-            <a:srgbClr val="095292"/>
-          </a:solidFill>
-          <a:ln>
-            <a:noFill/>
-          </a:ln>
-        </p:spPr>
-        <p:style>
-          <a:lnRef idx="1">
-            <a:schemeClr val="accent1"/>
-          </a:lnRef>
-          <a:fillRef idx="3">
-            <a:schemeClr val="accent1"/>
-          </a:fillRef>
-          <a:effectRef idx="2">
-            <a:schemeClr val="accent1"/>
-          </a:effectRef>
-          <a:fontRef idx="minor">
-            <a:schemeClr val="lt1"/>
-          </a:fontRef>
-        </p:style>
-        <p:txBody>
-          <a:bodyPr rtlCol="0" anchor="ctr"/>
-          <a:lstStyle/>
-          <a:p>
-            <a:pPr algn="ctr"/>
-          </a:p>
-        </p:txBody>
-      </p:sp>
-      <p:sp>
-        <p:nvSpPr>
-          <p:cNvPr id="7" name="TextBox 6"/>
+              <a:t>Refactorizar es cambiar la forma interna del código sin cambiar ni un... (2/2)</a:t>
+            </a:r>
+          </a:p>
+        </p:txBody>
+      </p:sp>
+      <p:sp>
+        <p:nvSpPr>
+          <p:cNvPr id="5" name="TextBox 4"/>
           <p:cNvSpPr txBox="1"/>
           <p:nvPr/>
         </p:nvSpPr>
         <p:spPr>
           <a:xfrm>
-            <a:off x="685800" y="1307592"/>
-            <a:ext cx="10820095" cy="256032"/>
-          </a:xfrm>
-          <a:prstGeom prst="rect">
-            <a:avLst/>
-          </a:prstGeom>
-          <a:noFill/>
-        </p:spPr>
-        <p:txBody>
-          <a:bodyPr wrap="square" anchor="ctr"/>
-          <a:lstStyle/>
-          <a:p>
-            <a:r>
-              <a:rPr sz="1000" b="1" i="0">
-                <a:solidFill>
-                  <a:srgbClr val="269CCB"/>
-                </a:solidFill>
-                <a:latin typeface="Calibri"/>
-              </a:rPr>
-              <a:t>● ● ●</a:t>
-            </a:r>
-          </a:p>
-        </p:txBody>
-      </p:sp>
-      <p:sp>
-        <p:nvSpPr>
-          <p:cNvPr id="8" name="TextBox 7"/>
-          <p:cNvSpPr txBox="1"/>
-          <p:nvPr/>
-        </p:nvSpPr>
-        <p:spPr>
-          <a:xfrm>
-            <a:off x="777240" y="1719072"/>
-            <a:ext cx="10637215" cy="4133087"/>
+            <a:off x="457200" y="1170432"/>
+            <a:ext cx="11277295" cy="5230368"/>
           </a:xfrm>
           <a:prstGeom prst="rect">
             <a:avLst/>
@@ -7145,251 +10455,56 @@
           <a:p>
             <a:pPr>
               <a:spcAft>
-                <a:spcPts val="400"/>
+                <a:spcPts val="800"/>
               </a:spcAft>
             </a:pPr>
             <a:r>
-              <a:rPr sz="1400" b="0" i="0">
-                <a:solidFill>
-                  <a:srgbClr val="FFFFFF"/>
-                </a:solidFill>
-                <a:latin typeface="Calibri"/>
-              </a:rPr>
-              <a:t>// Sin esto, al cerrar la ventana la clinica Huellitas vuelve al papel.</a:t>
+              <a:rPr sz="2000" b="0" i="0">
+                <a:solidFill>
+                  <a:srgbClr val="333333"/>
+                </a:solidFill>
+                <a:latin typeface="Calibri"/>
+              </a:rPr>
+              <a:t>–   Y aquí va lo que refactorizar NO es: no es agregar funcionalidades nuevas, no es corregir errores de lógica, no es cambiar de librería, no es reescribir el proyecto desde cero.</a:t>
             </a:r>
           </a:p>
           <a:p>
             <a:pPr>
               <a:spcAft>
-                <a:spcPts val="400"/>
+                <a:spcPts val="800"/>
               </a:spcAft>
             </a:pPr>
             <a:r>
-              <a:rPr sz="1400" b="0" i="0">
-                <a:solidFill>
-                  <a:srgbClr val="FFFFFF"/>
-                </a:solidFill>
-                <a:latin typeface="Calibri"/>
-              </a:rPr>
-              <a:t>try (BufferedWriter salida = Files.newBufferedWriter(ruta, StandardCharsets.UTF_8)) {</a:t>
+              <a:rPr sz="2000" b="0" i="0">
+                <a:solidFill>
+                  <a:srgbClr val="333333"/>
+                </a:solidFill>
+                <a:latin typeface="Calibri"/>
+              </a:rPr>
+              <a:t>–   Si al terminar la aplicación hace algo distinto, eso ya no fue una refactorización: fue un cambio de requisitos disfrazado, y hay que probarlo como tal.</a:t>
             </a:r>
           </a:p>
           <a:p>
             <a:pPr>
               <a:spcAft>
-                <a:spcPts val="400"/>
+                <a:spcPts val="800"/>
               </a:spcAft>
             </a:pPr>
             <a:r>
-              <a:rPr sz="1400" b="0" i="0">
-                <a:solidFill>
-                  <a:srgbClr val="FFFFFF"/>
-                </a:solidFill>
-                <a:latin typeface="Calibri"/>
-              </a:rPr>
-              <a:t>    salida.write("id;nombre;especie;edad;cedula_dueno"); // encabezado = contrato del CSV</a:t>
-            </a:r>
-          </a:p>
-          <a:p>
-            <a:pPr>
-              <a:spcAft>
-                <a:spcPts val="400"/>
-              </a:spcAft>
-            </a:pPr>
-            <a:r>
-              <a:rPr sz="1400" b="0" i="0">
-                <a:solidFill>
-                  <a:srgbClr val="FFFFFF"/>
-                </a:solidFill>
-                <a:latin typeface="Calibri"/>
-              </a:rPr>
-              <a:t>    salida.newLine();</a:t>
-            </a:r>
-          </a:p>
-          <a:p>
-            <a:pPr>
-              <a:spcAft>
-                <a:spcPts val="400"/>
-              </a:spcAft>
-            </a:pPr>
-            <a:r>
-              <a:rPr sz="1400" b="0" i="0">
-                <a:solidFill>
-                  <a:srgbClr val="FFFFFF"/>
-                </a:solidFill>
-                <a:latin typeface="Calibri"/>
-              </a:rPr>
-              <a:t>    for (Mascota m: mascotas) {</a:t>
-            </a:r>
-          </a:p>
-          <a:p>
-            <a:pPr>
-              <a:spcAft>
-                <a:spcPts val="400"/>
-              </a:spcAft>
-            </a:pPr>
-            <a:r>
-              <a:rPr sz="1400" b="0" i="0">
-                <a:solidFill>
-                  <a:srgbClr val="FFFFFF"/>
-                </a:solidFill>
-                <a:latin typeface="Calibri"/>
-              </a:rPr>
-              <a:t>        salida.write(m.getId() + ";" + m.getNombre() + ";" + m.getEspecie()</a:t>
-            </a:r>
-          </a:p>
-          <a:p>
-            <a:pPr>
-              <a:spcAft>
-                <a:spcPts val="400"/>
-              </a:spcAft>
-            </a:pPr>
-            <a:r>
-              <a:rPr sz="1400" b="0" i="0">
-                <a:solidFill>
-                  <a:srgbClr val="FFFFFF"/>
-                </a:solidFill>
-                <a:latin typeface="Calibri"/>
-              </a:rPr>
-              <a:t>                   + ";" + m.getEdad() + ";" + m.getCedulaDueno());</a:t>
-            </a:r>
-          </a:p>
-          <a:p>
-            <a:pPr>
-              <a:spcAft>
-                <a:spcPts val="400"/>
-              </a:spcAft>
-            </a:pPr>
-            <a:r>
-              <a:rPr sz="1400" b="0" i="0">
-                <a:solidFill>
-                  <a:srgbClr val="FFFFFF"/>
-                </a:solidFill>
-                <a:latin typeface="Calibri"/>
-              </a:rPr>
-              <a:t>        salida.newLine();                 // una mascota = una linea, siempre 4 separadores</a:t>
-            </a:r>
-          </a:p>
-          <a:p>
-            <a:pPr>
-              <a:spcAft>
-                <a:spcPts val="400"/>
-              </a:spcAft>
-            </a:pPr>
-            <a:r>
-              <a:rPr sz="1400" b="0" i="0">
-                <a:solidFill>
-                  <a:srgbClr val="FFFFFF"/>
-                </a:solidFill>
-                <a:latin typeface="Calibri"/>
-              </a:rPr>
-              <a:t>    }</a:t>
-            </a:r>
-          </a:p>
-          <a:p>
-            <a:pPr>
-              <a:spcAft>
-                <a:spcPts val="400"/>
-              </a:spcAft>
-            </a:pPr>
-            <a:r>
-              <a:rPr sz="1400" b="0" i="0">
-                <a:solidFill>
-                  <a:srgbClr val="FFFFFF"/>
-                </a:solidFill>
-                <a:latin typeface="Calibri"/>
-              </a:rPr>
-              <a:t>}                                          // aqui se cierra solo y el buffer baja al disco</a:t>
-            </a:r>
-          </a:p>
-          <a:p>
-            <a:pPr>
-              <a:spcAft>
-                <a:spcPts val="400"/>
-              </a:spcAft>
-            </a:pPr>
-            <a:r>
-              <a:rPr sz="1400" b="0" i="0">
-                <a:solidFill>
-                  <a:srgbClr val="FFFFFF"/>
-                </a:solidFill>
-                <a:latin typeface="Calibri"/>
-              </a:rPr>
-              <a:t>catch (IOException e) {                    // IOException es checked: el compilador la exige</a:t>
-            </a:r>
-          </a:p>
-          <a:p>
-            <a:pPr>
-              <a:spcAft>
-                <a:spcPts val="400"/>
-              </a:spcAft>
-            </a:pPr>
-            <a:r>
-              <a:rPr sz="1400" b="0" i="0">
-                <a:solidFill>
-                  <a:srgbClr val="FFFFFF"/>
-                </a:solidFill>
-                <a:latin typeface="Calibri"/>
-              </a:rPr>
-              <a:t>    JOptionPane.showMessageDialog(null, "No se pudo guardar: " + e.getMessage());</a:t>
-            </a:r>
-          </a:p>
-          <a:p>
-            <a:pPr>
-              <a:spcAft>
-                <a:spcPts val="400"/>
-              </a:spcAft>
-            </a:pPr>
-            <a:r>
-              <a:rPr sz="1400" b="0" i="0">
-                <a:solidFill>
-                  <a:srgbClr val="FFFFFF"/>
-                </a:solidFill>
-                <a:latin typeface="Calibri"/>
-              </a:rPr>
-              <a:t>}                                          // un catch vacio aqui = mascota perdida en silencio</a:t>
-            </a:r>
-          </a:p>
-        </p:txBody>
-      </p:sp>
-      <p:sp>
-        <p:nvSpPr>
-          <p:cNvPr id="9" name="TextBox 8"/>
-          <p:cNvSpPr txBox="1"/>
-          <p:nvPr/>
-        </p:nvSpPr>
-        <p:spPr>
-          <a:xfrm>
-            <a:off x="457200" y="6080760"/>
-            <a:ext cx="11277295" cy="320040"/>
-          </a:xfrm>
-          <a:prstGeom prst="rect">
-            <a:avLst/>
-          </a:prstGeom>
-          <a:noFill/>
-        </p:spPr>
-        <p:txBody>
-          <a:bodyPr wrap="square">
-            <a:spAutoFit/>
-          </a:bodyPr>
-          <a:lstStyle/>
-          <a:p>
-            <a:pPr algn="ctr"/>
-            <a:r>
-              <a:rPr sz="1200" b="0" i="1">
-                <a:solidFill>
-                  <a:srgbClr val="666666"/>
-                </a:solidFill>
-                <a:latin typeface="Calibri"/>
-              </a:rPr>
-              <a:t>El try-with-resources cierra el archivo pase lo que pase; si no cierra, el .csv queda en cero bytes aunque el programa diga que guardó.</a:t>
-            </a:r>
-          </a:p>
-        </p:txBody>
-      </p:sp>
-      <p:sp>
-        <p:nvSpPr>
-          <p:cNvPr id="10" name="TextBox 9"/>
+              <a:rPr sz="2000" b="0" i="0">
+                <a:solidFill>
+                  <a:srgbClr val="333333"/>
+                </a:solidFill>
+                <a:latin typeface="Calibri"/>
+              </a:rPr>
+              <a:t>–   La prueba de que el refactor salió bien es aburridamente simple: correr el mismo flujo con los mismos datos y obtener las mismas salidas.</a:t>
+            </a:r>
+          </a:p>
+        </p:txBody>
+      </p:sp>
+      <p:sp>
+        <p:nvSpPr>
+          <p:cNvPr id="6" name="TextBox 5"/>
           <p:cNvSpPr txBox="1"/>
           <p:nvPr/>
         </p:nvSpPr>
@@ -7563,7 +10678,7 @@
                 </a:solidFill>
                 <a:latin typeface="Calibri"/>
               </a:rPr>
-              <a:t>Demo del dia</a:t>
+              <a:t>Un code smell es un síntoma en el código que casi siempre anuncia un... (1/2)</a:t>
             </a:r>
           </a:p>
         </p:txBody>
@@ -7602,25 +10717,7 @@
                 </a:solidFill>
                 <a:latin typeface="Calibri"/>
               </a:rPr>
-              <a:t>–   </a:t>
-            </a:r>
-            <a:r>
-              <a:rPr sz="2000" b="1" i="0">
-                <a:solidFill>
-                  <a:srgbClr val="333333"/>
-                </a:solidFill>
-                <a:latin typeface="Calibri"/>
-              </a:rPr>
-              <a:t>Herramienta:</a:t>
-            </a:r>
-            <a:r>
-              <a:rPr sz="2000" b="0" i="0">
-                <a:solidFill>
-                  <a:srgbClr val="333333"/>
-                </a:solidFill>
-                <a:latin typeface="Calibri"/>
-              </a:rPr>
-              <a:t> Visual Studio Code (Java)</a:t>
+              <a:t>–   Un code smell es un síntoma en el código que casi siempre anuncia un problema mayor; no es un error de compilación ni una excepción, es un olor.</a:t>
             </a:r>
           </a:p>
           <a:p>
@@ -7636,25 +10733,7 @@
                 </a:solidFill>
                 <a:latin typeface="Calibri"/>
               </a:rPr>
-              <a:t>–   </a:t>
-            </a:r>
-            <a:r>
-              <a:rPr sz="2000" b="1" i="0">
-                <a:solidFill>
-                  <a:srgbClr val="333333"/>
-                </a:solidFill>
-                <a:latin typeface="Calibri"/>
-              </a:rPr>
-              <a:t>Demo:</a:t>
-            </a:r>
-            <a:r>
-              <a:rPr sz="2000" b="0" i="0">
-                <a:solidFill>
-                  <a:srgbClr val="333333"/>
-                </a:solidFill>
-                <a:latin typeface="Calibri"/>
-              </a:rPr>
-              <a:t> El docente registra una mascota, cierra la aplicación, la vuelve a abrir y la mascota sigue ahí; enseguida abre mascotas.csv en el Bloc de notas para mostrar la línea que escribió el programa.</a:t>
+              <a:t>–   Los que van a aparecer sí o sí en los proyectos de VetCare son seis.</a:t>
             </a:r>
           </a:p>
           <a:p>
@@ -7670,7 +10749,55 @@
                 </a:solidFill>
                 <a:latin typeface="Calibri"/>
               </a:rPr>
-              <a:t>–   Mismo dominio VetCare — no otro ejemplo.</a:t>
+              <a:t>–   Primero, el método largo: el ActionListener del botón que hace de todo.</a:t>
+            </a:r>
+          </a:p>
+          <a:p>
+            <a:pPr>
+              <a:spcAft>
+                <a:spcPts val="800"/>
+              </a:spcAft>
+            </a:pPr>
+            <a:r>
+              <a:rPr sz="2000" b="0" i="0">
+                <a:solidFill>
+                  <a:srgbClr val="333333"/>
+                </a:solidFill>
+                <a:latin typeface="Calibri"/>
+              </a:rPr>
+              <a:t>–   Segundo, la duplicación: el mismo bucle de búsqueda por ID copiado y pegado en el botón Buscar, en el botón Editar y en el botón Eliminar</a:t>
+            </a:r>
+          </a:p>
+          <a:p>
+            <a:pPr>
+              <a:spcAft>
+                <a:spcPts val="800"/>
+              </a:spcAft>
+            </a:pPr>
+            <a:r>
+              <a:rPr sz="2000" b="0" i="0">
+                <a:solidFill>
+                  <a:srgbClr val="333333"/>
+                </a:solidFill>
+                <a:latin typeface="Calibri"/>
+              </a:rPr>
+              <a:t>–   De modo que cuando el criterio de búsqueda cambia hay que acordarse de arreglarlo en tres lugares y siempre se olvida uno.</a:t>
+            </a:r>
+          </a:p>
+          <a:p>
+            <a:pPr>
+              <a:spcAft>
+                <a:spcPts val="800"/>
+              </a:spcAft>
+            </a:pPr>
+            <a:r>
+              <a:rPr sz="2000" b="0" i="0">
+                <a:solidFill>
+                  <a:srgbClr val="333333"/>
+                </a:solidFill>
+                <a:latin typeface="Calibri"/>
+              </a:rPr>
+              <a:t>–   Tercero, los nombres opacos: ArrayList&lt;String[]&gt; a1, variables x, d, v, un método llamado proceso().</a:t>
             </a:r>
           </a:p>
         </p:txBody>
@@ -7851,7 +10978,7 @@
                 </a:solidFill>
                 <a:latin typeface="Calibri"/>
               </a:rPr>
-              <a:t>Taller PI — por que importa</a:t>
+              <a:t>Un code smell es un síntoma en el código que casi siempre anuncia un... (2/2)</a:t>
             </a:r>
           </a:p>
         </p:txBody>
@@ -7890,25 +11017,7 @@
                 </a:solidFill>
                 <a:latin typeface="Calibri"/>
               </a:rPr>
-              <a:t>–   </a:t>
-            </a:r>
-            <a:r>
-              <a:rPr sz="2000" b="1" i="0">
-                <a:solidFill>
-                  <a:srgbClr val="333333"/>
-                </a:solidFill>
-                <a:latin typeface="Calibri"/>
-              </a:rPr>
-              <a:t>Por que importa al PI:</a:t>
-            </a:r>
-            <a:r>
-              <a:rPr sz="2000" b="0" i="0">
-                <a:solidFill>
-                  <a:srgbClr val="333333"/>
-                </a:solidFill>
-                <a:latin typeface="Calibri"/>
-              </a:rPr>
-              <a:t> el PI exige explícitamente persistencia en archivos .txt o .csv, y sin ella VetCare sigue siendo una libreta que se borra sola: la clínica Huellitas no puede recuperar el expediente de Firulais al día siguiente.</a:t>
+              <a:t>–   Cuarto, los números mágicos: un if (edad &gt; 25) sin explicación, cuando lo correcto es una constante EDAD_MAXIMA = 25 con nombre.</a:t>
             </a:r>
           </a:p>
           <a:p>
@@ -7924,7 +11033,7 @@
                 </a:solidFill>
                 <a:latin typeface="Calibri"/>
               </a:rPr>
-              <a:t>–   Esta es la primera clase donde el producto deja de existir solo mientras la ventana está abierta; a partir de hoy el proyecto tiene datos reales acumulados que las clases siguientes van a leer, integrar y revisar.</a:t>
+              <a:t>–   Quinto, el catch vacío que se traga la IOException y deja al usuario creyendo que guardó.</a:t>
             </a:r>
           </a:p>
           <a:p>
@@ -7940,7 +11049,23 @@
                 </a:solidFill>
                 <a:latin typeface="Calibri"/>
               </a:rPr>
-              <a:t>–   La bitácora REFACTOR.md es también la evidencia del uso responsable de IA que se le va a exigir en la sustentación final: quien no pueda explicar su propio código no puede defenderlo.</a:t>
+              <a:t>–   Sexto, la clase Dios: una única clase Principal que es ventana, es lista y es archivo al mismo tiempo.</a:t>
+            </a:r>
+          </a:p>
+          <a:p>
+            <a:pPr>
+              <a:spcAft>
+                <a:spcPts val="800"/>
+              </a:spcAft>
+            </a:pPr>
+            <a:r>
+              <a:rPr sz="2000" b="0" i="0">
+                <a:solidFill>
+                  <a:srgbClr val="333333"/>
+                </a:solidFill>
+                <a:latin typeface="Calibri"/>
+              </a:rPr>
+              <a:t>–   VS Code ayuda a atacarlos con acciones seguras: Rename Symbol (F2), y desde la bombilla o Ctrl+Shift+R los refactors «Extract Method» y «Move», que renombran o extraen actualizando todas las referencias, cosa que buscar y reemplazar a mano nunca garantiza.</a:t>
             </a:r>
           </a:p>
         </p:txBody>
@@ -8121,7 +11246,7 @@
                 </a:solidFill>
                 <a:latin typeface="Calibri"/>
               </a:rPr>
-              <a:t>Taller PI — punto de partida</a:t>
+              <a:t>Persistencia es lograr que los datos sobrevivan al proceso que los creó (1/2)</a:t>
             </a:r>
           </a:p>
         </p:txBody>
@@ -8160,7 +11285,7 @@
                 </a:solidFill>
                 <a:latin typeface="Calibri"/>
               </a:rPr>
-              <a:t>–   VetCare ya tiene la clase Mascota con atributos privados y getters, un ArrayList&lt;Mascota&gt; administrado por el servicio y una ventana Swing que registra y lista (trabajo de las clases 1 a 6).</a:t>
+              <a:t>–   Persistencia es lograr que los datos sobrevivan al proceso que los creó.</a:t>
             </a:r>
           </a:p>
           <a:p>
@@ -8176,7 +11301,7 @@
                 </a:solidFill>
                 <a:latin typeface="Calibri"/>
               </a:rPr>
-              <a:t>–   En la carpeta del proyecto todavía no existe ningún archivo de datos: cada vez que se cierra la aplicación, la lista arranca vacía otra vez.</a:t>
+              <a:t>–   Mientras la aplicación está corriendo, el ArrayList&lt;Mascota&gt; vive en la memoria RAM, que es rápida pero volátil: en el instante en que se cierra la ventana, el sistema operativo recupera esa memoria y las mascotas se evaporan.</a:t>
             </a:r>
           </a:p>
           <a:p>
@@ -8192,7 +11317,39 @@
                 </a:solidFill>
                 <a:latin typeface="Calibri"/>
               </a:rPr>
-              <a:t>–   Se trabaja con tres mascotas de prueba: M001 Firulais, canino, 4 años, dueño CC 1144556677; M002 Michi, felino, 2 años, dueño CC 1098765432; M003 Pelusa, felino, 1 año, dueño CC 1052233445.</a:t>
+              <a:t>–   Guardar en disco significa convertir cada objeto Mascota en texto y escribirlo en un archivo que queda en el computador.</a:t>
+            </a:r>
+          </a:p>
+          <a:p>
+            <a:pPr>
+              <a:spcAft>
+                <a:spcPts val="800"/>
+              </a:spcAft>
+            </a:pPr>
+            <a:r>
+              <a:rPr sz="2000" b="0" i="0">
+                <a:solidFill>
+                  <a:srgbClr val="333333"/>
+                </a:solidFill>
+                <a:latin typeface="Calibri"/>
+              </a:rPr>
+              <a:t>–   Un.txt es texto libre, sirve para una bitácora o un log; un.csv es texto también</a:t>
+            </a:r>
+          </a:p>
+          <a:p>
+            <a:pPr>
+              <a:spcAft>
+                <a:spcPts val="800"/>
+              </a:spcAft>
+            </a:pPr>
+            <a:r>
+              <a:rPr sz="2000" b="0" i="0">
+                <a:solidFill>
+                  <a:srgbClr val="333333"/>
+                </a:solidFill>
+                <a:latin typeface="Calibri"/>
+              </a:rPr>
+              <a:t>–   Pero con una estructura tabular acordada: una línea por registro, campos separados por un carácter separador y, opcionalmente, una primera línea de encabezado que documenta el orden de las columnas.</a:t>
             </a:r>
           </a:p>
         </p:txBody>
@@ -8373,111 +11530,21 @@
                 </a:solidFill>
                 <a:latin typeface="Calibri"/>
               </a:rPr>
-              <a:t>Taller PI — pasos guiados</a:t>
-            </a:r>
-          </a:p>
-        </p:txBody>
-      </p:sp>
-      <p:sp>
-        <p:nvSpPr>
-          <p:cNvPr id="5" name="Rounded Rectangle 4"/>
-          <p:cNvSpPr/>
-          <p:nvPr/>
-        </p:nvSpPr>
-        <p:spPr>
-          <a:xfrm>
-            <a:off x="457200" y="1234440"/>
-            <a:ext cx="11277295" cy="950976"/>
-          </a:xfrm>
-          <a:prstGeom prst="roundRect">
-            <a:avLst>
-              <a:gd name="adj" fmla="val 12000"/>
-            </a:avLst>
-          </a:prstGeom>
-          <a:solidFill>
-            <a:srgbClr val="F2F2F2"/>
-          </a:solidFill>
-          <a:ln>
-            <a:noFill/>
-          </a:ln>
-        </p:spPr>
-        <p:style>
-          <a:lnRef idx="1">
-            <a:schemeClr val="accent1"/>
-          </a:lnRef>
-          <a:fillRef idx="3">
-            <a:schemeClr val="accent1"/>
-          </a:fillRef>
-          <a:effectRef idx="2">
-            <a:schemeClr val="accent1"/>
-          </a:effectRef>
-          <a:fontRef idx="minor">
-            <a:schemeClr val="lt1"/>
-          </a:fontRef>
-        </p:style>
-        <p:txBody>
-          <a:bodyPr rtlCol="0" anchor="ctr"/>
-          <a:lstStyle/>
-          <a:p>
-            <a:pPr algn="ctr"/>
-          </a:p>
-        </p:txBody>
-      </p:sp>
-      <p:sp>
-        <p:nvSpPr>
-          <p:cNvPr id="6" name="Rounded Rectangle 5"/>
-          <p:cNvSpPr/>
-          <p:nvPr/>
-        </p:nvSpPr>
-        <p:spPr>
-          <a:xfrm>
-            <a:off x="594360" y="1490472"/>
-            <a:ext cx="438912" cy="438912"/>
-          </a:xfrm>
-          <a:prstGeom prst="roundRect">
-            <a:avLst>
-              <a:gd name="adj" fmla="val 12000"/>
-            </a:avLst>
-          </a:prstGeom>
-          <a:solidFill>
-            <a:srgbClr val="095292"/>
-          </a:solidFill>
-          <a:ln>
-            <a:noFill/>
-          </a:ln>
-        </p:spPr>
-        <p:style>
-          <a:lnRef idx="1">
-            <a:schemeClr val="accent1"/>
-          </a:lnRef>
-          <a:fillRef idx="3">
-            <a:schemeClr val="accent1"/>
-          </a:fillRef>
-          <a:effectRef idx="2">
-            <a:schemeClr val="accent1"/>
-          </a:effectRef>
-          <a:fontRef idx="minor">
-            <a:schemeClr val="lt1"/>
-          </a:fontRef>
-        </p:style>
-        <p:txBody>
-          <a:bodyPr rtlCol="0" anchor="ctr"/>
-          <a:lstStyle/>
-          <a:p>
-            <a:pPr algn="ctr"/>
-          </a:p>
-        </p:txBody>
-      </p:sp>
-      <p:sp>
-        <p:nvSpPr>
-          <p:cNvPr id="7" name="TextBox 6"/>
+              <a:t>Persistencia es lograr que los datos sobrevivan al proceso que los creó (2/2)</a:t>
+            </a:r>
+          </a:p>
+        </p:txBody>
+      </p:sp>
+      <p:sp>
+        <p:nvSpPr>
+          <p:cNvPr id="5" name="TextBox 4"/>
           <p:cNvSpPr txBox="1"/>
           <p:nvPr/>
         </p:nvSpPr>
         <p:spPr>
           <a:xfrm>
-            <a:off x="594360" y="1490472"/>
-            <a:ext cx="438912" cy="438912"/>
+            <a:off x="457200" y="1170432"/>
+            <a:ext cx="11277295" cy="5230368"/>
           </a:xfrm>
           <a:prstGeom prst="rect">
             <a:avLst/>
@@ -8485,677 +11552,79 @@
           <a:noFill/>
         </p:spPr>
         <p:txBody>
-          <a:bodyPr wrap="square" anchor="ctr"/>
-          <a:lstStyle/>
-          <a:p>
-            <a:pPr algn="ctr"/>
-            <a:r>
-              <a:rPr sz="1600" b="1" i="0">
-                <a:solidFill>
-                  <a:srgbClr val="FFFFFF"/>
-                </a:solidFill>
-                <a:latin typeface="Calibri"/>
-              </a:rPr>
-              <a:t>1</a:t>
-            </a:r>
-          </a:p>
-        </p:txBody>
-      </p:sp>
-      <p:sp>
-        <p:nvSpPr>
-          <p:cNvPr id="8" name="TextBox 7"/>
-          <p:cNvSpPr txBox="1"/>
-          <p:nvPr/>
-        </p:nvSpPr>
-        <p:spPr>
-          <a:xfrm>
-            <a:off x="1188720" y="1325880"/>
-            <a:ext cx="10271455" cy="786384"/>
-          </a:xfrm>
-          <a:prstGeom prst="rect">
-            <a:avLst/>
-          </a:prstGeom>
-          <a:noFill/>
-        </p:spPr>
-        <p:txBody>
-          <a:bodyPr wrap="square" anchor="ctr"/>
-          <a:lstStyle/>
-          <a:p>
-            <a:r>
-              <a:rPr sz="1400" b="1" i="0">
-                <a:solidFill>
-                  <a:srgbClr val="095292"/>
-                </a:solidFill>
-                <a:latin typeface="Calibri"/>
-              </a:rPr>
-              <a:t>Cree el paquete vetcare.datos y dentro la clase RepositorioMascotasCSV con la constante private static final String SEPARADOR = ";", la constante ENCABEZADO con el texto id;nombre;especie;edad;cedula_dueno y un atributo Path ruta construido con Paths.get("mascotas.csv"); compile el proyecto y verifique que no hay errores rojos antes de seguir.</a:t>
-            </a:r>
-          </a:p>
-        </p:txBody>
-      </p:sp>
-      <p:sp>
-        <p:nvSpPr>
-          <p:cNvPr id="9" name="Rounded Rectangle 8"/>
-          <p:cNvSpPr/>
-          <p:nvPr/>
-        </p:nvSpPr>
-        <p:spPr>
-          <a:xfrm>
-            <a:off x="457200" y="2276856"/>
-            <a:ext cx="11277295" cy="950976"/>
-          </a:xfrm>
-          <a:prstGeom prst="roundRect">
-            <a:avLst>
-              <a:gd name="adj" fmla="val 12000"/>
-            </a:avLst>
-          </a:prstGeom>
-          <a:solidFill>
-            <a:srgbClr val="E8F4FA"/>
-          </a:solidFill>
-          <a:ln>
-            <a:noFill/>
-          </a:ln>
-        </p:spPr>
-        <p:style>
-          <a:lnRef idx="1">
-            <a:schemeClr val="accent1"/>
-          </a:lnRef>
-          <a:fillRef idx="3">
-            <a:schemeClr val="accent1"/>
-          </a:fillRef>
-          <a:effectRef idx="2">
-            <a:schemeClr val="accent1"/>
-          </a:effectRef>
-          <a:fontRef idx="minor">
-            <a:schemeClr val="lt1"/>
-          </a:fontRef>
-        </p:style>
-        <p:txBody>
-          <a:bodyPr rtlCol="0" anchor="ctr"/>
-          <a:lstStyle/>
-          <a:p>
-            <a:pPr algn="ctr"/>
-          </a:p>
-        </p:txBody>
-      </p:sp>
-      <p:sp>
-        <p:nvSpPr>
-          <p:cNvPr id="10" name="Rounded Rectangle 9"/>
-          <p:cNvSpPr/>
-          <p:nvPr/>
-        </p:nvSpPr>
-        <p:spPr>
-          <a:xfrm>
-            <a:off x="594360" y="2532888"/>
-            <a:ext cx="438912" cy="438912"/>
-          </a:xfrm>
-          <a:prstGeom prst="roundRect">
-            <a:avLst>
-              <a:gd name="adj" fmla="val 12000"/>
-            </a:avLst>
-          </a:prstGeom>
-          <a:solidFill>
-            <a:srgbClr val="095292"/>
-          </a:solidFill>
-          <a:ln>
-            <a:noFill/>
-          </a:ln>
-        </p:spPr>
-        <p:style>
-          <a:lnRef idx="1">
-            <a:schemeClr val="accent1"/>
-          </a:lnRef>
-          <a:fillRef idx="3">
-            <a:schemeClr val="accent1"/>
-          </a:fillRef>
-          <a:effectRef idx="2">
-            <a:schemeClr val="accent1"/>
-          </a:effectRef>
-          <a:fontRef idx="minor">
-            <a:schemeClr val="lt1"/>
-          </a:fontRef>
-        </p:style>
-        <p:txBody>
-          <a:bodyPr rtlCol="0" anchor="ctr"/>
-          <a:lstStyle/>
-          <a:p>
-            <a:pPr algn="ctr"/>
-          </a:p>
-        </p:txBody>
-      </p:sp>
-      <p:sp>
-        <p:nvSpPr>
-          <p:cNvPr id="11" name="TextBox 10"/>
-          <p:cNvSpPr txBox="1"/>
-          <p:nvPr/>
-        </p:nvSpPr>
-        <p:spPr>
-          <a:xfrm>
-            <a:off x="594360" y="2532888"/>
-            <a:ext cx="438912" cy="438912"/>
-          </a:xfrm>
-          <a:prstGeom prst="rect">
-            <a:avLst/>
-          </a:prstGeom>
-          <a:noFill/>
-        </p:spPr>
-        <p:txBody>
-          <a:bodyPr wrap="square" anchor="ctr"/>
-          <a:lstStyle/>
-          <a:p>
-            <a:pPr algn="ctr"/>
-            <a:r>
-              <a:rPr sz="1600" b="1" i="0">
-                <a:solidFill>
-                  <a:srgbClr val="FFFFFF"/>
-                </a:solidFill>
-                <a:latin typeface="Calibri"/>
-              </a:rPr>
-              <a:t>2</a:t>
-            </a:r>
-          </a:p>
-        </p:txBody>
-      </p:sp>
-      <p:sp>
-        <p:nvSpPr>
-          <p:cNvPr id="12" name="TextBox 11"/>
-          <p:cNvSpPr txBox="1"/>
-          <p:nvPr/>
-        </p:nvSpPr>
-        <p:spPr>
-          <a:xfrm>
-            <a:off x="1188720" y="2368296"/>
-            <a:ext cx="10271455" cy="786384"/>
-          </a:xfrm>
-          <a:prstGeom prst="rect">
-            <a:avLst/>
-          </a:prstGeom>
-          <a:noFill/>
-        </p:spPr>
-        <p:txBody>
-          <a:bodyPr wrap="square" anchor="ctr"/>
-          <a:lstStyle/>
-          <a:p>
-            <a:r>
-              <a:rPr sz="1400" b="1" i="0">
-                <a:solidFill>
-                  <a:srgbClr val="095292"/>
-                </a:solidFill>
-                <a:latin typeface="Calibri"/>
-              </a:rPr>
-              <a:t>Implemente guardar(List&lt;Mascota&gt;) usando try-with-resources: escriba el encabezado, recorra la lista y escriba una línea por mascota; ejecute, abra mascotas.csv en el Bloc de notas y verifique que tiene exactamente tantas líneas como mascotas más una, y el mismo número de punto y coma en todas.</a:t>
-            </a:r>
-          </a:p>
-        </p:txBody>
-      </p:sp>
-      <p:sp>
-        <p:nvSpPr>
-          <p:cNvPr id="13" name="Rounded Rectangle 12"/>
-          <p:cNvSpPr/>
-          <p:nvPr/>
-        </p:nvSpPr>
-        <p:spPr>
-          <a:xfrm>
-            <a:off x="457200" y="3319272"/>
-            <a:ext cx="11277295" cy="950976"/>
-          </a:xfrm>
-          <a:prstGeom prst="roundRect">
-            <a:avLst>
-              <a:gd name="adj" fmla="val 12000"/>
-            </a:avLst>
-          </a:prstGeom>
-          <a:solidFill>
-            <a:srgbClr val="F2F2F2"/>
-          </a:solidFill>
-          <a:ln>
-            <a:noFill/>
-          </a:ln>
-        </p:spPr>
-        <p:style>
-          <a:lnRef idx="1">
-            <a:schemeClr val="accent1"/>
-          </a:lnRef>
-          <a:fillRef idx="3">
-            <a:schemeClr val="accent1"/>
-          </a:fillRef>
-          <a:effectRef idx="2">
-            <a:schemeClr val="accent1"/>
-          </a:effectRef>
-          <a:fontRef idx="minor">
-            <a:schemeClr val="lt1"/>
-          </a:fontRef>
-        </p:style>
-        <p:txBody>
-          <a:bodyPr rtlCol="0" anchor="ctr"/>
-          <a:lstStyle/>
-          <a:p>
-            <a:pPr algn="ctr"/>
-          </a:p>
-        </p:txBody>
-      </p:sp>
-      <p:sp>
-        <p:nvSpPr>
-          <p:cNvPr id="14" name="Rounded Rectangle 13"/>
-          <p:cNvSpPr/>
-          <p:nvPr/>
-        </p:nvSpPr>
-        <p:spPr>
-          <a:xfrm>
-            <a:off x="594360" y="3575304"/>
-            <a:ext cx="438912" cy="438912"/>
-          </a:xfrm>
-          <a:prstGeom prst="roundRect">
-            <a:avLst>
-              <a:gd name="adj" fmla="val 12000"/>
-            </a:avLst>
-          </a:prstGeom>
-          <a:solidFill>
-            <a:srgbClr val="095292"/>
-          </a:solidFill>
-          <a:ln>
-            <a:noFill/>
-          </a:ln>
-        </p:spPr>
-        <p:style>
-          <a:lnRef idx="1">
-            <a:schemeClr val="accent1"/>
-          </a:lnRef>
-          <a:fillRef idx="3">
-            <a:schemeClr val="accent1"/>
-          </a:fillRef>
-          <a:effectRef idx="2">
-            <a:schemeClr val="accent1"/>
-          </a:effectRef>
-          <a:fontRef idx="minor">
-            <a:schemeClr val="lt1"/>
-          </a:fontRef>
-        </p:style>
-        <p:txBody>
-          <a:bodyPr rtlCol="0" anchor="ctr"/>
-          <a:lstStyle/>
-          <a:p>
-            <a:pPr algn="ctr"/>
-          </a:p>
-        </p:txBody>
-      </p:sp>
-      <p:sp>
-        <p:nvSpPr>
-          <p:cNvPr id="15" name="TextBox 14"/>
-          <p:cNvSpPr txBox="1"/>
-          <p:nvPr/>
-        </p:nvSpPr>
-        <p:spPr>
-          <a:xfrm>
-            <a:off x="594360" y="3575304"/>
-            <a:ext cx="438912" cy="438912"/>
-          </a:xfrm>
-          <a:prstGeom prst="rect">
-            <a:avLst/>
-          </a:prstGeom>
-          <a:noFill/>
-        </p:spPr>
-        <p:txBody>
-          <a:bodyPr wrap="square" anchor="ctr"/>
-          <a:lstStyle/>
-          <a:p>
-            <a:pPr algn="ctr"/>
-            <a:r>
-              <a:rPr sz="1600" b="1" i="0">
-                <a:solidFill>
-                  <a:srgbClr val="FFFFFF"/>
-                </a:solidFill>
-                <a:latin typeface="Calibri"/>
-              </a:rPr>
-              <a:t>3</a:t>
-            </a:r>
-          </a:p>
-        </p:txBody>
-      </p:sp>
-      <p:sp>
-        <p:nvSpPr>
-          <p:cNvPr id="16" name="TextBox 15"/>
-          <p:cNvSpPr txBox="1"/>
-          <p:nvPr/>
-        </p:nvSpPr>
-        <p:spPr>
-          <a:xfrm>
-            <a:off x="1188720" y="3410712"/>
-            <a:ext cx="10271455" cy="786384"/>
-          </a:xfrm>
-          <a:prstGeom prst="rect">
-            <a:avLst/>
-          </a:prstGeom>
-          <a:noFill/>
-        </p:spPr>
-        <p:txBody>
-          <a:bodyPr wrap="square" anchor="ctr"/>
-          <a:lstStyle/>
-          <a:p>
-            <a:r>
-              <a:rPr sz="1400" b="1" i="0">
-                <a:solidFill>
-                  <a:srgbClr val="095292"/>
-                </a:solidFill>
-                <a:latin typeface="Calibri"/>
-              </a:rPr>
-              <a:t>Implemente cargar() de forma defensiva: si el archivo no existe devuelve una lista vacía, descarta la línea de encabezado, ignora las líneas que no tengan cinco campos e ignora las que traigan una edad no numérica, avisando por consola el número de la línea; compruébelo dañando a propósito una línea del archivo y volviendo a ejecutar.</a:t>
-            </a:r>
-          </a:p>
-        </p:txBody>
-      </p:sp>
-      <p:sp>
-        <p:nvSpPr>
-          <p:cNvPr id="17" name="Rounded Rectangle 16"/>
-          <p:cNvSpPr/>
-          <p:nvPr/>
-        </p:nvSpPr>
-        <p:spPr>
-          <a:xfrm>
-            <a:off x="457200" y="4361688"/>
-            <a:ext cx="11277295" cy="950976"/>
-          </a:xfrm>
-          <a:prstGeom prst="roundRect">
-            <a:avLst>
-              <a:gd name="adj" fmla="val 12000"/>
-            </a:avLst>
-          </a:prstGeom>
-          <a:solidFill>
-            <a:srgbClr val="E8F4FA"/>
-          </a:solidFill>
-          <a:ln>
-            <a:noFill/>
-          </a:ln>
-        </p:spPr>
-        <p:style>
-          <a:lnRef idx="1">
-            <a:schemeClr val="accent1"/>
-          </a:lnRef>
-          <a:fillRef idx="3">
-            <a:schemeClr val="accent1"/>
-          </a:fillRef>
-          <a:effectRef idx="2">
-            <a:schemeClr val="accent1"/>
-          </a:effectRef>
-          <a:fontRef idx="minor">
-            <a:schemeClr val="lt1"/>
-          </a:fontRef>
-        </p:style>
-        <p:txBody>
-          <a:bodyPr rtlCol="0" anchor="ctr"/>
-          <a:lstStyle/>
-          <a:p>
-            <a:pPr algn="ctr"/>
-          </a:p>
-        </p:txBody>
-      </p:sp>
-      <p:sp>
-        <p:nvSpPr>
-          <p:cNvPr id="18" name="Rounded Rectangle 17"/>
-          <p:cNvSpPr/>
-          <p:nvPr/>
-        </p:nvSpPr>
-        <p:spPr>
-          <a:xfrm>
-            <a:off x="594360" y="4617720"/>
-            <a:ext cx="438912" cy="438912"/>
-          </a:xfrm>
-          <a:prstGeom prst="roundRect">
-            <a:avLst>
-              <a:gd name="adj" fmla="val 12000"/>
-            </a:avLst>
-          </a:prstGeom>
-          <a:solidFill>
-            <a:srgbClr val="095292"/>
-          </a:solidFill>
-          <a:ln>
-            <a:noFill/>
-          </a:ln>
-        </p:spPr>
-        <p:style>
-          <a:lnRef idx="1">
-            <a:schemeClr val="accent1"/>
-          </a:lnRef>
-          <a:fillRef idx="3">
-            <a:schemeClr val="accent1"/>
-          </a:fillRef>
-          <a:effectRef idx="2">
-            <a:schemeClr val="accent1"/>
-          </a:effectRef>
-          <a:fontRef idx="minor">
-            <a:schemeClr val="lt1"/>
-          </a:fontRef>
-        </p:style>
-        <p:txBody>
-          <a:bodyPr rtlCol="0" anchor="ctr"/>
-          <a:lstStyle/>
-          <a:p>
-            <a:pPr algn="ctr"/>
-          </a:p>
-        </p:txBody>
-      </p:sp>
-      <p:sp>
-        <p:nvSpPr>
-          <p:cNvPr id="19" name="TextBox 18"/>
-          <p:cNvSpPr txBox="1"/>
-          <p:nvPr/>
-        </p:nvSpPr>
-        <p:spPr>
-          <a:xfrm>
-            <a:off x="594360" y="4617720"/>
-            <a:ext cx="438912" cy="438912"/>
-          </a:xfrm>
-          <a:prstGeom prst="rect">
-            <a:avLst/>
-          </a:prstGeom>
-          <a:noFill/>
-        </p:spPr>
-        <p:txBody>
-          <a:bodyPr wrap="square" anchor="ctr"/>
-          <a:lstStyle/>
-          <a:p>
-            <a:pPr algn="ctr"/>
-            <a:r>
-              <a:rPr sz="1600" b="1" i="0">
-                <a:solidFill>
-                  <a:srgbClr val="FFFFFF"/>
-                </a:solidFill>
-                <a:latin typeface="Calibri"/>
-              </a:rPr>
-              <a:t>4</a:t>
-            </a:r>
-          </a:p>
-        </p:txBody>
-      </p:sp>
-      <p:sp>
-        <p:nvSpPr>
-          <p:cNvPr id="20" name="TextBox 19"/>
-          <p:cNvSpPr txBox="1"/>
-          <p:nvPr/>
-        </p:nvSpPr>
-        <p:spPr>
-          <a:xfrm>
-            <a:off x="1188720" y="4453128"/>
-            <a:ext cx="10271455" cy="786384"/>
-          </a:xfrm>
-          <a:prstGeom prst="rect">
-            <a:avLst/>
-          </a:prstGeom>
-          <a:noFill/>
-        </p:spPr>
-        <p:txBody>
-          <a:bodyPr wrap="square" anchor="ctr"/>
-          <a:lstStyle/>
-          <a:p>
-            <a:r>
-              <a:rPr sz="1500" b="1" i="0">
-                <a:solidFill>
-                  <a:srgbClr val="095292"/>
-                </a:solidFill>
-                <a:latin typeface="Calibri"/>
-              </a:rPr>
-              <a:t>Conecte el repositorio al ciclo de vida de la aplicación: cargar() al arrancar antes de mostrar la ventana y guardar() al cerrar; cierre la aplicación, vuelva a abrirla y verifique que el conteo de mascotas en la tabla es el mismo que había antes de cerrar.</a:t>
-            </a:r>
-          </a:p>
-        </p:txBody>
-      </p:sp>
-      <p:sp>
-        <p:nvSpPr>
-          <p:cNvPr id="21" name="Rounded Rectangle 20"/>
-          <p:cNvSpPr/>
-          <p:nvPr/>
-        </p:nvSpPr>
-        <p:spPr>
-          <a:xfrm>
-            <a:off x="457200" y="5404104"/>
-            <a:ext cx="11277295" cy="950976"/>
-          </a:xfrm>
-          <a:prstGeom prst="roundRect">
-            <a:avLst>
-              <a:gd name="adj" fmla="val 12000"/>
-            </a:avLst>
-          </a:prstGeom>
-          <a:solidFill>
-            <a:srgbClr val="F2F2F2"/>
-          </a:solidFill>
-          <a:ln>
-            <a:noFill/>
-          </a:ln>
-        </p:spPr>
-        <p:style>
-          <a:lnRef idx="1">
-            <a:schemeClr val="accent1"/>
-          </a:lnRef>
-          <a:fillRef idx="3">
-            <a:schemeClr val="accent1"/>
-          </a:fillRef>
-          <a:effectRef idx="2">
-            <a:schemeClr val="accent1"/>
-          </a:effectRef>
-          <a:fontRef idx="minor">
-            <a:schemeClr val="lt1"/>
-          </a:fontRef>
-        </p:style>
-        <p:txBody>
-          <a:bodyPr rtlCol="0" anchor="ctr"/>
-          <a:lstStyle/>
-          <a:p>
-            <a:pPr algn="ctr"/>
-          </a:p>
-        </p:txBody>
-      </p:sp>
-      <p:sp>
-        <p:nvSpPr>
-          <p:cNvPr id="22" name="Rounded Rectangle 21"/>
-          <p:cNvSpPr/>
-          <p:nvPr/>
-        </p:nvSpPr>
-        <p:spPr>
-          <a:xfrm>
-            <a:off x="594360" y="5660136"/>
-            <a:ext cx="438912" cy="438912"/>
-          </a:xfrm>
-          <a:prstGeom prst="roundRect">
-            <a:avLst>
-              <a:gd name="adj" fmla="val 12000"/>
-            </a:avLst>
-          </a:prstGeom>
-          <a:solidFill>
-            <a:srgbClr val="095292"/>
-          </a:solidFill>
-          <a:ln>
-            <a:noFill/>
-          </a:ln>
-        </p:spPr>
-        <p:style>
-          <a:lnRef idx="1">
-            <a:schemeClr val="accent1"/>
-          </a:lnRef>
-          <a:fillRef idx="3">
-            <a:schemeClr val="accent1"/>
-          </a:fillRef>
-          <a:effectRef idx="2">
-            <a:schemeClr val="accent1"/>
-          </a:effectRef>
-          <a:fontRef idx="minor">
-            <a:schemeClr val="lt1"/>
-          </a:fontRef>
-        </p:style>
-        <p:txBody>
-          <a:bodyPr rtlCol="0" anchor="ctr"/>
-          <a:lstStyle/>
-          <a:p>
-            <a:pPr algn="ctr"/>
-          </a:p>
-        </p:txBody>
-      </p:sp>
-      <p:sp>
-        <p:nvSpPr>
-          <p:cNvPr id="23" name="TextBox 22"/>
-          <p:cNvSpPr txBox="1"/>
-          <p:nvPr/>
-        </p:nvSpPr>
-        <p:spPr>
-          <a:xfrm>
-            <a:off x="594360" y="5660136"/>
-            <a:ext cx="438912" cy="438912"/>
-          </a:xfrm>
-          <a:prstGeom prst="rect">
-            <a:avLst/>
-          </a:prstGeom>
-          <a:noFill/>
-        </p:spPr>
-        <p:txBody>
-          <a:bodyPr wrap="square" anchor="ctr"/>
-          <a:lstStyle/>
-          <a:p>
-            <a:pPr algn="ctr"/>
-            <a:r>
-              <a:rPr sz="1600" b="1" i="0">
-                <a:solidFill>
-                  <a:srgbClr val="FFFFFF"/>
-                </a:solidFill>
-                <a:latin typeface="Calibri"/>
-              </a:rPr>
-              <a:t>5</a:t>
-            </a:r>
-          </a:p>
-        </p:txBody>
-      </p:sp>
-      <p:sp>
-        <p:nvSpPr>
-          <p:cNvPr id="24" name="TextBox 23"/>
-          <p:cNvSpPr txBox="1"/>
-          <p:nvPr/>
-        </p:nvSpPr>
-        <p:spPr>
-          <a:xfrm>
-            <a:off x="1188720" y="5495544"/>
-            <a:ext cx="10271455" cy="786384"/>
-          </a:xfrm>
-          <a:prstGeom prst="rect">
-            <a:avLst/>
-          </a:prstGeom>
-          <a:noFill/>
-        </p:spPr>
-        <p:txBody>
-          <a:bodyPr wrap="square" anchor="ctr"/>
-          <a:lstStyle/>
-          <a:p>
-            <a:r>
-              <a:rPr sz="1400" b="1" i="0">
-                <a:solidFill>
-                  <a:srgbClr val="095292"/>
-                </a:solidFill>
-                <a:latin typeface="Calibri"/>
-              </a:rPr>
-              <a:t>Haga una revisión asistida por IA de su método guardar(): pídale a la herramienta que señale problemas, aplique como máximo dos mejoras que usted pueda explicar en voz alta, rechace por escrito al menos una sugerencia y registre todo en REFACTOR.md con el formato 'sugerencia / la acepté o no / por qué'; vuelva a correr el flujo completo y confirme que el comportamiento es idéntico.</a:t>
-            </a:r>
-          </a:p>
-        </p:txBody>
-      </p:sp>
-      <p:sp>
-        <p:nvSpPr>
-          <p:cNvPr id="25" name="TextBox 24"/>
+          <a:bodyPr wrap="square">
+            <a:spAutoFit/>
+          </a:bodyPr>
+          <a:lstStyle/>
+          <a:p>
+            <a:pPr>
+              <a:spcAft>
+                <a:spcPts val="800"/>
+              </a:spcAft>
+            </a:pPr>
+            <a:r>
+              <a:rPr sz="2000" b="0" i="0">
+                <a:solidFill>
+                  <a:srgbClr val="333333"/>
+                </a:solidFill>
+                <a:latin typeface="Calibri"/>
+              </a:rPr>
+              <a:t>–   Para VetCare la línea acordada es M001;Firulais;Canino;4;1144556677 con encabezado id;nombre;especie;edad;cedula_dueno.</a:t>
+            </a:r>
+          </a:p>
+          <a:p>
+            <a:pPr>
+              <a:spcAft>
+                <a:spcPts val="800"/>
+              </a:spcAft>
+            </a:pPr>
+            <a:r>
+              <a:rPr sz="2000" b="0" i="0">
+                <a:solidFill>
+                  <a:srgbClr val="333333"/>
+                </a:solidFill>
+                <a:latin typeface="Calibri"/>
+              </a:rPr>
+              <a:t>–   Usamos punto y coma y no coma por dos razones muy prácticas: los nombres y las direcciones de los dueños suelen traer comas y le romperían la línea al programa</a:t>
+            </a:r>
+          </a:p>
+          <a:p>
+            <a:pPr>
+              <a:spcAft>
+                <a:spcPts val="800"/>
+              </a:spcAft>
+            </a:pPr>
+            <a:r>
+              <a:rPr sz="2000" b="0" i="0">
+                <a:solidFill>
+                  <a:srgbClr val="333333"/>
+                </a:solidFill>
+                <a:latin typeface="Calibri"/>
+              </a:rPr>
+              <a:t>–   Y el Excel en configuración regional de Colombia abre los archivos separados por punto y coma sin pedir nada.</a:t>
+            </a:r>
+          </a:p>
+          <a:p>
+            <a:pPr>
+              <a:spcAft>
+                <a:spcPts val="800"/>
+              </a:spcAft>
+            </a:pPr>
+            <a:r>
+              <a:rPr sz="2000" b="0" i="0">
+                <a:solidFill>
+                  <a:srgbClr val="333333"/>
+                </a:solidFill>
+                <a:latin typeface="Calibri"/>
+              </a:rPr>
+              <a:t>–   La ventaja enorme del CSV frente a un formato binario es que se puede abrir en el Bloc de notas y ver el dato: cuando algo falla, el estudiante ve con sus ojos si el problema está en lo que escribió o en cómo lo leyó.</a:t>
+            </a:r>
+          </a:p>
+        </p:txBody>
+      </p:sp>
+      <p:sp>
+        <p:nvSpPr>
+          <p:cNvPr id="6" name="TextBox 5"/>
           <p:cNvSpPr txBox="1"/>
           <p:nvPr/>
         </p:nvSpPr>

--- a/Programacion II/Clases/Clase 9 - Refactorizacion con IA y persistencia de archivos/Presentacion.pptx
+++ b/Programacion II/Clases/Clase 9 - Refactorizacion con IA y persistencia de archivos/Presentacion.pptx
@@ -11,38 +11,32 @@
     <p:sldId id="259" r:id="rId10"/>
     <p:sldId id="260" r:id="rId11"/>
     <p:sldId id="261" r:id="rId12"/>
-    <p:sldId id="262" r:id="rId13"/>
-    <p:sldId id="263" r:id="rId14"/>
-    <p:sldId id="264" r:id="rId15"/>
-    <p:sldId id="265" r:id="rId16"/>
-    <p:sldId id="266" r:id="rId17"/>
-    <p:sldId id="267" r:id="rId18"/>
-    <p:sldId id="268" r:id="rId19"/>
-    <p:sldId id="269" r:id="rId20"/>
-    <p:sldId id="270" r:id="rId21"/>
-    <p:sldId id="271" r:id="rId22"/>
-    <p:sldId id="272" r:id="rId23"/>
-    <p:sldId id="273" r:id="rId24"/>
-    <p:sldId id="274" r:id="rId25"/>
-    <p:sldId id="275" r:id="rId26"/>
-    <p:sldId id="276" r:id="rId27"/>
-    <p:sldId id="277" r:id="rId28"/>
-    <p:sldId id="278" r:id="rId29"/>
-    <p:sldId id="279" r:id="rId30"/>
-    <p:sldId id="280" r:id="rId31"/>
-    <p:sldId id="281" r:id="rId32"/>
-    <p:sldId id="282" r:id="rId33"/>
-    <p:sldId id="283" r:id="rId34"/>
-    <p:sldId id="284" r:id="rId35"/>
-    <p:sldId id="285" r:id="rId36"/>
-    <p:sldId id="286" r:id="rId37"/>
-    <p:sldId id="287" r:id="rId38"/>
-    <p:sldId id="288" r:id="rId39"/>
-    <p:sldId id="289" r:id="rId40"/>
-    <p:sldId id="290" r:id="rId41"/>
-    <p:sldId id="291" r:id="rId42"/>
-    <p:sldId id="292" r:id="rId43"/>
-    <p:sldId id="293" r:id="rId44"/>
+    <p:sldId id="262" r:id="rId14"/>
+    <p:sldId id="263" r:id="rId15"/>
+    <p:sldId id="264" r:id="rId16"/>
+    <p:sldId id="265" r:id="rId17"/>
+    <p:sldId id="266" r:id="rId18"/>
+    <p:sldId id="267" r:id="rId19"/>
+    <p:sldId id="268" r:id="rId20"/>
+    <p:sldId id="269" r:id="rId21"/>
+    <p:sldId id="270" r:id="rId22"/>
+    <p:sldId id="271" r:id="rId23"/>
+    <p:sldId id="272" r:id="rId24"/>
+    <p:sldId id="273" r:id="rId25"/>
+    <p:sldId id="274" r:id="rId26"/>
+    <p:sldId id="275" r:id="rId27"/>
+    <p:sldId id="276" r:id="rId28"/>
+    <p:sldId id="277" r:id="rId29"/>
+    <p:sldId id="278" r:id="rId30"/>
+    <p:sldId id="279" r:id="rId31"/>
+    <p:sldId id="280" r:id="rId32"/>
+    <p:sldId id="281" r:id="rId33"/>
+    <p:sldId id="282" r:id="rId34"/>
+    <p:sldId id="283" r:id="rId35"/>
+    <p:sldId id="284" r:id="rId36"/>
+    <p:sldId id="285" r:id="rId37"/>
+    <p:sldId id="286" r:id="rId38"/>
+    <p:sldId id="287" r:id="rId39"/>
   </p:sldIdLst>
   <p:sldSz cx="12191695" cy="6858000" type="screen4x3"/>
   <p:notesSz cx="6858000" cy="9144000"/>
@@ -142,6 +136,648 @@
     </a:lvl9pPr>
   </p:defaultTextStyle>
 </p:presentation>
+</file>
+
+<file path=ppt/notesMasters/notesMaster1.xml><?xml version="1.0" encoding="utf-8"?>
+<p:notesMaster xmlns:a="http://schemas.openxmlformats.org/drawingml/2006/main" xmlns:p="http://schemas.openxmlformats.org/presentationml/2006/main" xmlns:r="http://schemas.openxmlformats.org/officeDocument/2006/relationships">
+  <p:cSld>
+    <p:bg>
+      <p:bgRef idx="1001">
+        <a:schemeClr val="bg1"/>
+      </p:bgRef>
+    </p:bg>
+    <p:spTree>
+      <p:nvGrpSpPr>
+        <p:cNvPr id="1" name=""/>
+        <p:cNvGrpSpPr/>
+        <p:nvPr/>
+      </p:nvGrpSpPr>
+      <p:grpSpPr>
+        <a:xfrm>
+          <a:off x="0" y="0"/>
+          <a:ext cx="0" cy="0"/>
+          <a:chOff x="0" y="0"/>
+          <a:chExt cx="0" cy="0"/>
+        </a:xfrm>
+      </p:grpSpPr>
+      <p:sp>
+        <p:nvSpPr>
+          <p:cNvPr id="2" name="Header Placeholder 1"/>
+          <p:cNvSpPr>
+            <a:spLocks noGrp="1"/>
+          </p:cNvSpPr>
+          <p:nvPr>
+            <p:ph type="hdr" sz="quarter"/>
+          </p:nvPr>
+        </p:nvSpPr>
+        <p:spPr>
+          <a:xfrm>
+            <a:off x="0" y="0"/>
+            <a:ext cx="2971800" cy="457200"/>
+          </a:xfrm>
+          <a:prstGeom prst="rect">
+            <a:avLst/>
+          </a:prstGeom>
+        </p:spPr>
+        <p:txBody>
+          <a:bodyPr vert="horz" lIns="91440" tIns="45720" rIns="91440" bIns="45720" rtlCol="0"/>
+          <a:lstStyle>
+            <a:lvl1pPr algn="l">
+              <a:defRPr sz="1200"/>
+            </a:lvl1pPr>
+          </a:lstStyle>
+          <a:p>
+            <a:endParaRPr lang="en-US"/>
+          </a:p>
+        </p:txBody>
+      </p:sp>
+      <p:sp>
+        <p:nvSpPr>
+          <p:cNvPr id="3" name="Date Placeholder 2"/>
+          <p:cNvSpPr>
+            <a:spLocks noGrp="1"/>
+          </p:cNvSpPr>
+          <p:nvPr>
+            <p:ph type="dt" idx="1"/>
+          </p:nvPr>
+        </p:nvSpPr>
+        <p:spPr>
+          <a:xfrm>
+            <a:off x="3884613" y="0"/>
+            <a:ext cx="2971800" cy="457200"/>
+          </a:xfrm>
+          <a:prstGeom prst="rect">
+            <a:avLst/>
+          </a:prstGeom>
+        </p:spPr>
+        <p:txBody>
+          <a:bodyPr vert="horz" lIns="91440" tIns="45720" rIns="91440" bIns="45720" rtlCol="0"/>
+          <a:lstStyle>
+            <a:lvl1pPr algn="r">
+              <a:defRPr sz="1200"/>
+            </a:lvl1pPr>
+          </a:lstStyle>
+          <a:p>
+            <a:fld id="{0F89C1C7-3DCD-1040-A9CF-14679D8B5DDD}" type="datetimeFigureOut">
+              <a:rPr lang="en-US" smtClean="0"/>
+              <a:t>10/17/16</a:t>
+            </a:fld>
+            <a:endParaRPr lang="en-US"/>
+          </a:p>
+        </p:txBody>
+      </p:sp>
+      <p:sp>
+        <p:nvSpPr>
+          <p:cNvPr id="4" name="Slide Image Placeholder 3"/>
+          <p:cNvSpPr>
+            <a:spLocks noGrp="1" noRot="1" noChangeAspect="1"/>
+          </p:cNvSpPr>
+          <p:nvPr>
+            <p:ph type="sldImg" idx="2"/>
+          </p:nvPr>
+        </p:nvSpPr>
+        <p:spPr>
+          <a:xfrm>
+            <a:off x="1143000" y="685800"/>
+            <a:ext cx="4572000" cy="3429000"/>
+          </a:xfrm>
+          <a:prstGeom prst="rect">
+            <a:avLst/>
+          </a:prstGeom>
+          <a:noFill/>
+          <a:ln w="12700">
+            <a:solidFill>
+              <a:prstClr val="black"/>
+            </a:solidFill>
+          </a:ln>
+        </p:spPr>
+        <p:txBody>
+          <a:bodyPr vert="horz" lIns="91440" tIns="45720" rIns="91440" bIns="45720" rtlCol="0" anchor="ctr"/>
+          <a:lstStyle/>
+          <a:p>
+            <a:endParaRPr lang="en-US"/>
+          </a:p>
+        </p:txBody>
+      </p:sp>
+      <p:sp>
+        <p:nvSpPr>
+          <p:cNvPr id="5" name="Notes Placeholder 4"/>
+          <p:cNvSpPr>
+            <a:spLocks noGrp="1"/>
+          </p:cNvSpPr>
+          <p:nvPr>
+            <p:ph type="body" sz="quarter" idx="3"/>
+          </p:nvPr>
+        </p:nvSpPr>
+        <p:spPr>
+          <a:xfrm>
+            <a:off x="685800" y="4343400"/>
+            <a:ext cx="5486400" cy="4114800"/>
+          </a:xfrm>
+          <a:prstGeom prst="rect">
+            <a:avLst/>
+          </a:prstGeom>
+        </p:spPr>
+        <p:txBody>
+          <a:bodyPr vert="horz" lIns="91440" tIns="45720" rIns="91440" bIns="45720" rtlCol="0"/>
+          <a:lstStyle/>
+          <a:p>
+            <a:pPr lvl="0"/>
+            <a:r>
+              <a:rPr lang="en-US" smtClean="0"/>
+              <a:t>Click to edit Master text styles</a:t>
+            </a:r>
+          </a:p>
+          <a:p>
+            <a:pPr lvl="1"/>
+            <a:r>
+              <a:rPr lang="en-US" smtClean="0"/>
+              <a:t>Second level</a:t>
+            </a:r>
+          </a:p>
+          <a:p>
+            <a:pPr lvl="2"/>
+            <a:r>
+              <a:rPr lang="en-US" smtClean="0"/>
+              <a:t>Third level</a:t>
+            </a:r>
+          </a:p>
+          <a:p>
+            <a:pPr lvl="3"/>
+            <a:r>
+              <a:rPr lang="en-US" smtClean="0"/>
+              <a:t>Fourth level</a:t>
+            </a:r>
+          </a:p>
+          <a:p>
+            <a:pPr lvl="4"/>
+            <a:r>
+              <a:rPr lang="en-US" smtClean="0"/>
+              <a:t>Fifth level</a:t>
+            </a:r>
+            <a:endParaRPr lang="en-US"/>
+          </a:p>
+        </p:txBody>
+      </p:sp>
+      <p:sp>
+        <p:nvSpPr>
+          <p:cNvPr id="6" name="Footer Placeholder 5"/>
+          <p:cNvSpPr>
+            <a:spLocks noGrp="1"/>
+          </p:cNvSpPr>
+          <p:nvPr>
+            <p:ph type="ftr" sz="quarter" idx="4"/>
+          </p:nvPr>
+        </p:nvSpPr>
+        <p:spPr>
+          <a:xfrm>
+            <a:off x="0" y="8685213"/>
+            <a:ext cx="2971800" cy="457200"/>
+          </a:xfrm>
+          <a:prstGeom prst="rect">
+            <a:avLst/>
+          </a:prstGeom>
+        </p:spPr>
+        <p:txBody>
+          <a:bodyPr vert="horz" lIns="91440" tIns="45720" rIns="91440" bIns="45720" rtlCol="0" anchor="b"/>
+          <a:lstStyle>
+            <a:lvl1pPr algn="l">
+              <a:defRPr sz="1200"/>
+            </a:lvl1pPr>
+          </a:lstStyle>
+          <a:p>
+            <a:endParaRPr lang="en-US"/>
+          </a:p>
+        </p:txBody>
+      </p:sp>
+      <p:sp>
+        <p:nvSpPr>
+          <p:cNvPr id="7" name="Slide Number Placeholder 6"/>
+          <p:cNvSpPr>
+            <a:spLocks noGrp="1"/>
+          </p:cNvSpPr>
+          <p:nvPr>
+            <p:ph type="sldNum" sz="quarter" idx="5"/>
+          </p:nvPr>
+        </p:nvSpPr>
+        <p:spPr>
+          <a:xfrm>
+            <a:off x="3884613" y="8685213"/>
+            <a:ext cx="2971800" cy="457200"/>
+          </a:xfrm>
+          <a:prstGeom prst="rect">
+            <a:avLst/>
+          </a:prstGeom>
+        </p:spPr>
+        <p:txBody>
+          <a:bodyPr vert="horz" lIns="91440" tIns="45720" rIns="91440" bIns="45720" rtlCol="0" anchor="b"/>
+          <a:lstStyle>
+            <a:lvl1pPr algn="r">
+              <a:defRPr sz="1200"/>
+            </a:lvl1pPr>
+          </a:lstStyle>
+          <a:p>
+            <a:fld id="{BB5E49A5-4136-284D-997B-48E1D791AD67}" type="slidenum">
+              <a:rPr lang="en-US" smtClean="0"/>
+              <a:t>‹#›</a:t>
+            </a:fld>
+            <a:endParaRPr lang="en-US"/>
+          </a:p>
+        </p:txBody>
+      </p:sp>
+    </p:spTree>
+    <p:extLst>
+      <p:ext uri="{BB962C8B-B14F-4D97-AF65-F5344CB8AC3E}">
+        <p14:creationId xmlns:p14="http://schemas.microsoft.com/office/powerpoint/2010/main" val="2623252185"/>
+      </p:ext>
+    </p:extLst>
+  </p:cSld>
+  <p:clrMap bg1="lt1" tx1="dk1" bg2="lt2" tx2="dk2" accent1="accent1" accent2="accent2" accent3="accent3" accent4="accent4" accent5="accent5" accent6="accent6" hlink="hlink" folHlink="folHlink"/>
+  <p:notesStyle>
+    <a:lvl1pPr marL="0" algn="l" defTabSz="457200" rtl="0" eaLnBrk="1" latinLnBrk="0" hangingPunct="1">
+      <a:defRPr sz="1200" kern="1200">
+        <a:solidFill>
+          <a:schemeClr val="tx1"/>
+        </a:solidFill>
+        <a:latin typeface="+mn-lt"/>
+        <a:ea typeface="+mn-ea"/>
+        <a:cs typeface="+mn-cs"/>
+      </a:defRPr>
+    </a:lvl1pPr>
+    <a:lvl2pPr marL="457200" algn="l" defTabSz="457200" rtl="0" eaLnBrk="1" latinLnBrk="0" hangingPunct="1">
+      <a:defRPr sz="1200" kern="1200">
+        <a:solidFill>
+          <a:schemeClr val="tx1"/>
+        </a:solidFill>
+        <a:latin typeface="+mn-lt"/>
+        <a:ea typeface="+mn-ea"/>
+        <a:cs typeface="+mn-cs"/>
+      </a:defRPr>
+    </a:lvl2pPr>
+    <a:lvl3pPr marL="914400" algn="l" defTabSz="457200" rtl="0" eaLnBrk="1" latinLnBrk="0" hangingPunct="1">
+      <a:defRPr sz="1200" kern="1200">
+        <a:solidFill>
+          <a:schemeClr val="tx1"/>
+        </a:solidFill>
+        <a:latin typeface="+mn-lt"/>
+        <a:ea typeface="+mn-ea"/>
+        <a:cs typeface="+mn-cs"/>
+      </a:defRPr>
+    </a:lvl3pPr>
+    <a:lvl4pPr marL="1371600" algn="l" defTabSz="457200" rtl="0" eaLnBrk="1" latinLnBrk="0" hangingPunct="1">
+      <a:defRPr sz="1200" kern="1200">
+        <a:solidFill>
+          <a:schemeClr val="tx1"/>
+        </a:solidFill>
+        <a:latin typeface="+mn-lt"/>
+        <a:ea typeface="+mn-ea"/>
+        <a:cs typeface="+mn-cs"/>
+      </a:defRPr>
+    </a:lvl4pPr>
+    <a:lvl5pPr marL="1828800" algn="l" defTabSz="457200" rtl="0" eaLnBrk="1" latinLnBrk="0" hangingPunct="1">
+      <a:defRPr sz="1200" kern="1200">
+        <a:solidFill>
+          <a:schemeClr val="tx1"/>
+        </a:solidFill>
+        <a:latin typeface="+mn-lt"/>
+        <a:ea typeface="+mn-ea"/>
+        <a:cs typeface="+mn-cs"/>
+      </a:defRPr>
+    </a:lvl5pPr>
+    <a:lvl6pPr marL="2286000" algn="l" defTabSz="457200" rtl="0" eaLnBrk="1" latinLnBrk="0" hangingPunct="1">
+      <a:defRPr sz="1200" kern="1200">
+        <a:solidFill>
+          <a:schemeClr val="tx1"/>
+        </a:solidFill>
+        <a:latin typeface="+mn-lt"/>
+        <a:ea typeface="+mn-ea"/>
+        <a:cs typeface="+mn-cs"/>
+      </a:defRPr>
+    </a:lvl6pPr>
+    <a:lvl7pPr marL="2743200" algn="l" defTabSz="457200" rtl="0" eaLnBrk="1" latinLnBrk="0" hangingPunct="1">
+      <a:defRPr sz="1200" kern="1200">
+        <a:solidFill>
+          <a:schemeClr val="tx1"/>
+        </a:solidFill>
+        <a:latin typeface="+mn-lt"/>
+        <a:ea typeface="+mn-ea"/>
+        <a:cs typeface="+mn-cs"/>
+      </a:defRPr>
+    </a:lvl7pPr>
+    <a:lvl8pPr marL="3200400" algn="l" defTabSz="457200" rtl="0" eaLnBrk="1" latinLnBrk="0" hangingPunct="1">
+      <a:defRPr sz="1200" kern="1200">
+        <a:solidFill>
+          <a:schemeClr val="tx1"/>
+        </a:solidFill>
+        <a:latin typeface="+mn-lt"/>
+        <a:ea typeface="+mn-ea"/>
+        <a:cs typeface="+mn-cs"/>
+      </a:defRPr>
+    </a:lvl8pPr>
+    <a:lvl9pPr marL="3657600" algn="l" defTabSz="457200" rtl="0" eaLnBrk="1" latinLnBrk="0" hangingPunct="1">
+      <a:defRPr sz="1200" kern="1200">
+        <a:solidFill>
+          <a:schemeClr val="tx1"/>
+        </a:solidFill>
+        <a:latin typeface="+mn-lt"/>
+        <a:ea typeface="+mn-ea"/>
+        <a:cs typeface="+mn-cs"/>
+      </a:defRPr>
+    </a:lvl9pPr>
+  </p:notesStyle>
+</p:notesMaster>
+</file>
+
+<file path=ppt/notesSlides/notesSlide1.xml><?xml version="1.0" encoding="utf-8"?>
+<p:notes xmlns:a="http://schemas.openxmlformats.org/drawingml/2006/main" xmlns:p="http://schemas.openxmlformats.org/presentationml/2006/main" xmlns:r="http://schemas.openxmlformats.org/officeDocument/2006/relationships">
+  <p:cSld>
+    <p:spTree>
+      <p:nvGrpSpPr>
+        <p:cNvPr id="1" name=""/>
+        <p:cNvGrpSpPr/>
+        <p:nvPr/>
+      </p:nvGrpSpPr>
+      <p:grpSpPr>
+        <a:xfrm>
+          <a:off x="0" y="0"/>
+          <a:ext cx="0" cy="0"/>
+          <a:chOff x="0" y="0"/>
+          <a:chExt cx="0" cy="0"/>
+        </a:xfrm>
+      </p:grpSpPr>
+      <p:sp>
+        <p:nvSpPr>
+          <p:cNvPr id="2" name="Slide Image Placeholder 1"/>
+          <p:cNvSpPr>
+            <a:spLocks noGrp="1"/>
+          </p:cNvSpPr>
+          <p:nvPr>
+            <p:ph type="sldImg" idx="2"/>
+          </p:nvPr>
+        </p:nvSpPr>
+        <p:spPr/>
+      </p:sp>
+      <p:sp>
+        <p:nvSpPr>
+          <p:cNvPr id="3" name="Notes Placeholder 2"/>
+          <p:cNvSpPr>
+            <a:spLocks noGrp="1"/>
+          </p:cNvSpPr>
+          <p:nvPr>
+            <p:ph type="body" idx="3" sz="quarter"/>
+          </p:nvPr>
+        </p:nvSpPr>
+        <p:spPr/>
+        <p:txBody>
+          <a:bodyPr/>
+          <a:lstStyle/>
+          <a:p>
+            <a:r>
+              <a:t>Quinto, el catch vacío que se traga la IOException y deja al usuario creyendo que guardó.</a:t>
+            </a:r>
+          </a:p>
+        </p:txBody>
+      </p:sp>
+      <p:sp>
+        <p:nvSpPr>
+          <p:cNvPr id="4" name="Slide Number Placeholder 3"/>
+          <p:cNvSpPr>
+            <a:spLocks noGrp="1"/>
+          </p:cNvSpPr>
+          <p:nvPr>
+            <p:ph type="sldNum" idx="5" sz="quarter"/>
+          </p:nvPr>
+        </p:nvSpPr>
+        <p:spPr/>
+      </p:sp>
+    </p:spTree>
+  </p:cSld>
+  <p:clrMapOvr>
+    <a:masterClrMapping/>
+  </p:clrMapOvr>
+</p:notes>
+</file>
+
+<file path=ppt/notesSlides/notesSlide2.xml><?xml version="1.0" encoding="utf-8"?>
+<p:notes xmlns:a="http://schemas.openxmlformats.org/drawingml/2006/main" xmlns:p="http://schemas.openxmlformats.org/presentationml/2006/main" xmlns:r="http://schemas.openxmlformats.org/officeDocument/2006/relationships">
+  <p:cSld>
+    <p:spTree>
+      <p:nvGrpSpPr>
+        <p:cNvPr id="1" name=""/>
+        <p:cNvGrpSpPr/>
+        <p:nvPr/>
+      </p:nvGrpSpPr>
+      <p:grpSpPr>
+        <a:xfrm>
+          <a:off x="0" y="0"/>
+          <a:ext cx="0" cy="0"/>
+          <a:chOff x="0" y="0"/>
+          <a:chExt cx="0" cy="0"/>
+        </a:xfrm>
+      </p:grpSpPr>
+      <p:sp>
+        <p:nvSpPr>
+          <p:cNvPr id="2" name="Slide Image Placeholder 1"/>
+          <p:cNvSpPr>
+            <a:spLocks noGrp="1"/>
+          </p:cNvSpPr>
+          <p:nvPr>
+            <p:ph type="sldImg" idx="2"/>
+          </p:nvPr>
+        </p:nvSpPr>
+        <p:spPr/>
+      </p:sp>
+      <p:sp>
+        <p:nvSpPr>
+          <p:cNvPr id="3" name="Notes Placeholder 2"/>
+          <p:cNvSpPr>
+            <a:spLocks noGrp="1"/>
+          </p:cNvSpPr>
+          <p:nvPr>
+            <p:ph type="body" idx="3" sz="quarter"/>
+          </p:nvPr>
+        </p:nvSpPr>
+        <p:spPr/>
+        <p:txBody>
+          <a:bodyPr/>
+          <a:lstStyle/>
+          <a:p>
+            <a:r>
+              <a:t>Guardar en disco significa convertir cada objeto Mascota en texto y escribirlo en un archivo que queda en el computador.</a:t>
+            </a:r>
+          </a:p>
+        </p:txBody>
+      </p:sp>
+      <p:sp>
+        <p:nvSpPr>
+          <p:cNvPr id="4" name="Slide Number Placeholder 3"/>
+          <p:cNvSpPr>
+            <a:spLocks noGrp="1"/>
+          </p:cNvSpPr>
+          <p:nvPr>
+            <p:ph type="sldNum" idx="5" sz="quarter"/>
+          </p:nvPr>
+        </p:nvSpPr>
+        <p:spPr/>
+      </p:sp>
+    </p:spTree>
+  </p:cSld>
+  <p:clrMapOvr>
+    <a:masterClrMapping/>
+  </p:clrMapOvr>
+</p:notes>
+</file>
+
+<file path=ppt/notesSlides/notesSlide3.xml><?xml version="1.0" encoding="utf-8"?>
+<p:notes xmlns:a="http://schemas.openxmlformats.org/drawingml/2006/main" xmlns:p="http://schemas.openxmlformats.org/presentationml/2006/main" xmlns:r="http://schemas.openxmlformats.org/officeDocument/2006/relationships">
+  <p:cSld>
+    <p:spTree>
+      <p:nvGrpSpPr>
+        <p:cNvPr id="1" name=""/>
+        <p:cNvGrpSpPr/>
+        <p:nvPr/>
+      </p:nvGrpSpPr>
+      <p:grpSpPr>
+        <a:xfrm>
+          <a:off x="0" y="0"/>
+          <a:ext cx="0" cy="0"/>
+          <a:chOff x="0" y="0"/>
+          <a:chExt cx="0" cy="0"/>
+        </a:xfrm>
+      </p:grpSpPr>
+      <p:sp>
+        <p:nvSpPr>
+          <p:cNvPr id="2" name="Slide Image Placeholder 1"/>
+          <p:cNvSpPr>
+            <a:spLocks noGrp="1"/>
+          </p:cNvSpPr>
+          <p:nvPr>
+            <p:ph type="sldImg" idx="2"/>
+          </p:nvPr>
+        </p:nvSpPr>
+        <p:spPr/>
+      </p:sp>
+      <p:sp>
+        <p:nvSpPr>
+          <p:cNvPr id="3" name="Notes Placeholder 2"/>
+          <p:cNvSpPr>
+            <a:spLocks noGrp="1"/>
+          </p:cNvSpPr>
+          <p:nvPr>
+            <p:ph type="body" idx="3" sz="quarter"/>
+          </p:nvPr>
+        </p:nvSpPr>
+        <p:spPr/>
+        <p:txBody>
+          <a:bodyPr/>
+          <a:lstStyle/>
+          <a:p>
+            <a:r>
+              <a:t>Por eso el error más desconcertante para un principiante es este: el programa corre sin lanzar ninguna excepción, dice 'guardado', y el archivo mascotas.csv aparece con cero bytes.</a:t>
+            </a:r>
+          </a:p>
+          <a:p/>
+          <a:p>
+            <a:r>
+              <a:t>Reemplaza al viejo patrón de finally con verificación de null, que casi nadie escribe bien.</a:t>
+            </a:r>
+          </a:p>
+        </p:txBody>
+      </p:sp>
+      <p:sp>
+        <p:nvSpPr>
+          <p:cNvPr id="4" name="Slide Number Placeholder 3"/>
+          <p:cNvSpPr>
+            <a:spLocks noGrp="1"/>
+          </p:cNvSpPr>
+          <p:nvPr>
+            <p:ph type="sldNum" idx="5" sz="quarter"/>
+          </p:nvPr>
+        </p:nvSpPr>
+        <p:spPr/>
+      </p:sp>
+    </p:spTree>
+  </p:cSld>
+  <p:clrMapOvr>
+    <a:masterClrMapping/>
+  </p:clrMapOvr>
+</p:notes>
+</file>
+
+<file path=ppt/notesSlides/notesSlide4.xml><?xml version="1.0" encoding="utf-8"?>
+<p:notes xmlns:a="http://schemas.openxmlformats.org/drawingml/2006/main" xmlns:p="http://schemas.openxmlformats.org/presentationml/2006/main" xmlns:r="http://schemas.openxmlformats.org/officeDocument/2006/relationships">
+  <p:cSld>
+    <p:spTree>
+      <p:nvGrpSpPr>
+        <p:cNvPr id="1" name=""/>
+        <p:cNvGrpSpPr/>
+        <p:nvPr/>
+      </p:nvGrpSpPr>
+      <p:grpSpPr>
+        <a:xfrm>
+          <a:off x="0" y="0"/>
+          <a:ext cx="0" cy="0"/>
+          <a:chOff x="0" y="0"/>
+          <a:chExt cx="0" cy="0"/>
+        </a:xfrm>
+      </p:grpSpPr>
+      <p:sp>
+        <p:nvSpPr>
+          <p:cNvPr id="2" name="Slide Image Placeholder 1"/>
+          <p:cNvSpPr>
+            <a:spLocks noGrp="1"/>
+          </p:cNvSpPr>
+          <p:nvPr>
+            <p:ph type="sldImg" idx="2"/>
+          </p:nvPr>
+        </p:nvSpPr>
+        <p:spPr/>
+      </p:sp>
+      <p:sp>
+        <p:nvSpPr>
+          <p:cNvPr id="3" name="Notes Placeholder 2"/>
+          <p:cNvSpPr>
+            <a:spLocks noGrp="1"/>
+          </p:cNvSpPr>
+          <p:nvPr>
+            <p:ph type="body" idx="3" sz="quarter"/>
+          </p:nvPr>
+        </p:nvSpPr>
+        <p:spPr/>
+        <p:txBody>
+          <a:bodyPr/>
+          <a:lstStyle/>
+          <a:p>
+            <a:r>
+              <a:t>Cargar al arrancar significa que el main construye el repositorio, pide cargar() y solo después muestra la ventana con la tabla ya poblada.</a:t>
+            </a:r>
+          </a:p>
+          <a:p/>
+          <a:p>
+            <a:r>
+              <a:t>Por eso conviene imprimir una vez ruta.toAbsolutePath() para que el estudiante sepa dónde buscarlo en vez de jurar que el programa no guardó nada.</a:t>
+            </a:r>
+          </a:p>
+        </p:txBody>
+      </p:sp>
+      <p:sp>
+        <p:nvSpPr>
+          <p:cNvPr id="4" name="Slide Number Placeholder 3"/>
+          <p:cNvSpPr>
+            <a:spLocks noGrp="1"/>
+          </p:cNvSpPr>
+          <p:nvPr>
+            <p:ph type="sldNum" idx="5" sz="quarter"/>
+          </p:nvPr>
+        </p:nvSpPr>
+        <p:spPr/>
+      </p:sp>
+    </p:spTree>
+  </p:cSld>
+  <p:clrMapOvr>
+    <a:masterClrMapping/>
+  </p:clrMapOvr>
+</p:notes>
 </file>
 
 <file path=ppt/slideLayouts/slideLayout1.xml><?xml version="1.0" encoding="utf-8"?>
@@ -7649,7 +8285,7 @@
                 </a:solidFill>
                 <a:latin typeface="Calibri"/>
               </a:rPr>
-              <a:t>Encuadre de hoy · Objetivo del PI</a:t>
+              <a:t>Encuadre de hoy</a:t>
             </a:r>
           </a:p>
         </p:txBody>
@@ -7697,7 +8333,7 @@
                 </a:solidFill>
                 <a:latin typeface="Calibri"/>
               </a:rPr>
-              <a:t>Hoy avanzamos VetCare en:</a:t>
+              <a:t>Tema de hoy:</a:t>
             </a:r>
             <a:r>
               <a:rPr sz="2000" b="0" i="0">
@@ -7706,7 +8342,7 @@
                 </a:solidFill>
                 <a:latin typeface="Calibri"/>
               </a:rPr>
-              <a:t> VetCare guarda la lista de mascotas en mascotas.csv al cerrar y la vuelve a cargar al abrir.</a:t>
+              <a:t> Refactorización con IA · Persistencia en archivos — Que los datos de VetCare no se pierdan al cerrar la ventana</a:t>
             </a:r>
           </a:p>
           <a:p>
@@ -7765,41 +8401,23 @@
                 </a:solidFill>
                 <a:latin typeface="Calibri"/>
               </a:rPr>
-              <a:t>–   </a:t>
-            </a:r>
-            <a:r>
-              <a:rPr sz="2000" b="1" i="0">
+              <a:t>–   Primero el concepto, despues el codigo que lo muestra y la demo en vivo.</a:t>
+            </a:r>
+          </a:p>
+          <a:p>
+            <a:pPr>
+              <a:spcAft>
+                <a:spcPts val="800"/>
+              </a:spcAft>
+            </a:pPr>
+            <a:r>
+              <a:rPr sz="2000" b="0" i="0">
                 <a:solidFill>
                   <a:srgbClr val="333333"/>
                 </a:solidFill>
                 <a:latin typeface="Calibri"/>
               </a:rPr>
-              <a:t>Entregable de hoy:</a:t>
-            </a:r>
-            <a:r>
-              <a:rPr sz="2000" b="0" i="0">
-                <a:solidFill>
-                  <a:srgbClr val="333333"/>
-                </a:solidFill>
-                <a:latin typeface="Calibri"/>
-              </a:rPr>
-              <a:t> La clase RepositorioMascotasCSV con guardar() y cargar() funcionando, el archivo mascotas.csv generado por la propia aplicación y la bitácora REFACTOR.md, subidos a la plataforma del curso.</a:t>
-            </a:r>
-          </a:p>
-          <a:p>
-            <a:pPr>
-              <a:spcAft>
-                <a:spcPts val="800"/>
-              </a:spcAft>
-            </a:pPr>
-            <a:r>
-              <a:rPr sz="2000" b="0" i="0">
-                <a:solidFill>
-                  <a:srgbClr val="333333"/>
-                </a:solidFill>
-                <a:latin typeface="Calibri"/>
-              </a:rPr>
-              <a:t>–   La teoria esta al servicio del producto: al salir, VetCare avanzo.</a:t>
+              <a:t>–   Todo con el mismo dominio: la clinica veterinaria Huellitas (VetCare).</a:t>
             </a:r>
           </a:p>
         </p:txBody>
@@ -12985,7 +13603,7 @@
                 </a:solidFill>
                 <a:latin typeface="Calibri"/>
               </a:rPr>
-              <a:t>Encuadre y repaso del avance</a:t>
+              <a:t>Encuadre y repaso de la clase anterior</a:t>
             </a:r>
           </a:p>
         </p:txBody>
@@ -13330,7 +13948,7 @@
                 </a:solidFill>
                 <a:latin typeface="Calibri"/>
               </a:rPr>
-              <a:t>Taller guiado = avance del PI</a:t>
+              <a:t>Practica (opcional, guia en la carpeta)</a:t>
             </a:r>
           </a:p>
         </p:txBody>
@@ -13445,7 +14063,7 @@
                 </a:solidFill>
                 <a:latin typeface="Calibri"/>
               </a:rPr>
-              <a:t>Criterios de exito y cierre</a:t>
+              <a:t>Repaso de conceptos y cierre</a:t>
             </a:r>
           </a:p>
         </p:txBody>
@@ -14428,3163 +15046,6 @@
         <p:spPr>
           <a:xfrm>
             <a:off x="0" y="0"/>
-            <a:ext cx="12191695" cy="960120"/>
-          </a:xfrm>
-          <a:prstGeom prst="rect">
-            <a:avLst/>
-          </a:prstGeom>
-          <a:solidFill>
-            <a:srgbClr val="095292"/>
-          </a:solidFill>
-          <a:ln>
-            <a:noFill/>
-          </a:ln>
-        </p:spPr>
-        <p:style>
-          <a:lnRef idx="1">
-            <a:schemeClr val="accent1"/>
-          </a:lnRef>
-          <a:fillRef idx="3">
-            <a:schemeClr val="accent1"/>
-          </a:fillRef>
-          <a:effectRef idx="2">
-            <a:schemeClr val="accent1"/>
-          </a:effectRef>
-          <a:fontRef idx="minor">
-            <a:schemeClr val="lt1"/>
-          </a:fontRef>
-        </p:style>
-        <p:txBody>
-          <a:bodyPr rtlCol="0" anchor="ctr"/>
-          <a:lstStyle/>
-          <a:p>
-            <a:pPr algn="ctr"/>
-          </a:p>
-        </p:txBody>
-      </p:sp>
-      <p:sp>
-        <p:nvSpPr>
-          <p:cNvPr id="3" name="Rectangle 2"/>
-          <p:cNvSpPr/>
-          <p:nvPr/>
-        </p:nvSpPr>
-        <p:spPr>
-          <a:xfrm>
-            <a:off x="0" y="960120"/>
-            <a:ext cx="12191695" cy="41148"/>
-          </a:xfrm>
-          <a:prstGeom prst="rect">
-            <a:avLst/>
-          </a:prstGeom>
-          <a:solidFill>
-            <a:srgbClr val="FFD000"/>
-          </a:solidFill>
-          <a:ln>
-            <a:noFill/>
-          </a:ln>
-        </p:spPr>
-        <p:style>
-          <a:lnRef idx="1">
-            <a:schemeClr val="accent1"/>
-          </a:lnRef>
-          <a:fillRef idx="3">
-            <a:schemeClr val="accent1"/>
-          </a:fillRef>
-          <a:effectRef idx="2">
-            <a:schemeClr val="accent1"/>
-          </a:effectRef>
-          <a:fontRef idx="minor">
-            <a:schemeClr val="lt1"/>
-          </a:fontRef>
-        </p:style>
-        <p:txBody>
-          <a:bodyPr rtlCol="0" anchor="ctr"/>
-          <a:lstStyle/>
-          <a:p>
-            <a:pPr algn="ctr"/>
-          </a:p>
-        </p:txBody>
-      </p:sp>
-      <p:sp>
-        <p:nvSpPr>
-          <p:cNvPr id="4" name="TextBox 3"/>
-          <p:cNvSpPr txBox="1"/>
-          <p:nvPr/>
-        </p:nvSpPr>
-        <p:spPr>
-          <a:xfrm>
-            <a:off x="457200" y="164592"/>
-            <a:ext cx="11277295" cy="502920"/>
-          </a:xfrm>
-          <a:prstGeom prst="rect">
-            <a:avLst/>
-          </a:prstGeom>
-          <a:noFill/>
-        </p:spPr>
-        <p:txBody>
-          <a:bodyPr wrap="square">
-            <a:spAutoFit/>
-          </a:bodyPr>
-          <a:lstStyle/>
-          <a:p>
-            <a:r>
-              <a:rPr sz="2600" b="1" i="0">
-                <a:solidFill>
-                  <a:srgbClr val="FFFFFF"/>
-                </a:solidFill>
-                <a:latin typeface="Calibri"/>
-              </a:rPr>
-              <a:t>Taller PI — por que importa</a:t>
-            </a:r>
-          </a:p>
-        </p:txBody>
-      </p:sp>
-      <p:sp>
-        <p:nvSpPr>
-          <p:cNvPr id="5" name="TextBox 4"/>
-          <p:cNvSpPr txBox="1"/>
-          <p:nvPr/>
-        </p:nvSpPr>
-        <p:spPr>
-          <a:xfrm>
-            <a:off x="457200" y="1170432"/>
-            <a:ext cx="11277295" cy="5230368"/>
-          </a:xfrm>
-          <a:prstGeom prst="rect">
-            <a:avLst/>
-          </a:prstGeom>
-          <a:noFill/>
-        </p:spPr>
-        <p:txBody>
-          <a:bodyPr wrap="square">
-            <a:spAutoFit/>
-          </a:bodyPr>
-          <a:lstStyle/>
-          <a:p>
-            <a:pPr>
-              <a:spcAft>
-                <a:spcPts val="800"/>
-              </a:spcAft>
-            </a:pPr>
-            <a:r>
-              <a:rPr sz="2000" b="0" i="0">
-                <a:solidFill>
-                  <a:srgbClr val="333333"/>
-                </a:solidFill>
-                <a:latin typeface="Calibri"/>
-              </a:rPr>
-              <a:t>–   </a:t>
-            </a:r>
-            <a:r>
-              <a:rPr sz="2000" b="1" i="0">
-                <a:solidFill>
-                  <a:srgbClr val="333333"/>
-                </a:solidFill>
-                <a:latin typeface="Calibri"/>
-              </a:rPr>
-              <a:t>Por que importa al PI:</a:t>
-            </a:r>
-            <a:r>
-              <a:rPr sz="2000" b="0" i="0">
-                <a:solidFill>
-                  <a:srgbClr val="333333"/>
-                </a:solidFill>
-                <a:latin typeface="Calibri"/>
-              </a:rPr>
-              <a:t> el PI exige explícitamente persistencia en archivos .txt o .csv, y sin ella VetCare sigue siendo una libreta que se borra sola: la clínica Huellitas no puede recuperar el expediente de Firulais al día siguiente.</a:t>
-            </a:r>
-          </a:p>
-          <a:p>
-            <a:pPr>
-              <a:spcAft>
-                <a:spcPts val="800"/>
-              </a:spcAft>
-            </a:pPr>
-            <a:r>
-              <a:rPr sz="2000" b="0" i="0">
-                <a:solidFill>
-                  <a:srgbClr val="333333"/>
-                </a:solidFill>
-                <a:latin typeface="Calibri"/>
-              </a:rPr>
-              <a:t>–   Esta es la primera clase donde el producto deja de existir solo mientras la ventana está abierta; a partir de hoy el proyecto tiene datos reales acumulados que las clases siguientes van a leer, integrar y revisar.</a:t>
-            </a:r>
-          </a:p>
-          <a:p>
-            <a:pPr>
-              <a:spcAft>
-                <a:spcPts val="800"/>
-              </a:spcAft>
-            </a:pPr>
-            <a:r>
-              <a:rPr sz="2000" b="0" i="0">
-                <a:solidFill>
-                  <a:srgbClr val="333333"/>
-                </a:solidFill>
-                <a:latin typeface="Calibri"/>
-              </a:rPr>
-              <a:t>–   La bitácora REFACTOR.md es también la evidencia del uso responsable de IA que se le va a exigir en la sustentación final: quien no pueda explicar su propio código no puede defenderlo.</a:t>
-            </a:r>
-          </a:p>
-        </p:txBody>
-      </p:sp>
-      <p:sp>
-        <p:nvSpPr>
-          <p:cNvPr id="6" name="TextBox 5"/>
-          <p:cNvSpPr txBox="1"/>
-          <p:nvPr/>
-        </p:nvSpPr>
-        <p:spPr>
-          <a:xfrm>
-            <a:off x="11185855" y="6473952"/>
-            <a:ext cx="640080" cy="274320"/>
-          </a:xfrm>
-          <a:prstGeom prst="rect">
-            <a:avLst/>
-          </a:prstGeom>
-          <a:noFill/>
-        </p:spPr>
-        <p:txBody>
-          <a:bodyPr wrap="square">
-            <a:spAutoFit/>
-          </a:bodyPr>
-          <a:lstStyle/>
-          <a:p>
-            <a:pPr algn="r"/>
-            <a:r>
-              <a:rPr sz="1100" b="0" i="0">
-                <a:solidFill>
-                  <a:srgbClr val="666666"/>
-                </a:solidFill>
-                <a:latin typeface="Calibri"/>
-              </a:rPr>
-              <a:t>32</a:t>
-            </a:r>
-          </a:p>
-        </p:txBody>
-      </p:sp>
-    </p:spTree>
-  </p:cSld>
-  <p:clrMapOvr>
-    <a:masterClrMapping/>
-  </p:clrMapOvr>
-</p:sld>
-</file>
-
-<file path=ppt/slides/slide33.xml><?xml version="1.0" encoding="utf-8"?>
-<p:sld xmlns:a="http://schemas.openxmlformats.org/drawingml/2006/main" xmlns:p="http://schemas.openxmlformats.org/presentationml/2006/main" xmlns:r="http://schemas.openxmlformats.org/officeDocument/2006/relationships">
-  <p:cSld>
-    <p:bg>
-      <p:bgPr>
-        <a:solidFill>
-          <a:srgbClr val="FFFFFF"/>
-        </a:solidFill>
-        <a:effectLst/>
-      </p:bgPr>
-    </p:bg>
-    <p:spTree>
-      <p:nvGrpSpPr>
-        <p:cNvPr id="1" name=""/>
-        <p:cNvGrpSpPr/>
-        <p:nvPr/>
-      </p:nvGrpSpPr>
-      <p:grpSpPr/>
-      <p:sp>
-        <p:nvSpPr>
-          <p:cNvPr id="2" name="Rectangle 1"/>
-          <p:cNvSpPr/>
-          <p:nvPr/>
-        </p:nvSpPr>
-        <p:spPr>
-          <a:xfrm>
-            <a:off x="0" y="0"/>
-            <a:ext cx="12191695" cy="960120"/>
-          </a:xfrm>
-          <a:prstGeom prst="rect">
-            <a:avLst/>
-          </a:prstGeom>
-          <a:solidFill>
-            <a:srgbClr val="095292"/>
-          </a:solidFill>
-          <a:ln>
-            <a:noFill/>
-          </a:ln>
-        </p:spPr>
-        <p:style>
-          <a:lnRef idx="1">
-            <a:schemeClr val="accent1"/>
-          </a:lnRef>
-          <a:fillRef idx="3">
-            <a:schemeClr val="accent1"/>
-          </a:fillRef>
-          <a:effectRef idx="2">
-            <a:schemeClr val="accent1"/>
-          </a:effectRef>
-          <a:fontRef idx="minor">
-            <a:schemeClr val="lt1"/>
-          </a:fontRef>
-        </p:style>
-        <p:txBody>
-          <a:bodyPr rtlCol="0" anchor="ctr"/>
-          <a:lstStyle/>
-          <a:p>
-            <a:pPr algn="ctr"/>
-          </a:p>
-        </p:txBody>
-      </p:sp>
-      <p:sp>
-        <p:nvSpPr>
-          <p:cNvPr id="3" name="Rectangle 2"/>
-          <p:cNvSpPr/>
-          <p:nvPr/>
-        </p:nvSpPr>
-        <p:spPr>
-          <a:xfrm>
-            <a:off x="0" y="960120"/>
-            <a:ext cx="12191695" cy="41148"/>
-          </a:xfrm>
-          <a:prstGeom prst="rect">
-            <a:avLst/>
-          </a:prstGeom>
-          <a:solidFill>
-            <a:srgbClr val="FFD000"/>
-          </a:solidFill>
-          <a:ln>
-            <a:noFill/>
-          </a:ln>
-        </p:spPr>
-        <p:style>
-          <a:lnRef idx="1">
-            <a:schemeClr val="accent1"/>
-          </a:lnRef>
-          <a:fillRef idx="3">
-            <a:schemeClr val="accent1"/>
-          </a:fillRef>
-          <a:effectRef idx="2">
-            <a:schemeClr val="accent1"/>
-          </a:effectRef>
-          <a:fontRef idx="minor">
-            <a:schemeClr val="lt1"/>
-          </a:fontRef>
-        </p:style>
-        <p:txBody>
-          <a:bodyPr rtlCol="0" anchor="ctr"/>
-          <a:lstStyle/>
-          <a:p>
-            <a:pPr algn="ctr"/>
-          </a:p>
-        </p:txBody>
-      </p:sp>
-      <p:sp>
-        <p:nvSpPr>
-          <p:cNvPr id="4" name="TextBox 3"/>
-          <p:cNvSpPr txBox="1"/>
-          <p:nvPr/>
-        </p:nvSpPr>
-        <p:spPr>
-          <a:xfrm>
-            <a:off x="457200" y="164592"/>
-            <a:ext cx="11277295" cy="502920"/>
-          </a:xfrm>
-          <a:prstGeom prst="rect">
-            <a:avLst/>
-          </a:prstGeom>
-          <a:noFill/>
-        </p:spPr>
-        <p:txBody>
-          <a:bodyPr wrap="square">
-            <a:spAutoFit/>
-          </a:bodyPr>
-          <a:lstStyle/>
-          <a:p>
-            <a:r>
-              <a:rPr sz="2600" b="1" i="0">
-                <a:solidFill>
-                  <a:srgbClr val="FFFFFF"/>
-                </a:solidFill>
-                <a:latin typeface="Calibri"/>
-              </a:rPr>
-              <a:t>Taller PI — punto de partida</a:t>
-            </a:r>
-          </a:p>
-        </p:txBody>
-      </p:sp>
-      <p:sp>
-        <p:nvSpPr>
-          <p:cNvPr id="5" name="TextBox 4"/>
-          <p:cNvSpPr txBox="1"/>
-          <p:nvPr/>
-        </p:nvSpPr>
-        <p:spPr>
-          <a:xfrm>
-            <a:off x="457200" y="1170432"/>
-            <a:ext cx="11277295" cy="5230368"/>
-          </a:xfrm>
-          <a:prstGeom prst="rect">
-            <a:avLst/>
-          </a:prstGeom>
-          <a:noFill/>
-        </p:spPr>
-        <p:txBody>
-          <a:bodyPr wrap="square">
-            <a:spAutoFit/>
-          </a:bodyPr>
-          <a:lstStyle/>
-          <a:p>
-            <a:pPr>
-              <a:spcAft>
-                <a:spcPts val="800"/>
-              </a:spcAft>
-            </a:pPr>
-            <a:r>
-              <a:rPr sz="2000" b="0" i="0">
-                <a:solidFill>
-                  <a:srgbClr val="333333"/>
-                </a:solidFill>
-                <a:latin typeface="Calibri"/>
-              </a:rPr>
-              <a:t>–   VetCare ya tiene la clase Mascota con atributos privados y getters, un ArrayList&lt;Mascota&gt; administrado por el servicio y una ventana Swing que registra y lista (trabajo de las clases 1 a 6).</a:t>
-            </a:r>
-          </a:p>
-          <a:p>
-            <a:pPr>
-              <a:spcAft>
-                <a:spcPts val="800"/>
-              </a:spcAft>
-            </a:pPr>
-            <a:r>
-              <a:rPr sz="2000" b="0" i="0">
-                <a:solidFill>
-                  <a:srgbClr val="333333"/>
-                </a:solidFill>
-                <a:latin typeface="Calibri"/>
-              </a:rPr>
-              <a:t>–   En la carpeta del proyecto todavía no existe ningún archivo de datos: cada vez que se cierra la aplicación, la lista arranca vacía otra vez.</a:t>
-            </a:r>
-          </a:p>
-          <a:p>
-            <a:pPr>
-              <a:spcAft>
-                <a:spcPts val="800"/>
-              </a:spcAft>
-            </a:pPr>
-            <a:r>
-              <a:rPr sz="2000" b="0" i="0">
-                <a:solidFill>
-                  <a:srgbClr val="333333"/>
-                </a:solidFill>
-                <a:latin typeface="Calibri"/>
-              </a:rPr>
-              <a:t>–   Se trabaja con tres mascotas de prueba: M001 Firulais, canino, 4 años, dueño CC 1144556677; M002 Michi, felino, 2 años, dueño CC 1098765432; M003 Pelusa, felino, 1 año, dueño CC 1052233445.</a:t>
-            </a:r>
-          </a:p>
-        </p:txBody>
-      </p:sp>
-      <p:sp>
-        <p:nvSpPr>
-          <p:cNvPr id="6" name="TextBox 5"/>
-          <p:cNvSpPr txBox="1"/>
-          <p:nvPr/>
-        </p:nvSpPr>
-        <p:spPr>
-          <a:xfrm>
-            <a:off x="11185855" y="6473952"/>
-            <a:ext cx="640080" cy="274320"/>
-          </a:xfrm>
-          <a:prstGeom prst="rect">
-            <a:avLst/>
-          </a:prstGeom>
-          <a:noFill/>
-        </p:spPr>
-        <p:txBody>
-          <a:bodyPr wrap="square">
-            <a:spAutoFit/>
-          </a:bodyPr>
-          <a:lstStyle/>
-          <a:p>
-            <a:pPr algn="r"/>
-            <a:r>
-              <a:rPr sz="1100" b="0" i="0">
-                <a:solidFill>
-                  <a:srgbClr val="666666"/>
-                </a:solidFill>
-                <a:latin typeface="Calibri"/>
-              </a:rPr>
-              <a:t>33</a:t>
-            </a:r>
-          </a:p>
-        </p:txBody>
-      </p:sp>
-    </p:spTree>
-  </p:cSld>
-  <p:clrMapOvr>
-    <a:masterClrMapping/>
-  </p:clrMapOvr>
-</p:sld>
-</file>
-
-<file path=ppt/slides/slide34.xml><?xml version="1.0" encoding="utf-8"?>
-<p:sld xmlns:a="http://schemas.openxmlformats.org/drawingml/2006/main" xmlns:p="http://schemas.openxmlformats.org/presentationml/2006/main" xmlns:r="http://schemas.openxmlformats.org/officeDocument/2006/relationships">
-  <p:cSld>
-    <p:bg>
-      <p:bgPr>
-        <a:solidFill>
-          <a:srgbClr val="FFFFFF"/>
-        </a:solidFill>
-        <a:effectLst/>
-      </p:bgPr>
-    </p:bg>
-    <p:spTree>
-      <p:nvGrpSpPr>
-        <p:cNvPr id="1" name=""/>
-        <p:cNvGrpSpPr/>
-        <p:nvPr/>
-      </p:nvGrpSpPr>
-      <p:grpSpPr/>
-      <p:sp>
-        <p:nvSpPr>
-          <p:cNvPr id="2" name="Rectangle 1"/>
-          <p:cNvSpPr/>
-          <p:nvPr/>
-        </p:nvSpPr>
-        <p:spPr>
-          <a:xfrm>
-            <a:off x="0" y="0"/>
-            <a:ext cx="12191695" cy="960120"/>
-          </a:xfrm>
-          <a:prstGeom prst="rect">
-            <a:avLst/>
-          </a:prstGeom>
-          <a:solidFill>
-            <a:srgbClr val="095292"/>
-          </a:solidFill>
-          <a:ln>
-            <a:noFill/>
-          </a:ln>
-        </p:spPr>
-        <p:style>
-          <a:lnRef idx="1">
-            <a:schemeClr val="accent1"/>
-          </a:lnRef>
-          <a:fillRef idx="3">
-            <a:schemeClr val="accent1"/>
-          </a:fillRef>
-          <a:effectRef idx="2">
-            <a:schemeClr val="accent1"/>
-          </a:effectRef>
-          <a:fontRef idx="minor">
-            <a:schemeClr val="lt1"/>
-          </a:fontRef>
-        </p:style>
-        <p:txBody>
-          <a:bodyPr rtlCol="0" anchor="ctr"/>
-          <a:lstStyle/>
-          <a:p>
-            <a:pPr algn="ctr"/>
-          </a:p>
-        </p:txBody>
-      </p:sp>
-      <p:sp>
-        <p:nvSpPr>
-          <p:cNvPr id="3" name="Rectangle 2"/>
-          <p:cNvSpPr/>
-          <p:nvPr/>
-        </p:nvSpPr>
-        <p:spPr>
-          <a:xfrm>
-            <a:off x="0" y="960120"/>
-            <a:ext cx="12191695" cy="41148"/>
-          </a:xfrm>
-          <a:prstGeom prst="rect">
-            <a:avLst/>
-          </a:prstGeom>
-          <a:solidFill>
-            <a:srgbClr val="FFD000"/>
-          </a:solidFill>
-          <a:ln>
-            <a:noFill/>
-          </a:ln>
-        </p:spPr>
-        <p:style>
-          <a:lnRef idx="1">
-            <a:schemeClr val="accent1"/>
-          </a:lnRef>
-          <a:fillRef idx="3">
-            <a:schemeClr val="accent1"/>
-          </a:fillRef>
-          <a:effectRef idx="2">
-            <a:schemeClr val="accent1"/>
-          </a:effectRef>
-          <a:fontRef idx="minor">
-            <a:schemeClr val="lt1"/>
-          </a:fontRef>
-        </p:style>
-        <p:txBody>
-          <a:bodyPr rtlCol="0" anchor="ctr"/>
-          <a:lstStyle/>
-          <a:p>
-            <a:pPr algn="ctr"/>
-          </a:p>
-        </p:txBody>
-      </p:sp>
-      <p:sp>
-        <p:nvSpPr>
-          <p:cNvPr id="4" name="TextBox 3"/>
-          <p:cNvSpPr txBox="1"/>
-          <p:nvPr/>
-        </p:nvSpPr>
-        <p:spPr>
-          <a:xfrm>
-            <a:off x="457200" y="164592"/>
-            <a:ext cx="11277295" cy="502920"/>
-          </a:xfrm>
-          <a:prstGeom prst="rect">
-            <a:avLst/>
-          </a:prstGeom>
-          <a:noFill/>
-        </p:spPr>
-        <p:txBody>
-          <a:bodyPr wrap="square">
-            <a:spAutoFit/>
-          </a:bodyPr>
-          <a:lstStyle/>
-          <a:p>
-            <a:r>
-              <a:rPr sz="2600" b="1" i="0">
-                <a:solidFill>
-                  <a:srgbClr val="FFFFFF"/>
-                </a:solidFill>
-                <a:latin typeface="Calibri"/>
-              </a:rPr>
-              <a:t>Taller PI — pasos guiados</a:t>
-            </a:r>
-          </a:p>
-        </p:txBody>
-      </p:sp>
-      <p:sp>
-        <p:nvSpPr>
-          <p:cNvPr id="5" name="Rounded Rectangle 4"/>
-          <p:cNvSpPr/>
-          <p:nvPr/>
-        </p:nvSpPr>
-        <p:spPr>
-          <a:xfrm>
-            <a:off x="457200" y="1234440"/>
-            <a:ext cx="11277295" cy="950976"/>
-          </a:xfrm>
-          <a:prstGeom prst="roundRect">
-            <a:avLst>
-              <a:gd name="adj" fmla="val 12000"/>
-            </a:avLst>
-          </a:prstGeom>
-          <a:solidFill>
-            <a:srgbClr val="F2F2F2"/>
-          </a:solidFill>
-          <a:ln>
-            <a:noFill/>
-          </a:ln>
-        </p:spPr>
-        <p:style>
-          <a:lnRef idx="1">
-            <a:schemeClr val="accent1"/>
-          </a:lnRef>
-          <a:fillRef idx="3">
-            <a:schemeClr val="accent1"/>
-          </a:fillRef>
-          <a:effectRef idx="2">
-            <a:schemeClr val="accent1"/>
-          </a:effectRef>
-          <a:fontRef idx="minor">
-            <a:schemeClr val="lt1"/>
-          </a:fontRef>
-        </p:style>
-        <p:txBody>
-          <a:bodyPr rtlCol="0" anchor="ctr"/>
-          <a:lstStyle/>
-          <a:p>
-            <a:pPr algn="ctr"/>
-          </a:p>
-        </p:txBody>
-      </p:sp>
-      <p:sp>
-        <p:nvSpPr>
-          <p:cNvPr id="6" name="Rounded Rectangle 5"/>
-          <p:cNvSpPr/>
-          <p:nvPr/>
-        </p:nvSpPr>
-        <p:spPr>
-          <a:xfrm>
-            <a:off x="594360" y="1490472"/>
-            <a:ext cx="438912" cy="438912"/>
-          </a:xfrm>
-          <a:prstGeom prst="roundRect">
-            <a:avLst>
-              <a:gd name="adj" fmla="val 12000"/>
-            </a:avLst>
-          </a:prstGeom>
-          <a:solidFill>
-            <a:srgbClr val="095292"/>
-          </a:solidFill>
-          <a:ln>
-            <a:noFill/>
-          </a:ln>
-        </p:spPr>
-        <p:style>
-          <a:lnRef idx="1">
-            <a:schemeClr val="accent1"/>
-          </a:lnRef>
-          <a:fillRef idx="3">
-            <a:schemeClr val="accent1"/>
-          </a:fillRef>
-          <a:effectRef idx="2">
-            <a:schemeClr val="accent1"/>
-          </a:effectRef>
-          <a:fontRef idx="minor">
-            <a:schemeClr val="lt1"/>
-          </a:fontRef>
-        </p:style>
-        <p:txBody>
-          <a:bodyPr rtlCol="0" anchor="ctr"/>
-          <a:lstStyle/>
-          <a:p>
-            <a:pPr algn="ctr"/>
-          </a:p>
-        </p:txBody>
-      </p:sp>
-      <p:sp>
-        <p:nvSpPr>
-          <p:cNvPr id="7" name="TextBox 6"/>
-          <p:cNvSpPr txBox="1"/>
-          <p:nvPr/>
-        </p:nvSpPr>
-        <p:spPr>
-          <a:xfrm>
-            <a:off x="594360" y="1490472"/>
-            <a:ext cx="438912" cy="438912"/>
-          </a:xfrm>
-          <a:prstGeom prst="rect">
-            <a:avLst/>
-          </a:prstGeom>
-          <a:noFill/>
-        </p:spPr>
-        <p:txBody>
-          <a:bodyPr wrap="square" anchor="ctr"/>
-          <a:lstStyle/>
-          <a:p>
-            <a:pPr algn="ctr"/>
-            <a:r>
-              <a:rPr sz="1600" b="1" i="0">
-                <a:solidFill>
-                  <a:srgbClr val="FFFFFF"/>
-                </a:solidFill>
-                <a:latin typeface="Calibri"/>
-              </a:rPr>
-              <a:t>1</a:t>
-            </a:r>
-          </a:p>
-        </p:txBody>
-      </p:sp>
-      <p:sp>
-        <p:nvSpPr>
-          <p:cNvPr id="8" name="TextBox 7"/>
-          <p:cNvSpPr txBox="1"/>
-          <p:nvPr/>
-        </p:nvSpPr>
-        <p:spPr>
-          <a:xfrm>
-            <a:off x="1188720" y="1325880"/>
-            <a:ext cx="10271455" cy="786384"/>
-          </a:xfrm>
-          <a:prstGeom prst="rect">
-            <a:avLst/>
-          </a:prstGeom>
-          <a:noFill/>
-        </p:spPr>
-        <p:txBody>
-          <a:bodyPr wrap="square" anchor="ctr"/>
-          <a:lstStyle/>
-          <a:p>
-            <a:r>
-              <a:rPr sz="1400" b="1" i="0">
-                <a:solidFill>
-                  <a:srgbClr val="095292"/>
-                </a:solidFill>
-                <a:latin typeface="Calibri"/>
-              </a:rPr>
-              <a:t>Cree el paquete vetcare.datos y dentro la clase RepositorioMascotasCSV con la constante private static final String SEPARADOR = ";", la constante ENCABEZADO con el texto id;nombre;especie;edad;cedula_dueno y un atributo Path ruta construido con Paths.get("mascotas.csv"); compile el proyecto y verifique que no hay errores rojos antes de seguir.</a:t>
-            </a:r>
-          </a:p>
-        </p:txBody>
-      </p:sp>
-      <p:sp>
-        <p:nvSpPr>
-          <p:cNvPr id="9" name="Rounded Rectangle 8"/>
-          <p:cNvSpPr/>
-          <p:nvPr/>
-        </p:nvSpPr>
-        <p:spPr>
-          <a:xfrm>
-            <a:off x="457200" y="2276856"/>
-            <a:ext cx="11277295" cy="950976"/>
-          </a:xfrm>
-          <a:prstGeom prst="roundRect">
-            <a:avLst>
-              <a:gd name="adj" fmla="val 12000"/>
-            </a:avLst>
-          </a:prstGeom>
-          <a:solidFill>
-            <a:srgbClr val="E8F4FA"/>
-          </a:solidFill>
-          <a:ln>
-            <a:noFill/>
-          </a:ln>
-        </p:spPr>
-        <p:style>
-          <a:lnRef idx="1">
-            <a:schemeClr val="accent1"/>
-          </a:lnRef>
-          <a:fillRef idx="3">
-            <a:schemeClr val="accent1"/>
-          </a:fillRef>
-          <a:effectRef idx="2">
-            <a:schemeClr val="accent1"/>
-          </a:effectRef>
-          <a:fontRef idx="minor">
-            <a:schemeClr val="lt1"/>
-          </a:fontRef>
-        </p:style>
-        <p:txBody>
-          <a:bodyPr rtlCol="0" anchor="ctr"/>
-          <a:lstStyle/>
-          <a:p>
-            <a:pPr algn="ctr"/>
-          </a:p>
-        </p:txBody>
-      </p:sp>
-      <p:sp>
-        <p:nvSpPr>
-          <p:cNvPr id="10" name="Rounded Rectangle 9"/>
-          <p:cNvSpPr/>
-          <p:nvPr/>
-        </p:nvSpPr>
-        <p:spPr>
-          <a:xfrm>
-            <a:off x="594360" y="2532888"/>
-            <a:ext cx="438912" cy="438912"/>
-          </a:xfrm>
-          <a:prstGeom prst="roundRect">
-            <a:avLst>
-              <a:gd name="adj" fmla="val 12000"/>
-            </a:avLst>
-          </a:prstGeom>
-          <a:solidFill>
-            <a:srgbClr val="095292"/>
-          </a:solidFill>
-          <a:ln>
-            <a:noFill/>
-          </a:ln>
-        </p:spPr>
-        <p:style>
-          <a:lnRef idx="1">
-            <a:schemeClr val="accent1"/>
-          </a:lnRef>
-          <a:fillRef idx="3">
-            <a:schemeClr val="accent1"/>
-          </a:fillRef>
-          <a:effectRef idx="2">
-            <a:schemeClr val="accent1"/>
-          </a:effectRef>
-          <a:fontRef idx="minor">
-            <a:schemeClr val="lt1"/>
-          </a:fontRef>
-        </p:style>
-        <p:txBody>
-          <a:bodyPr rtlCol="0" anchor="ctr"/>
-          <a:lstStyle/>
-          <a:p>
-            <a:pPr algn="ctr"/>
-          </a:p>
-        </p:txBody>
-      </p:sp>
-      <p:sp>
-        <p:nvSpPr>
-          <p:cNvPr id="11" name="TextBox 10"/>
-          <p:cNvSpPr txBox="1"/>
-          <p:nvPr/>
-        </p:nvSpPr>
-        <p:spPr>
-          <a:xfrm>
-            <a:off x="594360" y="2532888"/>
-            <a:ext cx="438912" cy="438912"/>
-          </a:xfrm>
-          <a:prstGeom prst="rect">
-            <a:avLst/>
-          </a:prstGeom>
-          <a:noFill/>
-        </p:spPr>
-        <p:txBody>
-          <a:bodyPr wrap="square" anchor="ctr"/>
-          <a:lstStyle/>
-          <a:p>
-            <a:pPr algn="ctr"/>
-            <a:r>
-              <a:rPr sz="1600" b="1" i="0">
-                <a:solidFill>
-                  <a:srgbClr val="FFFFFF"/>
-                </a:solidFill>
-                <a:latin typeface="Calibri"/>
-              </a:rPr>
-              <a:t>2</a:t>
-            </a:r>
-          </a:p>
-        </p:txBody>
-      </p:sp>
-      <p:sp>
-        <p:nvSpPr>
-          <p:cNvPr id="12" name="TextBox 11"/>
-          <p:cNvSpPr txBox="1"/>
-          <p:nvPr/>
-        </p:nvSpPr>
-        <p:spPr>
-          <a:xfrm>
-            <a:off x="1188720" y="2368296"/>
-            <a:ext cx="10271455" cy="786384"/>
-          </a:xfrm>
-          <a:prstGeom prst="rect">
-            <a:avLst/>
-          </a:prstGeom>
-          <a:noFill/>
-        </p:spPr>
-        <p:txBody>
-          <a:bodyPr wrap="square" anchor="ctr"/>
-          <a:lstStyle/>
-          <a:p>
-            <a:r>
-              <a:rPr sz="1400" b="1" i="0">
-                <a:solidFill>
-                  <a:srgbClr val="095292"/>
-                </a:solidFill>
-                <a:latin typeface="Calibri"/>
-              </a:rPr>
-              <a:t>Implemente guardar(List&lt;Mascota&gt;) usando try-with-resources: escriba el encabezado, recorra la lista y escriba una línea por mascota; ejecute, abra mascotas.csv en el Bloc de notas y verifique que tiene exactamente tantas líneas como mascotas más una, y el mismo número de punto y coma en todas.</a:t>
-            </a:r>
-          </a:p>
-        </p:txBody>
-      </p:sp>
-      <p:sp>
-        <p:nvSpPr>
-          <p:cNvPr id="13" name="Rounded Rectangle 12"/>
-          <p:cNvSpPr/>
-          <p:nvPr/>
-        </p:nvSpPr>
-        <p:spPr>
-          <a:xfrm>
-            <a:off x="457200" y="3319272"/>
-            <a:ext cx="11277295" cy="950976"/>
-          </a:xfrm>
-          <a:prstGeom prst="roundRect">
-            <a:avLst>
-              <a:gd name="adj" fmla="val 12000"/>
-            </a:avLst>
-          </a:prstGeom>
-          <a:solidFill>
-            <a:srgbClr val="F2F2F2"/>
-          </a:solidFill>
-          <a:ln>
-            <a:noFill/>
-          </a:ln>
-        </p:spPr>
-        <p:style>
-          <a:lnRef idx="1">
-            <a:schemeClr val="accent1"/>
-          </a:lnRef>
-          <a:fillRef idx="3">
-            <a:schemeClr val="accent1"/>
-          </a:fillRef>
-          <a:effectRef idx="2">
-            <a:schemeClr val="accent1"/>
-          </a:effectRef>
-          <a:fontRef idx="minor">
-            <a:schemeClr val="lt1"/>
-          </a:fontRef>
-        </p:style>
-        <p:txBody>
-          <a:bodyPr rtlCol="0" anchor="ctr"/>
-          <a:lstStyle/>
-          <a:p>
-            <a:pPr algn="ctr"/>
-          </a:p>
-        </p:txBody>
-      </p:sp>
-      <p:sp>
-        <p:nvSpPr>
-          <p:cNvPr id="14" name="Rounded Rectangle 13"/>
-          <p:cNvSpPr/>
-          <p:nvPr/>
-        </p:nvSpPr>
-        <p:spPr>
-          <a:xfrm>
-            <a:off x="594360" y="3575304"/>
-            <a:ext cx="438912" cy="438912"/>
-          </a:xfrm>
-          <a:prstGeom prst="roundRect">
-            <a:avLst>
-              <a:gd name="adj" fmla="val 12000"/>
-            </a:avLst>
-          </a:prstGeom>
-          <a:solidFill>
-            <a:srgbClr val="095292"/>
-          </a:solidFill>
-          <a:ln>
-            <a:noFill/>
-          </a:ln>
-        </p:spPr>
-        <p:style>
-          <a:lnRef idx="1">
-            <a:schemeClr val="accent1"/>
-          </a:lnRef>
-          <a:fillRef idx="3">
-            <a:schemeClr val="accent1"/>
-          </a:fillRef>
-          <a:effectRef idx="2">
-            <a:schemeClr val="accent1"/>
-          </a:effectRef>
-          <a:fontRef idx="minor">
-            <a:schemeClr val="lt1"/>
-          </a:fontRef>
-        </p:style>
-        <p:txBody>
-          <a:bodyPr rtlCol="0" anchor="ctr"/>
-          <a:lstStyle/>
-          <a:p>
-            <a:pPr algn="ctr"/>
-          </a:p>
-        </p:txBody>
-      </p:sp>
-      <p:sp>
-        <p:nvSpPr>
-          <p:cNvPr id="15" name="TextBox 14"/>
-          <p:cNvSpPr txBox="1"/>
-          <p:nvPr/>
-        </p:nvSpPr>
-        <p:spPr>
-          <a:xfrm>
-            <a:off x="594360" y="3575304"/>
-            <a:ext cx="438912" cy="438912"/>
-          </a:xfrm>
-          <a:prstGeom prst="rect">
-            <a:avLst/>
-          </a:prstGeom>
-          <a:noFill/>
-        </p:spPr>
-        <p:txBody>
-          <a:bodyPr wrap="square" anchor="ctr"/>
-          <a:lstStyle/>
-          <a:p>
-            <a:pPr algn="ctr"/>
-            <a:r>
-              <a:rPr sz="1600" b="1" i="0">
-                <a:solidFill>
-                  <a:srgbClr val="FFFFFF"/>
-                </a:solidFill>
-                <a:latin typeface="Calibri"/>
-              </a:rPr>
-              <a:t>3</a:t>
-            </a:r>
-          </a:p>
-        </p:txBody>
-      </p:sp>
-      <p:sp>
-        <p:nvSpPr>
-          <p:cNvPr id="16" name="TextBox 15"/>
-          <p:cNvSpPr txBox="1"/>
-          <p:nvPr/>
-        </p:nvSpPr>
-        <p:spPr>
-          <a:xfrm>
-            <a:off x="1188720" y="3410712"/>
-            <a:ext cx="10271455" cy="786384"/>
-          </a:xfrm>
-          <a:prstGeom prst="rect">
-            <a:avLst/>
-          </a:prstGeom>
-          <a:noFill/>
-        </p:spPr>
-        <p:txBody>
-          <a:bodyPr wrap="square" anchor="ctr"/>
-          <a:lstStyle/>
-          <a:p>
-            <a:r>
-              <a:rPr sz="1400" b="1" i="0">
-                <a:solidFill>
-                  <a:srgbClr val="095292"/>
-                </a:solidFill>
-                <a:latin typeface="Calibri"/>
-              </a:rPr>
-              <a:t>Implemente cargar() de forma defensiva: si el archivo no existe devuelve una lista vacía, descarta la línea de encabezado, ignora las líneas que no tengan cinco campos e ignora las que traigan una edad no numérica, avisando por consola el número de la línea; compruébelo dañando a propósito una línea del archivo y volviendo a ejecutar.</a:t>
-            </a:r>
-          </a:p>
-        </p:txBody>
-      </p:sp>
-      <p:sp>
-        <p:nvSpPr>
-          <p:cNvPr id="17" name="Rounded Rectangle 16"/>
-          <p:cNvSpPr/>
-          <p:nvPr/>
-        </p:nvSpPr>
-        <p:spPr>
-          <a:xfrm>
-            <a:off x="457200" y="4361688"/>
-            <a:ext cx="11277295" cy="950976"/>
-          </a:xfrm>
-          <a:prstGeom prst="roundRect">
-            <a:avLst>
-              <a:gd name="adj" fmla="val 12000"/>
-            </a:avLst>
-          </a:prstGeom>
-          <a:solidFill>
-            <a:srgbClr val="E8F4FA"/>
-          </a:solidFill>
-          <a:ln>
-            <a:noFill/>
-          </a:ln>
-        </p:spPr>
-        <p:style>
-          <a:lnRef idx="1">
-            <a:schemeClr val="accent1"/>
-          </a:lnRef>
-          <a:fillRef idx="3">
-            <a:schemeClr val="accent1"/>
-          </a:fillRef>
-          <a:effectRef idx="2">
-            <a:schemeClr val="accent1"/>
-          </a:effectRef>
-          <a:fontRef idx="minor">
-            <a:schemeClr val="lt1"/>
-          </a:fontRef>
-        </p:style>
-        <p:txBody>
-          <a:bodyPr rtlCol="0" anchor="ctr"/>
-          <a:lstStyle/>
-          <a:p>
-            <a:pPr algn="ctr"/>
-          </a:p>
-        </p:txBody>
-      </p:sp>
-      <p:sp>
-        <p:nvSpPr>
-          <p:cNvPr id="18" name="Rounded Rectangle 17"/>
-          <p:cNvSpPr/>
-          <p:nvPr/>
-        </p:nvSpPr>
-        <p:spPr>
-          <a:xfrm>
-            <a:off x="594360" y="4617720"/>
-            <a:ext cx="438912" cy="438912"/>
-          </a:xfrm>
-          <a:prstGeom prst="roundRect">
-            <a:avLst>
-              <a:gd name="adj" fmla="val 12000"/>
-            </a:avLst>
-          </a:prstGeom>
-          <a:solidFill>
-            <a:srgbClr val="095292"/>
-          </a:solidFill>
-          <a:ln>
-            <a:noFill/>
-          </a:ln>
-        </p:spPr>
-        <p:style>
-          <a:lnRef idx="1">
-            <a:schemeClr val="accent1"/>
-          </a:lnRef>
-          <a:fillRef idx="3">
-            <a:schemeClr val="accent1"/>
-          </a:fillRef>
-          <a:effectRef idx="2">
-            <a:schemeClr val="accent1"/>
-          </a:effectRef>
-          <a:fontRef idx="minor">
-            <a:schemeClr val="lt1"/>
-          </a:fontRef>
-        </p:style>
-        <p:txBody>
-          <a:bodyPr rtlCol="0" anchor="ctr"/>
-          <a:lstStyle/>
-          <a:p>
-            <a:pPr algn="ctr"/>
-          </a:p>
-        </p:txBody>
-      </p:sp>
-      <p:sp>
-        <p:nvSpPr>
-          <p:cNvPr id="19" name="TextBox 18"/>
-          <p:cNvSpPr txBox="1"/>
-          <p:nvPr/>
-        </p:nvSpPr>
-        <p:spPr>
-          <a:xfrm>
-            <a:off x="594360" y="4617720"/>
-            <a:ext cx="438912" cy="438912"/>
-          </a:xfrm>
-          <a:prstGeom prst="rect">
-            <a:avLst/>
-          </a:prstGeom>
-          <a:noFill/>
-        </p:spPr>
-        <p:txBody>
-          <a:bodyPr wrap="square" anchor="ctr"/>
-          <a:lstStyle/>
-          <a:p>
-            <a:pPr algn="ctr"/>
-            <a:r>
-              <a:rPr sz="1600" b="1" i="0">
-                <a:solidFill>
-                  <a:srgbClr val="FFFFFF"/>
-                </a:solidFill>
-                <a:latin typeface="Calibri"/>
-              </a:rPr>
-              <a:t>4</a:t>
-            </a:r>
-          </a:p>
-        </p:txBody>
-      </p:sp>
-      <p:sp>
-        <p:nvSpPr>
-          <p:cNvPr id="20" name="TextBox 19"/>
-          <p:cNvSpPr txBox="1"/>
-          <p:nvPr/>
-        </p:nvSpPr>
-        <p:spPr>
-          <a:xfrm>
-            <a:off x="1188720" y="4453128"/>
-            <a:ext cx="10271455" cy="786384"/>
-          </a:xfrm>
-          <a:prstGeom prst="rect">
-            <a:avLst/>
-          </a:prstGeom>
-          <a:noFill/>
-        </p:spPr>
-        <p:txBody>
-          <a:bodyPr wrap="square" anchor="ctr"/>
-          <a:lstStyle/>
-          <a:p>
-            <a:r>
-              <a:rPr sz="1500" b="1" i="0">
-                <a:solidFill>
-                  <a:srgbClr val="095292"/>
-                </a:solidFill>
-                <a:latin typeface="Calibri"/>
-              </a:rPr>
-              <a:t>Conecte el repositorio al ciclo de vida de la aplicación: cargar() al arrancar antes de mostrar la ventana y guardar() al cerrar; cierre la aplicación, vuelva a abrirla y verifique que el conteo de mascotas en la tabla es el mismo que había antes de cerrar.</a:t>
-            </a:r>
-          </a:p>
-        </p:txBody>
-      </p:sp>
-      <p:sp>
-        <p:nvSpPr>
-          <p:cNvPr id="21" name="Rounded Rectangle 20"/>
-          <p:cNvSpPr/>
-          <p:nvPr/>
-        </p:nvSpPr>
-        <p:spPr>
-          <a:xfrm>
-            <a:off x="457200" y="5404104"/>
-            <a:ext cx="11277295" cy="950976"/>
-          </a:xfrm>
-          <a:prstGeom prst="roundRect">
-            <a:avLst>
-              <a:gd name="adj" fmla="val 12000"/>
-            </a:avLst>
-          </a:prstGeom>
-          <a:solidFill>
-            <a:srgbClr val="F2F2F2"/>
-          </a:solidFill>
-          <a:ln>
-            <a:noFill/>
-          </a:ln>
-        </p:spPr>
-        <p:style>
-          <a:lnRef idx="1">
-            <a:schemeClr val="accent1"/>
-          </a:lnRef>
-          <a:fillRef idx="3">
-            <a:schemeClr val="accent1"/>
-          </a:fillRef>
-          <a:effectRef idx="2">
-            <a:schemeClr val="accent1"/>
-          </a:effectRef>
-          <a:fontRef idx="minor">
-            <a:schemeClr val="lt1"/>
-          </a:fontRef>
-        </p:style>
-        <p:txBody>
-          <a:bodyPr rtlCol="0" anchor="ctr"/>
-          <a:lstStyle/>
-          <a:p>
-            <a:pPr algn="ctr"/>
-          </a:p>
-        </p:txBody>
-      </p:sp>
-      <p:sp>
-        <p:nvSpPr>
-          <p:cNvPr id="22" name="Rounded Rectangle 21"/>
-          <p:cNvSpPr/>
-          <p:nvPr/>
-        </p:nvSpPr>
-        <p:spPr>
-          <a:xfrm>
-            <a:off x="594360" y="5660136"/>
-            <a:ext cx="438912" cy="438912"/>
-          </a:xfrm>
-          <a:prstGeom prst="roundRect">
-            <a:avLst>
-              <a:gd name="adj" fmla="val 12000"/>
-            </a:avLst>
-          </a:prstGeom>
-          <a:solidFill>
-            <a:srgbClr val="095292"/>
-          </a:solidFill>
-          <a:ln>
-            <a:noFill/>
-          </a:ln>
-        </p:spPr>
-        <p:style>
-          <a:lnRef idx="1">
-            <a:schemeClr val="accent1"/>
-          </a:lnRef>
-          <a:fillRef idx="3">
-            <a:schemeClr val="accent1"/>
-          </a:fillRef>
-          <a:effectRef idx="2">
-            <a:schemeClr val="accent1"/>
-          </a:effectRef>
-          <a:fontRef idx="minor">
-            <a:schemeClr val="lt1"/>
-          </a:fontRef>
-        </p:style>
-        <p:txBody>
-          <a:bodyPr rtlCol="0" anchor="ctr"/>
-          <a:lstStyle/>
-          <a:p>
-            <a:pPr algn="ctr"/>
-          </a:p>
-        </p:txBody>
-      </p:sp>
-      <p:sp>
-        <p:nvSpPr>
-          <p:cNvPr id="23" name="TextBox 22"/>
-          <p:cNvSpPr txBox="1"/>
-          <p:nvPr/>
-        </p:nvSpPr>
-        <p:spPr>
-          <a:xfrm>
-            <a:off x="594360" y="5660136"/>
-            <a:ext cx="438912" cy="438912"/>
-          </a:xfrm>
-          <a:prstGeom prst="rect">
-            <a:avLst/>
-          </a:prstGeom>
-          <a:noFill/>
-        </p:spPr>
-        <p:txBody>
-          <a:bodyPr wrap="square" anchor="ctr"/>
-          <a:lstStyle/>
-          <a:p>
-            <a:pPr algn="ctr"/>
-            <a:r>
-              <a:rPr sz="1600" b="1" i="0">
-                <a:solidFill>
-                  <a:srgbClr val="FFFFFF"/>
-                </a:solidFill>
-                <a:latin typeface="Calibri"/>
-              </a:rPr>
-              <a:t>5</a:t>
-            </a:r>
-          </a:p>
-        </p:txBody>
-      </p:sp>
-      <p:sp>
-        <p:nvSpPr>
-          <p:cNvPr id="24" name="TextBox 23"/>
-          <p:cNvSpPr txBox="1"/>
-          <p:nvPr/>
-        </p:nvSpPr>
-        <p:spPr>
-          <a:xfrm>
-            <a:off x="1188720" y="5495544"/>
-            <a:ext cx="10271455" cy="786384"/>
-          </a:xfrm>
-          <a:prstGeom prst="rect">
-            <a:avLst/>
-          </a:prstGeom>
-          <a:noFill/>
-        </p:spPr>
-        <p:txBody>
-          <a:bodyPr wrap="square" anchor="ctr"/>
-          <a:lstStyle/>
-          <a:p>
-            <a:r>
-              <a:rPr sz="1400" b="1" i="0">
-                <a:solidFill>
-                  <a:srgbClr val="095292"/>
-                </a:solidFill>
-                <a:latin typeface="Calibri"/>
-              </a:rPr>
-              <a:t>Haga una revisión asistida por IA de su método guardar(): pídale a la herramienta que señale problemas, aplique como máximo dos mejoras que usted pueda explicar en voz alta, rechace por escrito al menos una sugerencia y registre todo en REFACTOR.md con el formato 'sugerencia / la acepté o no / por qué'; vuelva a correr el flujo completo y confirme que el comportamiento es idéntico.</a:t>
-            </a:r>
-          </a:p>
-        </p:txBody>
-      </p:sp>
-      <p:sp>
-        <p:nvSpPr>
-          <p:cNvPr id="25" name="TextBox 24"/>
-          <p:cNvSpPr txBox="1"/>
-          <p:nvPr/>
-        </p:nvSpPr>
-        <p:spPr>
-          <a:xfrm>
-            <a:off x="11185855" y="6473952"/>
-            <a:ext cx="640080" cy="274320"/>
-          </a:xfrm>
-          <a:prstGeom prst="rect">
-            <a:avLst/>
-          </a:prstGeom>
-          <a:noFill/>
-        </p:spPr>
-        <p:txBody>
-          <a:bodyPr wrap="square">
-            <a:spAutoFit/>
-          </a:bodyPr>
-          <a:lstStyle/>
-          <a:p>
-            <a:pPr algn="r"/>
-            <a:r>
-              <a:rPr sz="1100" b="0" i="0">
-                <a:solidFill>
-                  <a:srgbClr val="666666"/>
-                </a:solidFill>
-                <a:latin typeface="Calibri"/>
-              </a:rPr>
-              <a:t>34</a:t>
-            </a:r>
-          </a:p>
-        </p:txBody>
-      </p:sp>
-    </p:spTree>
-  </p:cSld>
-  <p:clrMapOvr>
-    <a:masterClrMapping/>
-  </p:clrMapOvr>
-</p:sld>
-</file>
-
-<file path=ppt/slides/slide35.xml><?xml version="1.0" encoding="utf-8"?>
-<p:sld xmlns:a="http://schemas.openxmlformats.org/drawingml/2006/main" xmlns:p="http://schemas.openxmlformats.org/presentationml/2006/main" xmlns:r="http://schemas.openxmlformats.org/officeDocument/2006/relationships">
-  <p:cSld>
-    <p:bg>
-      <p:bgPr>
-        <a:solidFill>
-          <a:srgbClr val="FFFFFF"/>
-        </a:solidFill>
-        <a:effectLst/>
-      </p:bgPr>
-    </p:bg>
-    <p:spTree>
-      <p:nvGrpSpPr>
-        <p:cNvPr id="1" name=""/>
-        <p:cNvGrpSpPr/>
-        <p:nvPr/>
-      </p:nvGrpSpPr>
-      <p:grpSpPr/>
-      <p:sp>
-        <p:nvSpPr>
-          <p:cNvPr id="2" name="Rectangle 1"/>
-          <p:cNvSpPr/>
-          <p:nvPr/>
-        </p:nvSpPr>
-        <p:spPr>
-          <a:xfrm>
-            <a:off x="0" y="0"/>
-            <a:ext cx="12191695" cy="960120"/>
-          </a:xfrm>
-          <a:prstGeom prst="rect">
-            <a:avLst/>
-          </a:prstGeom>
-          <a:solidFill>
-            <a:srgbClr val="095292"/>
-          </a:solidFill>
-          <a:ln>
-            <a:noFill/>
-          </a:ln>
-        </p:spPr>
-        <p:style>
-          <a:lnRef idx="1">
-            <a:schemeClr val="accent1"/>
-          </a:lnRef>
-          <a:fillRef idx="3">
-            <a:schemeClr val="accent1"/>
-          </a:fillRef>
-          <a:effectRef idx="2">
-            <a:schemeClr val="accent1"/>
-          </a:effectRef>
-          <a:fontRef idx="minor">
-            <a:schemeClr val="lt1"/>
-          </a:fontRef>
-        </p:style>
-        <p:txBody>
-          <a:bodyPr rtlCol="0" anchor="ctr"/>
-          <a:lstStyle/>
-          <a:p>
-            <a:pPr algn="ctr"/>
-          </a:p>
-        </p:txBody>
-      </p:sp>
-      <p:sp>
-        <p:nvSpPr>
-          <p:cNvPr id="3" name="Rectangle 2"/>
-          <p:cNvSpPr/>
-          <p:nvPr/>
-        </p:nvSpPr>
-        <p:spPr>
-          <a:xfrm>
-            <a:off x="0" y="960120"/>
-            <a:ext cx="12191695" cy="41148"/>
-          </a:xfrm>
-          <a:prstGeom prst="rect">
-            <a:avLst/>
-          </a:prstGeom>
-          <a:solidFill>
-            <a:srgbClr val="FFD000"/>
-          </a:solidFill>
-          <a:ln>
-            <a:noFill/>
-          </a:ln>
-        </p:spPr>
-        <p:style>
-          <a:lnRef idx="1">
-            <a:schemeClr val="accent1"/>
-          </a:lnRef>
-          <a:fillRef idx="3">
-            <a:schemeClr val="accent1"/>
-          </a:fillRef>
-          <a:effectRef idx="2">
-            <a:schemeClr val="accent1"/>
-          </a:effectRef>
-          <a:fontRef idx="minor">
-            <a:schemeClr val="lt1"/>
-          </a:fontRef>
-        </p:style>
-        <p:txBody>
-          <a:bodyPr rtlCol="0" anchor="ctr"/>
-          <a:lstStyle/>
-          <a:p>
-            <a:pPr algn="ctr"/>
-          </a:p>
-        </p:txBody>
-      </p:sp>
-      <p:sp>
-        <p:nvSpPr>
-          <p:cNvPr id="4" name="TextBox 3"/>
-          <p:cNvSpPr txBox="1"/>
-          <p:nvPr/>
-        </p:nvSpPr>
-        <p:spPr>
-          <a:xfrm>
-            <a:off x="457200" y="164592"/>
-            <a:ext cx="11277295" cy="502920"/>
-          </a:xfrm>
-          <a:prstGeom prst="rect">
-            <a:avLst/>
-          </a:prstGeom>
-          <a:noFill/>
-        </p:spPr>
-        <p:txBody>
-          <a:bodyPr wrap="square">
-            <a:spAutoFit/>
-          </a:bodyPr>
-          <a:lstStyle/>
-          <a:p>
-            <a:r>
-              <a:rPr sz="2600" b="1" i="0">
-                <a:solidFill>
-                  <a:srgbClr val="FFFFFF"/>
-                </a:solidFill>
-                <a:latin typeface="Calibri"/>
-              </a:rPr>
-              <a:t>Antes de entregar — autochequeo</a:t>
-            </a:r>
-          </a:p>
-        </p:txBody>
-      </p:sp>
-      <p:sp>
-        <p:nvSpPr>
-          <p:cNvPr id="5" name="Rounded Rectangle 4"/>
-          <p:cNvSpPr/>
-          <p:nvPr/>
-        </p:nvSpPr>
-        <p:spPr>
-          <a:xfrm>
-            <a:off x="457200" y="1261872"/>
-            <a:ext cx="11277295" cy="566928"/>
-          </a:xfrm>
-          <a:prstGeom prst="roundRect">
-            <a:avLst>
-              <a:gd name="adj" fmla="val 12000"/>
-            </a:avLst>
-          </a:prstGeom>
-          <a:solidFill>
-            <a:srgbClr val="F2F2F2"/>
-          </a:solidFill>
-          <a:ln>
-            <a:noFill/>
-          </a:ln>
-        </p:spPr>
-        <p:style>
-          <a:lnRef idx="1">
-            <a:schemeClr val="accent1"/>
-          </a:lnRef>
-          <a:fillRef idx="3">
-            <a:schemeClr val="accent1"/>
-          </a:fillRef>
-          <a:effectRef idx="2">
-            <a:schemeClr val="accent1"/>
-          </a:effectRef>
-          <a:fontRef idx="minor">
-            <a:schemeClr val="lt1"/>
-          </a:fontRef>
-        </p:style>
-        <p:txBody>
-          <a:bodyPr rtlCol="0" anchor="ctr"/>
-          <a:lstStyle/>
-          <a:p>
-            <a:pPr algn="ctr"/>
-          </a:p>
-        </p:txBody>
-      </p:sp>
-      <p:sp>
-        <p:nvSpPr>
-          <p:cNvPr id="6" name="Rectangle 5"/>
-          <p:cNvSpPr/>
-          <p:nvPr/>
-        </p:nvSpPr>
-        <p:spPr>
-          <a:xfrm>
-            <a:off x="640080" y="1408175"/>
-            <a:ext cx="274320" cy="274320"/>
-          </a:xfrm>
-          <a:prstGeom prst="rect">
-            <a:avLst/>
-          </a:prstGeom>
-          <a:solidFill>
-            <a:srgbClr val="FFFFFF"/>
-          </a:solidFill>
-          <a:ln>
-            <a:solidFill>
-              <a:srgbClr val="333333"/>
-            </a:solidFill>
-          </a:ln>
-        </p:spPr>
-        <p:style>
-          <a:lnRef idx="1">
-            <a:schemeClr val="accent1"/>
-          </a:lnRef>
-          <a:fillRef idx="3">
-            <a:schemeClr val="accent1"/>
-          </a:fillRef>
-          <a:effectRef idx="2">
-            <a:schemeClr val="accent1"/>
-          </a:effectRef>
-          <a:fontRef idx="minor">
-            <a:schemeClr val="lt1"/>
-          </a:fontRef>
-        </p:style>
-        <p:txBody>
-          <a:bodyPr rtlCol="0" anchor="ctr"/>
-          <a:lstStyle/>
-          <a:p>
-            <a:pPr algn="ctr"/>
-          </a:p>
-        </p:txBody>
-      </p:sp>
-      <p:sp>
-        <p:nvSpPr>
-          <p:cNvPr id="7" name="Rectangle 6"/>
-          <p:cNvSpPr/>
-          <p:nvPr/>
-        </p:nvSpPr>
-        <p:spPr>
-          <a:xfrm>
-            <a:off x="640080" y="1408175"/>
-            <a:ext cx="73152" cy="274320"/>
-          </a:xfrm>
-          <a:prstGeom prst="rect">
-            <a:avLst/>
-          </a:prstGeom>
-          <a:solidFill>
-            <a:srgbClr val="269CCB"/>
-          </a:solidFill>
-          <a:ln>
-            <a:noFill/>
-          </a:ln>
-        </p:spPr>
-        <p:style>
-          <a:lnRef idx="1">
-            <a:schemeClr val="accent1"/>
-          </a:lnRef>
-          <a:fillRef idx="3">
-            <a:schemeClr val="accent1"/>
-          </a:fillRef>
-          <a:effectRef idx="2">
-            <a:schemeClr val="accent1"/>
-          </a:effectRef>
-          <a:fontRef idx="minor">
-            <a:schemeClr val="lt1"/>
-          </a:fontRef>
-        </p:style>
-        <p:txBody>
-          <a:bodyPr rtlCol="0" anchor="ctr"/>
-          <a:lstStyle/>
-          <a:p>
-            <a:pPr algn="ctr"/>
-          </a:p>
-        </p:txBody>
-      </p:sp>
-      <p:sp>
-        <p:nvSpPr>
-          <p:cNvPr id="8" name="TextBox 7"/>
-          <p:cNvSpPr txBox="1"/>
-          <p:nvPr/>
-        </p:nvSpPr>
-        <p:spPr>
-          <a:xfrm>
-            <a:off x="1097280" y="1353312"/>
-            <a:ext cx="10362895" cy="402336"/>
-          </a:xfrm>
-          <a:prstGeom prst="rect">
-            <a:avLst/>
-          </a:prstGeom>
-          <a:noFill/>
-        </p:spPr>
-        <p:txBody>
-          <a:bodyPr wrap="square" anchor="ctr"/>
-          <a:lstStyle/>
-          <a:p>
-            <a:r>
-              <a:rPr sz="1500" b="0" i="0">
-                <a:solidFill>
-                  <a:srgbClr val="333333"/>
-                </a:solidFill>
-                <a:latin typeface="Calibri"/>
-              </a:rPr>
-              <a:t>Si el archivo aparece con 0 bytes aunque el programa dijo que guardó, ¿quién debía vaciar el buffer y cuándo se supone que eso ocurre?</a:t>
-            </a:r>
-          </a:p>
-        </p:txBody>
-      </p:sp>
-      <p:sp>
-        <p:nvSpPr>
-          <p:cNvPr id="9" name="Rounded Rectangle 8"/>
-          <p:cNvSpPr/>
-          <p:nvPr/>
-        </p:nvSpPr>
-        <p:spPr>
-          <a:xfrm>
-            <a:off x="457200" y="1938528"/>
-            <a:ext cx="11277295" cy="566928"/>
-          </a:xfrm>
-          <a:prstGeom prst="roundRect">
-            <a:avLst>
-              <a:gd name="adj" fmla="val 12000"/>
-            </a:avLst>
-          </a:prstGeom>
-          <a:solidFill>
-            <a:srgbClr val="F2F2F2"/>
-          </a:solidFill>
-          <a:ln>
-            <a:noFill/>
-          </a:ln>
-        </p:spPr>
-        <p:style>
-          <a:lnRef idx="1">
-            <a:schemeClr val="accent1"/>
-          </a:lnRef>
-          <a:fillRef idx="3">
-            <a:schemeClr val="accent1"/>
-          </a:fillRef>
-          <a:effectRef idx="2">
-            <a:schemeClr val="accent1"/>
-          </a:effectRef>
-          <a:fontRef idx="minor">
-            <a:schemeClr val="lt1"/>
-          </a:fontRef>
-        </p:style>
-        <p:txBody>
-          <a:bodyPr rtlCol="0" anchor="ctr"/>
-          <a:lstStyle/>
-          <a:p>
-            <a:pPr algn="ctr"/>
-          </a:p>
-        </p:txBody>
-      </p:sp>
-      <p:sp>
-        <p:nvSpPr>
-          <p:cNvPr id="10" name="Rectangle 9"/>
-          <p:cNvSpPr/>
-          <p:nvPr/>
-        </p:nvSpPr>
-        <p:spPr>
-          <a:xfrm>
-            <a:off x="640080" y="2084832"/>
-            <a:ext cx="274320" cy="274320"/>
-          </a:xfrm>
-          <a:prstGeom prst="rect">
-            <a:avLst/>
-          </a:prstGeom>
-          <a:solidFill>
-            <a:srgbClr val="FFFFFF"/>
-          </a:solidFill>
-          <a:ln>
-            <a:solidFill>
-              <a:srgbClr val="333333"/>
-            </a:solidFill>
-          </a:ln>
-        </p:spPr>
-        <p:style>
-          <a:lnRef idx="1">
-            <a:schemeClr val="accent1"/>
-          </a:lnRef>
-          <a:fillRef idx="3">
-            <a:schemeClr val="accent1"/>
-          </a:fillRef>
-          <a:effectRef idx="2">
-            <a:schemeClr val="accent1"/>
-          </a:effectRef>
-          <a:fontRef idx="minor">
-            <a:schemeClr val="lt1"/>
-          </a:fontRef>
-        </p:style>
-        <p:txBody>
-          <a:bodyPr rtlCol="0" anchor="ctr"/>
-          <a:lstStyle/>
-          <a:p>
-            <a:pPr algn="ctr"/>
-          </a:p>
-        </p:txBody>
-      </p:sp>
-      <p:sp>
-        <p:nvSpPr>
-          <p:cNvPr id="11" name="Rectangle 10"/>
-          <p:cNvSpPr/>
-          <p:nvPr/>
-        </p:nvSpPr>
-        <p:spPr>
-          <a:xfrm>
-            <a:off x="640080" y="2084832"/>
-            <a:ext cx="73152" cy="274320"/>
-          </a:xfrm>
-          <a:prstGeom prst="rect">
-            <a:avLst/>
-          </a:prstGeom>
-          <a:solidFill>
-            <a:srgbClr val="269CCB"/>
-          </a:solidFill>
-          <a:ln>
-            <a:noFill/>
-          </a:ln>
-        </p:spPr>
-        <p:style>
-          <a:lnRef idx="1">
-            <a:schemeClr val="accent1"/>
-          </a:lnRef>
-          <a:fillRef idx="3">
-            <a:schemeClr val="accent1"/>
-          </a:fillRef>
-          <a:effectRef idx="2">
-            <a:schemeClr val="accent1"/>
-          </a:effectRef>
-          <a:fontRef idx="minor">
-            <a:schemeClr val="lt1"/>
-          </a:fontRef>
-        </p:style>
-        <p:txBody>
-          <a:bodyPr rtlCol="0" anchor="ctr"/>
-          <a:lstStyle/>
-          <a:p>
-            <a:pPr algn="ctr"/>
-          </a:p>
-        </p:txBody>
-      </p:sp>
-      <p:sp>
-        <p:nvSpPr>
-          <p:cNvPr id="12" name="TextBox 11"/>
-          <p:cNvSpPr txBox="1"/>
-          <p:nvPr/>
-        </p:nvSpPr>
-        <p:spPr>
-          <a:xfrm>
-            <a:off x="1097280" y="2029968"/>
-            <a:ext cx="10362895" cy="402336"/>
-          </a:xfrm>
-          <a:prstGeom prst="rect">
-            <a:avLst/>
-          </a:prstGeom>
-          <a:noFill/>
-        </p:spPr>
-        <p:txBody>
-          <a:bodyPr wrap="square" anchor="ctr"/>
-          <a:lstStyle/>
-          <a:p>
-            <a:r>
-              <a:rPr sz="1500" b="0" i="0">
-                <a:solidFill>
-                  <a:srgbClr val="333333"/>
-                </a:solidFill>
-                <a:latin typeface="Calibri"/>
-              </a:rPr>
-              <a:t>Si al reabrir la aplicación aparecen cero mascotas pero el .csv tiene contenido, ¿está descartando el encabezado o lo está intentando convertir en una mascota?</a:t>
-            </a:r>
-          </a:p>
-        </p:txBody>
-      </p:sp>
-      <p:sp>
-        <p:nvSpPr>
-          <p:cNvPr id="13" name="Rounded Rectangle 12"/>
-          <p:cNvSpPr/>
-          <p:nvPr/>
-        </p:nvSpPr>
-        <p:spPr>
-          <a:xfrm>
-            <a:off x="457200" y="2615184"/>
-            <a:ext cx="11277295" cy="566928"/>
-          </a:xfrm>
-          <a:prstGeom prst="roundRect">
-            <a:avLst>
-              <a:gd name="adj" fmla="val 12000"/>
-            </a:avLst>
-          </a:prstGeom>
-          <a:solidFill>
-            <a:srgbClr val="F2F2F2"/>
-          </a:solidFill>
-          <a:ln>
-            <a:noFill/>
-          </a:ln>
-        </p:spPr>
-        <p:style>
-          <a:lnRef idx="1">
-            <a:schemeClr val="accent1"/>
-          </a:lnRef>
-          <a:fillRef idx="3">
-            <a:schemeClr val="accent1"/>
-          </a:fillRef>
-          <a:effectRef idx="2">
-            <a:schemeClr val="accent1"/>
-          </a:effectRef>
-          <a:fontRef idx="minor">
-            <a:schemeClr val="lt1"/>
-          </a:fontRef>
-        </p:style>
-        <p:txBody>
-          <a:bodyPr rtlCol="0" anchor="ctr"/>
-          <a:lstStyle/>
-          <a:p>
-            <a:pPr algn="ctr"/>
-          </a:p>
-        </p:txBody>
-      </p:sp>
-      <p:sp>
-        <p:nvSpPr>
-          <p:cNvPr id="14" name="Rectangle 13"/>
-          <p:cNvSpPr/>
-          <p:nvPr/>
-        </p:nvSpPr>
-        <p:spPr>
-          <a:xfrm>
-            <a:off x="640080" y="2761488"/>
-            <a:ext cx="274320" cy="274320"/>
-          </a:xfrm>
-          <a:prstGeom prst="rect">
-            <a:avLst/>
-          </a:prstGeom>
-          <a:solidFill>
-            <a:srgbClr val="FFFFFF"/>
-          </a:solidFill>
-          <a:ln>
-            <a:solidFill>
-              <a:srgbClr val="333333"/>
-            </a:solidFill>
-          </a:ln>
-        </p:spPr>
-        <p:style>
-          <a:lnRef idx="1">
-            <a:schemeClr val="accent1"/>
-          </a:lnRef>
-          <a:fillRef idx="3">
-            <a:schemeClr val="accent1"/>
-          </a:fillRef>
-          <a:effectRef idx="2">
-            <a:schemeClr val="accent1"/>
-          </a:effectRef>
-          <a:fontRef idx="minor">
-            <a:schemeClr val="lt1"/>
-          </a:fontRef>
-        </p:style>
-        <p:txBody>
-          <a:bodyPr rtlCol="0" anchor="ctr"/>
-          <a:lstStyle/>
-          <a:p>
-            <a:pPr algn="ctr"/>
-          </a:p>
-        </p:txBody>
-      </p:sp>
-      <p:sp>
-        <p:nvSpPr>
-          <p:cNvPr id="15" name="Rectangle 14"/>
-          <p:cNvSpPr/>
-          <p:nvPr/>
-        </p:nvSpPr>
-        <p:spPr>
-          <a:xfrm>
-            <a:off x="640080" y="2761488"/>
-            <a:ext cx="73152" cy="274320"/>
-          </a:xfrm>
-          <a:prstGeom prst="rect">
-            <a:avLst/>
-          </a:prstGeom>
-          <a:solidFill>
-            <a:srgbClr val="269CCB"/>
-          </a:solidFill>
-          <a:ln>
-            <a:noFill/>
-          </a:ln>
-        </p:spPr>
-        <p:style>
-          <a:lnRef idx="1">
-            <a:schemeClr val="accent1"/>
-          </a:lnRef>
-          <a:fillRef idx="3">
-            <a:schemeClr val="accent1"/>
-          </a:fillRef>
-          <a:effectRef idx="2">
-            <a:schemeClr val="accent1"/>
-          </a:effectRef>
-          <a:fontRef idx="minor">
-            <a:schemeClr val="lt1"/>
-          </a:fontRef>
-        </p:style>
-        <p:txBody>
-          <a:bodyPr rtlCol="0" anchor="ctr"/>
-          <a:lstStyle/>
-          <a:p>
-            <a:pPr algn="ctr"/>
-          </a:p>
-        </p:txBody>
-      </p:sp>
-      <p:sp>
-        <p:nvSpPr>
-          <p:cNvPr id="16" name="TextBox 15"/>
-          <p:cNvSpPr txBox="1"/>
-          <p:nvPr/>
-        </p:nvSpPr>
-        <p:spPr>
-          <a:xfrm>
-            <a:off x="1097280" y="2706624"/>
-            <a:ext cx="10362895" cy="402336"/>
-          </a:xfrm>
-          <a:prstGeom prst="rect">
-            <a:avLst/>
-          </a:prstGeom>
-          <a:noFill/>
-        </p:spPr>
-        <p:txBody>
-          <a:bodyPr wrap="square" anchor="ctr"/>
-          <a:lstStyle/>
-          <a:p>
-            <a:r>
-              <a:rPr sz="1500" b="0" i="0">
-                <a:solidFill>
-                  <a:srgbClr val="333333"/>
-                </a:solidFill>
-                <a:latin typeface="Calibri"/>
-              </a:rPr>
-              <a:t>De las sugerencias que le dio la IA, ¿cuál cambia únicamente la forma del código y cuál cambia lo que el programa hace? ¿Puede explicar la diferencia sin volver a preguntarle a la IA?</a:t>
-            </a:r>
-          </a:p>
-        </p:txBody>
-      </p:sp>
-      <p:sp>
-        <p:nvSpPr>
-          <p:cNvPr id="17" name="TextBox 16"/>
-          <p:cNvSpPr txBox="1"/>
-          <p:nvPr/>
-        </p:nvSpPr>
-        <p:spPr>
-          <a:xfrm>
-            <a:off x="11185855" y="6473952"/>
-            <a:ext cx="640080" cy="274320"/>
-          </a:xfrm>
-          <a:prstGeom prst="rect">
-            <a:avLst/>
-          </a:prstGeom>
-          <a:noFill/>
-        </p:spPr>
-        <p:txBody>
-          <a:bodyPr wrap="square">
-            <a:spAutoFit/>
-          </a:bodyPr>
-          <a:lstStyle/>
-          <a:p>
-            <a:pPr algn="r"/>
-            <a:r>
-              <a:rPr sz="1100" b="0" i="0">
-                <a:solidFill>
-                  <a:srgbClr val="666666"/>
-                </a:solidFill>
-                <a:latin typeface="Calibri"/>
-              </a:rPr>
-              <a:t>35</a:t>
-            </a:r>
-          </a:p>
-        </p:txBody>
-      </p:sp>
-    </p:spTree>
-  </p:cSld>
-  <p:clrMapOvr>
-    <a:masterClrMapping/>
-  </p:clrMapOvr>
-</p:sld>
-</file>
-
-<file path=ppt/slides/slide36.xml><?xml version="1.0" encoding="utf-8"?>
-<p:sld xmlns:a="http://schemas.openxmlformats.org/drawingml/2006/main" xmlns:p="http://schemas.openxmlformats.org/presentationml/2006/main" xmlns:r="http://schemas.openxmlformats.org/officeDocument/2006/relationships">
-  <p:cSld>
-    <p:bg>
-      <p:bgPr>
-        <a:solidFill>
-          <a:srgbClr val="FFFFFF"/>
-        </a:solidFill>
-        <a:effectLst/>
-      </p:bgPr>
-    </p:bg>
-    <p:spTree>
-      <p:nvGrpSpPr>
-        <p:cNvPr id="1" name=""/>
-        <p:cNvGrpSpPr/>
-        <p:nvPr/>
-      </p:nvGrpSpPr>
-      <p:grpSpPr/>
-      <p:sp>
-        <p:nvSpPr>
-          <p:cNvPr id="2" name="Rectangle 1"/>
-          <p:cNvSpPr/>
-          <p:nvPr/>
-        </p:nvSpPr>
-        <p:spPr>
-          <a:xfrm>
-            <a:off x="0" y="0"/>
-            <a:ext cx="12191695" cy="960120"/>
-          </a:xfrm>
-          <a:prstGeom prst="rect">
-            <a:avLst/>
-          </a:prstGeom>
-          <a:solidFill>
-            <a:srgbClr val="095292"/>
-          </a:solidFill>
-          <a:ln>
-            <a:noFill/>
-          </a:ln>
-        </p:spPr>
-        <p:style>
-          <a:lnRef idx="1">
-            <a:schemeClr val="accent1"/>
-          </a:lnRef>
-          <a:fillRef idx="3">
-            <a:schemeClr val="accent1"/>
-          </a:fillRef>
-          <a:effectRef idx="2">
-            <a:schemeClr val="accent1"/>
-          </a:effectRef>
-          <a:fontRef idx="minor">
-            <a:schemeClr val="lt1"/>
-          </a:fontRef>
-        </p:style>
-        <p:txBody>
-          <a:bodyPr rtlCol="0" anchor="ctr"/>
-          <a:lstStyle/>
-          <a:p>
-            <a:pPr algn="ctr"/>
-          </a:p>
-        </p:txBody>
-      </p:sp>
-      <p:sp>
-        <p:nvSpPr>
-          <p:cNvPr id="3" name="Rectangle 2"/>
-          <p:cNvSpPr/>
-          <p:nvPr/>
-        </p:nvSpPr>
-        <p:spPr>
-          <a:xfrm>
-            <a:off x="0" y="960120"/>
-            <a:ext cx="12191695" cy="41148"/>
-          </a:xfrm>
-          <a:prstGeom prst="rect">
-            <a:avLst/>
-          </a:prstGeom>
-          <a:solidFill>
-            <a:srgbClr val="FFD000"/>
-          </a:solidFill>
-          <a:ln>
-            <a:noFill/>
-          </a:ln>
-        </p:spPr>
-        <p:style>
-          <a:lnRef idx="1">
-            <a:schemeClr val="accent1"/>
-          </a:lnRef>
-          <a:fillRef idx="3">
-            <a:schemeClr val="accent1"/>
-          </a:fillRef>
-          <a:effectRef idx="2">
-            <a:schemeClr val="accent1"/>
-          </a:effectRef>
-          <a:fontRef idx="minor">
-            <a:schemeClr val="lt1"/>
-          </a:fontRef>
-        </p:style>
-        <p:txBody>
-          <a:bodyPr rtlCol="0" anchor="ctr"/>
-          <a:lstStyle/>
-          <a:p>
-            <a:pPr algn="ctr"/>
-          </a:p>
-        </p:txBody>
-      </p:sp>
-      <p:sp>
-        <p:nvSpPr>
-          <p:cNvPr id="4" name="TextBox 3"/>
-          <p:cNvSpPr txBox="1"/>
-          <p:nvPr/>
-        </p:nvSpPr>
-        <p:spPr>
-          <a:xfrm>
-            <a:off x="457200" y="164592"/>
-            <a:ext cx="11277295" cy="502920"/>
-          </a:xfrm>
-          <a:prstGeom prst="rect">
-            <a:avLst/>
-          </a:prstGeom>
-          <a:noFill/>
-        </p:spPr>
-        <p:txBody>
-          <a:bodyPr wrap="square">
-            <a:spAutoFit/>
-          </a:bodyPr>
-          <a:lstStyle/>
-          <a:p>
-            <a:r>
-              <a:rPr sz="2600" b="1" i="0">
-                <a:solidFill>
-                  <a:srgbClr val="FFFFFF"/>
-                </a:solidFill>
-                <a:latin typeface="Calibri"/>
-              </a:rPr>
-              <a:t>Criterios de exito / entregable</a:t>
-            </a:r>
-          </a:p>
-        </p:txBody>
-      </p:sp>
-      <p:sp>
-        <p:nvSpPr>
-          <p:cNvPr id="5" name="TextBox 4"/>
-          <p:cNvSpPr txBox="1"/>
-          <p:nvPr/>
-        </p:nvSpPr>
-        <p:spPr>
-          <a:xfrm>
-            <a:off x="457200" y="1170432"/>
-            <a:ext cx="11277295" cy="5230368"/>
-          </a:xfrm>
-          <a:prstGeom prst="rect">
-            <a:avLst/>
-          </a:prstGeom>
-          <a:noFill/>
-        </p:spPr>
-        <p:txBody>
-          <a:bodyPr wrap="square">
-            <a:spAutoFit/>
-          </a:bodyPr>
-          <a:lstStyle/>
-          <a:p>
-            <a:pPr>
-              <a:spcAft>
-                <a:spcPts val="800"/>
-              </a:spcAft>
-            </a:pPr>
-            <a:r>
-              <a:rPr sz="2000" b="0" i="0">
-                <a:solidFill>
-                  <a:srgbClr val="333333"/>
-                </a:solidFill>
-                <a:latin typeface="Calibri"/>
-              </a:rPr>
-              <a:t>–   </a:t>
-            </a:r>
-            <a:r>
-              <a:rPr sz="2000" b="1" i="0">
-                <a:solidFill>
-                  <a:srgbClr val="333333"/>
-                </a:solidFill>
-                <a:latin typeface="Calibri"/>
-              </a:rPr>
-              <a:t>Entregable:</a:t>
-            </a:r>
-            <a:r>
-              <a:rPr sz="2000" b="0" i="0">
-                <a:solidFill>
-                  <a:srgbClr val="333333"/>
-                </a:solidFill>
-                <a:latin typeface="Calibri"/>
-              </a:rPr>
-              <a:t> La clase RepositorioMascotasCSV con guardar() y cargar() funcionando, el archivo mascotas.csv generado por la propia aplicación y la bitácora REFACTOR.md, subidos a la plataforma del curso.</a:t>
-            </a:r>
-          </a:p>
-          <a:p>
-            <a:pPr>
-              <a:spcAft>
-                <a:spcPts val="800"/>
-              </a:spcAft>
-            </a:pPr>
-            <a:r>
-              <a:rPr sz="2000" b="0" i="0">
-                <a:solidFill>
-                  <a:srgbClr val="333333"/>
-                </a:solidFill>
-                <a:latin typeface="Calibri"/>
-              </a:rPr>
-              <a:t>–   </a:t>
-            </a:r>
-            <a:r>
-              <a:rPr sz="2000" b="1" i="0">
-                <a:solidFill>
-                  <a:srgbClr val="333333"/>
-                </a:solidFill>
-                <a:latin typeface="Calibri"/>
-              </a:rPr>
-              <a:t>Exito:</a:t>
-            </a:r>
-            <a:r>
-              <a:rPr sz="2000" b="0" i="0">
-                <a:solidFill>
-                  <a:srgbClr val="333333"/>
-                </a:solidFill>
-                <a:latin typeface="Calibri"/>
-              </a:rPr>
-              <a:t> Al cerrar la aplicación y volver a abrirla, la tabla muestra las mismas mascotas que había antes: el conteo coincide y los datos no cambiaron de columna.</a:t>
-            </a:r>
-          </a:p>
-          <a:p>
-            <a:pPr>
-              <a:spcAft>
-                <a:spcPts val="800"/>
-              </a:spcAft>
-            </a:pPr>
-            <a:r>
-              <a:rPr sz="2000" b="0" i="0">
-                <a:solidFill>
-                  <a:srgbClr val="333333"/>
-                </a:solidFill>
-                <a:latin typeface="Calibri"/>
-              </a:rPr>
-              <a:t>–   </a:t>
-            </a:r>
-            <a:r>
-              <a:rPr sz="2000" b="1" i="0">
-                <a:solidFill>
-                  <a:srgbClr val="333333"/>
-                </a:solidFill>
-                <a:latin typeface="Calibri"/>
-              </a:rPr>
-              <a:t>Exito:</a:t>
-            </a:r>
-            <a:r>
-              <a:rPr sz="2000" b="0" i="0">
-                <a:solidFill>
-                  <a:srgbClr val="333333"/>
-                </a:solidFill>
-                <a:latin typeface="Calibri"/>
-              </a:rPr>
-              <a:t> El archivo mascotas.csv tiene una línea de encabezado y una línea por mascota, todas con el mismo número de separadores y sin líneas en blanco intermedias.</a:t>
-            </a:r>
-          </a:p>
-          <a:p>
-            <a:pPr>
-              <a:spcAft>
-                <a:spcPts val="800"/>
-              </a:spcAft>
-            </a:pPr>
-            <a:r>
-              <a:rPr sz="2000" b="0" i="0">
-                <a:solidFill>
-                  <a:srgbClr val="333333"/>
-                </a:solidFill>
-                <a:latin typeface="Calibri"/>
-              </a:rPr>
-              <a:t>–   </a:t>
-            </a:r>
-            <a:r>
-              <a:rPr sz="2000" b="1" i="0">
-                <a:solidFill>
-                  <a:srgbClr val="333333"/>
-                </a:solidFill>
-                <a:latin typeface="Calibri"/>
-              </a:rPr>
-              <a:t>Exito:</a:t>
-            </a:r>
-            <a:r>
-              <a:rPr sz="2000" b="0" i="0">
-                <a:solidFill>
-                  <a:srgbClr val="333333"/>
-                </a:solidFill>
-                <a:latin typeface="Calibri"/>
-              </a:rPr>
-              <a:t> Toda lectura y escritura de archivo usa try-with-resources y captura IOException informando al usuario: no queda ningún catch vacío en el proyecto.</a:t>
-            </a:r>
-          </a:p>
-          <a:p>
-            <a:pPr>
-              <a:spcAft>
-                <a:spcPts val="800"/>
-              </a:spcAft>
-            </a:pPr>
-            <a:r>
-              <a:rPr sz="2000" b="0" i="0">
-                <a:solidFill>
-                  <a:srgbClr val="333333"/>
-                </a:solidFill>
-                <a:latin typeface="Calibri"/>
-              </a:rPr>
-              <a:t>–   </a:t>
-            </a:r>
-            <a:r>
-              <a:rPr sz="2000" b="1" i="0">
-                <a:solidFill>
-                  <a:srgbClr val="333333"/>
-                </a:solidFill>
-                <a:latin typeface="Calibri"/>
-              </a:rPr>
-              <a:t>Exito:</a:t>
-            </a:r>
-            <a:r>
-              <a:rPr sz="2000" b="0" i="0">
-                <a:solidFill>
-                  <a:srgbClr val="333333"/>
-                </a:solidFill>
-                <a:latin typeface="Calibri"/>
-              </a:rPr>
-              <a:t> Si mascotas.csv no existe o si una línea está dañada, la aplicación arranca igual, reporta el problema indicando el número de línea y carga los registros válidos restantes.</a:t>
-            </a:r>
-          </a:p>
-          <a:p>
-            <a:pPr>
-              <a:spcAft>
-                <a:spcPts val="800"/>
-              </a:spcAft>
-            </a:pPr>
-            <a:r>
-              <a:rPr sz="2000" b="0" i="0">
-                <a:solidFill>
-                  <a:srgbClr val="333333"/>
-                </a:solidFill>
-                <a:latin typeface="Calibri"/>
-              </a:rPr>
-              <a:t>–   </a:t>
-            </a:r>
-            <a:r>
-              <a:rPr sz="2000" b="1" i="0">
-                <a:solidFill>
-                  <a:srgbClr val="333333"/>
-                </a:solidFill>
-                <a:latin typeface="Calibri"/>
-              </a:rPr>
-              <a:t>Entrega en la plataforma del curso</a:t>
-            </a:r>
-            <a:r>
-              <a:rPr sz="2000" b="0" i="0">
-                <a:solidFill>
-                  <a:srgbClr val="333333"/>
-                </a:solidFill>
-                <a:latin typeface="Calibri"/>
-              </a:rPr>
-              <a:t> — en la fecha que indique el docente.</a:t>
-            </a:r>
-          </a:p>
-        </p:txBody>
-      </p:sp>
-      <p:sp>
-        <p:nvSpPr>
-          <p:cNvPr id="6" name="TextBox 5"/>
-          <p:cNvSpPr txBox="1"/>
-          <p:nvPr/>
-        </p:nvSpPr>
-        <p:spPr>
-          <a:xfrm>
-            <a:off x="11185855" y="6473952"/>
-            <a:ext cx="640080" cy="274320"/>
-          </a:xfrm>
-          <a:prstGeom prst="rect">
-            <a:avLst/>
-          </a:prstGeom>
-          <a:noFill/>
-        </p:spPr>
-        <p:txBody>
-          <a:bodyPr wrap="square">
-            <a:spAutoFit/>
-          </a:bodyPr>
-          <a:lstStyle/>
-          <a:p>
-            <a:pPr algn="r"/>
-            <a:r>
-              <a:rPr sz="1100" b="0" i="0">
-                <a:solidFill>
-                  <a:srgbClr val="666666"/>
-                </a:solidFill>
-                <a:latin typeface="Calibri"/>
-              </a:rPr>
-              <a:t>36</a:t>
-            </a:r>
-          </a:p>
-        </p:txBody>
-      </p:sp>
-    </p:spTree>
-  </p:cSld>
-  <p:clrMapOvr>
-    <a:masterClrMapping/>
-  </p:clrMapOvr>
-</p:sld>
-</file>
-
-<file path=ppt/slides/slide37.xml><?xml version="1.0" encoding="utf-8"?>
-<p:sld xmlns:a="http://schemas.openxmlformats.org/drawingml/2006/main" xmlns:p="http://schemas.openxmlformats.org/presentationml/2006/main" xmlns:r="http://schemas.openxmlformats.org/officeDocument/2006/relationships">
-  <p:cSld>
-    <p:bg>
-      <p:bgPr>
-        <a:solidFill>
-          <a:srgbClr val="FFFFFF"/>
-        </a:solidFill>
-        <a:effectLst/>
-      </p:bgPr>
-    </p:bg>
-    <p:spTree>
-      <p:nvGrpSpPr>
-        <p:cNvPr id="1" name=""/>
-        <p:cNvGrpSpPr/>
-        <p:nvPr/>
-      </p:nvGrpSpPr>
-      <p:grpSpPr/>
-      <p:sp>
-        <p:nvSpPr>
-          <p:cNvPr id="2" name="Rectangle 1"/>
-          <p:cNvSpPr/>
-          <p:nvPr/>
-        </p:nvSpPr>
-        <p:spPr>
-          <a:xfrm>
-            <a:off x="0" y="0"/>
-            <a:ext cx="12191695" cy="960120"/>
-          </a:xfrm>
-          <a:prstGeom prst="rect">
-            <a:avLst/>
-          </a:prstGeom>
-          <a:solidFill>
-            <a:srgbClr val="095292"/>
-          </a:solidFill>
-          <a:ln>
-            <a:noFill/>
-          </a:ln>
-        </p:spPr>
-        <p:style>
-          <a:lnRef idx="1">
-            <a:schemeClr val="accent1"/>
-          </a:lnRef>
-          <a:fillRef idx="3">
-            <a:schemeClr val="accent1"/>
-          </a:fillRef>
-          <a:effectRef idx="2">
-            <a:schemeClr val="accent1"/>
-          </a:effectRef>
-          <a:fontRef idx="minor">
-            <a:schemeClr val="lt1"/>
-          </a:fontRef>
-        </p:style>
-        <p:txBody>
-          <a:bodyPr rtlCol="0" anchor="ctr"/>
-          <a:lstStyle/>
-          <a:p>
-            <a:pPr algn="ctr"/>
-          </a:p>
-        </p:txBody>
-      </p:sp>
-      <p:sp>
-        <p:nvSpPr>
-          <p:cNvPr id="3" name="Rectangle 2"/>
-          <p:cNvSpPr/>
-          <p:nvPr/>
-        </p:nvSpPr>
-        <p:spPr>
-          <a:xfrm>
-            <a:off x="0" y="960120"/>
-            <a:ext cx="12191695" cy="41148"/>
-          </a:xfrm>
-          <a:prstGeom prst="rect">
-            <a:avLst/>
-          </a:prstGeom>
-          <a:solidFill>
-            <a:srgbClr val="FFD000"/>
-          </a:solidFill>
-          <a:ln>
-            <a:noFill/>
-          </a:ln>
-        </p:spPr>
-        <p:style>
-          <a:lnRef idx="1">
-            <a:schemeClr val="accent1"/>
-          </a:lnRef>
-          <a:fillRef idx="3">
-            <a:schemeClr val="accent1"/>
-          </a:fillRef>
-          <a:effectRef idx="2">
-            <a:schemeClr val="accent1"/>
-          </a:effectRef>
-          <a:fontRef idx="minor">
-            <a:schemeClr val="lt1"/>
-          </a:fontRef>
-        </p:style>
-        <p:txBody>
-          <a:bodyPr rtlCol="0" anchor="ctr"/>
-          <a:lstStyle/>
-          <a:p>
-            <a:pPr algn="ctr"/>
-          </a:p>
-        </p:txBody>
-      </p:sp>
-      <p:sp>
-        <p:nvSpPr>
-          <p:cNvPr id="4" name="TextBox 3"/>
-          <p:cNvSpPr txBox="1"/>
-          <p:nvPr/>
-        </p:nvSpPr>
-        <p:spPr>
-          <a:xfrm>
-            <a:off x="457200" y="164592"/>
-            <a:ext cx="11277295" cy="502920"/>
-          </a:xfrm>
-          <a:prstGeom prst="rect">
-            <a:avLst/>
-          </a:prstGeom>
-          <a:noFill/>
-        </p:spPr>
-        <p:txBody>
-          <a:bodyPr wrap="square">
-            <a:spAutoFit/>
-          </a:bodyPr>
-          <a:lstStyle/>
-          <a:p>
-            <a:r>
-              <a:rPr sz="2600" b="1" i="0">
-                <a:solidFill>
-                  <a:srgbClr val="FFFFFF"/>
-                </a:solidFill>
-                <a:latin typeface="Calibri"/>
-              </a:rPr>
-              <a:t>Para el PI esta semana</a:t>
-            </a:r>
-          </a:p>
-        </p:txBody>
-      </p:sp>
-      <p:sp>
-        <p:nvSpPr>
-          <p:cNvPr id="5" name="Rounded Rectangle 4"/>
-          <p:cNvSpPr/>
-          <p:nvPr/>
-        </p:nvSpPr>
-        <p:spPr>
-          <a:xfrm>
-            <a:off x="457200" y="1261872"/>
-            <a:ext cx="11277295" cy="1051560"/>
-          </a:xfrm>
-          <a:prstGeom prst="roundRect">
-            <a:avLst>
-              <a:gd name="adj" fmla="val 12000"/>
-            </a:avLst>
-          </a:prstGeom>
-          <a:solidFill>
-            <a:srgbClr val="E8F4FA"/>
-          </a:solidFill>
-          <a:ln>
-            <a:noFill/>
-          </a:ln>
-        </p:spPr>
-        <p:style>
-          <a:lnRef idx="1">
-            <a:schemeClr val="accent1"/>
-          </a:lnRef>
-          <a:fillRef idx="3">
-            <a:schemeClr val="accent1"/>
-          </a:fillRef>
-          <a:effectRef idx="2">
-            <a:schemeClr val="accent1"/>
-          </a:effectRef>
-          <a:fontRef idx="minor">
-            <a:schemeClr val="lt1"/>
-          </a:fontRef>
-        </p:style>
-        <p:txBody>
-          <a:bodyPr rtlCol="0" anchor="ctr"/>
-          <a:lstStyle/>
-          <a:p>
-            <a:pPr algn="ctr"/>
-          </a:p>
-        </p:txBody>
-      </p:sp>
-      <p:sp>
-        <p:nvSpPr>
-          <p:cNvPr id="6" name="Rectangle 5"/>
-          <p:cNvSpPr/>
-          <p:nvPr/>
-        </p:nvSpPr>
-        <p:spPr>
-          <a:xfrm>
-            <a:off x="457200" y="1261872"/>
-            <a:ext cx="128016" cy="1051560"/>
-          </a:xfrm>
-          <a:prstGeom prst="rect">
-            <a:avLst/>
-          </a:prstGeom>
-          <a:solidFill>
-            <a:srgbClr val="269CCB"/>
-          </a:solidFill>
-          <a:ln>
-            <a:noFill/>
-          </a:ln>
-        </p:spPr>
-        <p:style>
-          <a:lnRef idx="1">
-            <a:schemeClr val="accent1"/>
-          </a:lnRef>
-          <a:fillRef idx="3">
-            <a:schemeClr val="accent1"/>
-          </a:fillRef>
-          <a:effectRef idx="2">
-            <a:schemeClr val="accent1"/>
-          </a:effectRef>
-          <a:fontRef idx="minor">
-            <a:schemeClr val="lt1"/>
-          </a:fontRef>
-        </p:style>
-        <p:txBody>
-          <a:bodyPr rtlCol="0" anchor="ctr"/>
-          <a:lstStyle/>
-          <a:p>
-            <a:pPr algn="ctr"/>
-          </a:p>
-        </p:txBody>
-      </p:sp>
-      <p:sp>
-        <p:nvSpPr>
-          <p:cNvPr id="7" name="TextBox 6"/>
-          <p:cNvSpPr txBox="1"/>
-          <p:nvPr/>
-        </p:nvSpPr>
-        <p:spPr>
-          <a:xfrm>
-            <a:off x="777240" y="1399031"/>
-            <a:ext cx="10774375" cy="822959"/>
-          </a:xfrm>
-          <a:prstGeom prst="rect">
-            <a:avLst/>
-          </a:prstGeom>
-          <a:noFill/>
-        </p:spPr>
-        <p:txBody>
-          <a:bodyPr wrap="square">
-            <a:spAutoFit/>
-          </a:bodyPr>
-          <a:lstStyle/>
-          <a:p>
-            <a:r>
-              <a:rPr sz="1200" b="1" i="0">
-                <a:solidFill>
-                  <a:srgbClr val="269CCB"/>
-                </a:solidFill>
-                <a:latin typeface="Calibri"/>
-              </a:rPr>
-              <a:t>Info</a:t>
-            </a:r>
-          </a:p>
-          <a:p>
-            <a:pPr>
-              <a:spcBef>
-                <a:spcPts val="400"/>
-              </a:spcBef>
-            </a:pPr>
-            <a:r>
-              <a:rPr sz="1400" b="0" i="0">
-                <a:solidFill>
-                  <a:srgbClr val="333333"/>
-                </a:solidFill>
-                <a:latin typeface="Calibri"/>
-              </a:rPr>
-              <a:t>Hito: VetCare guarda la lista de mascotas en mascotas.csv al cerrar y la vuelve a cargar al abrir.</a:t>
-            </a:r>
-          </a:p>
-        </p:txBody>
-      </p:sp>
-      <p:sp>
-        <p:nvSpPr>
-          <p:cNvPr id="8" name="Rounded Rectangle 7"/>
-          <p:cNvSpPr/>
-          <p:nvPr/>
-        </p:nvSpPr>
-        <p:spPr>
-          <a:xfrm>
-            <a:off x="457200" y="2478024"/>
-            <a:ext cx="11277295" cy="1051560"/>
-          </a:xfrm>
-          <a:prstGeom prst="roundRect">
-            <a:avLst>
-              <a:gd name="adj" fmla="val 12000"/>
-            </a:avLst>
-          </a:prstGeom>
-          <a:solidFill>
-            <a:srgbClr val="FFF8E1"/>
-          </a:solidFill>
-          <a:ln>
-            <a:noFill/>
-          </a:ln>
-        </p:spPr>
-        <p:style>
-          <a:lnRef idx="1">
-            <a:schemeClr val="accent1"/>
-          </a:lnRef>
-          <a:fillRef idx="3">
-            <a:schemeClr val="accent1"/>
-          </a:fillRef>
-          <a:effectRef idx="2">
-            <a:schemeClr val="accent1"/>
-          </a:effectRef>
-          <a:fontRef idx="minor">
-            <a:schemeClr val="lt1"/>
-          </a:fontRef>
-        </p:style>
-        <p:txBody>
-          <a:bodyPr rtlCol="0" anchor="ctr"/>
-          <a:lstStyle/>
-          <a:p>
-            <a:pPr algn="ctr"/>
-          </a:p>
-        </p:txBody>
-      </p:sp>
-      <p:sp>
-        <p:nvSpPr>
-          <p:cNvPr id="9" name="Rectangle 8"/>
-          <p:cNvSpPr/>
-          <p:nvPr/>
-        </p:nvSpPr>
-        <p:spPr>
-          <a:xfrm>
-            <a:off x="457200" y="2478024"/>
-            <a:ext cx="128016" cy="1051560"/>
-          </a:xfrm>
-          <a:prstGeom prst="rect">
-            <a:avLst/>
-          </a:prstGeom>
-          <a:solidFill>
-            <a:srgbClr val="FFD000"/>
-          </a:solidFill>
-          <a:ln>
-            <a:noFill/>
-          </a:ln>
-        </p:spPr>
-        <p:style>
-          <a:lnRef idx="1">
-            <a:schemeClr val="accent1"/>
-          </a:lnRef>
-          <a:fillRef idx="3">
-            <a:schemeClr val="accent1"/>
-          </a:fillRef>
-          <a:effectRef idx="2">
-            <a:schemeClr val="accent1"/>
-          </a:effectRef>
-          <a:fontRef idx="minor">
-            <a:schemeClr val="lt1"/>
-          </a:fontRef>
-        </p:style>
-        <p:txBody>
-          <a:bodyPr rtlCol="0" anchor="ctr"/>
-          <a:lstStyle/>
-          <a:p>
-            <a:pPr algn="ctr"/>
-          </a:p>
-        </p:txBody>
-      </p:sp>
-      <p:sp>
-        <p:nvSpPr>
-          <p:cNvPr id="10" name="TextBox 9"/>
-          <p:cNvSpPr txBox="1"/>
-          <p:nvPr/>
-        </p:nvSpPr>
-        <p:spPr>
-          <a:xfrm>
-            <a:off x="777240" y="2615184"/>
-            <a:ext cx="10774375" cy="822959"/>
-          </a:xfrm>
-          <a:prstGeom prst="rect">
-            <a:avLst/>
-          </a:prstGeom>
-          <a:noFill/>
-        </p:spPr>
-        <p:txBody>
-          <a:bodyPr wrap="square">
-            <a:spAutoFit/>
-          </a:bodyPr>
-          <a:lstStyle/>
-          <a:p>
-            <a:r>
-              <a:rPr sz="1200" b="1" i="0">
-                <a:solidFill>
-                  <a:srgbClr val="FFD000"/>
-                </a:solidFill>
-                <a:latin typeface="Calibri"/>
-              </a:rPr>
-              <a:t>Aclaración</a:t>
-            </a:r>
-          </a:p>
-          <a:p>
-            <a:pPr>
-              <a:spcBef>
-                <a:spcPts val="400"/>
-              </a:spcBef>
-            </a:pPr>
-            <a:r>
-              <a:rPr sz="1400" b="0" i="0">
-                <a:solidFill>
-                  <a:srgbClr val="333333"/>
-                </a:solidFill>
-                <a:latin typeface="Calibri"/>
-              </a:rPr>
-              <a:t>Enunciado completo: Clases/Proyecto Integrador/ (VetCare).</a:t>
-            </a:r>
-          </a:p>
-        </p:txBody>
-      </p:sp>
-      <p:sp>
-        <p:nvSpPr>
-          <p:cNvPr id="11" name="Rounded Rectangle 10"/>
-          <p:cNvSpPr/>
-          <p:nvPr/>
-        </p:nvSpPr>
-        <p:spPr>
-          <a:xfrm>
-            <a:off x="457200" y="3694176"/>
-            <a:ext cx="11277295" cy="1051560"/>
-          </a:xfrm>
-          <a:prstGeom prst="roundRect">
-            <a:avLst>
-              <a:gd name="adj" fmla="val 12000"/>
-            </a:avLst>
-          </a:prstGeom>
-          <a:solidFill>
-            <a:srgbClr val="FBE4E4"/>
-          </a:solidFill>
-          <a:ln>
-            <a:noFill/>
-          </a:ln>
-        </p:spPr>
-        <p:style>
-          <a:lnRef idx="1">
-            <a:schemeClr val="accent1"/>
-          </a:lnRef>
-          <a:fillRef idx="3">
-            <a:schemeClr val="accent1"/>
-          </a:fillRef>
-          <a:effectRef idx="2">
-            <a:schemeClr val="accent1"/>
-          </a:effectRef>
-          <a:fontRef idx="minor">
-            <a:schemeClr val="lt1"/>
-          </a:fontRef>
-        </p:style>
-        <p:txBody>
-          <a:bodyPr rtlCol="0" anchor="ctr"/>
-          <a:lstStyle/>
-          <a:p>
-            <a:pPr algn="ctr"/>
-          </a:p>
-        </p:txBody>
-      </p:sp>
-      <p:sp>
-        <p:nvSpPr>
-          <p:cNvPr id="12" name="Rectangle 11"/>
-          <p:cNvSpPr/>
-          <p:nvPr/>
-        </p:nvSpPr>
-        <p:spPr>
-          <a:xfrm>
-            <a:off x="457200" y="3694176"/>
-            <a:ext cx="128016" cy="1051560"/>
-          </a:xfrm>
-          <a:prstGeom prst="rect">
-            <a:avLst/>
-          </a:prstGeom>
-          <a:solidFill>
-            <a:srgbClr val="A02030"/>
-          </a:solidFill>
-          <a:ln>
-            <a:noFill/>
-          </a:ln>
-        </p:spPr>
-        <p:style>
-          <a:lnRef idx="1">
-            <a:schemeClr val="accent1"/>
-          </a:lnRef>
-          <a:fillRef idx="3">
-            <a:schemeClr val="accent1"/>
-          </a:fillRef>
-          <a:effectRef idx="2">
-            <a:schemeClr val="accent1"/>
-          </a:effectRef>
-          <a:fontRef idx="minor">
-            <a:schemeClr val="lt1"/>
-          </a:fontRef>
-        </p:style>
-        <p:txBody>
-          <a:bodyPr rtlCol="0" anchor="ctr"/>
-          <a:lstStyle/>
-          <a:p>
-            <a:pPr algn="ctr"/>
-          </a:p>
-        </p:txBody>
-      </p:sp>
-      <p:sp>
-        <p:nvSpPr>
-          <p:cNvPr id="13" name="TextBox 12"/>
-          <p:cNvSpPr txBox="1"/>
-          <p:nvPr/>
-        </p:nvSpPr>
-        <p:spPr>
-          <a:xfrm>
-            <a:off x="777240" y="3831336"/>
-            <a:ext cx="10774375" cy="822959"/>
-          </a:xfrm>
-          <a:prstGeom prst="rect">
-            <a:avLst/>
-          </a:prstGeom>
-          <a:noFill/>
-        </p:spPr>
-        <p:txBody>
-          <a:bodyPr wrap="square">
-            <a:spAutoFit/>
-          </a:bodyPr>
-          <a:lstStyle/>
-          <a:p>
-            <a:r>
-              <a:rPr sz="1200" b="1" i="0">
-                <a:solidFill>
-                  <a:srgbClr val="A02030"/>
-                </a:solidFill>
-                <a:latin typeface="Calibri"/>
-              </a:rPr>
-              <a:t>Atención</a:t>
-            </a:r>
-          </a:p>
-          <a:p>
-            <a:pPr>
-              <a:spcBef>
-                <a:spcPts val="400"/>
-              </a:spcBef>
-            </a:pPr>
-            <a:r>
-              <a:rPr sz="1400" b="0" i="0">
-                <a:solidFill>
-                  <a:srgbClr val="333333"/>
-                </a:solidFill>
-                <a:latin typeface="Calibri"/>
-              </a:rPr>
-              <a:t>Entrega del taller, si el docente lo asigna · en la fecha que indique el docente.</a:t>
-            </a:r>
-          </a:p>
-        </p:txBody>
-      </p:sp>
-      <p:sp>
-        <p:nvSpPr>
-          <p:cNvPr id="14" name="TextBox 13"/>
-          <p:cNvSpPr txBox="1"/>
-          <p:nvPr/>
-        </p:nvSpPr>
-        <p:spPr>
-          <a:xfrm>
-            <a:off x="11185855" y="6473952"/>
-            <a:ext cx="640080" cy="274320"/>
-          </a:xfrm>
-          <a:prstGeom prst="rect">
-            <a:avLst/>
-          </a:prstGeom>
-          <a:noFill/>
-        </p:spPr>
-        <p:txBody>
-          <a:bodyPr wrap="square">
-            <a:spAutoFit/>
-          </a:bodyPr>
-          <a:lstStyle/>
-          <a:p>
-            <a:pPr algn="r"/>
-            <a:r>
-              <a:rPr sz="1100" b="0" i="0">
-                <a:solidFill>
-                  <a:srgbClr val="666666"/>
-                </a:solidFill>
-                <a:latin typeface="Calibri"/>
-              </a:rPr>
-              <a:t>37</a:t>
-            </a:r>
-          </a:p>
-        </p:txBody>
-      </p:sp>
-    </p:spTree>
-  </p:cSld>
-  <p:clrMapOvr>
-    <a:masterClrMapping/>
-  </p:clrMapOvr>
-</p:sld>
-</file>
-
-<file path=ppt/slides/slide38.xml><?xml version="1.0" encoding="utf-8"?>
-<p:sld xmlns:a="http://schemas.openxmlformats.org/drawingml/2006/main" xmlns:p="http://schemas.openxmlformats.org/presentationml/2006/main" xmlns:r="http://schemas.openxmlformats.org/officeDocument/2006/relationships">
-  <p:cSld>
-    <p:bg>
-      <p:bgPr>
-        <a:solidFill>
-          <a:srgbClr val="FFFFFF"/>
-        </a:solidFill>
-        <a:effectLst/>
-      </p:bgPr>
-    </p:bg>
-    <p:spTree>
-      <p:nvGrpSpPr>
-        <p:cNvPr id="1" name=""/>
-        <p:cNvGrpSpPr/>
-        <p:nvPr/>
-      </p:nvGrpSpPr>
-      <p:grpSpPr/>
-      <p:sp>
-        <p:nvSpPr>
-          <p:cNvPr id="2" name="Rectangle 1"/>
-          <p:cNvSpPr/>
-          <p:nvPr/>
-        </p:nvSpPr>
-        <p:spPr>
-          <a:xfrm>
-            <a:off x="0" y="0"/>
             <a:ext cx="12191695" cy="164592"/>
           </a:xfrm>
           <a:prstGeom prst="rect">
@@ -17671,7 +15132,7 @@
                 </a:solidFill>
                 <a:latin typeface="Calibri"/>
               </a:rPr>
-              <a:t>Clase 9 · VetCare avanza</a:t>
+              <a:t>Clase 9 · Refactorización con IA · Persistencia en archivos</a:t>
             </a:r>
           </a:p>
         </p:txBody>
@@ -17710,7 +15171,7 @@
                 </a:solidFill>
                 <a:latin typeface="Calibri"/>
               </a:rPr>
-              <a:t>VetCare guarda la lista de mascotas en mascotas.csv al cerrar y la vuelve a cargar al abrir.</a:t>
+              <a:t>Que los datos de VetCare no se pierdan al cerrar la ventana</a:t>
             </a:r>
           </a:p>
           <a:p>
@@ -17726,7 +15187,7 @@
                 </a:solidFill>
                 <a:latin typeface="Calibri"/>
               </a:rPr>
-              <a:t>Entregable: La clase RepositorioMascotasCSV con guardar() y cargar() funcionando, el archivo mascotas.csv generado por la propia aplicación y la bitácora REFACTOR.md, subidos a la plataforma del curso.</a:t>
+              <a:t>Repasa las laminas de concepto y el codigo de la demo</a:t>
             </a:r>
           </a:p>
           <a:p>
@@ -17742,7 +15203,7 @@
                 </a:solidFill>
                 <a:latin typeface="Calibri"/>
               </a:rPr>
-              <a:t>Siguiente clase: continuamos el hilo del PI</a:t>
+              <a:t>Siguiente clase: continuamos el hilo del tema</a:t>
             </a:r>
           </a:p>
         </p:txBody>
@@ -19732,4 +17193,324 @@
   </a:objectDefaults>
   <a:extraClrSchemeLst/>
 </a:theme>
+</file>
+
+<file path=ppt/theme/theme2.xml><?xml version="1.0" encoding="utf-8"?>
+<a:theme xmlns:a="http://schemas.openxmlformats.org/drawingml/2006/main" name="Office Theme">
+  <a:themeElements>
+    <a:clrScheme name="Office">
+      <a:dk1>
+        <a:sysClr val="windowText" lastClr="000000"/>
+      </a:dk1>
+      <a:lt1>
+        <a:sysClr val="window" lastClr="FFFFFF"/>
+      </a:lt1>
+      <a:dk2>
+        <a:srgbClr val="1F497D"/>
+      </a:dk2>
+      <a:lt2>
+        <a:srgbClr val="EEECE1"/>
+      </a:lt2>
+      <a:accent1>
+        <a:srgbClr val="4F81BD"/>
+      </a:accent1>
+      <a:accent2>
+        <a:srgbClr val="C0504D"/>
+      </a:accent2>
+      <a:accent3>
+        <a:srgbClr val="9BBB59"/>
+      </a:accent3>
+      <a:accent4>
+        <a:srgbClr val="8064A2"/>
+      </a:accent4>
+      <a:accent5>
+        <a:srgbClr val="4BACC6"/>
+      </a:accent5>
+      <a:accent6>
+        <a:srgbClr val="F79646"/>
+      </a:accent6>
+      <a:hlink>
+        <a:srgbClr val="0000FF"/>
+      </a:hlink>
+      <a:folHlink>
+        <a:srgbClr val="800080"/>
+      </a:folHlink>
+    </a:clrScheme>
+    <a:fontScheme name="Office">
+      <a:majorFont>
+        <a:latin typeface="Calibri"/>
+        <a:ea typeface=""/>
+        <a:cs typeface=""/>
+        <a:font script="Jpan" typeface="ＭＳ Ｐゴシック"/>
+        <a:font script="Hang" typeface="맑은 고딕"/>
+        <a:font script="Hans" typeface="宋体"/>
+        <a:font script="Hant" typeface="新細明體"/>
+        <a:font script="Arab" typeface="Times New Roman"/>
+        <a:font script="Hebr" typeface="Times New Roman"/>
+        <a:font script="Thai" typeface="Angsana New"/>
+        <a:font script="Ethi" typeface="Nyala"/>
+        <a:font script="Beng" typeface="Vrinda"/>
+        <a:font script="Gujr" typeface="Shruti"/>
+        <a:font script="Khmr" typeface="MoolBoran"/>
+        <a:font script="Knda" typeface="Tunga"/>
+        <a:font script="Guru" typeface="Raavi"/>
+        <a:font script="Cans" typeface="Euphemia"/>
+        <a:font script="Cher" typeface="Plantagenet Cherokee"/>
+        <a:font script="Yiii" typeface="Microsoft Yi Baiti"/>
+        <a:font script="Tibt" typeface="Microsoft Himalaya"/>
+        <a:font script="Thaa" typeface="MV Boli"/>
+        <a:font script="Deva" typeface="Mangal"/>
+        <a:font script="Telu" typeface="Gautami"/>
+        <a:font script="Taml" typeface="Latha"/>
+        <a:font script="Syrc" typeface="Estrangelo Edessa"/>
+        <a:font script="Orya" typeface="Kalinga"/>
+        <a:font script="Mlym" typeface="Kartika"/>
+        <a:font script="Laoo" typeface="DokChampa"/>
+        <a:font script="Sinh" typeface="Iskoola Pota"/>
+        <a:font script="Mong" typeface="Mongolian Baiti"/>
+        <a:font script="Viet" typeface="Times New Roman"/>
+        <a:font script="Uigh" typeface="Microsoft Uighur"/>
+        <a:font script="Geor" typeface="Sylfaen"/>
+      </a:majorFont>
+      <a:minorFont>
+        <a:latin typeface="Calibri"/>
+        <a:ea typeface=""/>
+        <a:cs typeface=""/>
+        <a:font script="Jpan" typeface="ＭＳ Ｐゴシック"/>
+        <a:font script="Hang" typeface="맑은 고딕"/>
+        <a:font script="Hans" typeface="宋体"/>
+        <a:font script="Hant" typeface="新細明體"/>
+        <a:font script="Arab" typeface="Arial"/>
+        <a:font script="Hebr" typeface="Arial"/>
+        <a:font script="Thai" typeface="Cordia New"/>
+        <a:font script="Ethi" typeface="Nyala"/>
+        <a:font script="Beng" typeface="Vrinda"/>
+        <a:font script="Gujr" typeface="Shruti"/>
+        <a:font script="Khmr" typeface="DaunPenh"/>
+        <a:font script="Knda" typeface="Tunga"/>
+        <a:font script="Guru" typeface="Raavi"/>
+        <a:font script="Cans" typeface="Euphemia"/>
+        <a:font script="Cher" typeface="Plantagenet Cherokee"/>
+        <a:font script="Yiii" typeface="Microsoft Yi Baiti"/>
+        <a:font script="Tibt" typeface="Microsoft Himalaya"/>
+        <a:font script="Thaa" typeface="MV Boli"/>
+        <a:font script="Deva" typeface="Mangal"/>
+        <a:font script="Telu" typeface="Gautami"/>
+        <a:font script="Taml" typeface="Latha"/>
+        <a:font script="Syrc" typeface="Estrangelo Edessa"/>
+        <a:font script="Orya" typeface="Kalinga"/>
+        <a:font script="Mlym" typeface="Kartika"/>
+        <a:font script="Laoo" typeface="DokChampa"/>
+        <a:font script="Sinh" typeface="Iskoola Pota"/>
+        <a:font script="Mong" typeface="Mongolian Baiti"/>
+        <a:font script="Viet" typeface="Arial"/>
+        <a:font script="Uigh" typeface="Microsoft Uighur"/>
+        <a:font script="Geor" typeface="Sylfaen"/>
+      </a:minorFont>
+    </a:fontScheme>
+    <a:fmtScheme name="Office">
+      <a:fillStyleLst>
+        <a:solidFill>
+          <a:schemeClr val="phClr"/>
+        </a:solidFill>
+        <a:gradFill rotWithShape="1">
+          <a:gsLst>
+            <a:gs pos="0">
+              <a:schemeClr val="phClr">
+                <a:tint val="50000"/>
+                <a:satMod val="300000"/>
+              </a:schemeClr>
+            </a:gs>
+            <a:gs pos="35000">
+              <a:schemeClr val="phClr">
+                <a:tint val="37000"/>
+                <a:satMod val="300000"/>
+              </a:schemeClr>
+            </a:gs>
+            <a:gs pos="100000">
+              <a:schemeClr val="phClr">
+                <a:tint val="15000"/>
+                <a:satMod val="350000"/>
+              </a:schemeClr>
+            </a:gs>
+          </a:gsLst>
+          <a:lin ang="16200000" scaled="1"/>
+        </a:gradFill>
+        <a:gradFill rotWithShape="1">
+          <a:gsLst>
+            <a:gs pos="0">
+              <a:schemeClr val="phClr">
+                <a:tint val="100000"/>
+                <a:shade val="100000"/>
+                <a:satMod val="130000"/>
+              </a:schemeClr>
+            </a:gs>
+            <a:gs pos="100000">
+              <a:schemeClr val="phClr">
+                <a:tint val="50000"/>
+                <a:shade val="100000"/>
+                <a:satMod val="350000"/>
+              </a:schemeClr>
+            </a:gs>
+          </a:gsLst>
+          <a:lin ang="16200000" scaled="0"/>
+        </a:gradFill>
+      </a:fillStyleLst>
+      <a:lnStyleLst>
+        <a:ln w="9525" cap="flat" cmpd="sng" algn="ctr">
+          <a:solidFill>
+            <a:schemeClr val="phClr">
+              <a:shade val="95000"/>
+              <a:satMod val="105000"/>
+            </a:schemeClr>
+          </a:solidFill>
+          <a:prstDash val="solid"/>
+        </a:ln>
+        <a:ln w="25400" cap="flat" cmpd="sng" algn="ctr">
+          <a:solidFill>
+            <a:schemeClr val="phClr"/>
+          </a:solidFill>
+          <a:prstDash val="solid"/>
+        </a:ln>
+        <a:ln w="38100" cap="flat" cmpd="sng" algn="ctr">
+          <a:solidFill>
+            <a:schemeClr val="phClr"/>
+          </a:solidFill>
+          <a:prstDash val="solid"/>
+        </a:ln>
+      </a:lnStyleLst>
+      <a:effectStyleLst>
+        <a:effectStyle>
+          <a:effectLst>
+            <a:outerShdw blurRad="40000" dist="20000" dir="5400000" rotWithShape="0">
+              <a:srgbClr val="000000">
+                <a:alpha val="38000"/>
+              </a:srgbClr>
+            </a:outerShdw>
+          </a:effectLst>
+        </a:effectStyle>
+        <a:effectStyle>
+          <a:effectLst>
+            <a:outerShdw blurRad="40000" dist="23000" dir="5400000" rotWithShape="0">
+              <a:srgbClr val="000000">
+                <a:alpha val="35000"/>
+              </a:srgbClr>
+            </a:outerShdw>
+          </a:effectLst>
+        </a:effectStyle>
+        <a:effectStyle>
+          <a:effectLst>
+            <a:outerShdw blurRad="40000" dist="23000" dir="5400000" rotWithShape="0">
+              <a:srgbClr val="000000">
+                <a:alpha val="35000"/>
+              </a:srgbClr>
+            </a:outerShdw>
+          </a:effectLst>
+          <a:scene3d>
+            <a:camera prst="orthographicFront">
+              <a:rot lat="0" lon="0" rev="0"/>
+            </a:camera>
+            <a:lightRig rig="threePt" dir="t">
+              <a:rot lat="0" lon="0" rev="1200000"/>
+            </a:lightRig>
+          </a:scene3d>
+          <a:sp3d>
+            <a:bevelT w="63500" h="25400"/>
+          </a:sp3d>
+        </a:effectStyle>
+      </a:effectStyleLst>
+      <a:bgFillStyleLst>
+        <a:solidFill>
+          <a:schemeClr val="phClr"/>
+        </a:solidFill>
+        <a:gradFill rotWithShape="1">
+          <a:gsLst>
+            <a:gs pos="0">
+              <a:schemeClr val="phClr">
+                <a:tint val="40000"/>
+                <a:satMod val="350000"/>
+              </a:schemeClr>
+            </a:gs>
+            <a:gs pos="40000">
+              <a:schemeClr val="phClr">
+                <a:tint val="45000"/>
+                <a:shade val="99000"/>
+                <a:satMod val="350000"/>
+              </a:schemeClr>
+            </a:gs>
+            <a:gs pos="100000">
+              <a:schemeClr val="phClr">
+                <a:shade val="20000"/>
+                <a:satMod val="255000"/>
+              </a:schemeClr>
+            </a:gs>
+          </a:gsLst>
+          <a:path path="circle">
+            <a:fillToRect l="50000" t="-80000" r="50000" b="180000"/>
+          </a:path>
+        </a:gradFill>
+        <a:gradFill rotWithShape="1">
+          <a:gsLst>
+            <a:gs pos="0">
+              <a:schemeClr val="phClr">
+                <a:tint val="80000"/>
+                <a:satMod val="300000"/>
+              </a:schemeClr>
+            </a:gs>
+            <a:gs pos="100000">
+              <a:schemeClr val="phClr">
+                <a:shade val="30000"/>
+                <a:satMod val="200000"/>
+              </a:schemeClr>
+            </a:gs>
+          </a:gsLst>
+          <a:path path="circle">
+            <a:fillToRect l="50000" t="50000" r="50000" b="50000"/>
+          </a:path>
+        </a:gradFill>
+      </a:bgFillStyleLst>
+    </a:fmtScheme>
+  </a:themeElements>
+  <a:objectDefaults>
+    <a:spDef>
+      <a:spPr/>
+      <a:bodyPr/>
+      <a:lstStyle/>
+      <a:style>
+        <a:lnRef idx="1">
+          <a:schemeClr val="accent1"/>
+        </a:lnRef>
+        <a:fillRef idx="3">
+          <a:schemeClr val="accent1"/>
+        </a:fillRef>
+        <a:effectRef idx="2">
+          <a:schemeClr val="accent1"/>
+        </a:effectRef>
+        <a:fontRef idx="minor">
+          <a:schemeClr val="lt1"/>
+        </a:fontRef>
+      </a:style>
+    </a:spDef>
+    <a:lnDef>
+      <a:spPr/>
+      <a:bodyPr/>
+      <a:lstStyle/>
+      <a:style>
+        <a:lnRef idx="2">
+          <a:schemeClr val="accent1"/>
+        </a:lnRef>
+        <a:fillRef idx="0">
+          <a:schemeClr val="accent1"/>
+        </a:fillRef>
+        <a:effectRef idx="1">
+          <a:schemeClr val="accent1"/>
+        </a:effectRef>
+        <a:fontRef idx="minor">
+          <a:schemeClr val="tx1"/>
+        </a:fontRef>
+      </a:style>
+    </a:lnDef>
+  </a:objectDefaults>
+  <a:extraClrSchemeLst/>
+</a:theme>
 </file>
--- a/Programacion II/Clases/Clase 9 - Refactorizacion con IA y persistencia de archivos/Presentacion.pptx
+++ b/Programacion II/Clases/Clase 9 - Refactorizacion con IA y persistencia de archivos/Presentacion.pptx
@@ -4098,7 +4098,7 @@
                 </a:solidFill>
                 <a:latin typeface="Calibri"/>
               </a:rPr>
-              <a:t>Que los datos de VetCare no se pierdan al cerrar la ventana</a:t>
+              <a:t>Que los datos del sistema de la clinica no se pierdan al cerrar la ventana</a:t>
             </a:r>
           </a:p>
         </p:txBody>
@@ -5303,7 +5303,7 @@
                 </a:solidFill>
                 <a:latin typeface="Calibri"/>
               </a:rPr>
-              <a:t>VetCarePersistencia.java — class VetCarePersistencia</a:t>
+              <a:t>ClinicaPersistencia.java — class ClinicaPersistencia</a:t>
             </a:r>
           </a:p>
         </p:txBody>
@@ -5462,7 +5462,7 @@
                 </a:solidFill>
                 <a:latin typeface="Calibri"/>
               </a:rPr>
-              <a:t>public class VetCarePersistencia {</a:t>
+              <a:t>public class ClinicaPersistencia {</a:t>
             </a:r>
           </a:p>
           <a:p>
@@ -5659,7 +5659,7 @@
                 </a:solidFill>
                 <a:latin typeface="Calibri"/>
               </a:rPr>
-              <a:t>VetCarePersistencia.java — main() (1/2)</a:t>
+              <a:t>ClinicaPersistencia.java — main() (1/2)</a:t>
             </a:r>
           </a:p>
         </p:txBody>
@@ -5866,7 +5866,7 @@
                 </a:solidFill>
                 <a:latin typeface="Calibri"/>
               </a:rPr>
-              <a:t>        System.out.println("=== VetCare: arranque ===");</a:t>
+              <a:t>        System.out.println("=== Clinica: arranque ===");</a:t>
             </a:r>
           </a:p>
           <a:p>
@@ -6326,7 +6326,7 @@
                 </a:solidFill>
                 <a:latin typeface="Calibri"/>
               </a:rPr>
-              <a:t>VetCarePersistencia.java — main() (2/2)</a:t>
+              <a:t>ClinicaPersistencia.java — main() (2/2)</a:t>
             </a:r>
           </a:p>
         </p:txBody>
@@ -6517,7 +6517,7 @@
                 </a:solidFill>
                 <a:latin typeface="Calibri"/>
               </a:rPr>
-              <a:t>        System.out.println("=== VetCare: simulacion de reapertura ===");</a:t>
+              <a:t>        System.out.println("=== Clinica: simulacion de reapertura ===");</a:t>
             </a:r>
           </a:p>
           <a:p>
@@ -6826,7 +6826,7 @@
                 </a:solidFill>
                 <a:latin typeface="Calibri"/>
               </a:rPr>
-              <a:t>VetCarePersistencia.java — siguienteId() (1/2)</a:t>
+              <a:t>ClinicaPersistencia.java — siguienteId() (1/2)</a:t>
             </a:r>
           </a:p>
         </p:txBody>
@@ -7493,7 +7493,7 @@
                 </a:solidFill>
                 <a:latin typeface="Calibri"/>
               </a:rPr>
-              <a:t>VetCarePersistencia.java — siguienteId() (2/2)</a:t>
+              <a:t>ClinicaPersistencia.java — siguienteId() (2/2)</a:t>
             </a:r>
           </a:p>
         </p:txBody>
@@ -7833,7 +7833,7 @@
                 </a:solidFill>
                 <a:latin typeface="Calibri"/>
               </a:rPr>
-              <a:t>VetCarePersistencia.java — class Mascota</a:t>
+              <a:t>ClinicaPersistencia.java — class Mascota</a:t>
             </a:r>
           </a:p>
         </p:txBody>
@@ -8342,7 +8342,7 @@
                 </a:solidFill>
                 <a:latin typeface="Calibri"/>
               </a:rPr>
-              <a:t> Refactorización con IA · Persistencia en archivos — Que los datos de VetCare no se pierdan al cerrar la ventana</a:t>
+              <a:t> Refactorización con IA · Persistencia en archivos — Que los datos del sistema de la clinica no se pierdan al cerrar la ventana</a:t>
             </a:r>
           </a:p>
           <a:p>
@@ -8417,7 +8417,7 @@
                 </a:solidFill>
                 <a:latin typeface="Calibri"/>
               </a:rPr>
-              <a:t>–   Todo con el mismo dominio: la clinica veterinaria Huellitas (VetCare).</a:t>
+              <a:t>–   Todo con el mismo dominio: una clinica veterinaria.</a:t>
             </a:r>
           </a:p>
         </p:txBody>
@@ -8598,7 +8598,7 @@
                 </a:solidFill>
                 <a:latin typeface="Calibri"/>
               </a:rPr>
-              <a:t>VetCarePersistencia.java — Mascota()</a:t>
+              <a:t>ClinicaPersistencia.java — Mascota()</a:t>
             </a:r>
           </a:p>
         </p:txBody>
@@ -9050,7 +9050,7 @@
                 </a:solidFill>
                 <a:latin typeface="Calibri"/>
               </a:rPr>
-              <a:t>VetCarePersistencia.java — class RepositorioMascotasCSV</a:t>
+              <a:t>ClinicaPersistencia.java — class RepositorioMascotasCSV</a:t>
             </a:r>
           </a:p>
         </p:txBody>
@@ -9502,7 +9502,7 @@
                 </a:solidFill>
                 <a:latin typeface="Calibri"/>
               </a:rPr>
-              <a:t>VetCarePersistencia.java — RepositorioMascotasCSV()</a:t>
+              <a:t>ClinicaPersistencia.java — RepositorioMascotasCSV()</a:t>
             </a:r>
           </a:p>
         </p:txBody>
@@ -9890,7 +9890,7 @@
                 </a:solidFill>
                 <a:latin typeface="Calibri"/>
               </a:rPr>
-              <a:t>VetCarePersistencia.java — rutaAbsoluta()</a:t>
+              <a:t>ClinicaPersistencia.java — rutaAbsoluta()</a:t>
             </a:r>
           </a:p>
         </p:txBody>
@@ -10294,7 +10294,7 @@
                 </a:solidFill>
                 <a:latin typeface="Calibri"/>
               </a:rPr>
-              <a:t>VetCarePersistencia.java — guardar()</a:t>
+              <a:t>ClinicaPersistencia.java — guardar()</a:t>
             </a:r>
           </a:p>
         </p:txBody>
@@ -10842,7 +10842,7 @@
                 </a:solidFill>
                 <a:latin typeface="Calibri"/>
               </a:rPr>
-              <a:t>VetCarePersistencia.java — cargar() (1/2)</a:t>
+              <a:t>ClinicaPersistencia.java — cargar() (1/2)</a:t>
             </a:r>
           </a:p>
         </p:txBody>
@@ -11509,7 +11509,7 @@
                 </a:solidFill>
                 <a:latin typeface="Calibri"/>
               </a:rPr>
-              <a:t>VetCarePersistencia.java — cargar() (2/2)</a:t>
+              <a:t>ClinicaPersistencia.java — cargar() (2/2)</a:t>
             </a:r>
           </a:p>
         </p:txBody>
@@ -11913,7 +11913,7 @@
                 </a:solidFill>
                 <a:latin typeface="Calibri"/>
               </a:rPr>
-              <a:t>VetCarePersistencia.java — aLinea()</a:t>
+              <a:t>ClinicaPersistencia.java — aLinea()</a:t>
             </a:r>
           </a:p>
         </p:txBody>
@@ -12365,7 +12365,7 @@
                 </a:solidFill>
                 <a:latin typeface="Calibri"/>
               </a:rPr>
-              <a:t>VetCarePersistencia.java — desdeLinea()</a:t>
+              <a:t>ClinicaPersistencia.java — desdeLinea()</a:t>
             </a:r>
           </a:p>
         </p:txBody>
@@ -12993,7 +12993,7 @@
                 </a:solidFill>
                 <a:latin typeface="Calibri"/>
               </a:rPr>
-              <a:t>VetCarePersistencia.java — limpiar()</a:t>
+              <a:t>ClinicaPersistencia.java — limpiar()</a:t>
             </a:r>
           </a:p>
         </p:txBody>
@@ -13833,7 +13833,7 @@
                 </a:solidFill>
                 <a:latin typeface="Calibri"/>
               </a:rPr>
-              <a:t>Demo en vivo sobre VetCare</a:t>
+              <a:t>Demo en vivo sobre el tema</a:t>
             </a:r>
           </a:p>
         </p:txBody>
@@ -14297,7 +14297,7 @@
                 </a:solidFill>
                 <a:latin typeface="Calibri"/>
               </a:rPr>
-              <a:t>guardar(): el archivo como memoria larga de VetCare</a:t>
+              <a:t>guardar(): el archivo como memoria larga del sistema de la clinica</a:t>
             </a:r>
           </a:p>
         </p:txBody>
@@ -14456,7 +14456,7 @@
                 </a:solidFill>
                 <a:latin typeface="Calibri"/>
               </a:rPr>
-              <a:t>// Sin esto, al cerrar la ventana la clinica Huellitas vuelve al papel.</a:t>
+              <a:t>// Sin esto, al cerrar la ventana la clinica vuelve al papel.</a:t>
             </a:r>
           </a:p>
           <a:p>
@@ -14971,7 +14971,7 @@
                 </a:solidFill>
                 <a:latin typeface="Calibri"/>
               </a:rPr>
-              <a:t>–   Mismo dominio VetCare — no otro ejemplo.</a:t>
+              <a:t>–   Mismo dominio de la clinica — no otro ejemplo.</a:t>
             </a:r>
           </a:p>
         </p:txBody>
@@ -15171,7 +15171,7 @@
                 </a:solidFill>
                 <a:latin typeface="Calibri"/>
               </a:rPr>
-              <a:t>Que los datos de VetCare no se pierdan al cerrar la ventana</a:t>
+              <a:t>Que los datos del sistema de la clinica no se pierdan al cerrar la ventana</a:t>
             </a:r>
           </a:p>
           <a:p>
@@ -15471,7 +15471,7 @@
                 </a:solidFill>
                 <a:latin typeface="Calibri"/>
               </a:rPr>
-              <a:t>–   En VetCare el caso clásico es el manejador del botón Registrar: un método de noventa líneas que valida el nombre, convierte la edad, genera el ID consecutivo, arma la línea del CSV, abre el archivo, escribe y muestra el aviso.</a:t>
+              <a:t>–   En el sistema de la clinica el caso clásico es el manejador del botón Registrar: un método de noventa líneas que valida el nombre, convierte la edad, genera el ID consecutivo, arma la línea del CSV, abre el archivo, escribe y muestra el aviso.</a:t>
             </a:r>
           </a:p>
           <a:p>
@@ -15975,7 +15975,7 @@
                 </a:solidFill>
                 <a:latin typeface="Calibri"/>
               </a:rPr>
-              <a:t>–   Los que van a aparecer sí o sí en los proyectos de VetCare son seis.</a:t>
+              <a:t>–   Los que van a aparecer sí o sí en los proyectos del sistema de la clinica son seis.</a:t>
             </a:r>
           </a:p>
           <a:p>
@@ -16575,7 +16575,7 @@
                 </a:solidFill>
                 <a:latin typeface="Calibri"/>
               </a:rPr>
-              <a:t>–   Para VetCare la línea acordada es M001;Firulais;Canino;4;1144556677 con encabezado id;nombre;especie;edad;cedula_dueno.</a:t>
+              <a:t>–   Para el sistema de la clinica la línea acordada es M001;Firulais;Canino;4;1144556677 con encabezado id;nombre;especie;edad;cedula_dueno.</a:t>
             </a:r>
           </a:p>
         </p:txBody>

--- a/Programacion II/Clases/Clase 9 - Refactorizacion con IA y persistencia de archivos/Presentacion.pptx
+++ b/Programacion II/Clases/Clase 9 - Refactorizacion con IA y persistencia de archivos/Presentacion.pptx
@@ -827,94 +827,6 @@
           <a:p>
             <a:r>
               <a:t>La persistencia se conecta al ciclo de vida de la aplicación en dos puntos: se carga al arrancar y se guarda al cerrar (o después de cada cambio, si se quiere ser más seguro). Cargar al arrancar significa que el main construye el repositorio, pide cargar() y solo después muestra la ventana con la tabla ya poblada. Y cargar tiene que ser defensivo, porque el archivo es del mundo real: si mascotas.csv no existe todavía, cargar() devuelve una lista vacía y la aplicación abre normalmente, no revienta con una excepción en la cara del usuario; si una línea quedó con cuatro campos en vez de cinco porque alguien la editó en el Bloc de notas, esa línea se ignora, se avisa por consola con el número de línea y las demás sí se cargan; si la edad viene como 'dos', el Integer.parseInt lanza NumberFormatException, se captura, se descarta ese registro y se sigue. La regla es que un dato malo no puede tumbar la aplicación completa. Del lado de la escritura, el detalle que muerde es la ruta: si se usa la ruta relativa "mascotas.csv", el archivo queda en el directorio de trabajo, que al ejecutar desde VS Code es la carpeta del proyecto. Por eso conviene imprimir una vez ruta.toAbsolutePath() para que el estudiante sepa dónde buscarlo en vez de jurar que el programa no guardó nada.</a:t>
-            </a:r>
-          </a:p>
-        </p:txBody>
-      </p:sp>
-      <p:sp>
-        <p:nvSpPr>
-          <p:cNvPr id="4" name="Slide Number Placeholder 3"/>
-          <p:cNvSpPr>
-            <a:spLocks noGrp="1"/>
-          </p:cNvSpPr>
-          <p:nvPr>
-            <p:ph type="sldNum" idx="5" sz="quarter"/>
-          </p:nvPr>
-        </p:nvSpPr>
-        <p:spPr/>
-      </p:sp>
-    </p:spTree>
-  </p:cSld>
-  <p:clrMapOvr>
-    <a:masterClrMapping/>
-  </p:clrMapOvr>
-</p:notes>
-</file>
-
-<file path=ppt/notesSlides/notesSlide6.xml><?xml version="1.0" encoding="utf-8"?>
-<p:notes xmlns:a="http://schemas.openxmlformats.org/drawingml/2006/main" xmlns:p="http://schemas.openxmlformats.org/presentationml/2006/main" xmlns:r="http://schemas.openxmlformats.org/officeDocument/2006/relationships">
-  <p:cSld>
-    <p:spTree>
-      <p:nvGrpSpPr>
-        <p:cNvPr id="1" name=""/>
-        <p:cNvGrpSpPr/>
-        <p:nvPr/>
-      </p:nvGrpSpPr>
-      <p:grpSpPr>
-        <a:xfrm>
-          <a:off x="0" y="0"/>
-          <a:ext cx="0" cy="0"/>
-          <a:chOff x="0" y="0"/>
-          <a:chExt cx="0" cy="0"/>
-        </a:xfrm>
-      </p:grpSpPr>
-      <p:sp>
-        <p:nvSpPr>
-          <p:cNvPr id="2" name="Slide Image Placeholder 1"/>
-          <p:cNvSpPr>
-            <a:spLocks noGrp="1"/>
-          </p:cNvSpPr>
-          <p:nvPr>
-            <p:ph type="sldImg" idx="2"/>
-          </p:nvPr>
-        </p:nvSpPr>
-        <p:spPr/>
-      </p:sp>
-      <p:sp>
-        <p:nvSpPr>
-          <p:cNvPr id="3" name="Notes Placeholder 2"/>
-          <p:cNvSpPr>
-            <a:spLocks noGrp="1"/>
-          </p:cNvSpPr>
-          <p:nvPr>
-            <p:ph type="body" idx="3" sz="quarter"/>
-          </p:nvPr>
-        </p:nvSpPr>
-        <p:spPr/>
-        <p:txBody>
-          <a:bodyPr/>
-          <a:lstStyle/>
-          <a:p>
-            <a:r>
-              <a:t>TEXTO COMPLETO DE LA LÁMINA (se proyecta resumido):</a:t>
-            </a:r>
-          </a:p>
-          <a:p/>
-          <a:p>
-            <a:r>
-              <a:t>Herramienta: Visual Studio Code (Java)</a:t>
-            </a:r>
-          </a:p>
-          <a:p/>
-          <a:p>
-            <a:r>
-              <a:t>Demo: El docente registra una mascota, cierra la aplicación, la vuelve a abrir y la mascota sigue ahí; enseguida abre mascotas.csv en el Bloc de notas para mostrar la línea que escribió el programa.</a:t>
-            </a:r>
-          </a:p>
-          <a:p/>
-          <a:p>
-            <a:r>
-              <a:t>Mismo dominio de la clinica — no otro ejemplo.</a:t>
             </a:r>
           </a:p>
         </p:txBody>
@@ -9866,118 +9778,14 @@
       </p:sp>
       <p:sp>
         <p:nvSpPr>
-          <p:cNvPr id="5" name="Rounded Rectangle 4"/>
-          <p:cNvSpPr/>
-          <p:nvPr/>
-        </p:nvSpPr>
-        <p:spPr>
-          <a:xfrm>
-            <a:off x="5797149" y="1573813"/>
-            <a:ext cx="6010497" cy="4057845"/>
-          </a:xfrm>
-          <a:prstGeom prst="roundRect">
-            <a:avLst>
-              <a:gd name="adj" fmla="val 4000"/>
-            </a:avLst>
-          </a:prstGeom>
-          <a:solidFill>
-            <a:srgbClr val="E8EEF4"/>
-          </a:solidFill>
-          <a:ln>
-            <a:noFill/>
-          </a:ln>
-        </p:spPr>
-        <p:style>
-          <a:lnRef idx="1">
-            <a:schemeClr val="accent1"/>
-          </a:lnRef>
-          <a:fillRef idx="3">
-            <a:schemeClr val="accent1"/>
-          </a:fillRef>
-          <a:effectRef idx="2">
-            <a:schemeClr val="accent1"/>
-          </a:effectRef>
-          <a:fontRef idx="minor">
-            <a:schemeClr val="lt1"/>
-          </a:fontRef>
-        </p:style>
-        <p:txBody>
-          <a:bodyPr rtlCol="0" anchor="ctr"/>
-          <a:lstStyle/>
-          <a:p>
-            <a:pPr algn="ctr"/>
-          </a:p>
-        </p:txBody>
-      </p:sp>
-      <p:pic>
-        <p:nvPicPr>
-          <p:cNvPr id="6" name="Picture 5" descr="laptop-code-live-demo.jpg"/>
-          <p:cNvPicPr>
-            <a:picLocks noChangeAspect="1"/>
-          </p:cNvPicPr>
-          <p:nvPr/>
-        </p:nvPicPr>
-        <p:blipFill>
-          <a:blip r:embed="rId2"/>
-          <a:stretch>
-            <a:fillRect/>
-          </a:stretch>
-        </p:blipFill>
-        <p:spPr>
-          <a:xfrm>
-            <a:off x="5870301" y="1646965"/>
-            <a:ext cx="5864193" cy="3911541"/>
-          </a:xfrm>
-          <a:prstGeom prst="rect">
-            <a:avLst/>
-          </a:prstGeom>
-        </p:spPr>
-      </p:pic>
-      <p:sp>
-        <p:nvSpPr>
-          <p:cNvPr id="7" name="TextBox 6"/>
+          <p:cNvPr id="5" name="TextBox 4"/>
           <p:cNvSpPr txBox="1"/>
           <p:nvPr/>
         </p:nvSpPr>
         <p:spPr>
           <a:xfrm>
-            <a:off x="5870301" y="5961888"/>
-            <a:ext cx="5864193" cy="320040"/>
-          </a:xfrm>
-          <a:prstGeom prst="rect">
-            <a:avLst/>
-          </a:prstGeom>
-          <a:noFill/>
-        </p:spPr>
-        <p:txBody>
-          <a:bodyPr wrap="square">
-            <a:spAutoFit/>
-          </a:bodyPr>
-          <a:lstStyle/>
-          <a:p>
-            <a:pPr algn="ctr"/>
-            <a:r>
-              <a:rPr sz="1100" b="0" i="1">
-                <a:solidFill>
-                  <a:srgbClr val="666666"/>
-                </a:solidFill>
-                <a:latin typeface="Calibri"/>
-              </a:rPr>
-              <a:t>Foto: olia danilevich · Pexels</a:t>
-            </a:r>
-          </a:p>
-        </p:txBody>
-      </p:sp>
-      <p:sp>
-        <p:nvSpPr>
-          <p:cNvPr id="8" name="TextBox 7"/>
-          <p:cNvSpPr txBox="1"/>
-          <p:nvPr/>
-        </p:nvSpPr>
-        <p:spPr>
-          <a:xfrm>
-            <a:off x="457200" y="1353312"/>
-            <a:ext cx="5093061" cy="5047488"/>
+            <a:off x="457200" y="1170432"/>
+            <a:ext cx="11277295" cy="5230368"/>
           </a:xfrm>
           <a:prstGeom prst="rect">
             <a:avLst/>
@@ -10054,7 +9862,7 @@
                 </a:solidFill>
                 <a:latin typeface="Calibri"/>
               </a:rPr>
-              <a:t> El docente registra una mascota, cierra la aplicación, la vuelve a abrir y la mascota sigue ahí;</a:t>
+              <a:t> El docente registra una mascota, cierra la aplicación, la vuelve a abrir y la mascota sigue ahí; enseguida abre mascotas.csv en el Bloc de notas para mostrar la línea que escribió el programa.</a:t>
             </a:r>
           </a:p>
           <a:p>
@@ -10077,7 +9885,7 @@
       </p:sp>
       <p:sp>
         <p:nvSpPr>
-          <p:cNvPr id="9" name="TextBox 8"/>
+          <p:cNvPr id="6" name="TextBox 5"/>
           <p:cNvSpPr txBox="1"/>
           <p:nvPr/>
         </p:nvSpPr>
@@ -10490,118 +10298,14 @@
       </p:sp>
       <p:sp>
         <p:nvSpPr>
-          <p:cNvPr id="5" name="Rounded Rectangle 4"/>
-          <p:cNvSpPr/>
-          <p:nvPr/>
-        </p:nvSpPr>
-        <p:spPr>
-          <a:xfrm>
-            <a:off x="5797149" y="1573813"/>
-            <a:ext cx="6010497" cy="4057845"/>
-          </a:xfrm>
-          <a:prstGeom prst="roundRect">
-            <a:avLst>
-              <a:gd name="adj" fmla="val 4000"/>
-            </a:avLst>
-          </a:prstGeom>
-          <a:solidFill>
-            <a:srgbClr val="E8EEF4"/>
-          </a:solidFill>
-          <a:ln>
-            <a:noFill/>
-          </a:ln>
-        </p:spPr>
-        <p:style>
-          <a:lnRef idx="1">
-            <a:schemeClr val="accent1"/>
-          </a:lnRef>
-          <a:fillRef idx="3">
-            <a:schemeClr val="accent1"/>
-          </a:fillRef>
-          <a:effectRef idx="2">
-            <a:schemeClr val="accent1"/>
-          </a:effectRef>
-          <a:fontRef idx="minor">
-            <a:schemeClr val="lt1"/>
-          </a:fontRef>
-        </p:style>
-        <p:txBody>
-          <a:bodyPr rtlCol="0" anchor="ctr"/>
-          <a:lstStyle/>
-          <a:p>
-            <a:pPr algn="ctr"/>
-          </a:p>
-        </p:txBody>
-      </p:sp>
-      <p:pic>
-        <p:nvPicPr>
-          <p:cNvPr id="6" name="Picture 5" descr="notebook-planning-desk-coffee.jpg"/>
-          <p:cNvPicPr>
-            <a:picLocks noChangeAspect="1"/>
-          </p:cNvPicPr>
-          <p:nvPr/>
-        </p:nvPicPr>
-        <p:blipFill>
-          <a:blip r:embed="rId2"/>
-          <a:stretch>
-            <a:fillRect/>
-          </a:stretch>
-        </p:blipFill>
-        <p:spPr>
-          <a:xfrm>
-            <a:off x="5870301" y="1646965"/>
-            <a:ext cx="5864193" cy="3911541"/>
-          </a:xfrm>
-          <a:prstGeom prst="rect">
-            <a:avLst/>
-          </a:prstGeom>
-        </p:spPr>
-      </p:pic>
-      <p:sp>
-        <p:nvSpPr>
-          <p:cNvPr id="7" name="TextBox 6"/>
+          <p:cNvPr id="5" name="TextBox 4"/>
           <p:cNvSpPr txBox="1"/>
           <p:nvPr/>
         </p:nvSpPr>
         <p:spPr>
           <a:xfrm>
-            <a:off x="5870301" y="5961888"/>
-            <a:ext cx="5864193" cy="320040"/>
-          </a:xfrm>
-          <a:prstGeom prst="rect">
-            <a:avLst/>
-          </a:prstGeom>
-          <a:noFill/>
-        </p:spPr>
-        <p:txBody>
-          <a:bodyPr wrap="square">
-            <a:spAutoFit/>
-          </a:bodyPr>
-          <a:lstStyle/>
-          <a:p>
-            <a:pPr algn="ctr"/>
-            <a:r>
-              <a:rPr sz="1100" b="0" i="1">
-                <a:solidFill>
-                  <a:srgbClr val="666666"/>
-                </a:solidFill>
-                <a:latin typeface="Calibri"/>
-              </a:rPr>
-              <a:t>Foto: Cup of  Couple · Pexels</a:t>
-            </a:r>
-          </a:p>
-        </p:txBody>
-      </p:sp>
-      <p:sp>
-        <p:nvSpPr>
-          <p:cNvPr id="8" name="TextBox 7"/>
-          <p:cNvSpPr txBox="1"/>
-          <p:nvPr/>
-        </p:nvSpPr>
-        <p:spPr>
-          <a:xfrm>
-            <a:off x="457200" y="1353312"/>
-            <a:ext cx="5093061" cy="5047488"/>
+            <a:off x="457200" y="1170432"/>
+            <a:ext cx="11277295" cy="5230368"/>
           </a:xfrm>
           <a:prstGeom prst="rect">
             <a:avLst/>
@@ -10726,7 +10430,7 @@
       </p:sp>
       <p:sp>
         <p:nvSpPr>
-          <p:cNvPr id="9" name="TextBox 8"/>
+          <p:cNvPr id="6" name="TextBox 5"/>
           <p:cNvSpPr txBox="1"/>
           <p:nvPr/>
         </p:nvSpPr>
@@ -12315,118 +12019,14 @@
       </p:sp>
       <p:sp>
         <p:nvSpPr>
-          <p:cNvPr id="5" name="Rounded Rectangle 4"/>
-          <p:cNvSpPr/>
-          <p:nvPr/>
-        </p:nvSpPr>
-        <p:spPr>
-          <a:xfrm>
-            <a:off x="5797149" y="1573813"/>
-            <a:ext cx="6010497" cy="4057845"/>
-          </a:xfrm>
-          <a:prstGeom prst="roundRect">
-            <a:avLst>
-              <a:gd name="adj" fmla="val 4000"/>
-            </a:avLst>
-          </a:prstGeom>
-          <a:solidFill>
-            <a:srgbClr val="E8EEF4"/>
-          </a:solidFill>
-          <a:ln>
-            <a:noFill/>
-          </a:ln>
-        </p:spPr>
-        <p:style>
-          <a:lnRef idx="1">
-            <a:schemeClr val="accent1"/>
-          </a:lnRef>
-          <a:fillRef idx="3">
-            <a:schemeClr val="accent1"/>
-          </a:fillRef>
-          <a:effectRef idx="2">
-            <a:schemeClr val="accent1"/>
-          </a:effectRef>
-          <a:fontRef idx="minor">
-            <a:schemeClr val="lt1"/>
-          </a:fontRef>
-        </p:style>
-        <p:txBody>
-          <a:bodyPr rtlCol="0" anchor="ctr"/>
-          <a:lstStyle/>
-          <a:p>
-            <a:pPr algn="ctr"/>
-          </a:p>
-        </p:txBody>
-      </p:sp>
-      <p:pic>
-        <p:nvPicPr>
-          <p:cNvPr id="6" name="Picture 5" descr="tangled-cables-mess.jpg"/>
-          <p:cNvPicPr>
-            <a:picLocks noChangeAspect="1"/>
-          </p:cNvPicPr>
-          <p:nvPr/>
-        </p:nvPicPr>
-        <p:blipFill>
-          <a:blip r:embed="rId2"/>
-          <a:stretch>
-            <a:fillRect/>
-          </a:stretch>
-        </p:blipFill>
-        <p:spPr>
-          <a:xfrm>
-            <a:off x="5870301" y="1646965"/>
-            <a:ext cx="5864193" cy="3911541"/>
-          </a:xfrm>
-          <a:prstGeom prst="rect">
-            <a:avLst/>
-          </a:prstGeom>
-        </p:spPr>
-      </p:pic>
-      <p:sp>
-        <p:nvSpPr>
-          <p:cNvPr id="7" name="TextBox 6"/>
+          <p:cNvPr id="5" name="TextBox 4"/>
           <p:cNvSpPr txBox="1"/>
           <p:nvPr/>
         </p:nvSpPr>
         <p:spPr>
           <a:xfrm>
-            <a:off x="5870301" y="5961888"/>
-            <a:ext cx="5864193" cy="320040"/>
-          </a:xfrm>
-          <a:prstGeom prst="rect">
-            <a:avLst/>
-          </a:prstGeom>
-          <a:noFill/>
-        </p:spPr>
-        <p:txBody>
-          <a:bodyPr wrap="square">
-            <a:spAutoFit/>
-          </a:bodyPr>
-          <a:lstStyle/>
-          <a:p>
-            <a:pPr algn="ctr"/>
-            <a:r>
-              <a:rPr sz="1100" b="0" i="1">
-                <a:solidFill>
-                  <a:srgbClr val="666666"/>
-                </a:solidFill>
-                <a:latin typeface="Calibri"/>
-              </a:rPr>
-              <a:t>Foto: Aritz Jauregui · Pexels</a:t>
-            </a:r>
-          </a:p>
-        </p:txBody>
-      </p:sp>
-      <p:sp>
-        <p:nvSpPr>
-          <p:cNvPr id="8" name="TextBox 7"/>
-          <p:cNvSpPr txBox="1"/>
-          <p:nvPr/>
-        </p:nvSpPr>
-        <p:spPr>
-          <a:xfrm>
-            <a:off x="457200" y="1353312"/>
-            <a:ext cx="5093061" cy="5047488"/>
+            <a:off x="457200" y="1170432"/>
+            <a:ext cx="11277295" cy="5230368"/>
           </a:xfrm>
           <a:prstGeom prst="rect">
             <a:avLst/>
@@ -12506,7 +12106,7 @@
       </p:sp>
       <p:sp>
         <p:nvSpPr>
-          <p:cNvPr id="9" name="TextBox 8"/>
+          <p:cNvPr id="6" name="TextBox 5"/>
           <p:cNvSpPr txBox="1"/>
           <p:nvPr/>
         </p:nvSpPr>

--- a/Programacion II/Clases/Clase 9 - Refactorizacion con IA y persistencia de archivos/Presentacion.pptx
+++ b/Programacion II/Clases/Clase 9 - Refactorizacion con IA y persistencia de archivos/Presentacion.pptx
@@ -827,6 +827,94 @@
           <a:p>
             <a:r>
               <a:t>La persistencia se conecta al ciclo de vida de la aplicación en dos puntos: se carga al arrancar y se guarda al cerrar (o después de cada cambio, si se quiere ser más seguro). Cargar al arrancar significa que el main construye el repositorio, pide cargar() y solo después muestra la ventana con la tabla ya poblada. Y cargar tiene que ser defensivo, porque el archivo es del mundo real: si mascotas.csv no existe todavía, cargar() devuelve una lista vacía y la aplicación abre normalmente, no revienta con una excepción en la cara del usuario; si una línea quedó con cuatro campos en vez de cinco porque alguien la editó en el Bloc de notas, esa línea se ignora, se avisa por consola con el número de línea y las demás sí se cargan; si la edad viene como 'dos', el Integer.parseInt lanza NumberFormatException, se captura, se descarta ese registro y se sigue. La regla es que un dato malo no puede tumbar la aplicación completa. Del lado de la escritura, el detalle que muerde es la ruta: si se usa la ruta relativa "mascotas.csv", el archivo queda en el directorio de trabajo, que al ejecutar desde VS Code es la carpeta del proyecto. Por eso conviene imprimir una vez ruta.toAbsolutePath() para que el estudiante sepa dónde buscarlo en vez de jurar que el programa no guardó nada.</a:t>
+            </a:r>
+          </a:p>
+        </p:txBody>
+      </p:sp>
+      <p:sp>
+        <p:nvSpPr>
+          <p:cNvPr id="4" name="Slide Number Placeholder 3"/>
+          <p:cNvSpPr>
+            <a:spLocks noGrp="1"/>
+          </p:cNvSpPr>
+          <p:nvPr>
+            <p:ph type="sldNum" idx="5" sz="quarter"/>
+          </p:nvPr>
+        </p:nvSpPr>
+        <p:spPr/>
+      </p:sp>
+    </p:spTree>
+  </p:cSld>
+  <p:clrMapOvr>
+    <a:masterClrMapping/>
+  </p:clrMapOvr>
+</p:notes>
+</file>
+
+<file path=ppt/notesSlides/notesSlide6.xml><?xml version="1.0" encoding="utf-8"?>
+<p:notes xmlns:a="http://schemas.openxmlformats.org/drawingml/2006/main" xmlns:p="http://schemas.openxmlformats.org/presentationml/2006/main" xmlns:r="http://schemas.openxmlformats.org/officeDocument/2006/relationships">
+  <p:cSld>
+    <p:spTree>
+      <p:nvGrpSpPr>
+        <p:cNvPr id="1" name=""/>
+        <p:cNvGrpSpPr/>
+        <p:nvPr/>
+      </p:nvGrpSpPr>
+      <p:grpSpPr>
+        <a:xfrm>
+          <a:off x="0" y="0"/>
+          <a:ext cx="0" cy="0"/>
+          <a:chOff x="0" y="0"/>
+          <a:chExt cx="0" cy="0"/>
+        </a:xfrm>
+      </p:grpSpPr>
+      <p:sp>
+        <p:nvSpPr>
+          <p:cNvPr id="2" name="Slide Image Placeholder 1"/>
+          <p:cNvSpPr>
+            <a:spLocks noGrp="1"/>
+          </p:cNvSpPr>
+          <p:nvPr>
+            <p:ph type="sldImg" idx="2"/>
+          </p:nvPr>
+        </p:nvSpPr>
+        <p:spPr/>
+      </p:sp>
+      <p:sp>
+        <p:nvSpPr>
+          <p:cNvPr id="3" name="Notes Placeholder 2"/>
+          <p:cNvSpPr>
+            <a:spLocks noGrp="1"/>
+          </p:cNvSpPr>
+          <p:nvPr>
+            <p:ph type="body" idx="3" sz="quarter"/>
+          </p:nvPr>
+        </p:nvSpPr>
+        <p:spPr/>
+        <p:txBody>
+          <a:bodyPr/>
+          <a:lstStyle/>
+          <a:p>
+            <a:r>
+              <a:t>TEXTO COMPLETO DE LA LÁMINA (se proyecta resumido):</a:t>
+            </a:r>
+          </a:p>
+          <a:p/>
+          <a:p>
+            <a:r>
+              <a:t>Herramienta: Visual Studio Code (Java)</a:t>
+            </a:r>
+          </a:p>
+          <a:p/>
+          <a:p>
+            <a:r>
+              <a:t>Demo: El docente registra una mascota, cierra la aplicación, la vuelve a abrir y la mascota sigue ahí; enseguida abre mascotas.csv en el Bloc de notas para mostrar la línea que escribió el programa.</a:t>
+            </a:r>
+          </a:p>
+          <a:p/>
+          <a:p>
+            <a:r>
+              <a:t>Mismo dominio de la clinica — no otro ejemplo.</a:t>
             </a:r>
           </a:p>
         </p:txBody>
@@ -9778,14 +9866,83 @@
       </p:sp>
       <p:sp>
         <p:nvSpPr>
-          <p:cNvPr id="5" name="TextBox 4"/>
+          <p:cNvPr id="5" name="Rounded Rectangle 4"/>
+          <p:cNvSpPr/>
+          <p:nvPr/>
+        </p:nvSpPr>
+        <p:spPr>
+          <a:xfrm>
+            <a:off x="5797149" y="1343926"/>
+            <a:ext cx="6010497" cy="4837658"/>
+          </a:xfrm>
+          <a:prstGeom prst="roundRect">
+            <a:avLst>
+              <a:gd name="adj" fmla="val 4000"/>
+            </a:avLst>
+          </a:prstGeom>
+          <a:solidFill>
+            <a:srgbClr val="E8EEF4"/>
+          </a:solidFill>
+          <a:ln>
+            <a:noFill/>
+          </a:ln>
+        </p:spPr>
+        <p:style>
+          <a:lnRef idx="1">
+            <a:schemeClr val="accent1"/>
+          </a:lnRef>
+          <a:fillRef idx="3">
+            <a:schemeClr val="accent1"/>
+          </a:fillRef>
+          <a:effectRef idx="2">
+            <a:schemeClr val="accent1"/>
+          </a:effectRef>
+          <a:fontRef idx="minor">
+            <a:schemeClr val="lt1"/>
+          </a:fontRef>
+        </p:style>
+        <p:txBody>
+          <a:bodyPr rtlCol="0" anchor="ctr"/>
+          <a:lstStyle/>
+          <a:p>
+            <a:pPr algn="ctr"/>
+          </a:p>
+        </p:txBody>
+      </p:sp>
+      <p:pic>
+        <p:nvPicPr>
+          <p:cNvPr id="6" name="Picture 5" descr="ilus-demo-paso1.png"/>
+          <p:cNvPicPr>
+            <a:picLocks noChangeAspect="1"/>
+          </p:cNvPicPr>
+          <p:nvPr/>
+        </p:nvPicPr>
+        <p:blipFill>
+          <a:blip r:embed="rId2"/>
+          <a:stretch>
+            <a:fillRect/>
+          </a:stretch>
+        </p:blipFill>
+        <p:spPr>
+          <a:xfrm>
+            <a:off x="5870301" y="1417078"/>
+            <a:ext cx="5864193" cy="4691354"/>
+          </a:xfrm>
+          <a:prstGeom prst="rect">
+            <a:avLst/>
+          </a:prstGeom>
+        </p:spPr>
+      </p:pic>
+      <p:sp>
+        <p:nvSpPr>
+          <p:cNvPr id="7" name="TextBox 6"/>
           <p:cNvSpPr txBox="1"/>
           <p:nvPr/>
         </p:nvSpPr>
         <p:spPr>
           <a:xfrm>
-            <a:off x="457200" y="1170432"/>
-            <a:ext cx="11277295" cy="5230368"/>
+            <a:off x="457200" y="1353312"/>
+            <a:ext cx="5093061" cy="5047488"/>
           </a:xfrm>
           <a:prstGeom prst="rect">
             <a:avLst/>
@@ -9862,7 +10019,7 @@
                 </a:solidFill>
                 <a:latin typeface="Calibri"/>
               </a:rPr>
-              <a:t> El docente registra una mascota, cierra la aplicación, la vuelve a abrir y la mascota sigue ahí; enseguida abre mascotas.csv en el Bloc de notas para mostrar la línea que escribió el programa.</a:t>
+              <a:t> El docente registra una mascota, cierra la aplicación, la vuelve a abrir y la mascota sigue ahí;</a:t>
             </a:r>
           </a:p>
           <a:p>
@@ -9885,7 +10042,7 @@
       </p:sp>
       <p:sp>
         <p:nvSpPr>
-          <p:cNvPr id="6" name="TextBox 5"/>
+          <p:cNvPr id="8" name="TextBox 7"/>
           <p:cNvSpPr txBox="1"/>
           <p:nvPr/>
         </p:nvSpPr>
@@ -12019,14 +12176,83 @@
       </p:sp>
       <p:sp>
         <p:nvSpPr>
-          <p:cNvPr id="5" name="TextBox 4"/>
+          <p:cNvPr id="5" name="Rounded Rectangle 4"/>
+          <p:cNvSpPr/>
+          <p:nvPr/>
+        </p:nvSpPr>
+        <p:spPr>
+          <a:xfrm>
+            <a:off x="5797149" y="1343926"/>
+            <a:ext cx="6010497" cy="4837658"/>
+          </a:xfrm>
+          <a:prstGeom prst="roundRect">
+            <a:avLst>
+              <a:gd name="adj" fmla="val 4000"/>
+            </a:avLst>
+          </a:prstGeom>
+          <a:solidFill>
+            <a:srgbClr val="E8EEF4"/>
+          </a:solidFill>
+          <a:ln>
+            <a:noFill/>
+          </a:ln>
+        </p:spPr>
+        <p:style>
+          <a:lnRef idx="1">
+            <a:schemeClr val="accent1"/>
+          </a:lnRef>
+          <a:fillRef idx="3">
+            <a:schemeClr val="accent1"/>
+          </a:fillRef>
+          <a:effectRef idx="2">
+            <a:schemeClr val="accent1"/>
+          </a:effectRef>
+          <a:fontRef idx="minor">
+            <a:schemeClr val="lt1"/>
+          </a:fontRef>
+        </p:style>
+        <p:txBody>
+          <a:bodyPr rtlCol="0" anchor="ctr"/>
+          <a:lstStyle/>
+          <a:p>
+            <a:pPr algn="ctr"/>
+          </a:p>
+        </p:txBody>
+      </p:sp>
+      <p:pic>
+        <p:nvPicPr>
+          <p:cNvPr id="6" name="Picture 5" descr="ilus-smells-paso1.png"/>
+          <p:cNvPicPr>
+            <a:picLocks noChangeAspect="1"/>
+          </p:cNvPicPr>
+          <p:nvPr/>
+        </p:nvPicPr>
+        <p:blipFill>
+          <a:blip r:embed="rId2"/>
+          <a:stretch>
+            <a:fillRect/>
+          </a:stretch>
+        </p:blipFill>
+        <p:spPr>
+          <a:xfrm>
+            <a:off x="5870301" y="1417078"/>
+            <a:ext cx="5864193" cy="4691354"/>
+          </a:xfrm>
+          <a:prstGeom prst="rect">
+            <a:avLst/>
+          </a:prstGeom>
+        </p:spPr>
+      </p:pic>
+      <p:sp>
+        <p:nvSpPr>
+          <p:cNvPr id="7" name="TextBox 6"/>
           <p:cNvSpPr txBox="1"/>
           <p:nvPr/>
         </p:nvSpPr>
         <p:spPr>
           <a:xfrm>
-            <a:off x="457200" y="1170432"/>
-            <a:ext cx="11277295" cy="5230368"/>
+            <a:off x="457200" y="1353312"/>
+            <a:ext cx="5093061" cy="5047488"/>
           </a:xfrm>
           <a:prstGeom prst="rect">
             <a:avLst/>
@@ -12106,7 +12332,7 @@
       </p:sp>
       <p:sp>
         <p:nvSpPr>
-          <p:cNvPr id="6" name="TextBox 5"/>
+          <p:cNvPr id="8" name="TextBox 7"/>
           <p:cNvSpPr txBox="1"/>
           <p:nvPr/>
         </p:nvSpPr>

--- a/Programacion II/Clases/Clase 9 - Refactorizacion con IA y persistencia de archivos/Presentacion.pptx
+++ b/Programacion II/Clases/Clase 9 - Refactorizacion con IA y persistencia de archivos/Presentacion.pptx
@@ -5008,7 +5008,7 @@
         <p:spPr>
           <a:xfrm>
             <a:off x="457200" y="1261872"/>
-            <a:ext cx="11277295" cy="4707096"/>
+            <a:ext cx="11277295" cy="3854435"/>
           </a:xfrm>
           <a:prstGeom prst="roundRect">
             <a:avLst>
@@ -5257,8 +5257,8 @@
         </p:nvSpPr>
         <p:spPr>
           <a:xfrm>
-            <a:off x="1188720" y="1719072"/>
-            <a:ext cx="10271455" cy="4112736"/>
+            <a:off x="685800" y="1719072"/>
+            <a:ext cx="502920" cy="3260075"/>
           </a:xfrm>
           <a:prstGeom prst="rect">
             <a:avLst/>
@@ -5271,733 +5271,211 @@
           </a:bodyPr>
           <a:lstStyle/>
           <a:p>
-            <a:pPr>
+            <a:pPr algn="r">
               <a:spcAft>
-                <a:spcPts val="342"/>
+                <a:spcPts val="278"/>
               </a:spcAft>
             </a:pPr>
             <a:r>
-              <a:rPr sz="1600" i="1" b="0">
-                <a:solidFill>
-                  <a:srgbClr val="6A9955"/>
-                </a:solidFill>
-                <a:latin typeface="Consolas"/>
-              </a:rPr>
-              <a:t>/** Lectura defensiva: si no hay archivo devuelve lista vacia; una linea mala no tumba la app. */</a:t>
-            </a:r>
-          </a:p>
-          <a:p>
-            <a:pPr>
+              <a:rPr sz="1300" i="0" b="0">
+                <a:solidFill>
+                  <a:srgbClr val="858585"/>
+                </a:solidFill>
+                <a:latin typeface="Consolas"/>
+              </a:rPr>
+              <a:t>1</a:t>
+            </a:r>
+          </a:p>
+          <a:p>
+            <a:pPr algn="r">
               <a:spcAft>
-                <a:spcPts val="342"/>
+                <a:spcPts val="278"/>
               </a:spcAft>
             </a:pPr>
             <a:r>
-              <a:rPr sz="1600" i="0" b="0">
-                <a:solidFill>
-                  <a:srgbClr val="569CD6"/>
-                </a:solidFill>
-                <a:latin typeface="Consolas"/>
-              </a:rPr>
-              <a:t>public</a:t>
-            </a:r>
-            <a:r>
-              <a:rPr sz="1600" i="0" b="0">
-                <a:solidFill>
-                  <a:srgbClr val="D4D4D4"/>
-                </a:solidFill>
-                <a:latin typeface="Consolas"/>
-              </a:rPr>
-              <a:t> </a:t>
-            </a:r>
-            <a:r>
-              <a:rPr sz="1600" i="0" b="0">
-                <a:solidFill>
-                  <a:srgbClr val="4EC9B0"/>
-                </a:solidFill>
-                <a:latin typeface="Consolas"/>
-              </a:rPr>
-              <a:t>List</a:t>
-            </a:r>
-            <a:r>
-              <a:rPr sz="1600" i="0" b="0">
-                <a:solidFill>
-                  <a:srgbClr val="D4D4D4"/>
-                </a:solidFill>
-                <a:latin typeface="Consolas"/>
-              </a:rPr>
-              <a:t>&lt;</a:t>
-            </a:r>
-            <a:r>
-              <a:rPr sz="1600" i="0" b="0">
-                <a:solidFill>
-                  <a:srgbClr val="D4D4D4"/>
-                </a:solidFill>
-                <a:latin typeface="Consolas"/>
-              </a:rPr>
-              <a:t>Mascota</a:t>
-            </a:r>
-            <a:r>
-              <a:rPr sz="1600" i="0" b="0">
-                <a:solidFill>
-                  <a:srgbClr val="D4D4D4"/>
-                </a:solidFill>
-                <a:latin typeface="Consolas"/>
-              </a:rPr>
-              <a:t>&gt; </a:t>
-            </a:r>
-            <a:r>
-              <a:rPr sz="1600" i="0" b="0">
-                <a:solidFill>
-                  <a:srgbClr val="DCDCAA"/>
-                </a:solidFill>
-                <a:latin typeface="Consolas"/>
-              </a:rPr>
-              <a:t>cargar</a:t>
-            </a:r>
-            <a:r>
-              <a:rPr sz="1600" i="0" b="0">
-                <a:solidFill>
-                  <a:srgbClr val="D4D4D4"/>
-                </a:solidFill>
-                <a:latin typeface="Consolas"/>
-              </a:rPr>
-              <a:t>() {</a:t>
-            </a:r>
-          </a:p>
-          <a:p>
-            <a:pPr>
+              <a:rPr sz="1300" i="0" b="0">
+                <a:solidFill>
+                  <a:srgbClr val="858585"/>
+                </a:solidFill>
+                <a:latin typeface="Consolas"/>
+              </a:rPr>
+              <a:t>2</a:t>
+            </a:r>
+          </a:p>
+          <a:p>
+            <a:pPr algn="r">
               <a:spcAft>
-                <a:spcPts val="342"/>
+                <a:spcPts val="278"/>
               </a:spcAft>
             </a:pPr>
             <a:r>
-              <a:rPr sz="1600" i="0" b="0">
-                <a:solidFill>
-                  <a:srgbClr val="D4D4D4"/>
-                </a:solidFill>
-                <a:latin typeface="Consolas"/>
-              </a:rPr>
-              <a:t>    </a:t>
-            </a:r>
-            <a:r>
-              <a:rPr sz="1600" i="0" b="0">
-                <a:solidFill>
-                  <a:srgbClr val="4EC9B0"/>
-                </a:solidFill>
-                <a:latin typeface="Consolas"/>
-              </a:rPr>
-              <a:t>List</a:t>
-            </a:r>
-            <a:r>
-              <a:rPr sz="1600" i="0" b="0">
-                <a:solidFill>
-                  <a:srgbClr val="D4D4D4"/>
-                </a:solidFill>
-                <a:latin typeface="Consolas"/>
-              </a:rPr>
-              <a:t>&lt;</a:t>
-            </a:r>
-            <a:r>
-              <a:rPr sz="1600" i="0" b="0">
-                <a:solidFill>
-                  <a:srgbClr val="D4D4D4"/>
-                </a:solidFill>
-                <a:latin typeface="Consolas"/>
-              </a:rPr>
-              <a:t>Mascota</a:t>
-            </a:r>
-            <a:r>
-              <a:rPr sz="1600" i="0" b="0">
-                <a:solidFill>
-                  <a:srgbClr val="D4D4D4"/>
-                </a:solidFill>
-                <a:latin typeface="Consolas"/>
-              </a:rPr>
-              <a:t>&gt; </a:t>
-            </a:r>
-            <a:r>
-              <a:rPr sz="1600" i="0" b="0">
-                <a:solidFill>
-                  <a:srgbClr val="D4D4D4"/>
-                </a:solidFill>
-                <a:latin typeface="Consolas"/>
-              </a:rPr>
-              <a:t>mascotas</a:t>
-            </a:r>
-            <a:r>
-              <a:rPr sz="1600" i="0" b="0">
-                <a:solidFill>
-                  <a:srgbClr val="D4D4D4"/>
-                </a:solidFill>
-                <a:latin typeface="Consolas"/>
-              </a:rPr>
-              <a:t> = </a:t>
-            </a:r>
-            <a:r>
-              <a:rPr sz="1600" i="0" b="0">
-                <a:solidFill>
-                  <a:srgbClr val="569CD6"/>
-                </a:solidFill>
-                <a:latin typeface="Consolas"/>
-              </a:rPr>
-              <a:t>new</a:t>
-            </a:r>
-            <a:r>
-              <a:rPr sz="1600" i="0" b="0">
-                <a:solidFill>
-                  <a:srgbClr val="D4D4D4"/>
-                </a:solidFill>
-                <a:latin typeface="Consolas"/>
-              </a:rPr>
-              <a:t> </a:t>
-            </a:r>
-            <a:r>
-              <a:rPr sz="1600" i="0" b="0">
-                <a:solidFill>
-                  <a:srgbClr val="4EC9B0"/>
-                </a:solidFill>
-                <a:latin typeface="Consolas"/>
-              </a:rPr>
-              <a:t>ArrayList</a:t>
-            </a:r>
-            <a:r>
-              <a:rPr sz="1600" i="0" b="0">
-                <a:solidFill>
-                  <a:srgbClr val="D4D4D4"/>
-                </a:solidFill>
-                <a:latin typeface="Consolas"/>
-              </a:rPr>
-              <a:t>&lt;&gt;();</a:t>
-            </a:r>
-          </a:p>
-          <a:p>
-            <a:pPr>
+              <a:rPr sz="1300" i="0" b="0">
+                <a:solidFill>
+                  <a:srgbClr val="858585"/>
+                </a:solidFill>
+                <a:latin typeface="Consolas"/>
+              </a:rPr>
+              <a:t>3</a:t>
+            </a:r>
+          </a:p>
+          <a:p>
+            <a:pPr algn="r">
               <a:spcAft>
-                <a:spcPts val="342"/>
+                <a:spcPts val="278"/>
               </a:spcAft>
             </a:pPr>
             <a:r>
-              <a:rPr sz="1600" i="0" b="0">
-                <a:solidFill>
-                  <a:srgbClr val="D4D4D4"/>
-                </a:solidFill>
-                <a:latin typeface="Consolas"/>
-              </a:rPr>
-              <a:t>    </a:t>
-            </a:r>
-            <a:r>
-              <a:rPr sz="1600" i="0" b="0">
-                <a:solidFill>
-                  <a:srgbClr val="569CD6"/>
-                </a:solidFill>
-                <a:latin typeface="Consolas"/>
-              </a:rPr>
-              <a:t>if</a:t>
-            </a:r>
-            <a:r>
-              <a:rPr sz="1600" i="0" b="0">
-                <a:solidFill>
-                  <a:srgbClr val="D4D4D4"/>
-                </a:solidFill>
-                <a:latin typeface="Consolas"/>
-              </a:rPr>
-              <a:t> (!</a:t>
-            </a:r>
-            <a:r>
-              <a:rPr sz="1600" i="0" b="0">
-                <a:solidFill>
-                  <a:srgbClr val="DCDCAA"/>
-                </a:solidFill>
-                <a:latin typeface="Consolas"/>
-              </a:rPr>
-              <a:t>Files.exists</a:t>
-            </a:r>
-            <a:r>
-              <a:rPr sz="1600" i="0" b="0">
-                <a:solidFill>
-                  <a:srgbClr val="D4D4D4"/>
-                </a:solidFill>
-                <a:latin typeface="Consolas"/>
-              </a:rPr>
-              <a:t>(</a:t>
-            </a:r>
-            <a:r>
-              <a:rPr sz="1600" i="0" b="0">
-                <a:solidFill>
-                  <a:srgbClr val="D4D4D4"/>
-                </a:solidFill>
-                <a:latin typeface="Consolas"/>
-              </a:rPr>
-              <a:t>ruta</a:t>
-            </a:r>
-            <a:r>
-              <a:rPr sz="1600" i="0" b="0">
-                <a:solidFill>
-                  <a:srgbClr val="D4D4D4"/>
-                </a:solidFill>
-                <a:latin typeface="Consolas"/>
-              </a:rPr>
-              <a:t>)) {</a:t>
-            </a:r>
-          </a:p>
-          <a:p>
-            <a:pPr>
+              <a:rPr sz="1300" i="0" b="0">
+                <a:solidFill>
+                  <a:srgbClr val="858585"/>
+                </a:solidFill>
+                <a:latin typeface="Consolas"/>
+              </a:rPr>
+              <a:t>4</a:t>
+            </a:r>
+          </a:p>
+          <a:p>
+            <a:pPr algn="r">
               <a:spcAft>
-                <a:spcPts val="342"/>
+                <a:spcPts val="278"/>
               </a:spcAft>
             </a:pPr>
             <a:r>
-              <a:rPr sz="1600" i="0" b="0">
-                <a:solidFill>
-                  <a:srgbClr val="D4D4D4"/>
-                </a:solidFill>
-                <a:latin typeface="Consolas"/>
-              </a:rPr>
-              <a:t>        </a:t>
-            </a:r>
-            <a:r>
-              <a:rPr sz="1600" i="0" b="0">
-                <a:solidFill>
-                  <a:srgbClr val="569CD6"/>
-                </a:solidFill>
-                <a:latin typeface="Consolas"/>
-              </a:rPr>
-              <a:t>return</a:t>
-            </a:r>
-            <a:r>
-              <a:rPr sz="1600" i="0" b="0">
-                <a:solidFill>
-                  <a:srgbClr val="D4D4D4"/>
-                </a:solidFill>
-                <a:latin typeface="Consolas"/>
-              </a:rPr>
-              <a:t> </a:t>
-            </a:r>
-            <a:r>
-              <a:rPr sz="1600" i="0" b="0">
-                <a:solidFill>
-                  <a:srgbClr val="D4D4D4"/>
-                </a:solidFill>
-                <a:latin typeface="Consolas"/>
-              </a:rPr>
-              <a:t>mascotas</a:t>
-            </a:r>
-            <a:r>
-              <a:rPr sz="1600" i="0" b="0">
-                <a:solidFill>
-                  <a:srgbClr val="D4D4D4"/>
-                </a:solidFill>
-                <a:latin typeface="Consolas"/>
-              </a:rPr>
-              <a:t>;</a:t>
-            </a:r>
-          </a:p>
-          <a:p>
-            <a:pPr>
+              <a:rPr sz="1300" i="0" b="0">
+                <a:solidFill>
+                  <a:srgbClr val="858585"/>
+                </a:solidFill>
+                <a:latin typeface="Consolas"/>
+              </a:rPr>
+              <a:t>5</a:t>
+            </a:r>
+          </a:p>
+          <a:p>
+            <a:pPr algn="r">
               <a:spcAft>
-                <a:spcPts val="342"/>
+                <a:spcPts val="278"/>
               </a:spcAft>
             </a:pPr>
             <a:r>
-              <a:rPr sz="1600" i="0" b="0">
-                <a:solidFill>
-                  <a:srgbClr val="D4D4D4"/>
-                </a:solidFill>
-                <a:latin typeface="Consolas"/>
-              </a:rPr>
-              <a:t>    }</a:t>
-            </a:r>
-          </a:p>
-          <a:p>
-            <a:pPr>
+              <a:rPr sz="1300" i="0" b="0">
+                <a:solidFill>
+                  <a:srgbClr val="858585"/>
+                </a:solidFill>
+                <a:latin typeface="Consolas"/>
+              </a:rPr>
+              <a:t>6</a:t>
+            </a:r>
+          </a:p>
+          <a:p>
+            <a:pPr algn="r">
               <a:spcAft>
-                <a:spcPts val="342"/>
+                <a:spcPts val="278"/>
               </a:spcAft>
             </a:pPr>
             <a:r>
-              <a:rPr sz="1600" i="0" b="0">
-                <a:solidFill>
-                  <a:srgbClr val="D4D4D4"/>
-                </a:solidFill>
-                <a:latin typeface="Consolas"/>
-              </a:rPr>
-              <a:t>    </a:t>
-            </a:r>
-            <a:r>
-              <a:rPr sz="1600" i="0" b="0">
-                <a:solidFill>
-                  <a:srgbClr val="569CD6"/>
-                </a:solidFill>
-                <a:latin typeface="Consolas"/>
-              </a:rPr>
-              <a:t>try</a:t>
-            </a:r>
-            <a:r>
-              <a:rPr sz="1600" i="0" b="0">
-                <a:solidFill>
-                  <a:srgbClr val="D4D4D4"/>
-                </a:solidFill>
-                <a:latin typeface="Consolas"/>
-              </a:rPr>
-              <a:t> (</a:t>
-            </a:r>
-            <a:r>
-              <a:rPr sz="1600" i="0" b="0">
-                <a:solidFill>
-                  <a:srgbClr val="D4D4D4"/>
-                </a:solidFill>
-                <a:latin typeface="Consolas"/>
-              </a:rPr>
-              <a:t>BufferedReader</a:t>
-            </a:r>
-            <a:r>
-              <a:rPr sz="1600" i="0" b="0">
-                <a:solidFill>
-                  <a:srgbClr val="D4D4D4"/>
-                </a:solidFill>
-                <a:latin typeface="Consolas"/>
-              </a:rPr>
-              <a:t> </a:t>
-            </a:r>
-            <a:r>
-              <a:rPr sz="1600" i="0" b="0">
-                <a:solidFill>
-                  <a:srgbClr val="D4D4D4"/>
-                </a:solidFill>
-                <a:latin typeface="Consolas"/>
-              </a:rPr>
-              <a:t>lector</a:t>
-            </a:r>
-            <a:r>
-              <a:rPr sz="1600" i="0" b="0">
-                <a:solidFill>
-                  <a:srgbClr val="D4D4D4"/>
-                </a:solidFill>
-                <a:latin typeface="Consolas"/>
-              </a:rPr>
-              <a:t> = </a:t>
-            </a:r>
-            <a:r>
-              <a:rPr sz="1600" i="0" b="0">
-                <a:solidFill>
-                  <a:srgbClr val="DCDCAA"/>
-                </a:solidFill>
-                <a:latin typeface="Consolas"/>
-              </a:rPr>
-              <a:t>Files.newBufferedReader</a:t>
-            </a:r>
-            <a:r>
-              <a:rPr sz="1600" i="0" b="0">
-                <a:solidFill>
-                  <a:srgbClr val="D4D4D4"/>
-                </a:solidFill>
-                <a:latin typeface="Consolas"/>
-              </a:rPr>
-              <a:t>(</a:t>
-            </a:r>
-            <a:r>
-              <a:rPr sz="1600" i="0" b="0">
-                <a:solidFill>
-                  <a:srgbClr val="D4D4D4"/>
-                </a:solidFill>
-                <a:latin typeface="Consolas"/>
-              </a:rPr>
-              <a:t>ruta</a:t>
-            </a:r>
-            <a:r>
-              <a:rPr sz="1600" i="0" b="0">
-                <a:solidFill>
-                  <a:srgbClr val="D4D4D4"/>
-                </a:solidFill>
-                <a:latin typeface="Consolas"/>
-              </a:rPr>
-              <a:t>, </a:t>
-            </a:r>
-            <a:r>
-              <a:rPr sz="1600" i="0" b="0">
-                <a:solidFill>
-                  <a:srgbClr val="D4D4D4"/>
-                </a:solidFill>
-                <a:latin typeface="Consolas"/>
-              </a:rPr>
-              <a:t>StandardCharsets</a:t>
-            </a:r>
-            <a:r>
-              <a:rPr sz="1600" i="0" b="0">
-                <a:solidFill>
-                  <a:srgbClr val="D4D4D4"/>
-                </a:solidFill>
-                <a:latin typeface="Consolas"/>
-              </a:rPr>
-              <a:t>.</a:t>
-            </a:r>
-            <a:r>
-              <a:rPr sz="1600" i="0" b="0">
-                <a:solidFill>
-                  <a:srgbClr val="D4D4D4"/>
-                </a:solidFill>
-                <a:latin typeface="Consolas"/>
-              </a:rPr>
-              <a:t>UTF_8</a:t>
-            </a:r>
-            <a:r>
-              <a:rPr sz="1600" i="0" b="0">
-                <a:solidFill>
-                  <a:srgbClr val="D4D4D4"/>
-                </a:solidFill>
-                <a:latin typeface="Consolas"/>
-              </a:rPr>
-              <a:t>)) {</a:t>
-            </a:r>
-          </a:p>
-          <a:p>
-            <a:pPr>
+              <a:rPr sz="1300" i="0" b="0">
+                <a:solidFill>
+                  <a:srgbClr val="858585"/>
+                </a:solidFill>
+                <a:latin typeface="Consolas"/>
+              </a:rPr>
+              <a:t>7</a:t>
+            </a:r>
+          </a:p>
+          <a:p>
+            <a:pPr algn="r">
               <a:spcAft>
-                <a:spcPts val="342"/>
+                <a:spcPts val="278"/>
               </a:spcAft>
             </a:pPr>
             <a:r>
-              <a:rPr sz="1600" i="0" b="0">
-                <a:solidFill>
-                  <a:srgbClr val="D4D4D4"/>
-                </a:solidFill>
-                <a:latin typeface="Consolas"/>
-              </a:rPr>
-              <a:t>        </a:t>
-            </a:r>
-            <a:r>
-              <a:rPr sz="1600" i="1" b="0">
-                <a:solidFill>
-                  <a:srgbClr val="6A9955"/>
-                </a:solidFill>
-                <a:latin typeface="Consolas"/>
-              </a:rPr>
-              <a:t>// ...</a:t>
-            </a:r>
-          </a:p>
-          <a:p>
-            <a:pPr>
+              <a:rPr sz="1300" i="0" b="0">
+                <a:solidFill>
+                  <a:srgbClr val="858585"/>
+                </a:solidFill>
+                <a:latin typeface="Consolas"/>
+              </a:rPr>
+              <a:t>8</a:t>
+            </a:r>
+          </a:p>
+          <a:p>
+            <a:pPr algn="r">
               <a:spcAft>
-                <a:spcPts val="342"/>
+                <a:spcPts val="278"/>
               </a:spcAft>
             </a:pPr>
             <a:r>
-              <a:rPr sz="1600" i="0" b="0">
-                <a:solidFill>
-                  <a:srgbClr val="D4D4D4"/>
-                </a:solidFill>
-                <a:latin typeface="Consolas"/>
-              </a:rPr>
-              <a:t>    } </a:t>
-            </a:r>
-            <a:r>
-              <a:rPr sz="1600" i="0" b="0">
-                <a:solidFill>
-                  <a:srgbClr val="569CD6"/>
-                </a:solidFill>
-                <a:latin typeface="Consolas"/>
-              </a:rPr>
-              <a:t>catch</a:t>
-            </a:r>
-            <a:r>
-              <a:rPr sz="1600" i="0" b="0">
-                <a:solidFill>
-                  <a:srgbClr val="D4D4D4"/>
-                </a:solidFill>
-                <a:latin typeface="Consolas"/>
-              </a:rPr>
-              <a:t> (</a:t>
-            </a:r>
-            <a:r>
-              <a:rPr sz="1600" i="0" b="0">
-                <a:solidFill>
-                  <a:srgbClr val="D4D4D4"/>
-                </a:solidFill>
-                <a:latin typeface="Consolas"/>
-              </a:rPr>
-              <a:t>IOException</a:t>
-            </a:r>
-            <a:r>
-              <a:rPr sz="1600" i="0" b="0">
-                <a:solidFill>
-                  <a:srgbClr val="D4D4D4"/>
-                </a:solidFill>
-                <a:latin typeface="Consolas"/>
-              </a:rPr>
-              <a:t> </a:t>
-            </a:r>
-            <a:r>
-              <a:rPr sz="1600" i="0" b="0">
-                <a:solidFill>
-                  <a:srgbClr val="D4D4D4"/>
-                </a:solidFill>
-                <a:latin typeface="Consolas"/>
-              </a:rPr>
-              <a:t>e</a:t>
-            </a:r>
-            <a:r>
-              <a:rPr sz="1600" i="0" b="0">
-                <a:solidFill>
-                  <a:srgbClr val="D4D4D4"/>
-                </a:solidFill>
-                <a:latin typeface="Consolas"/>
-              </a:rPr>
-              <a:t>) {</a:t>
-            </a:r>
-          </a:p>
-          <a:p>
-            <a:pPr>
+              <a:rPr sz="1300" i="0" b="0">
+                <a:solidFill>
+                  <a:srgbClr val="858585"/>
+                </a:solidFill>
+                <a:latin typeface="Consolas"/>
+              </a:rPr>
+              <a:t>9</a:t>
+            </a:r>
+          </a:p>
+          <a:p>
+            <a:pPr algn="r">
               <a:spcAft>
-                <a:spcPts val="342"/>
+                <a:spcPts val="278"/>
               </a:spcAft>
             </a:pPr>
             <a:r>
-              <a:rPr sz="1600" i="0" b="0">
-                <a:solidFill>
-                  <a:srgbClr val="D4D4D4"/>
-                </a:solidFill>
-                <a:latin typeface="Consolas"/>
-              </a:rPr>
-              <a:t>        </a:t>
-            </a:r>
-            <a:r>
-              <a:rPr sz="1600" i="0" b="0">
-                <a:solidFill>
-                  <a:srgbClr val="DCDCAA"/>
-                </a:solidFill>
-                <a:latin typeface="Consolas"/>
-              </a:rPr>
-              <a:t>System.out.println</a:t>
-            </a:r>
-            <a:r>
-              <a:rPr sz="1600" i="0" b="0">
-                <a:solidFill>
-                  <a:srgbClr val="D4D4D4"/>
-                </a:solidFill>
-                <a:latin typeface="Consolas"/>
-              </a:rPr>
-              <a:t>(</a:t>
-            </a:r>
-            <a:r>
-              <a:rPr sz="1600" i="0" b="0">
-                <a:solidFill>
-                  <a:srgbClr val="CE9178"/>
-                </a:solidFill>
-                <a:latin typeface="Consolas"/>
-              </a:rPr>
-              <a:t>"No se pudo leer el archivo: "</a:t>
-            </a:r>
-            <a:r>
-              <a:rPr sz="1600" i="0" b="0">
-                <a:solidFill>
-                  <a:srgbClr val="D4D4D4"/>
-                </a:solidFill>
-                <a:latin typeface="Consolas"/>
-              </a:rPr>
-              <a:t> + </a:t>
-            </a:r>
-            <a:r>
-              <a:rPr sz="1600" i="0" b="0">
-                <a:solidFill>
-                  <a:srgbClr val="DCDCAA"/>
-                </a:solidFill>
-                <a:latin typeface="Consolas"/>
-              </a:rPr>
-              <a:t>e.getMessage</a:t>
-            </a:r>
-            <a:r>
-              <a:rPr sz="1600" i="0" b="0">
-                <a:solidFill>
-                  <a:srgbClr val="D4D4D4"/>
-                </a:solidFill>
-                <a:latin typeface="Consolas"/>
-              </a:rPr>
-              <a:t>());</a:t>
-            </a:r>
-          </a:p>
-          <a:p>
-            <a:pPr>
+              <a:rPr sz="1300" i="0" b="0">
+                <a:solidFill>
+                  <a:srgbClr val="858585"/>
+                </a:solidFill>
+                <a:latin typeface="Consolas"/>
+              </a:rPr>
+              <a:t>10</a:t>
+            </a:r>
+          </a:p>
+          <a:p>
+            <a:pPr algn="r">
               <a:spcAft>
-                <a:spcPts val="342"/>
+                <a:spcPts val="278"/>
               </a:spcAft>
             </a:pPr>
             <a:r>
-              <a:rPr sz="1600" i="0" b="0">
-                <a:solidFill>
-                  <a:srgbClr val="D4D4D4"/>
-                </a:solidFill>
-                <a:latin typeface="Consolas"/>
-              </a:rPr>
-              <a:t>    }</a:t>
-            </a:r>
-          </a:p>
-          <a:p>
-            <a:pPr>
+              <a:rPr sz="1300" i="0" b="0">
+                <a:solidFill>
+                  <a:srgbClr val="858585"/>
+                </a:solidFill>
+                <a:latin typeface="Consolas"/>
+              </a:rPr>
+              <a:t>11</a:t>
+            </a:r>
+          </a:p>
+          <a:p>
+            <a:pPr algn="r">
               <a:spcAft>
-                <a:spcPts val="342"/>
+                <a:spcPts val="278"/>
               </a:spcAft>
             </a:pPr>
             <a:r>
-              <a:rPr sz="1600" i="0" b="0">
-                <a:solidFill>
-                  <a:srgbClr val="D4D4D4"/>
-                </a:solidFill>
-                <a:latin typeface="Consolas"/>
-              </a:rPr>
-              <a:t>    </a:t>
-            </a:r>
-            <a:r>
-              <a:rPr sz="1600" i="0" b="0">
-                <a:solidFill>
-                  <a:srgbClr val="569CD6"/>
-                </a:solidFill>
-                <a:latin typeface="Consolas"/>
-              </a:rPr>
-              <a:t>return</a:t>
-            </a:r>
-            <a:r>
-              <a:rPr sz="1600" i="0" b="0">
-                <a:solidFill>
-                  <a:srgbClr val="D4D4D4"/>
-                </a:solidFill>
-                <a:latin typeface="Consolas"/>
-              </a:rPr>
-              <a:t> </a:t>
-            </a:r>
-            <a:r>
-              <a:rPr sz="1600" i="0" b="0">
-                <a:solidFill>
-                  <a:srgbClr val="D4D4D4"/>
-                </a:solidFill>
-                <a:latin typeface="Consolas"/>
-              </a:rPr>
-              <a:t>mascotas</a:t>
-            </a:r>
-            <a:r>
-              <a:rPr sz="1600" i="0" b="0">
-                <a:solidFill>
-                  <a:srgbClr val="D4D4D4"/>
-                </a:solidFill>
-                <a:latin typeface="Consolas"/>
-              </a:rPr>
-              <a:t>;</a:t>
-            </a:r>
-          </a:p>
-          <a:p>
-            <a:pPr>
+              <a:rPr sz="1300" i="0" b="0">
+                <a:solidFill>
+                  <a:srgbClr val="858585"/>
+                </a:solidFill>
+                <a:latin typeface="Consolas"/>
+              </a:rPr>
+              <a:t>12</a:t>
+            </a:r>
+          </a:p>
+          <a:p>
+            <a:pPr algn="r">
               <a:spcAft>
-                <a:spcPts val="342"/>
+                <a:spcPts val="278"/>
               </a:spcAft>
             </a:pPr>
             <a:r>
-              <a:rPr sz="1600" i="0" b="0">
-                <a:solidFill>
-                  <a:srgbClr val="D4D4D4"/>
-                </a:solidFill>
-                <a:latin typeface="Consolas"/>
-              </a:rPr>
-              <a:t>}</a:t>
+              <a:rPr sz="1300" i="0" b="0">
+                <a:solidFill>
+                  <a:srgbClr val="858585"/>
+                </a:solidFill>
+                <a:latin typeface="Consolas"/>
+              </a:rPr>
+              <a:t>13</a:t>
             </a:r>
           </a:p>
         </p:txBody>
@@ -6010,8 +5488,8 @@
         </p:nvSpPr>
         <p:spPr>
           <a:xfrm>
-            <a:off x="457200" y="6035040"/>
-            <a:ext cx="11277295" cy="365760"/>
+            <a:off x="1188720" y="1719072"/>
+            <a:ext cx="10271455" cy="3260075"/>
           </a:xfrm>
           <a:prstGeom prst="rect">
             <a:avLst/>
@@ -6024,6 +5502,759 @@
           </a:bodyPr>
           <a:lstStyle/>
           <a:p>
+            <a:pPr>
+              <a:spcAft>
+                <a:spcPts val="278"/>
+              </a:spcAft>
+            </a:pPr>
+            <a:r>
+              <a:rPr sz="1300" i="1" b="0">
+                <a:solidFill>
+                  <a:srgbClr val="6A9955"/>
+                </a:solidFill>
+                <a:latin typeface="Consolas"/>
+              </a:rPr>
+              <a:t>/** Lectura defensiva: si no hay archivo devuelve lista vacia; una linea mala no tumba la app. */</a:t>
+            </a:r>
+          </a:p>
+          <a:p>
+            <a:pPr>
+              <a:spcAft>
+                <a:spcPts val="278"/>
+              </a:spcAft>
+            </a:pPr>
+            <a:r>
+              <a:rPr sz="1300" i="0" b="0">
+                <a:solidFill>
+                  <a:srgbClr val="569CD6"/>
+                </a:solidFill>
+                <a:latin typeface="Consolas"/>
+              </a:rPr>
+              <a:t>public</a:t>
+            </a:r>
+            <a:r>
+              <a:rPr sz="1300" i="0" b="0">
+                <a:solidFill>
+                  <a:srgbClr val="D4D4D4"/>
+                </a:solidFill>
+                <a:latin typeface="Consolas"/>
+              </a:rPr>
+              <a:t> </a:t>
+            </a:r>
+            <a:r>
+              <a:rPr sz="1300" i="0" b="0">
+                <a:solidFill>
+                  <a:srgbClr val="4EC9B0"/>
+                </a:solidFill>
+                <a:latin typeface="Consolas"/>
+              </a:rPr>
+              <a:t>List</a:t>
+            </a:r>
+            <a:r>
+              <a:rPr sz="1300" i="0" b="0">
+                <a:solidFill>
+                  <a:srgbClr val="D4D4D4"/>
+                </a:solidFill>
+                <a:latin typeface="Consolas"/>
+              </a:rPr>
+              <a:t>&lt;</a:t>
+            </a:r>
+            <a:r>
+              <a:rPr sz="1300" i="0" b="0">
+                <a:solidFill>
+                  <a:srgbClr val="D4D4D4"/>
+                </a:solidFill>
+                <a:latin typeface="Consolas"/>
+              </a:rPr>
+              <a:t>Mascota</a:t>
+            </a:r>
+            <a:r>
+              <a:rPr sz="1300" i="0" b="0">
+                <a:solidFill>
+                  <a:srgbClr val="D4D4D4"/>
+                </a:solidFill>
+                <a:latin typeface="Consolas"/>
+              </a:rPr>
+              <a:t>&gt; </a:t>
+            </a:r>
+            <a:r>
+              <a:rPr sz="1300" i="0" b="0">
+                <a:solidFill>
+                  <a:srgbClr val="DCDCAA"/>
+                </a:solidFill>
+                <a:latin typeface="Consolas"/>
+              </a:rPr>
+              <a:t>cargar</a:t>
+            </a:r>
+            <a:r>
+              <a:rPr sz="1300" i="0" b="0">
+                <a:solidFill>
+                  <a:srgbClr val="D4D4D4"/>
+                </a:solidFill>
+                <a:latin typeface="Consolas"/>
+              </a:rPr>
+              <a:t>() {</a:t>
+            </a:r>
+          </a:p>
+          <a:p>
+            <a:pPr>
+              <a:spcAft>
+                <a:spcPts val="278"/>
+              </a:spcAft>
+            </a:pPr>
+            <a:r>
+              <a:rPr sz="1300" i="0" b="0">
+                <a:solidFill>
+                  <a:srgbClr val="D4D4D4"/>
+                </a:solidFill>
+                <a:latin typeface="Consolas"/>
+              </a:rPr>
+              <a:t>    </a:t>
+            </a:r>
+            <a:r>
+              <a:rPr sz="1300" i="0" b="0">
+                <a:solidFill>
+                  <a:srgbClr val="4EC9B0"/>
+                </a:solidFill>
+                <a:latin typeface="Consolas"/>
+              </a:rPr>
+              <a:t>List</a:t>
+            </a:r>
+            <a:r>
+              <a:rPr sz="1300" i="0" b="0">
+                <a:solidFill>
+                  <a:srgbClr val="D4D4D4"/>
+                </a:solidFill>
+                <a:latin typeface="Consolas"/>
+              </a:rPr>
+              <a:t>&lt;</a:t>
+            </a:r>
+            <a:r>
+              <a:rPr sz="1300" i="0" b="0">
+                <a:solidFill>
+                  <a:srgbClr val="D4D4D4"/>
+                </a:solidFill>
+                <a:latin typeface="Consolas"/>
+              </a:rPr>
+              <a:t>Mascota</a:t>
+            </a:r>
+            <a:r>
+              <a:rPr sz="1300" i="0" b="0">
+                <a:solidFill>
+                  <a:srgbClr val="D4D4D4"/>
+                </a:solidFill>
+                <a:latin typeface="Consolas"/>
+              </a:rPr>
+              <a:t>&gt; </a:t>
+            </a:r>
+            <a:r>
+              <a:rPr sz="1300" i="0" b="0">
+                <a:solidFill>
+                  <a:srgbClr val="D4D4D4"/>
+                </a:solidFill>
+                <a:latin typeface="Consolas"/>
+              </a:rPr>
+              <a:t>mascotas</a:t>
+            </a:r>
+            <a:r>
+              <a:rPr sz="1300" i="0" b="0">
+                <a:solidFill>
+                  <a:srgbClr val="D4D4D4"/>
+                </a:solidFill>
+                <a:latin typeface="Consolas"/>
+              </a:rPr>
+              <a:t> = </a:t>
+            </a:r>
+            <a:r>
+              <a:rPr sz="1300" i="0" b="0">
+                <a:solidFill>
+                  <a:srgbClr val="569CD6"/>
+                </a:solidFill>
+                <a:latin typeface="Consolas"/>
+              </a:rPr>
+              <a:t>new</a:t>
+            </a:r>
+            <a:r>
+              <a:rPr sz="1300" i="0" b="0">
+                <a:solidFill>
+                  <a:srgbClr val="D4D4D4"/>
+                </a:solidFill>
+                <a:latin typeface="Consolas"/>
+              </a:rPr>
+              <a:t> </a:t>
+            </a:r>
+            <a:r>
+              <a:rPr sz="1300" i="0" b="0">
+                <a:solidFill>
+                  <a:srgbClr val="4EC9B0"/>
+                </a:solidFill>
+                <a:latin typeface="Consolas"/>
+              </a:rPr>
+              <a:t>ArrayList</a:t>
+            </a:r>
+            <a:r>
+              <a:rPr sz="1300" i="0" b="0">
+                <a:solidFill>
+                  <a:srgbClr val="D4D4D4"/>
+                </a:solidFill>
+                <a:latin typeface="Consolas"/>
+              </a:rPr>
+              <a:t>&lt;&gt;();</a:t>
+            </a:r>
+          </a:p>
+          <a:p>
+            <a:pPr>
+              <a:spcAft>
+                <a:spcPts val="278"/>
+              </a:spcAft>
+            </a:pPr>
+            <a:r>
+              <a:rPr sz="1300" i="0" b="0">
+                <a:solidFill>
+                  <a:srgbClr val="D4D4D4"/>
+                </a:solidFill>
+                <a:latin typeface="Consolas"/>
+              </a:rPr>
+              <a:t>    </a:t>
+            </a:r>
+            <a:r>
+              <a:rPr sz="1300" i="0" b="0">
+                <a:solidFill>
+                  <a:srgbClr val="569CD6"/>
+                </a:solidFill>
+                <a:latin typeface="Consolas"/>
+              </a:rPr>
+              <a:t>if</a:t>
+            </a:r>
+            <a:r>
+              <a:rPr sz="1300" i="0" b="0">
+                <a:solidFill>
+                  <a:srgbClr val="D4D4D4"/>
+                </a:solidFill>
+                <a:latin typeface="Consolas"/>
+              </a:rPr>
+              <a:t> (!</a:t>
+            </a:r>
+            <a:r>
+              <a:rPr sz="1300" i="0" b="0">
+                <a:solidFill>
+                  <a:srgbClr val="DCDCAA"/>
+                </a:solidFill>
+                <a:latin typeface="Consolas"/>
+              </a:rPr>
+              <a:t>Files.exists</a:t>
+            </a:r>
+            <a:r>
+              <a:rPr sz="1300" i="0" b="0">
+                <a:solidFill>
+                  <a:srgbClr val="D4D4D4"/>
+                </a:solidFill>
+                <a:latin typeface="Consolas"/>
+              </a:rPr>
+              <a:t>(</a:t>
+            </a:r>
+            <a:r>
+              <a:rPr sz="1300" i="0" b="0">
+                <a:solidFill>
+                  <a:srgbClr val="D4D4D4"/>
+                </a:solidFill>
+                <a:latin typeface="Consolas"/>
+              </a:rPr>
+              <a:t>ruta</a:t>
+            </a:r>
+            <a:r>
+              <a:rPr sz="1300" i="0" b="0">
+                <a:solidFill>
+                  <a:srgbClr val="D4D4D4"/>
+                </a:solidFill>
+                <a:latin typeface="Consolas"/>
+              </a:rPr>
+              <a:t>)) {</a:t>
+            </a:r>
+          </a:p>
+          <a:p>
+            <a:pPr>
+              <a:spcAft>
+                <a:spcPts val="278"/>
+              </a:spcAft>
+            </a:pPr>
+            <a:r>
+              <a:rPr sz="1300" i="0" b="0">
+                <a:solidFill>
+                  <a:srgbClr val="D4D4D4"/>
+                </a:solidFill>
+                <a:latin typeface="Consolas"/>
+              </a:rPr>
+              <a:t>        </a:t>
+            </a:r>
+            <a:r>
+              <a:rPr sz="1300" i="0" b="0">
+                <a:solidFill>
+                  <a:srgbClr val="569CD6"/>
+                </a:solidFill>
+                <a:latin typeface="Consolas"/>
+              </a:rPr>
+              <a:t>return</a:t>
+            </a:r>
+            <a:r>
+              <a:rPr sz="1300" i="0" b="0">
+                <a:solidFill>
+                  <a:srgbClr val="D4D4D4"/>
+                </a:solidFill>
+                <a:latin typeface="Consolas"/>
+              </a:rPr>
+              <a:t> </a:t>
+            </a:r>
+            <a:r>
+              <a:rPr sz="1300" i="0" b="0">
+                <a:solidFill>
+                  <a:srgbClr val="D4D4D4"/>
+                </a:solidFill>
+                <a:latin typeface="Consolas"/>
+              </a:rPr>
+              <a:t>mascotas</a:t>
+            </a:r>
+            <a:r>
+              <a:rPr sz="1300" i="0" b="0">
+                <a:solidFill>
+                  <a:srgbClr val="D4D4D4"/>
+                </a:solidFill>
+                <a:latin typeface="Consolas"/>
+              </a:rPr>
+              <a:t>;</a:t>
+            </a:r>
+          </a:p>
+          <a:p>
+            <a:pPr>
+              <a:spcAft>
+                <a:spcPts val="278"/>
+              </a:spcAft>
+            </a:pPr>
+            <a:r>
+              <a:rPr sz="1300" i="0" b="0">
+                <a:solidFill>
+                  <a:srgbClr val="D4D4D4"/>
+                </a:solidFill>
+                <a:latin typeface="Consolas"/>
+              </a:rPr>
+              <a:t>    }</a:t>
+            </a:r>
+          </a:p>
+          <a:p>
+            <a:pPr>
+              <a:spcAft>
+                <a:spcPts val="278"/>
+              </a:spcAft>
+            </a:pPr>
+            <a:r>
+              <a:rPr sz="1300" i="0" b="0">
+                <a:solidFill>
+                  <a:srgbClr val="D4D4D4"/>
+                </a:solidFill>
+                <a:latin typeface="Consolas"/>
+              </a:rPr>
+              <a:t>    </a:t>
+            </a:r>
+            <a:r>
+              <a:rPr sz="1300" i="0" b="0">
+                <a:solidFill>
+                  <a:srgbClr val="569CD6"/>
+                </a:solidFill>
+                <a:latin typeface="Consolas"/>
+              </a:rPr>
+              <a:t>try</a:t>
+            </a:r>
+            <a:r>
+              <a:rPr sz="1300" i="0" b="0">
+                <a:solidFill>
+                  <a:srgbClr val="D4D4D4"/>
+                </a:solidFill>
+                <a:latin typeface="Consolas"/>
+              </a:rPr>
+              <a:t> (</a:t>
+            </a:r>
+            <a:r>
+              <a:rPr sz="1300" i="0" b="0">
+                <a:solidFill>
+                  <a:srgbClr val="D4D4D4"/>
+                </a:solidFill>
+                <a:latin typeface="Consolas"/>
+              </a:rPr>
+              <a:t>BufferedReader</a:t>
+            </a:r>
+            <a:r>
+              <a:rPr sz="1300" i="0" b="0">
+                <a:solidFill>
+                  <a:srgbClr val="D4D4D4"/>
+                </a:solidFill>
+                <a:latin typeface="Consolas"/>
+              </a:rPr>
+              <a:t> </a:t>
+            </a:r>
+            <a:r>
+              <a:rPr sz="1300" i="0" b="0">
+                <a:solidFill>
+                  <a:srgbClr val="D4D4D4"/>
+                </a:solidFill>
+                <a:latin typeface="Consolas"/>
+              </a:rPr>
+              <a:t>lector</a:t>
+            </a:r>
+            <a:r>
+              <a:rPr sz="1300" i="0" b="0">
+                <a:solidFill>
+                  <a:srgbClr val="D4D4D4"/>
+                </a:solidFill>
+                <a:latin typeface="Consolas"/>
+              </a:rPr>
+              <a:t> = </a:t>
+            </a:r>
+            <a:r>
+              <a:rPr sz="1300" i="0" b="0">
+                <a:solidFill>
+                  <a:srgbClr val="DCDCAA"/>
+                </a:solidFill>
+                <a:latin typeface="Consolas"/>
+              </a:rPr>
+              <a:t>Files.newBufferedReader</a:t>
+            </a:r>
+            <a:r>
+              <a:rPr sz="1300" i="0" b="0">
+                <a:solidFill>
+                  <a:srgbClr val="D4D4D4"/>
+                </a:solidFill>
+                <a:latin typeface="Consolas"/>
+              </a:rPr>
+              <a:t>(</a:t>
+            </a:r>
+            <a:r>
+              <a:rPr sz="1300" i="0" b="0">
+                <a:solidFill>
+                  <a:srgbClr val="D4D4D4"/>
+                </a:solidFill>
+                <a:latin typeface="Consolas"/>
+              </a:rPr>
+              <a:t>ruta</a:t>
+            </a:r>
+            <a:r>
+              <a:rPr sz="1300" i="0" b="0">
+                <a:solidFill>
+                  <a:srgbClr val="D4D4D4"/>
+                </a:solidFill>
+                <a:latin typeface="Consolas"/>
+              </a:rPr>
+              <a:t>, </a:t>
+            </a:r>
+            <a:r>
+              <a:rPr sz="1300" i="0" b="0">
+                <a:solidFill>
+                  <a:srgbClr val="D4D4D4"/>
+                </a:solidFill>
+                <a:latin typeface="Consolas"/>
+              </a:rPr>
+              <a:t>StandardCharsets</a:t>
+            </a:r>
+            <a:r>
+              <a:rPr sz="1300" i="0" b="0">
+                <a:solidFill>
+                  <a:srgbClr val="D4D4D4"/>
+                </a:solidFill>
+                <a:latin typeface="Consolas"/>
+              </a:rPr>
+              <a:t>.</a:t>
+            </a:r>
+            <a:r>
+              <a:rPr sz="1300" i="0" b="0">
+                <a:solidFill>
+                  <a:srgbClr val="D4D4D4"/>
+                </a:solidFill>
+                <a:latin typeface="Consolas"/>
+              </a:rPr>
+              <a:t>UTF_8</a:t>
+            </a:r>
+            <a:r>
+              <a:rPr sz="1300" i="0" b="0">
+                <a:solidFill>
+                  <a:srgbClr val="D4D4D4"/>
+                </a:solidFill>
+                <a:latin typeface="Consolas"/>
+              </a:rPr>
+              <a:t>)) {</a:t>
+            </a:r>
+          </a:p>
+          <a:p>
+            <a:pPr>
+              <a:spcAft>
+                <a:spcPts val="278"/>
+              </a:spcAft>
+            </a:pPr>
+            <a:r>
+              <a:rPr sz="1300" i="0" b="0">
+                <a:solidFill>
+                  <a:srgbClr val="D4D4D4"/>
+                </a:solidFill>
+                <a:latin typeface="Consolas"/>
+              </a:rPr>
+              <a:t>        </a:t>
+            </a:r>
+            <a:r>
+              <a:rPr sz="1300" i="1" b="0">
+                <a:solidFill>
+                  <a:srgbClr val="6A9955"/>
+                </a:solidFill>
+                <a:latin typeface="Consolas"/>
+              </a:rPr>
+              <a:t>// ...</a:t>
+            </a:r>
+          </a:p>
+          <a:p>
+            <a:pPr>
+              <a:spcAft>
+                <a:spcPts val="278"/>
+              </a:spcAft>
+            </a:pPr>
+            <a:r>
+              <a:rPr sz="1300" i="0" b="0">
+                <a:solidFill>
+                  <a:srgbClr val="D4D4D4"/>
+                </a:solidFill>
+                <a:latin typeface="Consolas"/>
+              </a:rPr>
+              <a:t>    } </a:t>
+            </a:r>
+            <a:r>
+              <a:rPr sz="1300" i="0" b="0">
+                <a:solidFill>
+                  <a:srgbClr val="569CD6"/>
+                </a:solidFill>
+                <a:latin typeface="Consolas"/>
+              </a:rPr>
+              <a:t>catch</a:t>
+            </a:r>
+            <a:r>
+              <a:rPr sz="1300" i="0" b="0">
+                <a:solidFill>
+                  <a:srgbClr val="D4D4D4"/>
+                </a:solidFill>
+                <a:latin typeface="Consolas"/>
+              </a:rPr>
+              <a:t> (</a:t>
+            </a:r>
+            <a:r>
+              <a:rPr sz="1300" i="0" b="0">
+                <a:solidFill>
+                  <a:srgbClr val="D4D4D4"/>
+                </a:solidFill>
+                <a:latin typeface="Consolas"/>
+              </a:rPr>
+              <a:t>IOException</a:t>
+            </a:r>
+            <a:r>
+              <a:rPr sz="1300" i="0" b="0">
+                <a:solidFill>
+                  <a:srgbClr val="D4D4D4"/>
+                </a:solidFill>
+                <a:latin typeface="Consolas"/>
+              </a:rPr>
+              <a:t> </a:t>
+            </a:r>
+            <a:r>
+              <a:rPr sz="1300" i="0" b="0">
+                <a:solidFill>
+                  <a:srgbClr val="D4D4D4"/>
+                </a:solidFill>
+                <a:latin typeface="Consolas"/>
+              </a:rPr>
+              <a:t>e</a:t>
+            </a:r>
+            <a:r>
+              <a:rPr sz="1300" i="0" b="0">
+                <a:solidFill>
+                  <a:srgbClr val="D4D4D4"/>
+                </a:solidFill>
+                <a:latin typeface="Consolas"/>
+              </a:rPr>
+              <a:t>) {</a:t>
+            </a:r>
+          </a:p>
+          <a:p>
+            <a:pPr>
+              <a:spcAft>
+                <a:spcPts val="278"/>
+              </a:spcAft>
+            </a:pPr>
+            <a:r>
+              <a:rPr sz="1300" i="0" b="0">
+                <a:solidFill>
+                  <a:srgbClr val="D4D4D4"/>
+                </a:solidFill>
+                <a:latin typeface="Consolas"/>
+              </a:rPr>
+              <a:t>        </a:t>
+            </a:r>
+            <a:r>
+              <a:rPr sz="1300" i="0" b="0">
+                <a:solidFill>
+                  <a:srgbClr val="DCDCAA"/>
+                </a:solidFill>
+                <a:latin typeface="Consolas"/>
+              </a:rPr>
+              <a:t>System.out.println</a:t>
+            </a:r>
+            <a:r>
+              <a:rPr sz="1300" i="0" b="0">
+                <a:solidFill>
+                  <a:srgbClr val="D4D4D4"/>
+                </a:solidFill>
+                <a:latin typeface="Consolas"/>
+              </a:rPr>
+              <a:t>(</a:t>
+            </a:r>
+            <a:r>
+              <a:rPr sz="1300" i="0" b="0">
+                <a:solidFill>
+                  <a:srgbClr val="CE9178"/>
+                </a:solidFill>
+                <a:latin typeface="Consolas"/>
+              </a:rPr>
+              <a:t>"No se pudo leer el archivo: "</a:t>
+            </a:r>
+            <a:r>
+              <a:rPr sz="1300" i="0" b="0">
+                <a:solidFill>
+                  <a:srgbClr val="D4D4D4"/>
+                </a:solidFill>
+                <a:latin typeface="Consolas"/>
+              </a:rPr>
+              <a:t> + </a:t>
+            </a:r>
+            <a:r>
+              <a:rPr sz="1300" i="0" b="0">
+                <a:solidFill>
+                  <a:srgbClr val="DCDCAA"/>
+                </a:solidFill>
+                <a:latin typeface="Consolas"/>
+              </a:rPr>
+              <a:t>e.getMessage</a:t>
+            </a:r>
+            <a:r>
+              <a:rPr sz="1300" i="0" b="0">
+                <a:solidFill>
+                  <a:srgbClr val="D4D4D4"/>
+                </a:solidFill>
+                <a:latin typeface="Consolas"/>
+              </a:rPr>
+              <a:t>());</a:t>
+            </a:r>
+          </a:p>
+          <a:p>
+            <a:pPr>
+              <a:spcAft>
+                <a:spcPts val="278"/>
+              </a:spcAft>
+            </a:pPr>
+            <a:r>
+              <a:rPr sz="1300" i="0" b="0">
+                <a:solidFill>
+                  <a:srgbClr val="D4D4D4"/>
+                </a:solidFill>
+                <a:latin typeface="Consolas"/>
+              </a:rPr>
+              <a:t>    }</a:t>
+            </a:r>
+          </a:p>
+          <a:p>
+            <a:pPr>
+              <a:spcAft>
+                <a:spcPts val="278"/>
+              </a:spcAft>
+            </a:pPr>
+            <a:r>
+              <a:rPr sz="1300" i="0" b="0">
+                <a:solidFill>
+                  <a:srgbClr val="D4D4D4"/>
+                </a:solidFill>
+                <a:latin typeface="Consolas"/>
+              </a:rPr>
+              <a:t>    </a:t>
+            </a:r>
+            <a:r>
+              <a:rPr sz="1300" i="0" b="0">
+                <a:solidFill>
+                  <a:srgbClr val="569CD6"/>
+                </a:solidFill>
+                <a:latin typeface="Consolas"/>
+              </a:rPr>
+              <a:t>return</a:t>
+            </a:r>
+            <a:r>
+              <a:rPr sz="1300" i="0" b="0">
+                <a:solidFill>
+                  <a:srgbClr val="D4D4D4"/>
+                </a:solidFill>
+                <a:latin typeface="Consolas"/>
+              </a:rPr>
+              <a:t> </a:t>
+            </a:r>
+            <a:r>
+              <a:rPr sz="1300" i="0" b="0">
+                <a:solidFill>
+                  <a:srgbClr val="D4D4D4"/>
+                </a:solidFill>
+                <a:latin typeface="Consolas"/>
+              </a:rPr>
+              <a:t>mascotas</a:t>
+            </a:r>
+            <a:r>
+              <a:rPr sz="1300" i="0" b="0">
+                <a:solidFill>
+                  <a:srgbClr val="D4D4D4"/>
+                </a:solidFill>
+                <a:latin typeface="Consolas"/>
+              </a:rPr>
+              <a:t>;</a:t>
+            </a:r>
+          </a:p>
+          <a:p>
+            <a:pPr>
+              <a:spcAft>
+                <a:spcPts val="278"/>
+              </a:spcAft>
+            </a:pPr>
+            <a:r>
+              <a:rPr sz="1300" i="0" b="0">
+                <a:solidFill>
+                  <a:srgbClr val="D4D4D4"/>
+                </a:solidFill>
+                <a:latin typeface="Consolas"/>
+              </a:rPr>
+              <a:t>}</a:t>
+            </a:r>
+          </a:p>
+        </p:txBody>
+      </p:sp>
+      <p:sp>
+        <p:nvSpPr>
+          <p:cNvPr id="13" name="TextBox 12"/>
+          <p:cNvSpPr txBox="1"/>
+          <p:nvPr/>
+        </p:nvSpPr>
+        <p:spPr>
+          <a:xfrm>
+            <a:off x="457200" y="6035040"/>
+            <a:ext cx="11277295" cy="365760"/>
+          </a:xfrm>
+          <a:prstGeom prst="rect">
+            <a:avLst/>
+          </a:prstGeom>
+          <a:noFill/>
+        </p:spPr>
+        <p:txBody>
+          <a:bodyPr wrap="square">
+            <a:spAutoFit/>
+          </a:bodyPr>
+          <a:lstStyle/>
+          <a:p>
             <a:pPr algn="ctr"/>
             <a:r>
               <a:rPr sz="1300" b="0" i="1">
@@ -6039,7 +6270,7 @@
       </p:sp>
       <p:sp>
         <p:nvSpPr>
-          <p:cNvPr id="13" name="TextBox 12"/>
+          <p:cNvPr id="14" name="TextBox 13"/>
           <p:cNvSpPr txBox="1"/>
           <p:nvPr/>
         </p:nvSpPr>
@@ -13076,7 +13307,7 @@
         <p:spPr>
           <a:xfrm>
             <a:off x="457200" y="1261872"/>
-            <a:ext cx="11277295" cy="4692907"/>
+            <a:ext cx="11277295" cy="3886755"/>
           </a:xfrm>
           <a:prstGeom prst="roundRect">
             <a:avLst>
@@ -13325,8 +13556,8 @@
         </p:nvSpPr>
         <p:spPr>
           <a:xfrm>
-            <a:off x="1188720" y="1719072"/>
-            <a:ext cx="10271455" cy="4098547"/>
+            <a:off x="685800" y="1719072"/>
+            <a:ext cx="502920" cy="3292395"/>
           </a:xfrm>
           <a:prstGeom prst="rect">
             <a:avLst/>
@@ -13339,773 +13570,179 @@
           </a:bodyPr>
           <a:lstStyle/>
           <a:p>
-            <a:pPr>
+            <a:pPr algn="r">
               <a:spcAft>
-                <a:spcPts val="407"/>
+                <a:spcPts val="342"/>
               </a:spcAft>
             </a:pPr>
             <a:r>
-              <a:rPr sz="1900" i="0" b="0">
-                <a:solidFill>
-                  <a:srgbClr val="569CD6"/>
-                </a:solidFill>
-                <a:latin typeface="Consolas"/>
-              </a:rPr>
-              <a:t>private</a:t>
-            </a:r>
-            <a:r>
-              <a:rPr sz="1900" i="0" b="0">
-                <a:solidFill>
-                  <a:srgbClr val="D4D4D4"/>
-                </a:solidFill>
-                <a:latin typeface="Consolas"/>
-              </a:rPr>
-              <a:t> </a:t>
-            </a:r>
-            <a:r>
-              <a:rPr sz="1900" i="0" b="0">
-                <a:solidFill>
-                  <a:srgbClr val="569CD6"/>
-                </a:solidFill>
-                <a:latin typeface="Consolas"/>
-              </a:rPr>
-              <a:t>static</a:t>
-            </a:r>
-            <a:r>
-              <a:rPr sz="1900" i="0" b="0">
-                <a:solidFill>
-                  <a:srgbClr val="D4D4D4"/>
-                </a:solidFill>
-                <a:latin typeface="Consolas"/>
-              </a:rPr>
-              <a:t> </a:t>
-            </a:r>
-            <a:r>
-              <a:rPr sz="1900" i="0" b="0">
-                <a:solidFill>
-                  <a:srgbClr val="569CD6"/>
-                </a:solidFill>
-                <a:latin typeface="Consolas"/>
-              </a:rPr>
-              <a:t>final</a:t>
-            </a:r>
-            <a:r>
-              <a:rPr sz="1900" i="0" b="0">
-                <a:solidFill>
-                  <a:srgbClr val="D4D4D4"/>
-                </a:solidFill>
-                <a:latin typeface="Consolas"/>
-              </a:rPr>
-              <a:t> </a:t>
-            </a:r>
-            <a:r>
-              <a:rPr sz="1900" i="0" b="0">
-                <a:solidFill>
-                  <a:srgbClr val="4EC9B0"/>
-                </a:solidFill>
-                <a:latin typeface="Consolas"/>
-              </a:rPr>
-              <a:t>String</a:t>
-            </a:r>
-            <a:r>
-              <a:rPr sz="1900" i="0" b="0">
-                <a:solidFill>
-                  <a:srgbClr val="D4D4D4"/>
-                </a:solidFill>
-                <a:latin typeface="Consolas"/>
-              </a:rPr>
-              <a:t> </a:t>
-            </a:r>
-            <a:r>
-              <a:rPr sz="1900" i="0" b="0">
-                <a:solidFill>
-                  <a:srgbClr val="D4D4D4"/>
-                </a:solidFill>
-                <a:latin typeface="Consolas"/>
-              </a:rPr>
-              <a:t>SEPARADOR</a:t>
-            </a:r>
-            <a:r>
-              <a:rPr sz="1900" i="0" b="0">
-                <a:solidFill>
-                  <a:srgbClr val="D4D4D4"/>
-                </a:solidFill>
-                <a:latin typeface="Consolas"/>
-              </a:rPr>
-              <a:t> = </a:t>
-            </a:r>
-            <a:r>
-              <a:rPr sz="1900" i="0" b="0">
-                <a:solidFill>
-                  <a:srgbClr val="CE9178"/>
-                </a:solidFill>
-                <a:latin typeface="Consolas"/>
-              </a:rPr>
-              <a:t>";"</a:t>
-            </a:r>
-            <a:r>
-              <a:rPr sz="1900" i="0" b="0">
-                <a:solidFill>
-                  <a:srgbClr val="D4D4D4"/>
-                </a:solidFill>
-                <a:latin typeface="Consolas"/>
-              </a:rPr>
-              <a:t>;</a:t>
-            </a:r>
-          </a:p>
-          <a:p>
-            <a:pPr>
+              <a:rPr sz="1600" i="0" b="0">
+                <a:solidFill>
+                  <a:srgbClr val="858585"/>
+                </a:solidFill>
+                <a:latin typeface="Consolas"/>
+              </a:rPr>
+              <a:t>1</a:t>
+            </a:r>
+          </a:p>
+          <a:p>
+            <a:pPr algn="r">
               <a:spcAft>
-                <a:spcPts val="407"/>
+                <a:spcPts val="342"/>
               </a:spcAft>
             </a:pPr>
             <a:r>
-              <a:rPr sz="1900" i="0" b="0">
-                <a:solidFill>
-                  <a:srgbClr val="569CD6"/>
-                </a:solidFill>
-                <a:latin typeface="Consolas"/>
-              </a:rPr>
-              <a:t>private</a:t>
-            </a:r>
-            <a:r>
-              <a:rPr sz="1900" i="0" b="0">
-                <a:solidFill>
-                  <a:srgbClr val="D4D4D4"/>
-                </a:solidFill>
-                <a:latin typeface="Consolas"/>
-              </a:rPr>
-              <a:t> </a:t>
-            </a:r>
-            <a:r>
-              <a:rPr sz="1900" i="0" b="0">
-                <a:solidFill>
-                  <a:srgbClr val="569CD6"/>
-                </a:solidFill>
-                <a:latin typeface="Consolas"/>
-              </a:rPr>
-              <a:t>static</a:t>
-            </a:r>
-            <a:r>
-              <a:rPr sz="1900" i="0" b="0">
-                <a:solidFill>
-                  <a:srgbClr val="D4D4D4"/>
-                </a:solidFill>
-                <a:latin typeface="Consolas"/>
-              </a:rPr>
-              <a:t> </a:t>
-            </a:r>
-            <a:r>
-              <a:rPr sz="1900" i="0" b="0">
-                <a:solidFill>
-                  <a:srgbClr val="569CD6"/>
-                </a:solidFill>
-                <a:latin typeface="Consolas"/>
-              </a:rPr>
-              <a:t>final</a:t>
-            </a:r>
-            <a:r>
-              <a:rPr sz="1900" i="0" b="0">
-                <a:solidFill>
-                  <a:srgbClr val="D4D4D4"/>
-                </a:solidFill>
-                <a:latin typeface="Consolas"/>
-              </a:rPr>
-              <a:t> </a:t>
-            </a:r>
-            <a:r>
-              <a:rPr sz="1900" i="0" b="0">
-                <a:solidFill>
-                  <a:srgbClr val="4EC9B0"/>
-                </a:solidFill>
-                <a:latin typeface="Consolas"/>
-              </a:rPr>
-              <a:t>String</a:t>
-            </a:r>
-            <a:r>
-              <a:rPr sz="1900" i="0" b="0">
-                <a:solidFill>
-                  <a:srgbClr val="D4D4D4"/>
-                </a:solidFill>
-                <a:latin typeface="Consolas"/>
-              </a:rPr>
-              <a:t> </a:t>
-            </a:r>
-            <a:r>
-              <a:rPr sz="1900" i="0" b="0">
-                <a:solidFill>
-                  <a:srgbClr val="D4D4D4"/>
-                </a:solidFill>
-                <a:latin typeface="Consolas"/>
-              </a:rPr>
-              <a:t>ENCABEZADO</a:t>
-            </a:r>
-            <a:r>
-              <a:rPr sz="1900" i="0" b="0">
-                <a:solidFill>
-                  <a:srgbClr val="D4D4D4"/>
-                </a:solidFill>
-                <a:latin typeface="Consolas"/>
-              </a:rPr>
-              <a:t> = </a:t>
-            </a:r>
-            <a:r>
-              <a:rPr sz="1900" i="0" b="0">
-                <a:solidFill>
-                  <a:srgbClr val="CE9178"/>
-                </a:solidFill>
-                <a:latin typeface="Consolas"/>
-              </a:rPr>
-              <a:t>"id;nombre;especie;edad;cedula_dueno"</a:t>
-            </a:r>
-            <a:r>
-              <a:rPr sz="1900" i="0" b="0">
-                <a:solidFill>
-                  <a:srgbClr val="D4D4D4"/>
-                </a:solidFill>
-                <a:latin typeface="Consolas"/>
-              </a:rPr>
-              <a:t>;</a:t>
-            </a:r>
-          </a:p>
-          <a:p>
-            <a:pPr>
+              <a:rPr sz="1600" i="0" b="0">
+                <a:solidFill>
+                  <a:srgbClr val="858585"/>
+                </a:solidFill>
+                <a:latin typeface="Consolas"/>
+              </a:rPr>
+              <a:t>2</a:t>
+            </a:r>
+          </a:p>
+          <a:p>
+            <a:pPr algn="r">
               <a:spcAft>
-                <a:spcPts val="407"/>
+                <a:spcPts val="342"/>
               </a:spcAft>
             </a:pPr>
             <a:r>
-              <a:rPr sz="1900" i="0" b="0">
-                <a:solidFill>
-                  <a:srgbClr val="569CD6"/>
-                </a:solidFill>
-                <a:latin typeface="Consolas"/>
-              </a:rPr>
-              <a:t>private</a:t>
-            </a:r>
-            <a:r>
-              <a:rPr sz="1900" i="0" b="0">
-                <a:solidFill>
-                  <a:srgbClr val="D4D4D4"/>
-                </a:solidFill>
-                <a:latin typeface="Consolas"/>
-              </a:rPr>
-              <a:t> </a:t>
-            </a:r>
-            <a:r>
-              <a:rPr sz="1900" i="0" b="0">
-                <a:solidFill>
-                  <a:srgbClr val="569CD6"/>
-                </a:solidFill>
-                <a:latin typeface="Consolas"/>
-              </a:rPr>
-              <a:t>static</a:t>
-            </a:r>
-            <a:r>
-              <a:rPr sz="1900" i="0" b="0">
-                <a:solidFill>
-                  <a:srgbClr val="D4D4D4"/>
-                </a:solidFill>
-                <a:latin typeface="Consolas"/>
-              </a:rPr>
-              <a:t> </a:t>
-            </a:r>
-            <a:r>
-              <a:rPr sz="1900" i="0" b="0">
-                <a:solidFill>
-                  <a:srgbClr val="569CD6"/>
-                </a:solidFill>
-                <a:latin typeface="Consolas"/>
-              </a:rPr>
-              <a:t>final</a:t>
-            </a:r>
-            <a:r>
-              <a:rPr sz="1900" i="0" b="0">
-                <a:solidFill>
-                  <a:srgbClr val="D4D4D4"/>
-                </a:solidFill>
-                <a:latin typeface="Consolas"/>
-              </a:rPr>
-              <a:t> </a:t>
-            </a:r>
-            <a:r>
-              <a:rPr sz="1900" i="0" b="0">
-                <a:solidFill>
-                  <a:srgbClr val="4EC9B0"/>
-                </a:solidFill>
-                <a:latin typeface="Consolas"/>
-              </a:rPr>
-              <a:t>int</a:t>
-            </a:r>
-            <a:r>
-              <a:rPr sz="1900" i="0" b="0">
-                <a:solidFill>
-                  <a:srgbClr val="D4D4D4"/>
-                </a:solidFill>
-                <a:latin typeface="Consolas"/>
-              </a:rPr>
-              <a:t> </a:t>
-            </a:r>
-            <a:r>
-              <a:rPr sz="1900" i="0" b="0">
-                <a:solidFill>
-                  <a:srgbClr val="D4D4D4"/>
-                </a:solidFill>
-                <a:latin typeface="Consolas"/>
-              </a:rPr>
-              <a:t>CAMPOS_ESPERADOS</a:t>
-            </a:r>
-            <a:r>
-              <a:rPr sz="1900" i="0" b="0">
-                <a:solidFill>
-                  <a:srgbClr val="D4D4D4"/>
-                </a:solidFill>
-                <a:latin typeface="Consolas"/>
-              </a:rPr>
-              <a:t> = </a:t>
-            </a:r>
-            <a:r>
-              <a:rPr sz="1900" i="0" b="0">
-                <a:solidFill>
-                  <a:srgbClr val="B5CEA8"/>
-                </a:solidFill>
-                <a:latin typeface="Consolas"/>
-              </a:rPr>
-              <a:t>5</a:t>
-            </a:r>
-            <a:r>
-              <a:rPr sz="1900" i="0" b="0">
-                <a:solidFill>
-                  <a:srgbClr val="D4D4D4"/>
-                </a:solidFill>
-                <a:latin typeface="Consolas"/>
-              </a:rPr>
-              <a:t>;</a:t>
-            </a:r>
-          </a:p>
-          <a:p>
-            <a:pPr>
+              <a:rPr sz="1600" i="0" b="0">
+                <a:solidFill>
+                  <a:srgbClr val="858585"/>
+                </a:solidFill>
+                <a:latin typeface="Consolas"/>
+              </a:rPr>
+              <a:t>3</a:t>
+            </a:r>
+          </a:p>
+          <a:p>
+            <a:pPr algn="r">
               <a:spcAft>
-                <a:spcPts val="407"/>
+                <a:spcPts val="342"/>
               </a:spcAft>
             </a:pPr>
             <a:r>
-              <a:rPr sz="1900" i="0" b="0">
-                <a:solidFill>
-                  <a:srgbClr val="D4D4D4"/>
-                </a:solidFill>
-                <a:latin typeface="Consolas"/>
-              </a:rPr>
-              <a:t/>
-            </a:r>
-          </a:p>
-          <a:p>
-            <a:pPr>
+              <a:rPr sz="1600" i="0" b="0">
+                <a:solidFill>
+                  <a:srgbClr val="858585"/>
+                </a:solidFill>
+                <a:latin typeface="Consolas"/>
+              </a:rPr>
+              <a:t>4</a:t>
+            </a:r>
+          </a:p>
+          <a:p>
+            <a:pPr algn="r">
               <a:spcAft>
-                <a:spcPts val="407"/>
+                <a:spcPts val="342"/>
               </a:spcAft>
             </a:pPr>
             <a:r>
-              <a:rPr sz="1900" i="0" b="0">
-                <a:solidFill>
-                  <a:srgbClr val="569CD6"/>
-                </a:solidFill>
-                <a:latin typeface="Consolas"/>
-              </a:rPr>
-              <a:t>private</a:t>
-            </a:r>
-            <a:r>
-              <a:rPr sz="1900" i="0" b="0">
-                <a:solidFill>
-                  <a:srgbClr val="D4D4D4"/>
-                </a:solidFill>
-                <a:latin typeface="Consolas"/>
-              </a:rPr>
-              <a:t> </a:t>
-            </a:r>
-            <a:r>
-              <a:rPr sz="1900" i="0" b="0">
-                <a:solidFill>
-                  <a:srgbClr val="4EC9B0"/>
-                </a:solidFill>
-                <a:latin typeface="Consolas"/>
-              </a:rPr>
-              <a:t>String</a:t>
-            </a:r>
-            <a:r>
-              <a:rPr sz="1900" i="0" b="0">
-                <a:solidFill>
-                  <a:srgbClr val="D4D4D4"/>
-                </a:solidFill>
-                <a:latin typeface="Consolas"/>
-              </a:rPr>
-              <a:t> </a:t>
-            </a:r>
-            <a:r>
-              <a:rPr sz="1900" i="0" b="0">
-                <a:solidFill>
-                  <a:srgbClr val="DCDCAA"/>
-                </a:solidFill>
-                <a:latin typeface="Consolas"/>
-              </a:rPr>
-              <a:t>aLinea</a:t>
-            </a:r>
-            <a:r>
-              <a:rPr sz="1900" i="0" b="0">
-                <a:solidFill>
-                  <a:srgbClr val="D4D4D4"/>
-                </a:solidFill>
-                <a:latin typeface="Consolas"/>
-              </a:rPr>
-              <a:t>(</a:t>
-            </a:r>
-            <a:r>
-              <a:rPr sz="1900" i="0" b="0">
-                <a:solidFill>
-                  <a:srgbClr val="D4D4D4"/>
-                </a:solidFill>
-                <a:latin typeface="Consolas"/>
-              </a:rPr>
-              <a:t>Mascota</a:t>
-            </a:r>
-            <a:r>
-              <a:rPr sz="1900" i="0" b="0">
-                <a:solidFill>
-                  <a:srgbClr val="D4D4D4"/>
-                </a:solidFill>
-                <a:latin typeface="Consolas"/>
-              </a:rPr>
-              <a:t> </a:t>
-            </a:r>
-            <a:r>
-              <a:rPr sz="1900" i="0" b="0">
-                <a:solidFill>
-                  <a:srgbClr val="D4D4D4"/>
-                </a:solidFill>
-                <a:latin typeface="Consolas"/>
-              </a:rPr>
-              <a:t>m</a:t>
-            </a:r>
-            <a:r>
-              <a:rPr sz="1900" i="0" b="0">
-                <a:solidFill>
-                  <a:srgbClr val="D4D4D4"/>
-                </a:solidFill>
-                <a:latin typeface="Consolas"/>
-              </a:rPr>
-              <a:t>) {</a:t>
-            </a:r>
-          </a:p>
-          <a:p>
-            <a:pPr>
+              <a:rPr sz="1600" i="0" b="0">
+                <a:solidFill>
+                  <a:srgbClr val="858585"/>
+                </a:solidFill>
+                <a:latin typeface="Consolas"/>
+              </a:rPr>
+              <a:t>5</a:t>
+            </a:r>
+          </a:p>
+          <a:p>
+            <a:pPr algn="r">
               <a:spcAft>
-                <a:spcPts val="407"/>
+                <a:spcPts val="342"/>
               </a:spcAft>
             </a:pPr>
             <a:r>
-              <a:rPr sz="1900" i="0" b="0">
-                <a:solidFill>
-                  <a:srgbClr val="D4D4D4"/>
-                </a:solidFill>
-                <a:latin typeface="Consolas"/>
-              </a:rPr>
-              <a:t>    </a:t>
-            </a:r>
-            <a:r>
-              <a:rPr sz="1900" i="0" b="0">
-                <a:solidFill>
-                  <a:srgbClr val="569CD6"/>
-                </a:solidFill>
-                <a:latin typeface="Consolas"/>
-              </a:rPr>
-              <a:t>return</a:t>
-            </a:r>
-            <a:r>
-              <a:rPr sz="1900" i="0" b="0">
-                <a:solidFill>
-                  <a:srgbClr val="D4D4D4"/>
-                </a:solidFill>
-                <a:latin typeface="Consolas"/>
-              </a:rPr>
-              <a:t> </a:t>
-            </a:r>
-            <a:r>
-              <a:rPr sz="1900" i="0" b="0">
-                <a:solidFill>
-                  <a:srgbClr val="DCDCAA"/>
-                </a:solidFill>
-                <a:latin typeface="Consolas"/>
-              </a:rPr>
-              <a:t>limpiar</a:t>
-            </a:r>
-            <a:r>
-              <a:rPr sz="1900" i="0" b="0">
-                <a:solidFill>
-                  <a:srgbClr val="D4D4D4"/>
-                </a:solidFill>
-                <a:latin typeface="Consolas"/>
-              </a:rPr>
-              <a:t>(</a:t>
-            </a:r>
-            <a:r>
-              <a:rPr sz="1900" i="0" b="0">
-                <a:solidFill>
-                  <a:srgbClr val="DCDCAA"/>
-                </a:solidFill>
-                <a:latin typeface="Consolas"/>
-              </a:rPr>
-              <a:t>m.getId</a:t>
-            </a:r>
-            <a:r>
-              <a:rPr sz="1900" i="0" b="0">
-                <a:solidFill>
-                  <a:srgbClr val="D4D4D4"/>
-                </a:solidFill>
-                <a:latin typeface="Consolas"/>
-              </a:rPr>
-              <a:t>()) + </a:t>
-            </a:r>
-            <a:r>
-              <a:rPr sz="1900" i="0" b="0">
-                <a:solidFill>
-                  <a:srgbClr val="D4D4D4"/>
-                </a:solidFill>
-                <a:latin typeface="Consolas"/>
-              </a:rPr>
-              <a:t>SEPARADOR</a:t>
-            </a:r>
-          </a:p>
-          <a:p>
-            <a:pPr>
+              <a:rPr sz="1600" i="0" b="0">
+                <a:solidFill>
+                  <a:srgbClr val="858585"/>
+                </a:solidFill>
+                <a:latin typeface="Consolas"/>
+              </a:rPr>
+              <a:t>6</a:t>
+            </a:r>
+          </a:p>
+          <a:p>
+            <a:pPr algn="r">
               <a:spcAft>
-                <a:spcPts val="407"/>
+                <a:spcPts val="342"/>
               </a:spcAft>
             </a:pPr>
             <a:r>
-              <a:rPr sz="1900" i="0" b="0">
-                <a:solidFill>
-                  <a:srgbClr val="D4D4D4"/>
-                </a:solidFill>
-                <a:latin typeface="Consolas"/>
-              </a:rPr>
-              <a:t>            + </a:t>
-            </a:r>
-            <a:r>
-              <a:rPr sz="1900" i="0" b="0">
-                <a:solidFill>
-                  <a:srgbClr val="DCDCAA"/>
-                </a:solidFill>
-                <a:latin typeface="Consolas"/>
-              </a:rPr>
-              <a:t>limpiar</a:t>
-            </a:r>
-            <a:r>
-              <a:rPr sz="1900" i="0" b="0">
-                <a:solidFill>
-                  <a:srgbClr val="D4D4D4"/>
-                </a:solidFill>
-                <a:latin typeface="Consolas"/>
-              </a:rPr>
-              <a:t>(</a:t>
-            </a:r>
-            <a:r>
-              <a:rPr sz="1900" i="0" b="0">
-                <a:solidFill>
-                  <a:srgbClr val="DCDCAA"/>
-                </a:solidFill>
-                <a:latin typeface="Consolas"/>
-              </a:rPr>
-              <a:t>m.getNombre</a:t>
-            </a:r>
-            <a:r>
-              <a:rPr sz="1900" i="0" b="0">
-                <a:solidFill>
-                  <a:srgbClr val="D4D4D4"/>
-                </a:solidFill>
-                <a:latin typeface="Consolas"/>
-              </a:rPr>
-              <a:t>()) + </a:t>
-            </a:r>
-            <a:r>
-              <a:rPr sz="1900" i="0" b="0">
-                <a:solidFill>
-                  <a:srgbClr val="D4D4D4"/>
-                </a:solidFill>
-                <a:latin typeface="Consolas"/>
-              </a:rPr>
-              <a:t>SEPARADOR</a:t>
-            </a:r>
-          </a:p>
-          <a:p>
-            <a:pPr>
+              <a:rPr sz="1600" i="0" b="0">
+                <a:solidFill>
+                  <a:srgbClr val="858585"/>
+                </a:solidFill>
+                <a:latin typeface="Consolas"/>
+              </a:rPr>
+              <a:t>7</a:t>
+            </a:r>
+          </a:p>
+          <a:p>
+            <a:pPr algn="r">
               <a:spcAft>
-                <a:spcPts val="407"/>
+                <a:spcPts val="342"/>
               </a:spcAft>
             </a:pPr>
             <a:r>
-              <a:rPr sz="1900" i="0" b="0">
-                <a:solidFill>
-                  <a:srgbClr val="D4D4D4"/>
-                </a:solidFill>
-                <a:latin typeface="Consolas"/>
-              </a:rPr>
-              <a:t>            + </a:t>
-            </a:r>
-            <a:r>
-              <a:rPr sz="1900" i="0" b="0">
-                <a:solidFill>
-                  <a:srgbClr val="DCDCAA"/>
-                </a:solidFill>
-                <a:latin typeface="Consolas"/>
-              </a:rPr>
-              <a:t>limpiar</a:t>
-            </a:r>
-            <a:r>
-              <a:rPr sz="1900" i="0" b="0">
-                <a:solidFill>
-                  <a:srgbClr val="D4D4D4"/>
-                </a:solidFill>
-                <a:latin typeface="Consolas"/>
-              </a:rPr>
-              <a:t>(</a:t>
-            </a:r>
-            <a:r>
-              <a:rPr sz="1900" i="0" b="0">
-                <a:solidFill>
-                  <a:srgbClr val="DCDCAA"/>
-                </a:solidFill>
-                <a:latin typeface="Consolas"/>
-              </a:rPr>
-              <a:t>m.getEspecie</a:t>
-            </a:r>
-            <a:r>
-              <a:rPr sz="1900" i="0" b="0">
-                <a:solidFill>
-                  <a:srgbClr val="D4D4D4"/>
-                </a:solidFill>
-                <a:latin typeface="Consolas"/>
-              </a:rPr>
-              <a:t>()) + </a:t>
-            </a:r>
-            <a:r>
-              <a:rPr sz="1900" i="0" b="0">
-                <a:solidFill>
-                  <a:srgbClr val="D4D4D4"/>
-                </a:solidFill>
-                <a:latin typeface="Consolas"/>
-              </a:rPr>
-              <a:t>SEPARADOR</a:t>
-            </a:r>
-          </a:p>
-          <a:p>
-            <a:pPr>
+              <a:rPr sz="1600" i="0" b="0">
+                <a:solidFill>
+                  <a:srgbClr val="858585"/>
+                </a:solidFill>
+                <a:latin typeface="Consolas"/>
+              </a:rPr>
+              <a:t>8</a:t>
+            </a:r>
+          </a:p>
+          <a:p>
+            <a:pPr algn="r">
               <a:spcAft>
-                <a:spcPts val="407"/>
+                <a:spcPts val="342"/>
               </a:spcAft>
             </a:pPr>
             <a:r>
-              <a:rPr sz="1900" i="0" b="0">
-                <a:solidFill>
-                  <a:srgbClr val="D4D4D4"/>
-                </a:solidFill>
-                <a:latin typeface="Consolas"/>
-              </a:rPr>
-              <a:t>            + </a:t>
-            </a:r>
-            <a:r>
-              <a:rPr sz="1900" i="0" b="0">
-                <a:solidFill>
-                  <a:srgbClr val="DCDCAA"/>
-                </a:solidFill>
-                <a:latin typeface="Consolas"/>
-              </a:rPr>
-              <a:t>m.getEdad</a:t>
-            </a:r>
-            <a:r>
-              <a:rPr sz="1900" i="0" b="0">
-                <a:solidFill>
-                  <a:srgbClr val="D4D4D4"/>
-                </a:solidFill>
-                <a:latin typeface="Consolas"/>
-              </a:rPr>
-              <a:t>() + </a:t>
-            </a:r>
-            <a:r>
-              <a:rPr sz="1900" i="0" b="0">
-                <a:solidFill>
-                  <a:srgbClr val="D4D4D4"/>
-                </a:solidFill>
-                <a:latin typeface="Consolas"/>
-              </a:rPr>
-              <a:t>SEPARADOR</a:t>
-            </a:r>
-          </a:p>
-          <a:p>
-            <a:pPr>
+              <a:rPr sz="1600" i="0" b="0">
+                <a:solidFill>
+                  <a:srgbClr val="858585"/>
+                </a:solidFill>
+                <a:latin typeface="Consolas"/>
+              </a:rPr>
+              <a:t>9</a:t>
+            </a:r>
+          </a:p>
+          <a:p>
+            <a:pPr algn="r">
               <a:spcAft>
-                <a:spcPts val="407"/>
+                <a:spcPts val="342"/>
               </a:spcAft>
             </a:pPr>
             <a:r>
-              <a:rPr sz="1900" i="0" b="0">
-                <a:solidFill>
-                  <a:srgbClr val="D4D4D4"/>
-                </a:solidFill>
-                <a:latin typeface="Consolas"/>
-              </a:rPr>
-              <a:t>            + </a:t>
-            </a:r>
-            <a:r>
-              <a:rPr sz="1900" i="0" b="0">
-                <a:solidFill>
-                  <a:srgbClr val="DCDCAA"/>
-                </a:solidFill>
-                <a:latin typeface="Consolas"/>
-              </a:rPr>
-              <a:t>limpiar</a:t>
-            </a:r>
-            <a:r>
-              <a:rPr sz="1900" i="0" b="0">
-                <a:solidFill>
-                  <a:srgbClr val="D4D4D4"/>
-                </a:solidFill>
-                <a:latin typeface="Consolas"/>
-              </a:rPr>
-              <a:t>(</a:t>
-            </a:r>
-            <a:r>
-              <a:rPr sz="1900" i="0" b="0">
-                <a:solidFill>
-                  <a:srgbClr val="DCDCAA"/>
-                </a:solidFill>
-                <a:latin typeface="Consolas"/>
-              </a:rPr>
-              <a:t>m.getCedulaDueno</a:t>
-            </a:r>
-            <a:r>
-              <a:rPr sz="1900" i="0" b="0">
-                <a:solidFill>
-                  <a:srgbClr val="D4D4D4"/>
-                </a:solidFill>
-                <a:latin typeface="Consolas"/>
-              </a:rPr>
-              <a:t>());</a:t>
-            </a:r>
-          </a:p>
-          <a:p>
-            <a:pPr>
+              <a:rPr sz="1600" i="0" b="0">
+                <a:solidFill>
+                  <a:srgbClr val="858585"/>
+                </a:solidFill>
+                <a:latin typeface="Consolas"/>
+              </a:rPr>
+              <a:t>10</a:t>
+            </a:r>
+          </a:p>
+          <a:p>
+            <a:pPr algn="r">
               <a:spcAft>
-                <a:spcPts val="407"/>
+                <a:spcPts val="342"/>
               </a:spcAft>
             </a:pPr>
             <a:r>
-              <a:rPr sz="1900" i="0" b="0">
-                <a:solidFill>
-                  <a:srgbClr val="D4D4D4"/>
-                </a:solidFill>
-                <a:latin typeface="Consolas"/>
-              </a:rPr>
-              <a:t>}</a:t>
+              <a:rPr sz="1600" i="0" b="0">
+                <a:solidFill>
+                  <a:srgbClr val="858585"/>
+                </a:solidFill>
+                <a:latin typeface="Consolas"/>
+              </a:rPr>
+              <a:t>11</a:t>
             </a:r>
           </a:p>
         </p:txBody>
@@ -14118,8 +13755,8 @@
         </p:nvSpPr>
         <p:spPr>
           <a:xfrm>
-            <a:off x="457200" y="6035040"/>
-            <a:ext cx="11277295" cy="365760"/>
+            <a:off x="1188720" y="1719072"/>
+            <a:ext cx="10271455" cy="3292395"/>
           </a:xfrm>
           <a:prstGeom prst="rect">
             <a:avLst/>
@@ -14132,6 +13769,799 @@
           </a:bodyPr>
           <a:lstStyle/>
           <a:p>
+            <a:pPr>
+              <a:spcAft>
+                <a:spcPts val="342"/>
+              </a:spcAft>
+            </a:pPr>
+            <a:r>
+              <a:rPr sz="1600" i="0" b="0">
+                <a:solidFill>
+                  <a:srgbClr val="569CD6"/>
+                </a:solidFill>
+                <a:latin typeface="Consolas"/>
+              </a:rPr>
+              <a:t>private</a:t>
+            </a:r>
+            <a:r>
+              <a:rPr sz="1600" i="0" b="0">
+                <a:solidFill>
+                  <a:srgbClr val="D4D4D4"/>
+                </a:solidFill>
+                <a:latin typeface="Consolas"/>
+              </a:rPr>
+              <a:t> </a:t>
+            </a:r>
+            <a:r>
+              <a:rPr sz="1600" i="0" b="0">
+                <a:solidFill>
+                  <a:srgbClr val="569CD6"/>
+                </a:solidFill>
+                <a:latin typeface="Consolas"/>
+              </a:rPr>
+              <a:t>static</a:t>
+            </a:r>
+            <a:r>
+              <a:rPr sz="1600" i="0" b="0">
+                <a:solidFill>
+                  <a:srgbClr val="D4D4D4"/>
+                </a:solidFill>
+                <a:latin typeface="Consolas"/>
+              </a:rPr>
+              <a:t> </a:t>
+            </a:r>
+            <a:r>
+              <a:rPr sz="1600" i="0" b="0">
+                <a:solidFill>
+                  <a:srgbClr val="569CD6"/>
+                </a:solidFill>
+                <a:latin typeface="Consolas"/>
+              </a:rPr>
+              <a:t>final</a:t>
+            </a:r>
+            <a:r>
+              <a:rPr sz="1600" i="0" b="0">
+                <a:solidFill>
+                  <a:srgbClr val="D4D4D4"/>
+                </a:solidFill>
+                <a:latin typeface="Consolas"/>
+              </a:rPr>
+              <a:t> </a:t>
+            </a:r>
+            <a:r>
+              <a:rPr sz="1600" i="0" b="0">
+                <a:solidFill>
+                  <a:srgbClr val="4EC9B0"/>
+                </a:solidFill>
+                <a:latin typeface="Consolas"/>
+              </a:rPr>
+              <a:t>String</a:t>
+            </a:r>
+            <a:r>
+              <a:rPr sz="1600" i="0" b="0">
+                <a:solidFill>
+                  <a:srgbClr val="D4D4D4"/>
+                </a:solidFill>
+                <a:latin typeface="Consolas"/>
+              </a:rPr>
+              <a:t> </a:t>
+            </a:r>
+            <a:r>
+              <a:rPr sz="1600" i="0" b="0">
+                <a:solidFill>
+                  <a:srgbClr val="D4D4D4"/>
+                </a:solidFill>
+                <a:latin typeface="Consolas"/>
+              </a:rPr>
+              <a:t>SEPARADOR</a:t>
+            </a:r>
+            <a:r>
+              <a:rPr sz="1600" i="0" b="0">
+                <a:solidFill>
+                  <a:srgbClr val="D4D4D4"/>
+                </a:solidFill>
+                <a:latin typeface="Consolas"/>
+              </a:rPr>
+              <a:t> = </a:t>
+            </a:r>
+            <a:r>
+              <a:rPr sz="1600" i="0" b="0">
+                <a:solidFill>
+                  <a:srgbClr val="CE9178"/>
+                </a:solidFill>
+                <a:latin typeface="Consolas"/>
+              </a:rPr>
+              <a:t>";"</a:t>
+            </a:r>
+            <a:r>
+              <a:rPr sz="1600" i="0" b="0">
+                <a:solidFill>
+                  <a:srgbClr val="D4D4D4"/>
+                </a:solidFill>
+                <a:latin typeface="Consolas"/>
+              </a:rPr>
+              <a:t>;</a:t>
+            </a:r>
+          </a:p>
+          <a:p>
+            <a:pPr>
+              <a:spcAft>
+                <a:spcPts val="342"/>
+              </a:spcAft>
+            </a:pPr>
+            <a:r>
+              <a:rPr sz="1600" i="0" b="0">
+                <a:solidFill>
+                  <a:srgbClr val="569CD6"/>
+                </a:solidFill>
+                <a:latin typeface="Consolas"/>
+              </a:rPr>
+              <a:t>private</a:t>
+            </a:r>
+            <a:r>
+              <a:rPr sz="1600" i="0" b="0">
+                <a:solidFill>
+                  <a:srgbClr val="D4D4D4"/>
+                </a:solidFill>
+                <a:latin typeface="Consolas"/>
+              </a:rPr>
+              <a:t> </a:t>
+            </a:r>
+            <a:r>
+              <a:rPr sz="1600" i="0" b="0">
+                <a:solidFill>
+                  <a:srgbClr val="569CD6"/>
+                </a:solidFill>
+                <a:latin typeface="Consolas"/>
+              </a:rPr>
+              <a:t>static</a:t>
+            </a:r>
+            <a:r>
+              <a:rPr sz="1600" i="0" b="0">
+                <a:solidFill>
+                  <a:srgbClr val="D4D4D4"/>
+                </a:solidFill>
+                <a:latin typeface="Consolas"/>
+              </a:rPr>
+              <a:t> </a:t>
+            </a:r>
+            <a:r>
+              <a:rPr sz="1600" i="0" b="0">
+                <a:solidFill>
+                  <a:srgbClr val="569CD6"/>
+                </a:solidFill>
+                <a:latin typeface="Consolas"/>
+              </a:rPr>
+              <a:t>final</a:t>
+            </a:r>
+            <a:r>
+              <a:rPr sz="1600" i="0" b="0">
+                <a:solidFill>
+                  <a:srgbClr val="D4D4D4"/>
+                </a:solidFill>
+                <a:latin typeface="Consolas"/>
+              </a:rPr>
+              <a:t> </a:t>
+            </a:r>
+            <a:r>
+              <a:rPr sz="1600" i="0" b="0">
+                <a:solidFill>
+                  <a:srgbClr val="4EC9B0"/>
+                </a:solidFill>
+                <a:latin typeface="Consolas"/>
+              </a:rPr>
+              <a:t>String</a:t>
+            </a:r>
+            <a:r>
+              <a:rPr sz="1600" i="0" b="0">
+                <a:solidFill>
+                  <a:srgbClr val="D4D4D4"/>
+                </a:solidFill>
+                <a:latin typeface="Consolas"/>
+              </a:rPr>
+              <a:t> </a:t>
+            </a:r>
+            <a:r>
+              <a:rPr sz="1600" i="0" b="0">
+                <a:solidFill>
+                  <a:srgbClr val="D4D4D4"/>
+                </a:solidFill>
+                <a:latin typeface="Consolas"/>
+              </a:rPr>
+              <a:t>ENCABEZADO</a:t>
+            </a:r>
+            <a:r>
+              <a:rPr sz="1600" i="0" b="0">
+                <a:solidFill>
+                  <a:srgbClr val="D4D4D4"/>
+                </a:solidFill>
+                <a:latin typeface="Consolas"/>
+              </a:rPr>
+              <a:t> = </a:t>
+            </a:r>
+            <a:r>
+              <a:rPr sz="1600" i="0" b="0">
+                <a:solidFill>
+                  <a:srgbClr val="CE9178"/>
+                </a:solidFill>
+                <a:latin typeface="Consolas"/>
+              </a:rPr>
+              <a:t>"id;nombre;especie;edad;cedula_dueno"</a:t>
+            </a:r>
+            <a:r>
+              <a:rPr sz="1600" i="0" b="0">
+                <a:solidFill>
+                  <a:srgbClr val="D4D4D4"/>
+                </a:solidFill>
+                <a:latin typeface="Consolas"/>
+              </a:rPr>
+              <a:t>;</a:t>
+            </a:r>
+          </a:p>
+          <a:p>
+            <a:pPr>
+              <a:spcAft>
+                <a:spcPts val="342"/>
+              </a:spcAft>
+            </a:pPr>
+            <a:r>
+              <a:rPr sz="1600" i="0" b="0">
+                <a:solidFill>
+                  <a:srgbClr val="569CD6"/>
+                </a:solidFill>
+                <a:latin typeface="Consolas"/>
+              </a:rPr>
+              <a:t>private</a:t>
+            </a:r>
+            <a:r>
+              <a:rPr sz="1600" i="0" b="0">
+                <a:solidFill>
+                  <a:srgbClr val="D4D4D4"/>
+                </a:solidFill>
+                <a:latin typeface="Consolas"/>
+              </a:rPr>
+              <a:t> </a:t>
+            </a:r>
+            <a:r>
+              <a:rPr sz="1600" i="0" b="0">
+                <a:solidFill>
+                  <a:srgbClr val="569CD6"/>
+                </a:solidFill>
+                <a:latin typeface="Consolas"/>
+              </a:rPr>
+              <a:t>static</a:t>
+            </a:r>
+            <a:r>
+              <a:rPr sz="1600" i="0" b="0">
+                <a:solidFill>
+                  <a:srgbClr val="D4D4D4"/>
+                </a:solidFill>
+                <a:latin typeface="Consolas"/>
+              </a:rPr>
+              <a:t> </a:t>
+            </a:r>
+            <a:r>
+              <a:rPr sz="1600" i="0" b="0">
+                <a:solidFill>
+                  <a:srgbClr val="569CD6"/>
+                </a:solidFill>
+                <a:latin typeface="Consolas"/>
+              </a:rPr>
+              <a:t>final</a:t>
+            </a:r>
+            <a:r>
+              <a:rPr sz="1600" i="0" b="0">
+                <a:solidFill>
+                  <a:srgbClr val="D4D4D4"/>
+                </a:solidFill>
+                <a:latin typeface="Consolas"/>
+              </a:rPr>
+              <a:t> </a:t>
+            </a:r>
+            <a:r>
+              <a:rPr sz="1600" i="0" b="0">
+                <a:solidFill>
+                  <a:srgbClr val="4EC9B0"/>
+                </a:solidFill>
+                <a:latin typeface="Consolas"/>
+              </a:rPr>
+              <a:t>int</a:t>
+            </a:r>
+            <a:r>
+              <a:rPr sz="1600" i="0" b="0">
+                <a:solidFill>
+                  <a:srgbClr val="D4D4D4"/>
+                </a:solidFill>
+                <a:latin typeface="Consolas"/>
+              </a:rPr>
+              <a:t> </a:t>
+            </a:r>
+            <a:r>
+              <a:rPr sz="1600" i="0" b="0">
+                <a:solidFill>
+                  <a:srgbClr val="D4D4D4"/>
+                </a:solidFill>
+                <a:latin typeface="Consolas"/>
+              </a:rPr>
+              <a:t>CAMPOS_ESPERADOS</a:t>
+            </a:r>
+            <a:r>
+              <a:rPr sz="1600" i="0" b="0">
+                <a:solidFill>
+                  <a:srgbClr val="D4D4D4"/>
+                </a:solidFill>
+                <a:latin typeface="Consolas"/>
+              </a:rPr>
+              <a:t> = </a:t>
+            </a:r>
+            <a:r>
+              <a:rPr sz="1600" i="0" b="0">
+                <a:solidFill>
+                  <a:srgbClr val="B5CEA8"/>
+                </a:solidFill>
+                <a:latin typeface="Consolas"/>
+              </a:rPr>
+              <a:t>5</a:t>
+            </a:r>
+            <a:r>
+              <a:rPr sz="1600" i="0" b="0">
+                <a:solidFill>
+                  <a:srgbClr val="D4D4D4"/>
+                </a:solidFill>
+                <a:latin typeface="Consolas"/>
+              </a:rPr>
+              <a:t>;</a:t>
+            </a:r>
+          </a:p>
+          <a:p>
+            <a:pPr>
+              <a:spcAft>
+                <a:spcPts val="342"/>
+              </a:spcAft>
+            </a:pPr>
+            <a:r>
+              <a:rPr sz="1600" i="0" b="0">
+                <a:solidFill>
+                  <a:srgbClr val="D4D4D4"/>
+                </a:solidFill>
+                <a:latin typeface="Consolas"/>
+              </a:rPr>
+              <a:t/>
+            </a:r>
+          </a:p>
+          <a:p>
+            <a:pPr>
+              <a:spcAft>
+                <a:spcPts val="342"/>
+              </a:spcAft>
+            </a:pPr>
+            <a:r>
+              <a:rPr sz="1600" i="0" b="0">
+                <a:solidFill>
+                  <a:srgbClr val="569CD6"/>
+                </a:solidFill>
+                <a:latin typeface="Consolas"/>
+              </a:rPr>
+              <a:t>private</a:t>
+            </a:r>
+            <a:r>
+              <a:rPr sz="1600" i="0" b="0">
+                <a:solidFill>
+                  <a:srgbClr val="D4D4D4"/>
+                </a:solidFill>
+                <a:latin typeface="Consolas"/>
+              </a:rPr>
+              <a:t> </a:t>
+            </a:r>
+            <a:r>
+              <a:rPr sz="1600" i="0" b="0">
+                <a:solidFill>
+                  <a:srgbClr val="4EC9B0"/>
+                </a:solidFill>
+                <a:latin typeface="Consolas"/>
+              </a:rPr>
+              <a:t>String</a:t>
+            </a:r>
+            <a:r>
+              <a:rPr sz="1600" i="0" b="0">
+                <a:solidFill>
+                  <a:srgbClr val="D4D4D4"/>
+                </a:solidFill>
+                <a:latin typeface="Consolas"/>
+              </a:rPr>
+              <a:t> </a:t>
+            </a:r>
+            <a:r>
+              <a:rPr sz="1600" i="0" b="0">
+                <a:solidFill>
+                  <a:srgbClr val="DCDCAA"/>
+                </a:solidFill>
+                <a:latin typeface="Consolas"/>
+              </a:rPr>
+              <a:t>aLinea</a:t>
+            </a:r>
+            <a:r>
+              <a:rPr sz="1600" i="0" b="0">
+                <a:solidFill>
+                  <a:srgbClr val="D4D4D4"/>
+                </a:solidFill>
+                <a:latin typeface="Consolas"/>
+              </a:rPr>
+              <a:t>(</a:t>
+            </a:r>
+            <a:r>
+              <a:rPr sz="1600" i="0" b="0">
+                <a:solidFill>
+                  <a:srgbClr val="D4D4D4"/>
+                </a:solidFill>
+                <a:latin typeface="Consolas"/>
+              </a:rPr>
+              <a:t>Mascota</a:t>
+            </a:r>
+            <a:r>
+              <a:rPr sz="1600" i="0" b="0">
+                <a:solidFill>
+                  <a:srgbClr val="D4D4D4"/>
+                </a:solidFill>
+                <a:latin typeface="Consolas"/>
+              </a:rPr>
+              <a:t> </a:t>
+            </a:r>
+            <a:r>
+              <a:rPr sz="1600" i="0" b="0">
+                <a:solidFill>
+                  <a:srgbClr val="D4D4D4"/>
+                </a:solidFill>
+                <a:latin typeface="Consolas"/>
+              </a:rPr>
+              <a:t>m</a:t>
+            </a:r>
+            <a:r>
+              <a:rPr sz="1600" i="0" b="0">
+                <a:solidFill>
+                  <a:srgbClr val="D4D4D4"/>
+                </a:solidFill>
+                <a:latin typeface="Consolas"/>
+              </a:rPr>
+              <a:t>) {</a:t>
+            </a:r>
+          </a:p>
+          <a:p>
+            <a:pPr>
+              <a:spcAft>
+                <a:spcPts val="342"/>
+              </a:spcAft>
+            </a:pPr>
+            <a:r>
+              <a:rPr sz="1600" i="0" b="0">
+                <a:solidFill>
+                  <a:srgbClr val="D4D4D4"/>
+                </a:solidFill>
+                <a:latin typeface="Consolas"/>
+              </a:rPr>
+              <a:t>    </a:t>
+            </a:r>
+            <a:r>
+              <a:rPr sz="1600" i="0" b="0">
+                <a:solidFill>
+                  <a:srgbClr val="569CD6"/>
+                </a:solidFill>
+                <a:latin typeface="Consolas"/>
+              </a:rPr>
+              <a:t>return</a:t>
+            </a:r>
+            <a:r>
+              <a:rPr sz="1600" i="0" b="0">
+                <a:solidFill>
+                  <a:srgbClr val="D4D4D4"/>
+                </a:solidFill>
+                <a:latin typeface="Consolas"/>
+              </a:rPr>
+              <a:t> </a:t>
+            </a:r>
+            <a:r>
+              <a:rPr sz="1600" i="0" b="0">
+                <a:solidFill>
+                  <a:srgbClr val="DCDCAA"/>
+                </a:solidFill>
+                <a:latin typeface="Consolas"/>
+              </a:rPr>
+              <a:t>limpiar</a:t>
+            </a:r>
+            <a:r>
+              <a:rPr sz="1600" i="0" b="0">
+                <a:solidFill>
+                  <a:srgbClr val="D4D4D4"/>
+                </a:solidFill>
+                <a:latin typeface="Consolas"/>
+              </a:rPr>
+              <a:t>(</a:t>
+            </a:r>
+            <a:r>
+              <a:rPr sz="1600" i="0" b="0">
+                <a:solidFill>
+                  <a:srgbClr val="DCDCAA"/>
+                </a:solidFill>
+                <a:latin typeface="Consolas"/>
+              </a:rPr>
+              <a:t>m.getId</a:t>
+            </a:r>
+            <a:r>
+              <a:rPr sz="1600" i="0" b="0">
+                <a:solidFill>
+                  <a:srgbClr val="D4D4D4"/>
+                </a:solidFill>
+                <a:latin typeface="Consolas"/>
+              </a:rPr>
+              <a:t>()) + </a:t>
+            </a:r>
+            <a:r>
+              <a:rPr sz="1600" i="0" b="0">
+                <a:solidFill>
+                  <a:srgbClr val="D4D4D4"/>
+                </a:solidFill>
+                <a:latin typeface="Consolas"/>
+              </a:rPr>
+              <a:t>SEPARADOR</a:t>
+            </a:r>
+          </a:p>
+          <a:p>
+            <a:pPr>
+              <a:spcAft>
+                <a:spcPts val="342"/>
+              </a:spcAft>
+            </a:pPr>
+            <a:r>
+              <a:rPr sz="1600" i="0" b="0">
+                <a:solidFill>
+                  <a:srgbClr val="D4D4D4"/>
+                </a:solidFill>
+                <a:latin typeface="Consolas"/>
+              </a:rPr>
+              <a:t>            + </a:t>
+            </a:r>
+            <a:r>
+              <a:rPr sz="1600" i="0" b="0">
+                <a:solidFill>
+                  <a:srgbClr val="DCDCAA"/>
+                </a:solidFill>
+                <a:latin typeface="Consolas"/>
+              </a:rPr>
+              <a:t>limpiar</a:t>
+            </a:r>
+            <a:r>
+              <a:rPr sz="1600" i="0" b="0">
+                <a:solidFill>
+                  <a:srgbClr val="D4D4D4"/>
+                </a:solidFill>
+                <a:latin typeface="Consolas"/>
+              </a:rPr>
+              <a:t>(</a:t>
+            </a:r>
+            <a:r>
+              <a:rPr sz="1600" i="0" b="0">
+                <a:solidFill>
+                  <a:srgbClr val="DCDCAA"/>
+                </a:solidFill>
+                <a:latin typeface="Consolas"/>
+              </a:rPr>
+              <a:t>m.getNombre</a:t>
+            </a:r>
+            <a:r>
+              <a:rPr sz="1600" i="0" b="0">
+                <a:solidFill>
+                  <a:srgbClr val="D4D4D4"/>
+                </a:solidFill>
+                <a:latin typeface="Consolas"/>
+              </a:rPr>
+              <a:t>()) + </a:t>
+            </a:r>
+            <a:r>
+              <a:rPr sz="1600" i="0" b="0">
+                <a:solidFill>
+                  <a:srgbClr val="D4D4D4"/>
+                </a:solidFill>
+                <a:latin typeface="Consolas"/>
+              </a:rPr>
+              <a:t>SEPARADOR</a:t>
+            </a:r>
+          </a:p>
+          <a:p>
+            <a:pPr>
+              <a:spcAft>
+                <a:spcPts val="342"/>
+              </a:spcAft>
+            </a:pPr>
+            <a:r>
+              <a:rPr sz="1600" i="0" b="0">
+                <a:solidFill>
+                  <a:srgbClr val="D4D4D4"/>
+                </a:solidFill>
+                <a:latin typeface="Consolas"/>
+              </a:rPr>
+              <a:t>            + </a:t>
+            </a:r>
+            <a:r>
+              <a:rPr sz="1600" i="0" b="0">
+                <a:solidFill>
+                  <a:srgbClr val="DCDCAA"/>
+                </a:solidFill>
+                <a:latin typeface="Consolas"/>
+              </a:rPr>
+              <a:t>limpiar</a:t>
+            </a:r>
+            <a:r>
+              <a:rPr sz="1600" i="0" b="0">
+                <a:solidFill>
+                  <a:srgbClr val="D4D4D4"/>
+                </a:solidFill>
+                <a:latin typeface="Consolas"/>
+              </a:rPr>
+              <a:t>(</a:t>
+            </a:r>
+            <a:r>
+              <a:rPr sz="1600" i="0" b="0">
+                <a:solidFill>
+                  <a:srgbClr val="DCDCAA"/>
+                </a:solidFill>
+                <a:latin typeface="Consolas"/>
+              </a:rPr>
+              <a:t>m.getEspecie</a:t>
+            </a:r>
+            <a:r>
+              <a:rPr sz="1600" i="0" b="0">
+                <a:solidFill>
+                  <a:srgbClr val="D4D4D4"/>
+                </a:solidFill>
+                <a:latin typeface="Consolas"/>
+              </a:rPr>
+              <a:t>()) + </a:t>
+            </a:r>
+            <a:r>
+              <a:rPr sz="1600" i="0" b="0">
+                <a:solidFill>
+                  <a:srgbClr val="D4D4D4"/>
+                </a:solidFill>
+                <a:latin typeface="Consolas"/>
+              </a:rPr>
+              <a:t>SEPARADOR</a:t>
+            </a:r>
+          </a:p>
+          <a:p>
+            <a:pPr>
+              <a:spcAft>
+                <a:spcPts val="342"/>
+              </a:spcAft>
+            </a:pPr>
+            <a:r>
+              <a:rPr sz="1600" i="0" b="0">
+                <a:solidFill>
+                  <a:srgbClr val="D4D4D4"/>
+                </a:solidFill>
+                <a:latin typeface="Consolas"/>
+              </a:rPr>
+              <a:t>            + </a:t>
+            </a:r>
+            <a:r>
+              <a:rPr sz="1600" i="0" b="0">
+                <a:solidFill>
+                  <a:srgbClr val="DCDCAA"/>
+                </a:solidFill>
+                <a:latin typeface="Consolas"/>
+              </a:rPr>
+              <a:t>m.getEdad</a:t>
+            </a:r>
+            <a:r>
+              <a:rPr sz="1600" i="0" b="0">
+                <a:solidFill>
+                  <a:srgbClr val="D4D4D4"/>
+                </a:solidFill>
+                <a:latin typeface="Consolas"/>
+              </a:rPr>
+              <a:t>() + </a:t>
+            </a:r>
+            <a:r>
+              <a:rPr sz="1600" i="0" b="0">
+                <a:solidFill>
+                  <a:srgbClr val="D4D4D4"/>
+                </a:solidFill>
+                <a:latin typeface="Consolas"/>
+              </a:rPr>
+              <a:t>SEPARADOR</a:t>
+            </a:r>
+          </a:p>
+          <a:p>
+            <a:pPr>
+              <a:spcAft>
+                <a:spcPts val="342"/>
+              </a:spcAft>
+            </a:pPr>
+            <a:r>
+              <a:rPr sz="1600" i="0" b="0">
+                <a:solidFill>
+                  <a:srgbClr val="D4D4D4"/>
+                </a:solidFill>
+                <a:latin typeface="Consolas"/>
+              </a:rPr>
+              <a:t>            + </a:t>
+            </a:r>
+            <a:r>
+              <a:rPr sz="1600" i="0" b="0">
+                <a:solidFill>
+                  <a:srgbClr val="DCDCAA"/>
+                </a:solidFill>
+                <a:latin typeface="Consolas"/>
+              </a:rPr>
+              <a:t>limpiar</a:t>
+            </a:r>
+            <a:r>
+              <a:rPr sz="1600" i="0" b="0">
+                <a:solidFill>
+                  <a:srgbClr val="D4D4D4"/>
+                </a:solidFill>
+                <a:latin typeface="Consolas"/>
+              </a:rPr>
+              <a:t>(</a:t>
+            </a:r>
+            <a:r>
+              <a:rPr sz="1600" i="0" b="0">
+                <a:solidFill>
+                  <a:srgbClr val="DCDCAA"/>
+                </a:solidFill>
+                <a:latin typeface="Consolas"/>
+              </a:rPr>
+              <a:t>m.getCedulaDueno</a:t>
+            </a:r>
+            <a:r>
+              <a:rPr sz="1600" i="0" b="0">
+                <a:solidFill>
+                  <a:srgbClr val="D4D4D4"/>
+                </a:solidFill>
+                <a:latin typeface="Consolas"/>
+              </a:rPr>
+              <a:t>());</a:t>
+            </a:r>
+          </a:p>
+          <a:p>
+            <a:pPr>
+              <a:spcAft>
+                <a:spcPts val="342"/>
+              </a:spcAft>
+            </a:pPr>
+            <a:r>
+              <a:rPr sz="1600" i="0" b="0">
+                <a:solidFill>
+                  <a:srgbClr val="D4D4D4"/>
+                </a:solidFill>
+                <a:latin typeface="Consolas"/>
+              </a:rPr>
+              <a:t>}</a:t>
+            </a:r>
+          </a:p>
+        </p:txBody>
+      </p:sp>
+      <p:sp>
+        <p:nvSpPr>
+          <p:cNvPr id="13" name="TextBox 12"/>
+          <p:cNvSpPr txBox="1"/>
+          <p:nvPr/>
+        </p:nvSpPr>
+        <p:spPr>
+          <a:xfrm>
+            <a:off x="457200" y="6035040"/>
+            <a:ext cx="11277295" cy="365760"/>
+          </a:xfrm>
+          <a:prstGeom prst="rect">
+            <a:avLst/>
+          </a:prstGeom>
+          <a:noFill/>
+        </p:spPr>
+        <p:txBody>
+          <a:bodyPr wrap="square">
+            <a:spAutoFit/>
+          </a:bodyPr>
+          <a:lstStyle/>
+          <a:p>
             <a:pPr algn="ctr"/>
             <a:r>
               <a:rPr sz="1300" b="0" i="1">
@@ -14147,7 +14577,7 @@
       </p:sp>
       <p:sp>
         <p:nvSpPr>
-          <p:cNvPr id="13" name="TextBox 12"/>
+          <p:cNvPr id="14" name="TextBox 13"/>
           <p:cNvSpPr txBox="1"/>
           <p:nvPr/>
         </p:nvSpPr>
@@ -14891,7 +15321,7 @@
         <p:spPr>
           <a:xfrm>
             <a:off x="457200" y="1261872"/>
-            <a:ext cx="11277295" cy="4707096"/>
+            <a:ext cx="11277295" cy="4055973"/>
           </a:xfrm>
           <a:prstGeom prst="roundRect">
             <a:avLst>
@@ -15140,8 +15570,8 @@
         </p:nvSpPr>
         <p:spPr>
           <a:xfrm>
-            <a:off x="1188720" y="1719072"/>
-            <a:ext cx="10271455" cy="4112736"/>
+            <a:off x="685800" y="1719072"/>
+            <a:ext cx="502920" cy="3461613"/>
           </a:xfrm>
           <a:prstGeom prst="rect">
             <a:avLst/>
@@ -15154,742 +15584,211 @@
           </a:bodyPr>
           <a:lstStyle/>
           <a:p>
-            <a:pPr>
+            <a:pPr algn="r">
               <a:spcAft>
-                <a:spcPts val="342"/>
+                <a:spcPts val="300"/>
               </a:spcAft>
             </a:pPr>
             <a:r>
-              <a:rPr sz="1600" i="1" b="0">
-                <a:solidFill>
-                  <a:srgbClr val="6A9955"/>
-                </a:solidFill>
-                <a:latin typeface="Consolas"/>
-              </a:rPr>
-              <a:t>/** Escribe TODA la lista. try-with-resources cierra y vacia el buffer pase lo que pase. */</a:t>
-            </a:r>
-          </a:p>
-          <a:p>
-            <a:pPr>
+              <a:rPr sz="1400" i="0" b="0">
+                <a:solidFill>
+                  <a:srgbClr val="858585"/>
+                </a:solidFill>
+                <a:latin typeface="Consolas"/>
+              </a:rPr>
+              <a:t>1</a:t>
+            </a:r>
+          </a:p>
+          <a:p>
+            <a:pPr algn="r">
               <a:spcAft>
-                <a:spcPts val="342"/>
+                <a:spcPts val="300"/>
               </a:spcAft>
             </a:pPr>
             <a:r>
-              <a:rPr sz="1600" i="0" b="0">
-                <a:solidFill>
-                  <a:srgbClr val="569CD6"/>
-                </a:solidFill>
-                <a:latin typeface="Consolas"/>
-              </a:rPr>
-              <a:t>public</a:t>
-            </a:r>
-            <a:r>
-              <a:rPr sz="1600" i="0" b="0">
-                <a:solidFill>
-                  <a:srgbClr val="D4D4D4"/>
-                </a:solidFill>
-                <a:latin typeface="Consolas"/>
-              </a:rPr>
-              <a:t> </a:t>
-            </a:r>
-            <a:r>
-              <a:rPr sz="1600" i="0" b="0">
-                <a:solidFill>
-                  <a:srgbClr val="569CD6"/>
-                </a:solidFill>
-                <a:latin typeface="Consolas"/>
-              </a:rPr>
-              <a:t>void</a:t>
-            </a:r>
-            <a:r>
-              <a:rPr sz="1600" i="0" b="0">
-                <a:solidFill>
-                  <a:srgbClr val="D4D4D4"/>
-                </a:solidFill>
-                <a:latin typeface="Consolas"/>
-              </a:rPr>
-              <a:t> </a:t>
-            </a:r>
-            <a:r>
-              <a:rPr sz="1600" i="0" b="0">
-                <a:solidFill>
-                  <a:srgbClr val="DCDCAA"/>
-                </a:solidFill>
-                <a:latin typeface="Consolas"/>
-              </a:rPr>
-              <a:t>guardar</a:t>
-            </a:r>
-            <a:r>
-              <a:rPr sz="1600" i="0" b="0">
-                <a:solidFill>
-                  <a:srgbClr val="D4D4D4"/>
-                </a:solidFill>
-                <a:latin typeface="Consolas"/>
-              </a:rPr>
-              <a:t>(</a:t>
-            </a:r>
-            <a:r>
-              <a:rPr sz="1600" i="0" b="0">
-                <a:solidFill>
-                  <a:srgbClr val="4EC9B0"/>
-                </a:solidFill>
-                <a:latin typeface="Consolas"/>
-              </a:rPr>
-              <a:t>List</a:t>
-            </a:r>
-            <a:r>
-              <a:rPr sz="1600" i="0" b="0">
-                <a:solidFill>
-                  <a:srgbClr val="D4D4D4"/>
-                </a:solidFill>
-                <a:latin typeface="Consolas"/>
-              </a:rPr>
-              <a:t>&lt;</a:t>
-            </a:r>
-            <a:r>
-              <a:rPr sz="1600" i="0" b="0">
-                <a:solidFill>
-                  <a:srgbClr val="D4D4D4"/>
-                </a:solidFill>
-                <a:latin typeface="Consolas"/>
-              </a:rPr>
-              <a:t>Mascota</a:t>
-            </a:r>
-            <a:r>
-              <a:rPr sz="1600" i="0" b="0">
-                <a:solidFill>
-                  <a:srgbClr val="D4D4D4"/>
-                </a:solidFill>
-                <a:latin typeface="Consolas"/>
-              </a:rPr>
-              <a:t>&gt; </a:t>
-            </a:r>
-            <a:r>
-              <a:rPr sz="1600" i="0" b="0">
-                <a:solidFill>
-                  <a:srgbClr val="D4D4D4"/>
-                </a:solidFill>
-                <a:latin typeface="Consolas"/>
-              </a:rPr>
-              <a:t>mascotas</a:t>
-            </a:r>
-            <a:r>
-              <a:rPr sz="1600" i="0" b="0">
-                <a:solidFill>
-                  <a:srgbClr val="D4D4D4"/>
-                </a:solidFill>
-                <a:latin typeface="Consolas"/>
-              </a:rPr>
-              <a:t>) {</a:t>
-            </a:r>
-          </a:p>
-          <a:p>
-            <a:pPr>
+              <a:rPr sz="1400" i="0" b="0">
+                <a:solidFill>
+                  <a:srgbClr val="858585"/>
+                </a:solidFill>
+                <a:latin typeface="Consolas"/>
+              </a:rPr>
+              <a:t>2</a:t>
+            </a:r>
+          </a:p>
+          <a:p>
+            <a:pPr algn="r">
               <a:spcAft>
-                <a:spcPts val="342"/>
+                <a:spcPts val="300"/>
               </a:spcAft>
             </a:pPr>
             <a:r>
-              <a:rPr sz="1600" i="0" b="0">
-                <a:solidFill>
-                  <a:srgbClr val="D4D4D4"/>
-                </a:solidFill>
-                <a:latin typeface="Consolas"/>
-              </a:rPr>
-              <a:t>    </a:t>
-            </a:r>
-            <a:r>
-              <a:rPr sz="1600" i="0" b="0">
-                <a:solidFill>
-                  <a:srgbClr val="569CD6"/>
-                </a:solidFill>
-                <a:latin typeface="Consolas"/>
-              </a:rPr>
-              <a:t>try</a:t>
-            </a:r>
-            <a:r>
-              <a:rPr sz="1600" i="0" b="0">
-                <a:solidFill>
-                  <a:srgbClr val="D4D4D4"/>
-                </a:solidFill>
-                <a:latin typeface="Consolas"/>
-              </a:rPr>
-              <a:t> (</a:t>
-            </a:r>
-            <a:r>
-              <a:rPr sz="1600" i="0" b="0">
-                <a:solidFill>
-                  <a:srgbClr val="D4D4D4"/>
-                </a:solidFill>
-                <a:latin typeface="Consolas"/>
-              </a:rPr>
-              <a:t>BufferedWriter</a:t>
-            </a:r>
-            <a:r>
-              <a:rPr sz="1600" i="0" b="0">
-                <a:solidFill>
-                  <a:srgbClr val="D4D4D4"/>
-                </a:solidFill>
-                <a:latin typeface="Consolas"/>
-              </a:rPr>
-              <a:t> </a:t>
-            </a:r>
-            <a:r>
-              <a:rPr sz="1600" i="0" b="0">
-                <a:solidFill>
-                  <a:srgbClr val="D4D4D4"/>
-                </a:solidFill>
-                <a:latin typeface="Consolas"/>
-              </a:rPr>
-              <a:t>escritor</a:t>
-            </a:r>
-            <a:r>
-              <a:rPr sz="1600" i="0" b="0">
-                <a:solidFill>
-                  <a:srgbClr val="D4D4D4"/>
-                </a:solidFill>
-                <a:latin typeface="Consolas"/>
-              </a:rPr>
-              <a:t> = </a:t>
-            </a:r>
-            <a:r>
-              <a:rPr sz="1600" i="0" b="0">
-                <a:solidFill>
-                  <a:srgbClr val="DCDCAA"/>
-                </a:solidFill>
-                <a:latin typeface="Consolas"/>
-              </a:rPr>
-              <a:t>Files.newBufferedWriter</a:t>
-            </a:r>
-            <a:r>
-              <a:rPr sz="1600" i="0" b="0">
-                <a:solidFill>
-                  <a:srgbClr val="D4D4D4"/>
-                </a:solidFill>
-                <a:latin typeface="Consolas"/>
-              </a:rPr>
-              <a:t>(</a:t>
-            </a:r>
-            <a:r>
-              <a:rPr sz="1600" i="0" b="0">
-                <a:solidFill>
-                  <a:srgbClr val="D4D4D4"/>
-                </a:solidFill>
-                <a:latin typeface="Consolas"/>
-              </a:rPr>
-              <a:t>ruta</a:t>
-            </a:r>
-            <a:r>
-              <a:rPr sz="1600" i="0" b="0">
-                <a:solidFill>
-                  <a:srgbClr val="D4D4D4"/>
-                </a:solidFill>
-                <a:latin typeface="Consolas"/>
-              </a:rPr>
-              <a:t>, </a:t>
-            </a:r>
-            <a:r>
-              <a:rPr sz="1600" i="0" b="0">
-                <a:solidFill>
-                  <a:srgbClr val="D4D4D4"/>
-                </a:solidFill>
-                <a:latin typeface="Consolas"/>
-              </a:rPr>
-              <a:t>StandardCharsets</a:t>
-            </a:r>
-            <a:r>
-              <a:rPr sz="1600" i="0" b="0">
-                <a:solidFill>
-                  <a:srgbClr val="D4D4D4"/>
-                </a:solidFill>
-                <a:latin typeface="Consolas"/>
-              </a:rPr>
-              <a:t>.</a:t>
-            </a:r>
-            <a:r>
-              <a:rPr sz="1600" i="0" b="0">
-                <a:solidFill>
-                  <a:srgbClr val="D4D4D4"/>
-                </a:solidFill>
-                <a:latin typeface="Consolas"/>
-              </a:rPr>
-              <a:t>UTF_8</a:t>
-            </a:r>
-            <a:r>
-              <a:rPr sz="1600" i="0" b="0">
-                <a:solidFill>
-                  <a:srgbClr val="D4D4D4"/>
-                </a:solidFill>
-                <a:latin typeface="Consolas"/>
-              </a:rPr>
-              <a:t>)) {</a:t>
-            </a:r>
-          </a:p>
-          <a:p>
-            <a:pPr>
+              <a:rPr sz="1400" i="0" b="0">
+                <a:solidFill>
+                  <a:srgbClr val="858585"/>
+                </a:solidFill>
+                <a:latin typeface="Consolas"/>
+              </a:rPr>
+              <a:t>3</a:t>
+            </a:r>
+          </a:p>
+          <a:p>
+            <a:pPr algn="r">
               <a:spcAft>
-                <a:spcPts val="342"/>
+                <a:spcPts val="300"/>
               </a:spcAft>
             </a:pPr>
             <a:r>
-              <a:rPr sz="1600" i="0" b="0">
-                <a:solidFill>
-                  <a:srgbClr val="D4D4D4"/>
-                </a:solidFill>
-                <a:latin typeface="Consolas"/>
-              </a:rPr>
-              <a:t>        </a:t>
-            </a:r>
-            <a:r>
-              <a:rPr sz="1600" i="0" b="0">
-                <a:solidFill>
-                  <a:srgbClr val="DCDCAA"/>
-                </a:solidFill>
-                <a:latin typeface="Consolas"/>
-              </a:rPr>
-              <a:t>escritor.write</a:t>
-            </a:r>
-            <a:r>
-              <a:rPr sz="1600" i="0" b="0">
-                <a:solidFill>
-                  <a:srgbClr val="D4D4D4"/>
-                </a:solidFill>
-                <a:latin typeface="Consolas"/>
-              </a:rPr>
-              <a:t>(</a:t>
-            </a:r>
-            <a:r>
-              <a:rPr sz="1600" i="0" b="0">
-                <a:solidFill>
-                  <a:srgbClr val="D4D4D4"/>
-                </a:solidFill>
-                <a:latin typeface="Consolas"/>
-              </a:rPr>
-              <a:t>ENCABEZADO</a:t>
-            </a:r>
-            <a:r>
-              <a:rPr sz="1600" i="0" b="0">
-                <a:solidFill>
-                  <a:srgbClr val="D4D4D4"/>
-                </a:solidFill>
-                <a:latin typeface="Consolas"/>
-              </a:rPr>
-              <a:t>);</a:t>
-            </a:r>
-          </a:p>
-          <a:p>
-            <a:pPr>
+              <a:rPr sz="1400" i="0" b="0">
+                <a:solidFill>
+                  <a:srgbClr val="858585"/>
+                </a:solidFill>
+                <a:latin typeface="Consolas"/>
+              </a:rPr>
+              <a:t>4</a:t>
+            </a:r>
+          </a:p>
+          <a:p>
+            <a:pPr algn="r">
               <a:spcAft>
-                <a:spcPts val="342"/>
+                <a:spcPts val="300"/>
               </a:spcAft>
             </a:pPr>
             <a:r>
-              <a:rPr sz="1600" i="0" b="0">
-                <a:solidFill>
-                  <a:srgbClr val="D4D4D4"/>
-                </a:solidFill>
-                <a:latin typeface="Consolas"/>
-              </a:rPr>
-              <a:t>        </a:t>
-            </a:r>
-            <a:r>
-              <a:rPr sz="1600" i="0" b="0">
-                <a:solidFill>
-                  <a:srgbClr val="DCDCAA"/>
-                </a:solidFill>
-                <a:latin typeface="Consolas"/>
-              </a:rPr>
-              <a:t>escritor.newLine</a:t>
-            </a:r>
-            <a:r>
-              <a:rPr sz="1600" i="0" b="0">
-                <a:solidFill>
-                  <a:srgbClr val="D4D4D4"/>
-                </a:solidFill>
-                <a:latin typeface="Consolas"/>
-              </a:rPr>
-              <a:t>();</a:t>
-            </a:r>
-          </a:p>
-          <a:p>
-            <a:pPr>
+              <a:rPr sz="1400" i="0" b="0">
+                <a:solidFill>
+                  <a:srgbClr val="858585"/>
+                </a:solidFill>
+                <a:latin typeface="Consolas"/>
+              </a:rPr>
+              <a:t>5</a:t>
+            </a:r>
+          </a:p>
+          <a:p>
+            <a:pPr algn="r">
               <a:spcAft>
-                <a:spcPts val="342"/>
+                <a:spcPts val="300"/>
               </a:spcAft>
             </a:pPr>
             <a:r>
-              <a:rPr sz="1600" i="0" b="0">
-                <a:solidFill>
-                  <a:srgbClr val="D4D4D4"/>
-                </a:solidFill>
-                <a:latin typeface="Consolas"/>
-              </a:rPr>
-              <a:t>        </a:t>
-            </a:r>
-            <a:r>
-              <a:rPr sz="1600" i="0" b="0">
-                <a:solidFill>
-                  <a:srgbClr val="569CD6"/>
-                </a:solidFill>
-                <a:latin typeface="Consolas"/>
-              </a:rPr>
-              <a:t>for</a:t>
-            </a:r>
-            <a:r>
-              <a:rPr sz="1600" i="0" b="0">
-                <a:solidFill>
-                  <a:srgbClr val="D4D4D4"/>
-                </a:solidFill>
-                <a:latin typeface="Consolas"/>
-              </a:rPr>
-              <a:t> (</a:t>
-            </a:r>
-            <a:r>
-              <a:rPr sz="1600" i="0" b="0">
-                <a:solidFill>
-                  <a:srgbClr val="D4D4D4"/>
-                </a:solidFill>
-                <a:latin typeface="Consolas"/>
-              </a:rPr>
-              <a:t>Mascota</a:t>
-            </a:r>
-            <a:r>
-              <a:rPr sz="1600" i="0" b="0">
-                <a:solidFill>
-                  <a:srgbClr val="D4D4D4"/>
-                </a:solidFill>
-                <a:latin typeface="Consolas"/>
-              </a:rPr>
-              <a:t> </a:t>
-            </a:r>
-            <a:r>
-              <a:rPr sz="1600" i="0" b="0">
-                <a:solidFill>
-                  <a:srgbClr val="D4D4D4"/>
-                </a:solidFill>
-                <a:latin typeface="Consolas"/>
-              </a:rPr>
-              <a:t>m</a:t>
-            </a:r>
-            <a:r>
-              <a:rPr sz="1600" i="0" b="0">
-                <a:solidFill>
-                  <a:srgbClr val="D4D4D4"/>
-                </a:solidFill>
-                <a:latin typeface="Consolas"/>
-              </a:rPr>
-              <a:t> : </a:t>
-            </a:r>
-            <a:r>
-              <a:rPr sz="1600" i="0" b="0">
-                <a:solidFill>
-                  <a:srgbClr val="D4D4D4"/>
-                </a:solidFill>
-                <a:latin typeface="Consolas"/>
-              </a:rPr>
-              <a:t>mascotas</a:t>
-            </a:r>
-            <a:r>
-              <a:rPr sz="1600" i="0" b="0">
-                <a:solidFill>
-                  <a:srgbClr val="D4D4D4"/>
-                </a:solidFill>
-                <a:latin typeface="Consolas"/>
-              </a:rPr>
-              <a:t>) {</a:t>
-            </a:r>
-          </a:p>
-          <a:p>
-            <a:pPr>
+              <a:rPr sz="1400" i="0" b="0">
+                <a:solidFill>
+                  <a:srgbClr val="858585"/>
+                </a:solidFill>
+                <a:latin typeface="Consolas"/>
+              </a:rPr>
+              <a:t>6</a:t>
+            </a:r>
+          </a:p>
+          <a:p>
+            <a:pPr algn="r">
               <a:spcAft>
-                <a:spcPts val="342"/>
+                <a:spcPts val="300"/>
               </a:spcAft>
             </a:pPr>
             <a:r>
-              <a:rPr sz="1600" i="0" b="0">
-                <a:solidFill>
-                  <a:srgbClr val="D4D4D4"/>
-                </a:solidFill>
-                <a:latin typeface="Consolas"/>
-              </a:rPr>
-              <a:t>            </a:t>
-            </a:r>
-            <a:r>
-              <a:rPr sz="1600" i="0" b="0">
-                <a:solidFill>
-                  <a:srgbClr val="DCDCAA"/>
-                </a:solidFill>
-                <a:latin typeface="Consolas"/>
-              </a:rPr>
-              <a:t>escritor.write</a:t>
-            </a:r>
-            <a:r>
-              <a:rPr sz="1600" i="0" b="0">
-                <a:solidFill>
-                  <a:srgbClr val="D4D4D4"/>
-                </a:solidFill>
-                <a:latin typeface="Consolas"/>
-              </a:rPr>
-              <a:t>(</a:t>
-            </a:r>
-            <a:r>
-              <a:rPr sz="1600" i="0" b="0">
-                <a:solidFill>
-                  <a:srgbClr val="DCDCAA"/>
-                </a:solidFill>
-                <a:latin typeface="Consolas"/>
-              </a:rPr>
-              <a:t>aLinea</a:t>
-            </a:r>
-            <a:r>
-              <a:rPr sz="1600" i="0" b="0">
-                <a:solidFill>
-                  <a:srgbClr val="D4D4D4"/>
-                </a:solidFill>
-                <a:latin typeface="Consolas"/>
-              </a:rPr>
-              <a:t>(</a:t>
-            </a:r>
-            <a:r>
-              <a:rPr sz="1600" i="0" b="0">
-                <a:solidFill>
-                  <a:srgbClr val="D4D4D4"/>
-                </a:solidFill>
-                <a:latin typeface="Consolas"/>
-              </a:rPr>
-              <a:t>m</a:t>
-            </a:r>
-            <a:r>
-              <a:rPr sz="1600" i="0" b="0">
-                <a:solidFill>
-                  <a:srgbClr val="D4D4D4"/>
-                </a:solidFill>
-                <a:latin typeface="Consolas"/>
-              </a:rPr>
-              <a:t>));</a:t>
-            </a:r>
-          </a:p>
-          <a:p>
-            <a:pPr>
+              <a:rPr sz="1400" i="0" b="0">
+                <a:solidFill>
+                  <a:srgbClr val="858585"/>
+                </a:solidFill>
+                <a:latin typeface="Consolas"/>
+              </a:rPr>
+              <a:t>7</a:t>
+            </a:r>
+          </a:p>
+          <a:p>
+            <a:pPr algn="r">
               <a:spcAft>
-                <a:spcPts val="342"/>
+                <a:spcPts val="300"/>
               </a:spcAft>
             </a:pPr>
             <a:r>
-              <a:rPr sz="1600" i="0" b="0">
-                <a:solidFill>
-                  <a:srgbClr val="D4D4D4"/>
-                </a:solidFill>
-                <a:latin typeface="Consolas"/>
-              </a:rPr>
-              <a:t>            </a:t>
-            </a:r>
-            <a:r>
-              <a:rPr sz="1600" i="0" b="0">
-                <a:solidFill>
-                  <a:srgbClr val="DCDCAA"/>
-                </a:solidFill>
-                <a:latin typeface="Consolas"/>
-              </a:rPr>
-              <a:t>escritor.newLine</a:t>
-            </a:r>
-            <a:r>
-              <a:rPr sz="1600" i="0" b="0">
-                <a:solidFill>
-                  <a:srgbClr val="D4D4D4"/>
-                </a:solidFill>
-                <a:latin typeface="Consolas"/>
-              </a:rPr>
-              <a:t>();</a:t>
-            </a:r>
-          </a:p>
-          <a:p>
-            <a:pPr>
+              <a:rPr sz="1400" i="0" b="0">
+                <a:solidFill>
+                  <a:srgbClr val="858585"/>
+                </a:solidFill>
+                <a:latin typeface="Consolas"/>
+              </a:rPr>
+              <a:t>8</a:t>
+            </a:r>
+          </a:p>
+          <a:p>
+            <a:pPr algn="r">
               <a:spcAft>
-                <a:spcPts val="342"/>
+                <a:spcPts val="300"/>
               </a:spcAft>
             </a:pPr>
             <a:r>
-              <a:rPr sz="1600" i="0" b="0">
-                <a:solidFill>
-                  <a:srgbClr val="D4D4D4"/>
-                </a:solidFill>
-                <a:latin typeface="Consolas"/>
-              </a:rPr>
-              <a:t>        }</a:t>
-            </a:r>
-          </a:p>
-          <a:p>
-            <a:pPr>
+              <a:rPr sz="1400" i="0" b="0">
+                <a:solidFill>
+                  <a:srgbClr val="858585"/>
+                </a:solidFill>
+                <a:latin typeface="Consolas"/>
+              </a:rPr>
+              <a:t>9</a:t>
+            </a:r>
+          </a:p>
+          <a:p>
+            <a:pPr algn="r">
               <a:spcAft>
-                <a:spcPts val="342"/>
+                <a:spcPts val="300"/>
               </a:spcAft>
             </a:pPr>
             <a:r>
-              <a:rPr sz="1600" i="0" b="0">
-                <a:solidFill>
-                  <a:srgbClr val="D4D4D4"/>
-                </a:solidFill>
-                <a:latin typeface="Consolas"/>
-              </a:rPr>
-              <a:t>    } </a:t>
-            </a:r>
-            <a:r>
-              <a:rPr sz="1600" i="0" b="0">
-                <a:solidFill>
-                  <a:srgbClr val="569CD6"/>
-                </a:solidFill>
-                <a:latin typeface="Consolas"/>
-              </a:rPr>
-              <a:t>catch</a:t>
-            </a:r>
-            <a:r>
-              <a:rPr sz="1600" i="0" b="0">
-                <a:solidFill>
-                  <a:srgbClr val="D4D4D4"/>
-                </a:solidFill>
-                <a:latin typeface="Consolas"/>
-              </a:rPr>
-              <a:t> (</a:t>
-            </a:r>
-            <a:r>
-              <a:rPr sz="1600" i="0" b="0">
-                <a:solidFill>
-                  <a:srgbClr val="D4D4D4"/>
-                </a:solidFill>
-                <a:latin typeface="Consolas"/>
-              </a:rPr>
-              <a:t>IOException</a:t>
-            </a:r>
-            <a:r>
-              <a:rPr sz="1600" i="0" b="0">
-                <a:solidFill>
-                  <a:srgbClr val="D4D4D4"/>
-                </a:solidFill>
-                <a:latin typeface="Consolas"/>
-              </a:rPr>
-              <a:t> </a:t>
-            </a:r>
-            <a:r>
-              <a:rPr sz="1600" i="0" b="0">
-                <a:solidFill>
-                  <a:srgbClr val="D4D4D4"/>
-                </a:solidFill>
-                <a:latin typeface="Consolas"/>
-              </a:rPr>
-              <a:t>e</a:t>
-            </a:r>
-            <a:r>
-              <a:rPr sz="1600" i="0" b="0">
-                <a:solidFill>
-                  <a:srgbClr val="D4D4D4"/>
-                </a:solidFill>
-                <a:latin typeface="Consolas"/>
-              </a:rPr>
-              <a:t>) {</a:t>
-            </a:r>
-          </a:p>
-          <a:p>
-            <a:pPr>
+              <a:rPr sz="1400" i="0" b="0">
+                <a:solidFill>
+                  <a:srgbClr val="858585"/>
+                </a:solidFill>
+                <a:latin typeface="Consolas"/>
+              </a:rPr>
+              <a:t>10</a:t>
+            </a:r>
+          </a:p>
+          <a:p>
+            <a:pPr algn="r">
               <a:spcAft>
-                <a:spcPts val="342"/>
+                <a:spcPts val="300"/>
               </a:spcAft>
             </a:pPr>
             <a:r>
-              <a:rPr sz="1600" i="0" b="0">
-                <a:solidFill>
-                  <a:srgbClr val="D4D4D4"/>
-                </a:solidFill>
-                <a:latin typeface="Consolas"/>
-              </a:rPr>
-              <a:t>        </a:t>
-            </a:r>
-            <a:r>
-              <a:rPr sz="1600" i="0" b="0">
-                <a:solidFill>
-                  <a:srgbClr val="DCDCAA"/>
-                </a:solidFill>
-                <a:latin typeface="Consolas"/>
-              </a:rPr>
-              <a:t>System.out.println</a:t>
-            </a:r>
-            <a:r>
-              <a:rPr sz="1600" i="0" b="0">
-                <a:solidFill>
-                  <a:srgbClr val="D4D4D4"/>
-                </a:solidFill>
-                <a:latin typeface="Consolas"/>
-              </a:rPr>
-              <a:t>(</a:t>
-            </a:r>
-            <a:r>
-              <a:rPr sz="1600" i="0" b="0">
-                <a:solidFill>
-                  <a:srgbClr val="CE9178"/>
-                </a:solidFill>
-                <a:latin typeface="Consolas"/>
-              </a:rPr>
-              <a:t>"No se pudo guardar el archivo: "</a:t>
-            </a:r>
-            <a:r>
-              <a:rPr sz="1600" i="0" b="0">
-                <a:solidFill>
-                  <a:srgbClr val="D4D4D4"/>
-                </a:solidFill>
-                <a:latin typeface="Consolas"/>
-              </a:rPr>
-              <a:t> + </a:t>
-            </a:r>
-            <a:r>
-              <a:rPr sz="1600" i="0" b="0">
-                <a:solidFill>
-                  <a:srgbClr val="DCDCAA"/>
-                </a:solidFill>
-                <a:latin typeface="Consolas"/>
-              </a:rPr>
-              <a:t>e.getMessage</a:t>
-            </a:r>
-            <a:r>
-              <a:rPr sz="1600" i="0" b="0">
-                <a:solidFill>
-                  <a:srgbClr val="D4D4D4"/>
-                </a:solidFill>
-                <a:latin typeface="Consolas"/>
-              </a:rPr>
-              <a:t>());</a:t>
-            </a:r>
-          </a:p>
-          <a:p>
-            <a:pPr>
+              <a:rPr sz="1400" i="0" b="0">
+                <a:solidFill>
+                  <a:srgbClr val="858585"/>
+                </a:solidFill>
+                <a:latin typeface="Consolas"/>
+              </a:rPr>
+              <a:t>11</a:t>
+            </a:r>
+          </a:p>
+          <a:p>
+            <a:pPr algn="r">
               <a:spcAft>
-                <a:spcPts val="342"/>
+                <a:spcPts val="300"/>
               </a:spcAft>
             </a:pPr>
             <a:r>
-              <a:rPr sz="1600" i="0" b="0">
-                <a:solidFill>
-                  <a:srgbClr val="D4D4D4"/>
-                </a:solidFill>
-                <a:latin typeface="Consolas"/>
-              </a:rPr>
-              <a:t>    }</a:t>
-            </a:r>
-          </a:p>
-          <a:p>
-            <a:pPr>
+              <a:rPr sz="1400" i="0" b="0">
+                <a:solidFill>
+                  <a:srgbClr val="858585"/>
+                </a:solidFill>
+                <a:latin typeface="Consolas"/>
+              </a:rPr>
+              <a:t>12</a:t>
+            </a:r>
+          </a:p>
+          <a:p>
+            <a:pPr algn="r">
               <a:spcAft>
-                <a:spcPts val="342"/>
+                <a:spcPts val="300"/>
               </a:spcAft>
             </a:pPr>
             <a:r>
-              <a:rPr sz="1600" i="0" b="0">
-                <a:solidFill>
-                  <a:srgbClr val="D4D4D4"/>
-                </a:solidFill>
-                <a:latin typeface="Consolas"/>
-              </a:rPr>
-              <a:t>}</a:t>
+              <a:rPr sz="1400" i="0" b="0">
+                <a:solidFill>
+                  <a:srgbClr val="858585"/>
+                </a:solidFill>
+                <a:latin typeface="Consolas"/>
+              </a:rPr>
+              <a:t>13</a:t>
             </a:r>
           </a:p>
         </p:txBody>
@@ -15902,8 +15801,8 @@
         </p:nvSpPr>
         <p:spPr>
           <a:xfrm>
-            <a:off x="457200" y="6035040"/>
-            <a:ext cx="11277295" cy="365760"/>
+            <a:off x="1188720" y="1719072"/>
+            <a:ext cx="10271455" cy="3461613"/>
           </a:xfrm>
           <a:prstGeom prst="rect">
             <a:avLst/>
@@ -15916,6 +15815,768 @@
           </a:bodyPr>
           <a:lstStyle/>
           <a:p>
+            <a:pPr>
+              <a:spcAft>
+                <a:spcPts val="300"/>
+              </a:spcAft>
+            </a:pPr>
+            <a:r>
+              <a:rPr sz="1400" i="1" b="0">
+                <a:solidFill>
+                  <a:srgbClr val="6A9955"/>
+                </a:solidFill>
+                <a:latin typeface="Consolas"/>
+              </a:rPr>
+              <a:t>/** Escribe TODA la lista. try-with-resources cierra y vacia el buffer pase lo que pase. */</a:t>
+            </a:r>
+          </a:p>
+          <a:p>
+            <a:pPr>
+              <a:spcAft>
+                <a:spcPts val="300"/>
+              </a:spcAft>
+            </a:pPr>
+            <a:r>
+              <a:rPr sz="1400" i="0" b="0">
+                <a:solidFill>
+                  <a:srgbClr val="569CD6"/>
+                </a:solidFill>
+                <a:latin typeface="Consolas"/>
+              </a:rPr>
+              <a:t>public</a:t>
+            </a:r>
+            <a:r>
+              <a:rPr sz="1400" i="0" b="0">
+                <a:solidFill>
+                  <a:srgbClr val="D4D4D4"/>
+                </a:solidFill>
+                <a:latin typeface="Consolas"/>
+              </a:rPr>
+              <a:t> </a:t>
+            </a:r>
+            <a:r>
+              <a:rPr sz="1400" i="0" b="0">
+                <a:solidFill>
+                  <a:srgbClr val="569CD6"/>
+                </a:solidFill>
+                <a:latin typeface="Consolas"/>
+              </a:rPr>
+              <a:t>void</a:t>
+            </a:r>
+            <a:r>
+              <a:rPr sz="1400" i="0" b="0">
+                <a:solidFill>
+                  <a:srgbClr val="D4D4D4"/>
+                </a:solidFill>
+                <a:latin typeface="Consolas"/>
+              </a:rPr>
+              <a:t> </a:t>
+            </a:r>
+            <a:r>
+              <a:rPr sz="1400" i="0" b="0">
+                <a:solidFill>
+                  <a:srgbClr val="DCDCAA"/>
+                </a:solidFill>
+                <a:latin typeface="Consolas"/>
+              </a:rPr>
+              <a:t>guardar</a:t>
+            </a:r>
+            <a:r>
+              <a:rPr sz="1400" i="0" b="0">
+                <a:solidFill>
+                  <a:srgbClr val="D4D4D4"/>
+                </a:solidFill>
+                <a:latin typeface="Consolas"/>
+              </a:rPr>
+              <a:t>(</a:t>
+            </a:r>
+            <a:r>
+              <a:rPr sz="1400" i="0" b="0">
+                <a:solidFill>
+                  <a:srgbClr val="4EC9B0"/>
+                </a:solidFill>
+                <a:latin typeface="Consolas"/>
+              </a:rPr>
+              <a:t>List</a:t>
+            </a:r>
+            <a:r>
+              <a:rPr sz="1400" i="0" b="0">
+                <a:solidFill>
+                  <a:srgbClr val="D4D4D4"/>
+                </a:solidFill>
+                <a:latin typeface="Consolas"/>
+              </a:rPr>
+              <a:t>&lt;</a:t>
+            </a:r>
+            <a:r>
+              <a:rPr sz="1400" i="0" b="0">
+                <a:solidFill>
+                  <a:srgbClr val="D4D4D4"/>
+                </a:solidFill>
+                <a:latin typeface="Consolas"/>
+              </a:rPr>
+              <a:t>Mascota</a:t>
+            </a:r>
+            <a:r>
+              <a:rPr sz="1400" i="0" b="0">
+                <a:solidFill>
+                  <a:srgbClr val="D4D4D4"/>
+                </a:solidFill>
+                <a:latin typeface="Consolas"/>
+              </a:rPr>
+              <a:t>&gt; </a:t>
+            </a:r>
+            <a:r>
+              <a:rPr sz="1400" i="0" b="0">
+                <a:solidFill>
+                  <a:srgbClr val="D4D4D4"/>
+                </a:solidFill>
+                <a:latin typeface="Consolas"/>
+              </a:rPr>
+              <a:t>mascotas</a:t>
+            </a:r>
+            <a:r>
+              <a:rPr sz="1400" i="0" b="0">
+                <a:solidFill>
+                  <a:srgbClr val="D4D4D4"/>
+                </a:solidFill>
+                <a:latin typeface="Consolas"/>
+              </a:rPr>
+              <a:t>) {</a:t>
+            </a:r>
+          </a:p>
+          <a:p>
+            <a:pPr>
+              <a:spcAft>
+                <a:spcPts val="300"/>
+              </a:spcAft>
+            </a:pPr>
+            <a:r>
+              <a:rPr sz="1400" i="0" b="0">
+                <a:solidFill>
+                  <a:srgbClr val="D4D4D4"/>
+                </a:solidFill>
+                <a:latin typeface="Consolas"/>
+              </a:rPr>
+              <a:t>    </a:t>
+            </a:r>
+            <a:r>
+              <a:rPr sz="1400" i="0" b="0">
+                <a:solidFill>
+                  <a:srgbClr val="569CD6"/>
+                </a:solidFill>
+                <a:latin typeface="Consolas"/>
+              </a:rPr>
+              <a:t>try</a:t>
+            </a:r>
+            <a:r>
+              <a:rPr sz="1400" i="0" b="0">
+                <a:solidFill>
+                  <a:srgbClr val="D4D4D4"/>
+                </a:solidFill>
+                <a:latin typeface="Consolas"/>
+              </a:rPr>
+              <a:t> (</a:t>
+            </a:r>
+            <a:r>
+              <a:rPr sz="1400" i="0" b="0">
+                <a:solidFill>
+                  <a:srgbClr val="D4D4D4"/>
+                </a:solidFill>
+                <a:latin typeface="Consolas"/>
+              </a:rPr>
+              <a:t>BufferedWriter</a:t>
+            </a:r>
+            <a:r>
+              <a:rPr sz="1400" i="0" b="0">
+                <a:solidFill>
+                  <a:srgbClr val="D4D4D4"/>
+                </a:solidFill>
+                <a:latin typeface="Consolas"/>
+              </a:rPr>
+              <a:t> </a:t>
+            </a:r>
+            <a:r>
+              <a:rPr sz="1400" i="0" b="0">
+                <a:solidFill>
+                  <a:srgbClr val="D4D4D4"/>
+                </a:solidFill>
+                <a:latin typeface="Consolas"/>
+              </a:rPr>
+              <a:t>escritor</a:t>
+            </a:r>
+            <a:r>
+              <a:rPr sz="1400" i="0" b="0">
+                <a:solidFill>
+                  <a:srgbClr val="D4D4D4"/>
+                </a:solidFill>
+                <a:latin typeface="Consolas"/>
+              </a:rPr>
+              <a:t> = </a:t>
+            </a:r>
+            <a:r>
+              <a:rPr sz="1400" i="0" b="0">
+                <a:solidFill>
+                  <a:srgbClr val="DCDCAA"/>
+                </a:solidFill>
+                <a:latin typeface="Consolas"/>
+              </a:rPr>
+              <a:t>Files.newBufferedWriter</a:t>
+            </a:r>
+            <a:r>
+              <a:rPr sz="1400" i="0" b="0">
+                <a:solidFill>
+                  <a:srgbClr val="D4D4D4"/>
+                </a:solidFill>
+                <a:latin typeface="Consolas"/>
+              </a:rPr>
+              <a:t>(</a:t>
+            </a:r>
+            <a:r>
+              <a:rPr sz="1400" i="0" b="0">
+                <a:solidFill>
+                  <a:srgbClr val="D4D4D4"/>
+                </a:solidFill>
+                <a:latin typeface="Consolas"/>
+              </a:rPr>
+              <a:t>ruta</a:t>
+            </a:r>
+            <a:r>
+              <a:rPr sz="1400" i="0" b="0">
+                <a:solidFill>
+                  <a:srgbClr val="D4D4D4"/>
+                </a:solidFill>
+                <a:latin typeface="Consolas"/>
+              </a:rPr>
+              <a:t>, </a:t>
+            </a:r>
+            <a:r>
+              <a:rPr sz="1400" i="0" b="0">
+                <a:solidFill>
+                  <a:srgbClr val="D4D4D4"/>
+                </a:solidFill>
+                <a:latin typeface="Consolas"/>
+              </a:rPr>
+              <a:t>StandardCharsets</a:t>
+            </a:r>
+            <a:r>
+              <a:rPr sz="1400" i="0" b="0">
+                <a:solidFill>
+                  <a:srgbClr val="D4D4D4"/>
+                </a:solidFill>
+                <a:latin typeface="Consolas"/>
+              </a:rPr>
+              <a:t>.</a:t>
+            </a:r>
+            <a:r>
+              <a:rPr sz="1400" i="0" b="0">
+                <a:solidFill>
+                  <a:srgbClr val="D4D4D4"/>
+                </a:solidFill>
+                <a:latin typeface="Consolas"/>
+              </a:rPr>
+              <a:t>UTF_8</a:t>
+            </a:r>
+            <a:r>
+              <a:rPr sz="1400" i="0" b="0">
+                <a:solidFill>
+                  <a:srgbClr val="D4D4D4"/>
+                </a:solidFill>
+                <a:latin typeface="Consolas"/>
+              </a:rPr>
+              <a:t>)) {</a:t>
+            </a:r>
+          </a:p>
+          <a:p>
+            <a:pPr>
+              <a:spcAft>
+                <a:spcPts val="300"/>
+              </a:spcAft>
+            </a:pPr>
+            <a:r>
+              <a:rPr sz="1400" i="0" b="0">
+                <a:solidFill>
+                  <a:srgbClr val="D4D4D4"/>
+                </a:solidFill>
+                <a:latin typeface="Consolas"/>
+              </a:rPr>
+              <a:t>        </a:t>
+            </a:r>
+            <a:r>
+              <a:rPr sz="1400" i="0" b="0">
+                <a:solidFill>
+                  <a:srgbClr val="DCDCAA"/>
+                </a:solidFill>
+                <a:latin typeface="Consolas"/>
+              </a:rPr>
+              <a:t>escritor.write</a:t>
+            </a:r>
+            <a:r>
+              <a:rPr sz="1400" i="0" b="0">
+                <a:solidFill>
+                  <a:srgbClr val="D4D4D4"/>
+                </a:solidFill>
+                <a:latin typeface="Consolas"/>
+              </a:rPr>
+              <a:t>(</a:t>
+            </a:r>
+            <a:r>
+              <a:rPr sz="1400" i="0" b="0">
+                <a:solidFill>
+                  <a:srgbClr val="D4D4D4"/>
+                </a:solidFill>
+                <a:latin typeface="Consolas"/>
+              </a:rPr>
+              <a:t>ENCABEZADO</a:t>
+            </a:r>
+            <a:r>
+              <a:rPr sz="1400" i="0" b="0">
+                <a:solidFill>
+                  <a:srgbClr val="D4D4D4"/>
+                </a:solidFill>
+                <a:latin typeface="Consolas"/>
+              </a:rPr>
+              <a:t>);</a:t>
+            </a:r>
+          </a:p>
+          <a:p>
+            <a:pPr>
+              <a:spcAft>
+                <a:spcPts val="300"/>
+              </a:spcAft>
+            </a:pPr>
+            <a:r>
+              <a:rPr sz="1400" i="0" b="0">
+                <a:solidFill>
+                  <a:srgbClr val="D4D4D4"/>
+                </a:solidFill>
+                <a:latin typeface="Consolas"/>
+              </a:rPr>
+              <a:t>        </a:t>
+            </a:r>
+            <a:r>
+              <a:rPr sz="1400" i="0" b="0">
+                <a:solidFill>
+                  <a:srgbClr val="DCDCAA"/>
+                </a:solidFill>
+                <a:latin typeface="Consolas"/>
+              </a:rPr>
+              <a:t>escritor.newLine</a:t>
+            </a:r>
+            <a:r>
+              <a:rPr sz="1400" i="0" b="0">
+                <a:solidFill>
+                  <a:srgbClr val="D4D4D4"/>
+                </a:solidFill>
+                <a:latin typeface="Consolas"/>
+              </a:rPr>
+              <a:t>();</a:t>
+            </a:r>
+          </a:p>
+          <a:p>
+            <a:pPr>
+              <a:spcAft>
+                <a:spcPts val="300"/>
+              </a:spcAft>
+            </a:pPr>
+            <a:r>
+              <a:rPr sz="1400" i="0" b="0">
+                <a:solidFill>
+                  <a:srgbClr val="D4D4D4"/>
+                </a:solidFill>
+                <a:latin typeface="Consolas"/>
+              </a:rPr>
+              <a:t>        </a:t>
+            </a:r>
+            <a:r>
+              <a:rPr sz="1400" i="0" b="0">
+                <a:solidFill>
+                  <a:srgbClr val="569CD6"/>
+                </a:solidFill>
+                <a:latin typeface="Consolas"/>
+              </a:rPr>
+              <a:t>for</a:t>
+            </a:r>
+            <a:r>
+              <a:rPr sz="1400" i="0" b="0">
+                <a:solidFill>
+                  <a:srgbClr val="D4D4D4"/>
+                </a:solidFill>
+                <a:latin typeface="Consolas"/>
+              </a:rPr>
+              <a:t> (</a:t>
+            </a:r>
+            <a:r>
+              <a:rPr sz="1400" i="0" b="0">
+                <a:solidFill>
+                  <a:srgbClr val="D4D4D4"/>
+                </a:solidFill>
+                <a:latin typeface="Consolas"/>
+              </a:rPr>
+              <a:t>Mascota</a:t>
+            </a:r>
+            <a:r>
+              <a:rPr sz="1400" i="0" b="0">
+                <a:solidFill>
+                  <a:srgbClr val="D4D4D4"/>
+                </a:solidFill>
+                <a:latin typeface="Consolas"/>
+              </a:rPr>
+              <a:t> </a:t>
+            </a:r>
+            <a:r>
+              <a:rPr sz="1400" i="0" b="0">
+                <a:solidFill>
+                  <a:srgbClr val="D4D4D4"/>
+                </a:solidFill>
+                <a:latin typeface="Consolas"/>
+              </a:rPr>
+              <a:t>m</a:t>
+            </a:r>
+            <a:r>
+              <a:rPr sz="1400" i="0" b="0">
+                <a:solidFill>
+                  <a:srgbClr val="D4D4D4"/>
+                </a:solidFill>
+                <a:latin typeface="Consolas"/>
+              </a:rPr>
+              <a:t> : </a:t>
+            </a:r>
+            <a:r>
+              <a:rPr sz="1400" i="0" b="0">
+                <a:solidFill>
+                  <a:srgbClr val="D4D4D4"/>
+                </a:solidFill>
+                <a:latin typeface="Consolas"/>
+              </a:rPr>
+              <a:t>mascotas</a:t>
+            </a:r>
+            <a:r>
+              <a:rPr sz="1400" i="0" b="0">
+                <a:solidFill>
+                  <a:srgbClr val="D4D4D4"/>
+                </a:solidFill>
+                <a:latin typeface="Consolas"/>
+              </a:rPr>
+              <a:t>) {</a:t>
+            </a:r>
+          </a:p>
+          <a:p>
+            <a:pPr>
+              <a:spcAft>
+                <a:spcPts val="300"/>
+              </a:spcAft>
+            </a:pPr>
+            <a:r>
+              <a:rPr sz="1400" i="0" b="0">
+                <a:solidFill>
+                  <a:srgbClr val="D4D4D4"/>
+                </a:solidFill>
+                <a:latin typeface="Consolas"/>
+              </a:rPr>
+              <a:t>            </a:t>
+            </a:r>
+            <a:r>
+              <a:rPr sz="1400" i="0" b="0">
+                <a:solidFill>
+                  <a:srgbClr val="DCDCAA"/>
+                </a:solidFill>
+                <a:latin typeface="Consolas"/>
+              </a:rPr>
+              <a:t>escritor.write</a:t>
+            </a:r>
+            <a:r>
+              <a:rPr sz="1400" i="0" b="0">
+                <a:solidFill>
+                  <a:srgbClr val="D4D4D4"/>
+                </a:solidFill>
+                <a:latin typeface="Consolas"/>
+              </a:rPr>
+              <a:t>(</a:t>
+            </a:r>
+            <a:r>
+              <a:rPr sz="1400" i="0" b="0">
+                <a:solidFill>
+                  <a:srgbClr val="DCDCAA"/>
+                </a:solidFill>
+                <a:latin typeface="Consolas"/>
+              </a:rPr>
+              <a:t>aLinea</a:t>
+            </a:r>
+            <a:r>
+              <a:rPr sz="1400" i="0" b="0">
+                <a:solidFill>
+                  <a:srgbClr val="D4D4D4"/>
+                </a:solidFill>
+                <a:latin typeface="Consolas"/>
+              </a:rPr>
+              <a:t>(</a:t>
+            </a:r>
+            <a:r>
+              <a:rPr sz="1400" i="0" b="0">
+                <a:solidFill>
+                  <a:srgbClr val="D4D4D4"/>
+                </a:solidFill>
+                <a:latin typeface="Consolas"/>
+              </a:rPr>
+              <a:t>m</a:t>
+            </a:r>
+            <a:r>
+              <a:rPr sz="1400" i="0" b="0">
+                <a:solidFill>
+                  <a:srgbClr val="D4D4D4"/>
+                </a:solidFill>
+                <a:latin typeface="Consolas"/>
+              </a:rPr>
+              <a:t>));</a:t>
+            </a:r>
+          </a:p>
+          <a:p>
+            <a:pPr>
+              <a:spcAft>
+                <a:spcPts val="300"/>
+              </a:spcAft>
+            </a:pPr>
+            <a:r>
+              <a:rPr sz="1400" i="0" b="0">
+                <a:solidFill>
+                  <a:srgbClr val="D4D4D4"/>
+                </a:solidFill>
+                <a:latin typeface="Consolas"/>
+              </a:rPr>
+              <a:t>            </a:t>
+            </a:r>
+            <a:r>
+              <a:rPr sz="1400" i="0" b="0">
+                <a:solidFill>
+                  <a:srgbClr val="DCDCAA"/>
+                </a:solidFill>
+                <a:latin typeface="Consolas"/>
+              </a:rPr>
+              <a:t>escritor.newLine</a:t>
+            </a:r>
+            <a:r>
+              <a:rPr sz="1400" i="0" b="0">
+                <a:solidFill>
+                  <a:srgbClr val="D4D4D4"/>
+                </a:solidFill>
+                <a:latin typeface="Consolas"/>
+              </a:rPr>
+              <a:t>();</a:t>
+            </a:r>
+          </a:p>
+          <a:p>
+            <a:pPr>
+              <a:spcAft>
+                <a:spcPts val="300"/>
+              </a:spcAft>
+            </a:pPr>
+            <a:r>
+              <a:rPr sz="1400" i="0" b="0">
+                <a:solidFill>
+                  <a:srgbClr val="D4D4D4"/>
+                </a:solidFill>
+                <a:latin typeface="Consolas"/>
+              </a:rPr>
+              <a:t>        }</a:t>
+            </a:r>
+          </a:p>
+          <a:p>
+            <a:pPr>
+              <a:spcAft>
+                <a:spcPts val="300"/>
+              </a:spcAft>
+            </a:pPr>
+            <a:r>
+              <a:rPr sz="1400" i="0" b="0">
+                <a:solidFill>
+                  <a:srgbClr val="D4D4D4"/>
+                </a:solidFill>
+                <a:latin typeface="Consolas"/>
+              </a:rPr>
+              <a:t>    } </a:t>
+            </a:r>
+            <a:r>
+              <a:rPr sz="1400" i="0" b="0">
+                <a:solidFill>
+                  <a:srgbClr val="569CD6"/>
+                </a:solidFill>
+                <a:latin typeface="Consolas"/>
+              </a:rPr>
+              <a:t>catch</a:t>
+            </a:r>
+            <a:r>
+              <a:rPr sz="1400" i="0" b="0">
+                <a:solidFill>
+                  <a:srgbClr val="D4D4D4"/>
+                </a:solidFill>
+                <a:latin typeface="Consolas"/>
+              </a:rPr>
+              <a:t> (</a:t>
+            </a:r>
+            <a:r>
+              <a:rPr sz="1400" i="0" b="0">
+                <a:solidFill>
+                  <a:srgbClr val="D4D4D4"/>
+                </a:solidFill>
+                <a:latin typeface="Consolas"/>
+              </a:rPr>
+              <a:t>IOException</a:t>
+            </a:r>
+            <a:r>
+              <a:rPr sz="1400" i="0" b="0">
+                <a:solidFill>
+                  <a:srgbClr val="D4D4D4"/>
+                </a:solidFill>
+                <a:latin typeface="Consolas"/>
+              </a:rPr>
+              <a:t> </a:t>
+            </a:r>
+            <a:r>
+              <a:rPr sz="1400" i="0" b="0">
+                <a:solidFill>
+                  <a:srgbClr val="D4D4D4"/>
+                </a:solidFill>
+                <a:latin typeface="Consolas"/>
+              </a:rPr>
+              <a:t>e</a:t>
+            </a:r>
+            <a:r>
+              <a:rPr sz="1400" i="0" b="0">
+                <a:solidFill>
+                  <a:srgbClr val="D4D4D4"/>
+                </a:solidFill>
+                <a:latin typeface="Consolas"/>
+              </a:rPr>
+              <a:t>) {</a:t>
+            </a:r>
+          </a:p>
+          <a:p>
+            <a:pPr>
+              <a:spcAft>
+                <a:spcPts val="300"/>
+              </a:spcAft>
+            </a:pPr>
+            <a:r>
+              <a:rPr sz="1400" i="0" b="0">
+                <a:solidFill>
+                  <a:srgbClr val="D4D4D4"/>
+                </a:solidFill>
+                <a:latin typeface="Consolas"/>
+              </a:rPr>
+              <a:t>        </a:t>
+            </a:r>
+            <a:r>
+              <a:rPr sz="1400" i="0" b="0">
+                <a:solidFill>
+                  <a:srgbClr val="DCDCAA"/>
+                </a:solidFill>
+                <a:latin typeface="Consolas"/>
+              </a:rPr>
+              <a:t>System.out.println</a:t>
+            </a:r>
+            <a:r>
+              <a:rPr sz="1400" i="0" b="0">
+                <a:solidFill>
+                  <a:srgbClr val="D4D4D4"/>
+                </a:solidFill>
+                <a:latin typeface="Consolas"/>
+              </a:rPr>
+              <a:t>(</a:t>
+            </a:r>
+            <a:r>
+              <a:rPr sz="1400" i="0" b="0">
+                <a:solidFill>
+                  <a:srgbClr val="CE9178"/>
+                </a:solidFill>
+                <a:latin typeface="Consolas"/>
+              </a:rPr>
+              <a:t>"No se pudo guardar el archivo: "</a:t>
+            </a:r>
+            <a:r>
+              <a:rPr sz="1400" i="0" b="0">
+                <a:solidFill>
+                  <a:srgbClr val="D4D4D4"/>
+                </a:solidFill>
+                <a:latin typeface="Consolas"/>
+              </a:rPr>
+              <a:t> + </a:t>
+            </a:r>
+            <a:r>
+              <a:rPr sz="1400" i="0" b="0">
+                <a:solidFill>
+                  <a:srgbClr val="DCDCAA"/>
+                </a:solidFill>
+                <a:latin typeface="Consolas"/>
+              </a:rPr>
+              <a:t>e.getMessage</a:t>
+            </a:r>
+            <a:r>
+              <a:rPr sz="1400" i="0" b="0">
+                <a:solidFill>
+                  <a:srgbClr val="D4D4D4"/>
+                </a:solidFill>
+                <a:latin typeface="Consolas"/>
+              </a:rPr>
+              <a:t>());</a:t>
+            </a:r>
+          </a:p>
+          <a:p>
+            <a:pPr>
+              <a:spcAft>
+                <a:spcPts val="300"/>
+              </a:spcAft>
+            </a:pPr>
+            <a:r>
+              <a:rPr sz="1400" i="0" b="0">
+                <a:solidFill>
+                  <a:srgbClr val="D4D4D4"/>
+                </a:solidFill>
+                <a:latin typeface="Consolas"/>
+              </a:rPr>
+              <a:t>    }</a:t>
+            </a:r>
+          </a:p>
+          <a:p>
+            <a:pPr>
+              <a:spcAft>
+                <a:spcPts val="300"/>
+              </a:spcAft>
+            </a:pPr>
+            <a:r>
+              <a:rPr sz="1400" i="0" b="0">
+                <a:solidFill>
+                  <a:srgbClr val="D4D4D4"/>
+                </a:solidFill>
+                <a:latin typeface="Consolas"/>
+              </a:rPr>
+              <a:t>}</a:t>
+            </a:r>
+          </a:p>
+        </p:txBody>
+      </p:sp>
+      <p:sp>
+        <p:nvSpPr>
+          <p:cNvPr id="13" name="TextBox 12"/>
+          <p:cNvSpPr txBox="1"/>
+          <p:nvPr/>
+        </p:nvSpPr>
+        <p:spPr>
+          <a:xfrm>
+            <a:off x="457200" y="6035040"/>
+            <a:ext cx="11277295" cy="365760"/>
+          </a:xfrm>
+          <a:prstGeom prst="rect">
+            <a:avLst/>
+          </a:prstGeom>
+          <a:noFill/>
+        </p:spPr>
+        <p:txBody>
+          <a:bodyPr wrap="square">
+            <a:spAutoFit/>
+          </a:bodyPr>
+          <a:lstStyle/>
+          <a:p>
             <a:pPr algn="ctr"/>
             <a:r>
               <a:rPr sz="1300" b="0" i="1">
@@ -15931,7 +16592,7 @@
       </p:sp>
       <p:sp>
         <p:nvSpPr>
-          <p:cNvPr id="13" name="TextBox 12"/>
+          <p:cNvPr id="14" name="TextBox 13"/>
           <p:cNvSpPr txBox="1"/>
           <p:nvPr/>
         </p:nvSpPr>

--- a/Programacion II/Clases/Clase 9 - Refactorizacion con IA y persistencia de archivos/Presentacion.pptx
+++ b/Programacion II/Clases/Clase 9 - Refactorizacion con IA y persistencia de archivos/Presentacion.pptx
@@ -886,7 +886,7 @@
           <a:p/>
           <a:p>
             <a:r>
-              <a:t>Persistencia es lograr que los datos sobrevivan al proceso que los creó. Mientras la aplicación está corriendo, el ArrayList&lt;Mascota&gt; vive en la memoria RAM, que es rápida pero volátil: en el instante en que se cierra la ventana, el sistema operativo recupera esa memoria y las mascotas se evaporan. Guardar en disco significa convertir cada objeto Mascota en texto y escribirlo en un archivo que queda en el computador. Un .txt es texto libre, sirve para una bitácora o un log; un .csv es texto también, pero con una estructura tabular acordada: una línea por registro, campos separados por un carácter separador y, opcionalmente, una primera línea de encabezado que documenta el orden de las columnas. Para el sistema de la clinica la línea acordada es M001;Firulais;Canino;4;1144556677 con encabezado id;nombre;especie;edad;cedula_dueno. Usamos punto y coma y no coma por dos razones muy prácticas: los nombres y las direcciones de los dueños suelen traer comas y le romperían la línea al programa, y el Excel en configuración regional de Colombia abre los archivos separados por punto y coma sin pedir nada. La ventaja enorme del CSV frente a un formato binario es que se puede abrir en el Bloc de notas y ver el dato: cuando algo falla, el estudiante ve con sus ojos si el problema está en lo que escribió o en cómo lo leyó.</a:t>
+              <a:t>Persistencia es lograr que los datos sobrevivan al proceso que los creó. Mientras la aplicación está corriendo, el ArrayList&lt;Mascota&gt; vive en la memoria RAM, que es rápida pero volátil: en el instante en que se cierra la ventana, el sistema operativo recupera esa memoria y las mascotas se pierden. Guardar en disco significa convertir cada objeto Mascota en texto y escribirlo en un archivo que queda en el computador. Un .txt es texto libre, sirve para una bitácora o un log; un .csv es texto también, pero con una estructura tabular acordada: una línea por registro, campos separados por un carácter separador y, opcionalmente, una primera línea de encabezado que documenta el orden de las columnas. Para el sistema de la clinica la línea acordada es M001;Firulais;Canino;4;1144556677 con encabezado id;nombre;especie;edad;cedula_dueno. Usamos punto y coma y no coma por dos razones muy prácticas: los nombres y las direcciones de los dueños suelen traer comas y le romperían la línea al programa, y el Excel en configuración regional de Colombia abre los archivos separados por punto y coma sin pedir nada. La ventaja enorme del CSV frente a un formato binario es que se puede abrir en el Bloc de notas y ver el dato: cuando algo falla, el estudiante ve con sus ojos si el problema está en lo que escribió o en cómo lo leyó.</a:t>
             </a:r>
           </a:p>
         </p:txBody>
@@ -22362,7 +22362,7 @@
                 </a:solidFill>
                 <a:latin typeface="Calibri"/>
               </a:rPr>
-              <a:t>–   La lista vive en RAM: al cerrar la ventana, las mascotas se evaporan.</a:t>
+              <a:t>–   La lista vive en RAM: al cerrar la ventana, las mascotas se pierden.</a:t>
             </a:r>
           </a:p>
           <a:p>
